--- a/share/SIH26-A0H-T364_Presentation.pptx
+++ b/share/SIH26-A0H-T364_Presentation.pptx
@@ -11,9 +11,9 @@
     <p:sldId id="291" r:id="rId2"/>
     <p:sldId id="281" r:id="rId3"/>
     <p:sldId id="290" r:id="rId4"/>
-    <p:sldId id="294" r:id="rId5"/>
-    <p:sldId id="293" r:id="rId6"/>
-    <p:sldId id="297" r:id="rId7"/>
+    <p:sldId id="293" r:id="rId5"/>
+    <p:sldId id="294" r:id="rId6"/>
+    <p:sldId id="296" r:id="rId7"/>
   </p:sldIdLst>
   <p:sldSz cx="12192000" cy="6858000"/>
   <p:notesSz cx="6858000" cy="9144000"/>
@@ -161,50 +161,6 @@
 </p:presentation>
 </file>
 
-<file path=ppt/revisionInfo.xml><?xml version="1.0" encoding="utf-8"?>
-<p1510:revInfo xmlns:a="http://schemas.openxmlformats.org/drawingml/2006/main" xmlns:r="http://schemas.openxmlformats.org/officeDocument/2006/relationships" xmlns:p1510="http://schemas.microsoft.com/office/powerpoint/2015/10/main">
-  <p1510:revLst>
-    <p1510:client id="{4C54EEAC-3316-4ACE-9326-A54C914E34A4}" v="6" dt="2026-08-30T13:42:45.498"/>
-  </p1510:revLst>
-</p1510:revInfo>
-</file>
-
-<file path=ppt/changesInfos/changesInfo1.xml><?xml version="1.0" encoding="utf-8"?>
-<pc:chgInfo xmlns:a="http://schemas.openxmlformats.org/drawingml/2006/main" xmlns:r="http://schemas.openxmlformats.org/officeDocument/2006/relationships" xmlns:ac="http://schemas.microsoft.com/office/drawing/2013/main/command" xmlns:pc="http://schemas.microsoft.com/office/powerpoint/2013/main/command">
-  <pc:docChgLst>
-    <pc:chgData name="NEHA DEEPTHI" userId="11b4eb8af682c208" providerId="LiveId" clId="{FD963E51-56A7-4F59-9560-027052A78E42}"/>
-    <pc:docChg chg="undo custSel addSld delSld modSld">
-      <pc:chgData name="NEHA DEEPTHI" userId="11b4eb8af682c208" providerId="LiveId" clId="{FD963E51-56A7-4F59-9560-027052A78E42}" dt="2026-08-30T17:15:41.379" v="12" actId="47"/>
-      <pc:docMkLst>
-        <pc:docMk/>
-      </pc:docMkLst>
-      <pc:sldChg chg="del">
-        <pc:chgData name="NEHA DEEPTHI" userId="11b4eb8af682c208" providerId="LiveId" clId="{FD963E51-56A7-4F59-9560-027052A78E42}" dt="2026-08-30T17:15:41.379" v="12" actId="47"/>
-        <pc:sldMkLst>
-          <pc:docMk/>
-          <pc:sldMk cId="3916788613" sldId="296"/>
-        </pc:sldMkLst>
-      </pc:sldChg>
-      <pc:sldChg chg="modSp add mod">
-        <pc:chgData name="NEHA DEEPTHI" userId="11b4eb8af682c208" providerId="LiveId" clId="{FD963E51-56A7-4F59-9560-027052A78E42}" dt="2026-08-30T13:42:54.908" v="11" actId="20577"/>
-        <pc:sldMkLst>
-          <pc:docMk/>
-          <pc:sldMk cId="3779924293" sldId="297"/>
-        </pc:sldMkLst>
-        <pc:spChg chg="mod">
-          <ac:chgData name="NEHA DEEPTHI" userId="11b4eb8af682c208" providerId="LiveId" clId="{FD963E51-56A7-4F59-9560-027052A78E42}" dt="2026-08-30T13:42:54.908" v="11" actId="20577"/>
-          <ac:spMkLst>
-            <pc:docMk/>
-            <pc:sldMk cId="3779924293" sldId="297"/>
-            <ac:spMk id="9" creationId="{5DBCE864-823D-4A13-9607-5DA1F0ED5FB8}"/>
-          </ac:spMkLst>
-        </pc:spChg>
-      </pc:sldChg>
-    </pc:docChg>
-  </pc:docChgLst>
-</pc:chgInfo>
-</file>
-
 <file path=ppt/notesMasters/notesMaster1.xml><?xml version="1.0" encoding="utf-8"?>
 <p:notesMaster xmlns:a="http://schemas.openxmlformats.org/drawingml/2006/main" xmlns:r="http://schemas.openxmlformats.org/officeDocument/2006/relationships" xmlns:p="http://schemas.openxmlformats.org/presentationml/2006/main">
   <p:cSld>
@@ -305,7 +261,7 @@
             <a:fld id="{C4D5ADD5-2BBC-4A94-8F86-D9013941F742}" type="datetimeFigureOut">
               <a:rPr lang="en-US"/>
               <a:pPr/>
-              <a:t>8/30/2026</a:t>
+              <a:t>9/14/2026</a:t>
             </a:fld>
             <a:endParaRPr lang="en-US"/>
           </a:p>
@@ -1029,7 +985,7 @@
     </p:spTree>
     <p:extLst>
       <p:ext uri="{BB962C8B-B14F-4D97-AF65-F5344CB8AC3E}">
-        <p14:creationId xmlns:p14="http://schemas.microsoft.com/office/powerpoint/2010/main" val="2641722845"/>
+        <p14:creationId xmlns:p14="http://schemas.microsoft.com/office/powerpoint/2010/main" val="3773505461"/>
       </p:ext>
     </p:extLst>
   </p:cSld>
@@ -1207,7 +1163,7 @@
     </p:spTree>
     <p:extLst>
       <p:ext uri="{BB962C8B-B14F-4D97-AF65-F5344CB8AC3E}">
-        <p14:creationId xmlns:p14="http://schemas.microsoft.com/office/powerpoint/2010/main" val="3773505461"/>
+        <p14:creationId xmlns:p14="http://schemas.microsoft.com/office/powerpoint/2010/main" val="2641722845"/>
       </p:ext>
     </p:extLst>
   </p:cSld>
@@ -1578,7 +1534,7 @@
           <a:p>
             <a:fld id="{E60792E3-D524-454C-8AFD-A91972900BCB}" type="datetime1">
               <a:rPr lang="en-US" smtClean="0"/>
-              <a:t>8/30/2026</a:t>
+              <a:t>9/14/2026</a:t>
             </a:fld>
             <a:endParaRPr lang="en-US"/>
           </a:p>
@@ -1760,7 +1716,7 @@
           <a:p>
             <a:fld id="{053C3A68-6922-42D3-8905-ECC2D82A3469}" type="datetime1">
               <a:rPr lang="en-US" smtClean="0"/>
-              <a:t>8/30/2026</a:t>
+              <a:t>9/14/2026</a:t>
             </a:fld>
             <a:endParaRPr lang="en-US"/>
           </a:p>
@@ -1952,7 +1908,7 @@
           <a:p>
             <a:fld id="{CB69E9F4-7604-4950-A8B2-8ACDEDB1506E}" type="datetime1">
               <a:rPr lang="en-US" smtClean="0"/>
-              <a:t>8/30/2026</a:t>
+              <a:t>9/14/2026</a:t>
             </a:fld>
             <a:endParaRPr lang="en-US"/>
           </a:p>
@@ -2134,7 +2090,7 @@
           <a:p>
             <a:fld id="{708B7524-32A2-4C20-A58C-BC3BAA1042FC}" type="datetime1">
               <a:rPr lang="en-US" smtClean="0"/>
-              <a:t>8/30/2026</a:t>
+              <a:t>9/14/2026</a:t>
             </a:fld>
             <a:endParaRPr lang="en-US"/>
           </a:p>
@@ -2393,7 +2349,7 @@
           <a:p>
             <a:fld id="{1E994447-D6B2-43BB-A877-57F1A267B999}" type="datetime1">
               <a:rPr lang="en-US" smtClean="0"/>
-              <a:t>8/30/2026</a:t>
+              <a:t>9/14/2026</a:t>
             </a:fld>
             <a:endParaRPr lang="en-US"/>
           </a:p>
@@ -2692,7 +2648,7 @@
           <a:p>
             <a:fld id="{68920E16-BD35-483C-AA6B-346FC7E46DEA}" type="datetime1">
               <a:rPr lang="en-US" smtClean="0"/>
-              <a:t>8/30/2026</a:t>
+              <a:t>9/14/2026</a:t>
             </a:fld>
             <a:endParaRPr lang="en-US"/>
           </a:p>
@@ -3125,7 +3081,7 @@
           <a:p>
             <a:fld id="{2FEAC6F8-5103-4FC0-A69E-5C6AE6469DA8}" type="datetime1">
               <a:rPr lang="en-US" smtClean="0"/>
-              <a:t>8/30/2026</a:t>
+              <a:t>9/14/2026</a:t>
             </a:fld>
             <a:endParaRPr lang="en-US"/>
           </a:p>
@@ -3256,7 +3212,7 @@
           <a:p>
             <a:fld id="{C60C6921-0627-4C8F-83D5-0CF936D2FFDD}" type="datetime1">
               <a:rPr lang="en-US" smtClean="0"/>
-              <a:t>8/30/2026</a:t>
+              <a:t>9/14/2026</a:t>
             </a:fld>
             <a:endParaRPr lang="en-US"/>
           </a:p>
@@ -3365,7 +3321,7 @@
           <a:p>
             <a:fld id="{2FF08AD7-8103-40F8-983C-E2BA6BB9CBE0}" type="datetime1">
               <a:rPr lang="en-US" smtClean="0"/>
-              <a:t>8/30/2026</a:t>
+              <a:t>9/14/2026</a:t>
             </a:fld>
             <a:endParaRPr lang="en-US"/>
           </a:p>
@@ -3654,7 +3610,7 @@
           <a:p>
             <a:fld id="{DF8C06B4-9380-4A4D-AF49-A3596E17DAF5}" type="datetime1">
               <a:rPr lang="en-US" smtClean="0"/>
-              <a:t>8/30/2026</a:t>
+              <a:t>9/14/2026</a:t>
             </a:fld>
             <a:endParaRPr lang="en-US"/>
           </a:p>
@@ -3923,7 +3879,7 @@
           <a:p>
             <a:fld id="{EF7FDEF1-C582-4E22-9E77-D68326471F28}" type="datetime1">
               <a:rPr lang="en-US" smtClean="0"/>
-              <a:t>8/30/2026</a:t>
+              <a:t>9/14/2026</a:t>
             </a:fld>
             <a:endParaRPr lang="en-US"/>
           </a:p>
@@ -4166,7 +4122,7 @@
           <a:p>
             <a:fld id="{780A9602-A9A9-453F-AEF1-37B5837E02CD}" type="datetime1">
               <a:rPr lang="en-US" smtClean="0"/>
-              <a:t>8/30/2026</a:t>
+              <a:t>9/14/2026</a:t>
             </a:fld>
             <a:endParaRPr lang="en-US"/>
           </a:p>
@@ -5601,16 +5557,6 @@
             </a:endParaRPr>
           </a:p>
           <a:p>
-            <a:r>
-              <a:rPr lang="en-US" b="1" dirty="0">
-                <a:solidFill>
-                  <a:schemeClr val="tx1"/>
-                </a:solidFill>
-                <a:latin typeface="Times New Roman" panose="02020603050405020304" pitchFamily="18" charset="0"/>
-                <a:cs typeface="Times New Roman" panose="02020603050405020304" pitchFamily="18" charset="0"/>
-              </a:rPr>
-              <a:t>TITLE PAGE</a:t>
-            </a:r>
             <a:endParaRPr lang="en-IN" b="1" dirty="0">
               <a:solidFill>
                 <a:schemeClr val="tx1"/>
@@ -5642,7 +5588,7 @@
           <a:lstStyle/>
           <a:p>
             <a:r>
-              <a:rPr lang="en-US" sz="4000" b="1" dirty="0">
+              <a:rPr lang="en-US" sz="3600" b="1" dirty="0">
                 <a:solidFill>
                   <a:schemeClr val="tx2"/>
                 </a:solidFill>
@@ -5650,7 +5596,7 @@
               </a:rPr>
               <a:t>SMART INDIA HACKATHON 2026</a:t>
             </a:r>
-            <a:endParaRPr lang="en-IN" sz="4000" b="1" dirty="0">
+            <a:endParaRPr lang="en-IN" sz="3600" b="1" dirty="0">
               <a:solidFill>
                 <a:schemeClr val="tx2"/>
               </a:solidFill>
@@ -5668,7 +5614,7 @@
         <p:spPr>
           <a:xfrm>
             <a:off x="331286" y="2076450"/>
-            <a:ext cx="5924550" cy="2958439"/>
+            <a:ext cx="5924550" cy="2296526"/>
           </a:xfrm>
           <a:prstGeom prst="rect">
             <a:avLst/>
@@ -5681,7 +5627,7 @@
           </a:bodyPr>
           <a:lstStyle/>
           <a:p>
-            <a:endParaRPr lang="en-US" dirty="0"/>
+            <a:endParaRPr lang="en-US" sz="1600" dirty="0"/>
           </a:p>
           <a:p>
             <a:pPr marL="285750" indent="-285750" algn="just">
@@ -5692,11 +5638,11 @@
               <a:buChar char="•"/>
             </a:pPr>
             <a:r>
-              <a:rPr lang="en-US" sz="2000" b="1" dirty="0">
+              <a:rPr lang="en-US" sz="1600" b="1" dirty="0">
                 <a:latin typeface="Arial" panose="020B0604020202020204" pitchFamily="34" charset="0"/>
                 <a:cs typeface="Arial" panose="020B0604020202020204" pitchFamily="34" charset="0"/>
               </a:rPr>
-              <a:t>Problem Statement ID – 26044</a:t>
+              <a:t>Problem Statement ID – 26154</a:t>
             </a:r>
           </a:p>
           <a:p>
@@ -5712,7 +5658,7 @@
                 <a:latin typeface="Arial" panose="020B0604020202020204" pitchFamily="34" charset="0"/>
                 <a:cs typeface="Arial" panose="020B0604020202020204" pitchFamily="34" charset="0"/>
               </a:rPr>
-              <a:t>Problem Statement Title– Portal for Academia-Industry Collaboration for Skill Mapping, Internships and Placement</a:t>
+              <a:t>Problem Statement Title- Gen AI Platform for Automated Content Transformation</a:t>
             </a:r>
           </a:p>
           <a:p>
@@ -5724,11 +5670,11 @@
               <a:buChar char="•"/>
             </a:pPr>
             <a:r>
-              <a:rPr lang="en-US" sz="2000" b="1" dirty="0">
+              <a:rPr lang="en-US" sz="1600" b="1" dirty="0">
                 <a:latin typeface="Arial" panose="020B0604020202020204" pitchFamily="34" charset="0"/>
                 <a:cs typeface="Arial" panose="020B0604020202020204" pitchFamily="34" charset="0"/>
               </a:rPr>
-              <a:t>Theme– Miscellaneous</a:t>
+              <a:t>Theme- Blockchain &amp; Cybersecurity</a:t>
             </a:r>
           </a:p>
           <a:p>
@@ -5740,11 +5686,11 @@
               <a:buChar char="•"/>
             </a:pPr>
             <a:r>
-              <a:rPr lang="en-US" sz="2000" b="1" dirty="0">
+              <a:rPr lang="en-US" sz="1600" b="1" dirty="0">
                 <a:latin typeface="Arial" panose="020B0604020202020204" pitchFamily="34" charset="0"/>
                 <a:cs typeface="Arial" panose="020B0604020202020204" pitchFamily="34" charset="0"/>
               </a:rPr>
-              <a:t>PS Category– Software</a:t>
+              <a:t>PS Category- Software</a:t>
             </a:r>
           </a:p>
           <a:p>
@@ -5756,11 +5702,11 @@
               <a:buChar char="•"/>
             </a:pPr>
             <a:r>
-              <a:rPr lang="en-US" sz="2000" b="1" dirty="0">
+              <a:rPr lang="en-US" sz="1600" b="1" dirty="0">
                 <a:latin typeface="Arial" panose="020B0604020202020204" pitchFamily="34" charset="0"/>
                 <a:cs typeface="Arial" panose="020B0604020202020204" pitchFamily="34" charset="0"/>
               </a:rPr>
-              <a:t>Team ID–SIH26-A0H-T364</a:t>
+              <a:t>Team ID- SIH26-A0H-T364</a:t>
             </a:r>
           </a:p>
           <a:p>
@@ -5772,13 +5718,13 @@
               <a:buChar char="•"/>
             </a:pPr>
             <a:r>
-              <a:rPr lang="en-US" sz="2000" b="1" dirty="0">
+              <a:rPr lang="en-US" sz="1600" b="1" dirty="0">
                 <a:latin typeface="Arial" panose="020B0604020202020204" pitchFamily="34" charset="0"/>
                 <a:cs typeface="Arial" panose="020B0604020202020204" pitchFamily="34" charset="0"/>
               </a:rPr>
-              <a:t>Team Name– Team Invictus</a:t>
-            </a:r>
-            <a:endParaRPr lang="en-IN" sz="2400" b="1" dirty="0">
+              <a:t>Team Name (Registered on portal)- Team Invictus</a:t>
+            </a:r>
+            <a:endParaRPr lang="en-IN" sz="1600" b="1" dirty="0">
               <a:latin typeface="Arial" panose="020B0604020202020204" pitchFamily="34" charset="0"/>
               <a:cs typeface="Arial" panose="020B0604020202020204" pitchFamily="34" charset="0"/>
             </a:endParaRPr>
@@ -5910,8 +5856,8 @@
         </p:nvSpPr>
         <p:spPr>
           <a:xfrm>
-            <a:off x="182998" y="0"/>
-            <a:ext cx="10972800" cy="1143000"/>
+            <a:off x="1700000" y="0"/>
+            <a:ext cx="7950000" cy="1143000"/>
           </a:xfrm>
         </p:spPr>
         <p:txBody>
@@ -5920,19 +5866,19 @@
           <a:p>
             <a:pPr eaLnBrk="1" hangingPunct="1"/>
             <a:br>
-              <a:rPr lang="en-US" sz="3600" b="1" dirty="0">
+              <a:rPr lang="en-US" sz="2600" b="1" dirty="0">
                 <a:latin typeface="Times New Roman" panose="02020603050405020304" pitchFamily="18" charset="0"/>
                 <a:ea typeface="ＭＳ Ｐゴシック" pitchFamily="1" charset="-128"/>
                 <a:cs typeface="Times New Roman" panose="02020603050405020304" pitchFamily="18" charset="0"/>
               </a:rPr>
             </a:br>
             <a:r>
-              <a:rPr lang="en-US" sz="3600" b="1" dirty="0">
+              <a:rPr lang="en-US" sz="2600" b="1" dirty="0">
                 <a:latin typeface="Times New Roman" panose="02020603050405020304" pitchFamily="18" charset="0"/>
                 <a:ea typeface="ＭＳ Ｐゴシック" pitchFamily="1" charset="-128"/>
                 <a:cs typeface="Times New Roman" panose="02020603050405020304" pitchFamily="18" charset="0"/>
               </a:rPr>
-              <a:t>IDEA TITLE</a:t>
+              <a:t>CONTENTFORGE AI – Unified Gen AI Platform for Automated Content Transformation</a:t>
             </a:r>
           </a:p>
         </p:txBody>
@@ -5947,8 +5893,8 @@
         </p:nvSpPr>
         <p:spPr bwMode="auto">
           <a:xfrm>
-            <a:off x="-1" y="1783080"/>
-            <a:ext cx="12191999" cy="822960"/>
+            <a:off x="-1" y="1417320"/>
+            <a:ext cx="12191999" cy="3246120"/>
           </a:xfrm>
           <a:prstGeom prst="rect">
             <a:avLst/>
@@ -5972,14 +5918,14 @@
               <a:buChar char="v"/>
             </a:pPr>
             <a:r>
-              <a:rPr lang="en-US" sz="2200" b="1" u="sng" dirty="0">
+              <a:rPr lang="en-US" sz="3200" b="1" u="sng" dirty="0">
                 <a:solidFill>
                   <a:schemeClr val="tx2"/>
                 </a:solidFill>
                 <a:latin typeface="Arial" pitchFamily="34" charset="0"/>
                 <a:cs typeface="Arial" pitchFamily="34" charset="0"/>
               </a:rPr>
-              <a:t>SKILL-SETU – AI-Powered Academia–Industry Collaboration Portal</a:t>
+              <a:t>Proposed Solution </a:t>
             </a:r>
             <a:endParaRPr lang="en-US" sz="3200" u="sng" dirty="0">
               <a:solidFill>
@@ -5988,6 +5934,84 @@
               <a:latin typeface="Arial" pitchFamily="34" charset="0"/>
               <a:cs typeface="Arial" pitchFamily="34" charset="0"/>
             </a:endParaRPr>
+          </a:p>
+          <a:p>
+            <a:pPr marL="342900" indent="-342900">
+              <a:buFont typeface="Arial" panose="020B0604020202020204" pitchFamily="34" charset="0"/>
+              <a:buChar char="•"/>
+            </a:pPr>
+            <a:endParaRPr lang="en-US" sz="1700" u="sng" dirty="0">
+              <a:solidFill>
+                <a:schemeClr val="tx2"/>
+              </a:solidFill>
+              <a:latin typeface="Arial" pitchFamily="34" charset="0"/>
+              <a:cs typeface="Arial" pitchFamily="34" charset="0"/>
+            </a:endParaRPr>
+          </a:p>
+          <a:p>
+            <a:pPr marL="342900" indent="-342900">
+              <a:buFont typeface="Arial" panose="020B0604020202020204" pitchFamily="34" charset="0"/>
+              <a:buChar char="•"/>
+            </a:pPr>
+            <a:endParaRPr lang="en-US" sz="1700" u="sng" dirty="0">
+              <a:solidFill>
+                <a:schemeClr val="tx2"/>
+              </a:solidFill>
+              <a:latin typeface="Arial" pitchFamily="34" charset="0"/>
+              <a:cs typeface="Arial" pitchFamily="34" charset="0"/>
+            </a:endParaRPr>
+          </a:p>
+          <a:p>
+            <a:pPr marL="342900" indent="-342900" algn="just">
+              <a:buFont typeface="Arial" panose="020B0604020202020204" pitchFamily="34" charset="0"/>
+              <a:buChar char="•"/>
+            </a:pPr>
+            <a:r>
+              <a:rPr lang="en-US" sz="1700" dirty="0">
+                <a:latin typeface="Arial" pitchFamily="34" charset="0"/>
+                <a:cs typeface="Arial" pitchFamily="34" charset="0"/>
+              </a:rPr>
+              <a:t>Single dashboard converts one source — text, documents, images, video or prompts — into every deliverable an operator selects, generated together</a:t>
+            </a:r>
+          </a:p>
+          <a:p>
+            <a:pPr marL="342900" indent="-342900" algn="just">
+              <a:buFont typeface="Arial" panose="020B0604020202020204" pitchFamily="34" charset="0"/>
+              <a:buChar char="•"/>
+            </a:pPr>
+            <a:r>
+              <a:rPr lang="en-US" sz="1700" dirty="0">
+                <a:latin typeface="Arial" pitchFamily="34" charset="0"/>
+                <a:cs typeface="Arial" pitchFamily="34" charset="0"/>
+              </a:rPr>
+              <a:t>Multimodal GenAI parses source content for context, entities &amp; intent, then routes it through format-specific generation modules in parallel</a:t>
+            </a:r>
+          </a:p>
+          <a:p>
+            <a:pPr marL="342900" indent="-342900" algn="just">
+              <a:buFont typeface="Arial" panose="020B0604020202020204" pitchFamily="34" charset="0"/>
+              <a:buChar char="•"/>
+            </a:pPr>
+            <a:r>
+              <a:rPr lang="en-US" sz="1700" dirty="0">
+                <a:latin typeface="Arial" pitchFamily="34" charset="0"/>
+                <a:cs typeface="Arial" pitchFamily="34" charset="0"/>
+              </a:rPr>
+              <a:t>Blockchain-anchored provenance ledger, on-prem deployment option &amp; configurable tone/audience controls make outputs auditable, secure &amp; tailored</a:t>
+            </a:r>
+          </a:p>
+          <a:p>
+            <a:pPr marL="342900" indent="-342900" algn="just">
+              <a:buFont typeface="Arial" panose="020B0604020202020204" pitchFamily="34" charset="0"/>
+              <a:buChar char="•"/>
+            </a:pPr>
+            <a:r>
+              <a:rPr lang="en-US" sz="1700" dirty="0">
+                <a:latin typeface="Arial" pitchFamily="34" charset="0"/>
+                <a:cs typeface="Arial" pitchFamily="34" charset="0"/>
+              </a:rPr>
+              <a:t>Core platform modules: Content Ingestion Engine  •  Intent &amp; Parameter Engine  •  Format Generation Modules  •  Review &amp; Export Studio  •  Provenance &amp; Audit Ledger  •  Admin &amp; Access Console</a:t>
+            </a:r>
           </a:p>
         </p:txBody>
       </p:sp>
@@ -6080,7 +6104,7 @@
         <p:spPr>
           <a:xfrm>
             <a:off x="329773" y="252246"/>
-            <a:ext cx="1676008" cy="807334"/>
+            <a:ext cx="1251857" cy="807334"/>
           </a:xfrm>
           <a:prstGeom prst="ellipse">
             <a:avLst/>
@@ -6106,10 +6130,7 @@
           <a:p>
             <a:pPr algn="ctr"/>
             <a:r>
-              <a:rPr lang="en-US" b="1" dirty="0">
-                <a:latin typeface="Arial" panose="020B0604020202020204" pitchFamily="34" charset="0"/>
-                <a:cs typeface="Arial" panose="020B0604020202020204" pitchFamily="34" charset="0"/>
-              </a:rPr>
+              <a:rPr lang="en-US" sz="1000" dirty="0"/>
               <a:t>Team Invictus</a:t>
             </a:r>
             <a:endParaRPr lang="en-IN" dirty="0"/>
@@ -6148,260 +6169,14 @@
       </p:pic>
       <p:sp>
         <p:nvSpPr>
-          <p:cNvPr id="15363" name="Rounded Rectangle 15362"/>
+          <p:cNvPr id="15363" name="Oval 15362"/>
           <p:cNvSpPr/>
           <p:nvPr/>
         </p:nvSpPr>
         <p:spPr>
           <a:xfrm>
-            <a:off x="411480" y="2724912"/>
-            <a:ext cx="3538727" cy="1536192"/>
-          </a:xfrm>
-          <a:prstGeom prst="roundRect">
-            <a:avLst>
-              <a:gd name="adj" fmla="val 6000"/>
-            </a:avLst>
-          </a:prstGeom>
-          <a:solidFill>
-            <a:srgbClr val="F1F5FA"/>
-          </a:solidFill>
-          <a:ln>
-            <a:noFill/>
-          </a:ln>
-          <a:effectLst/>
-        </p:spPr>
-        <p:style>
-          <a:lnRef idx="1">
-            <a:schemeClr val="accent1"/>
-          </a:lnRef>
-          <a:fillRef idx="3">
-            <a:schemeClr val="accent1"/>
-          </a:fillRef>
-          <a:effectRef idx="2">
-            <a:schemeClr val="accent1"/>
-          </a:effectRef>
-          <a:fontRef idx="minor">
-            <a:schemeClr val="lt1"/>
-          </a:fontRef>
-        </p:style>
-        <p:txBody>
-          <a:bodyPr rtlCol="0" anchor="ctr"/>
-          <a:lstStyle/>
-          <a:p>
-            <a:pPr algn="ctr"/>
-            <a:endParaRPr/>
-          </a:p>
-        </p:txBody>
-      </p:sp>
-      <p:sp>
-        <p:nvSpPr>
-          <p:cNvPr id="15364" name="Oval 15363"/>
-          <p:cNvSpPr/>
-          <p:nvPr/>
-        </p:nvSpPr>
-        <p:spPr>
-          <a:xfrm>
-            <a:off x="521208" y="2834639"/>
-            <a:ext cx="365760" cy="365760"/>
-          </a:xfrm>
-          <a:prstGeom prst="ellipse">
-            <a:avLst/>
-          </a:prstGeom>
-          <a:solidFill>
-            <a:srgbClr val="F28C28"/>
-          </a:solidFill>
-          <a:ln>
-            <a:noFill/>
-          </a:ln>
-          <a:effectLst/>
-        </p:spPr>
-        <p:style>
-          <a:lnRef idx="1">
-            <a:schemeClr val="accent1"/>
-          </a:lnRef>
-          <a:fillRef idx="3">
-            <a:schemeClr val="accent1"/>
-          </a:fillRef>
-          <a:effectRef idx="2">
-            <a:schemeClr val="accent1"/>
-          </a:effectRef>
-          <a:fontRef idx="minor">
-            <a:schemeClr val="lt1"/>
-          </a:fontRef>
-        </p:style>
-        <p:txBody>
-          <a:bodyPr lIns="0" tIns="0" rIns="0" bIns="0" rtlCol="0" anchor="ctr"/>
-          <a:lstStyle/>
-          <a:p>
-            <a:pPr algn="ctr"/>
-            <a:r>
-              <a:rPr sz="1300" b="1">
-                <a:solidFill>
-                  <a:srgbClr val="FFFFFF"/>
-                </a:solidFill>
-              </a:rPr>
-              <a:t>W</a:t>
-            </a:r>
-          </a:p>
-        </p:txBody>
-      </p:sp>
-      <p:sp>
-        <p:nvSpPr>
-          <p:cNvPr id="15365" name="TextBox 15364"/>
-          <p:cNvSpPr txBox="1"/>
-          <p:nvPr/>
-        </p:nvSpPr>
-        <p:spPr>
-          <a:xfrm>
-            <a:off x="960120" y="2852928"/>
-            <a:ext cx="2807207" cy="365760"/>
-          </a:xfrm>
-          <a:prstGeom prst="rect">
-            <a:avLst/>
-          </a:prstGeom>
-          <a:noFill/>
-        </p:spPr>
-        <p:txBody>
-          <a:bodyPr wrap="square" lIns="0" tIns="0" rIns="0" bIns="0" anchor="t">
-            <a:spAutoFit/>
-          </a:bodyPr>
-          <a:lstStyle/>
-          <a:p>
-            <a:pPr algn="l">
-              <a:lnSpc>
-                <a:spcPct val="100000"/>
-              </a:lnSpc>
-            </a:pPr>
-            <a:r>
-              <a:rPr sz="1250" b="1" i="0">
-                <a:solidFill>
-                  <a:srgbClr val="1F3864"/>
-                </a:solidFill>
-                <a:latin typeface="Calibri"/>
-              </a:rPr>
-              <a:t>What It Is</a:t>
-            </a:r>
-          </a:p>
-        </p:txBody>
-      </p:sp>
-      <p:sp>
-        <p:nvSpPr>
-          <p:cNvPr id="15366" name="TextBox 15365"/>
-          <p:cNvSpPr txBox="1"/>
-          <p:nvPr/>
-        </p:nvSpPr>
-        <p:spPr>
-          <a:xfrm>
-            <a:off x="612648" y="3291840"/>
-            <a:ext cx="3154679" cy="850392"/>
-          </a:xfrm>
-          <a:prstGeom prst="rect">
-            <a:avLst/>
-          </a:prstGeom>
-          <a:noFill/>
-        </p:spPr>
-        <p:txBody>
-          <a:bodyPr wrap="square" lIns="0" tIns="0" rIns="0" bIns="0">
-            <a:spAutoFit/>
-          </a:bodyPr>
-          <a:lstStyle/>
-          <a:p>
-            <a:pPr>
-              <a:lnSpc>
-                <a:spcPct val="105000"/>
-              </a:lnSpc>
-              <a:spcAft>
-                <a:spcPts val="200"/>
-              </a:spcAft>
-            </a:pPr>
-            <a:r>
-              <a:rPr sz="950">
-                <a:solidFill>
-                  <a:srgbClr val="222A33"/>
-                </a:solidFill>
-                <a:latin typeface="Calibri"/>
-              </a:rPr>
-              <a:t>•  Unified web portal mapping student skills to industry-defined competency taxonomy</a:t>
-            </a:r>
-          </a:p>
-          <a:p>
-            <a:pPr>
-              <a:lnSpc>
-                <a:spcPct val="105000"/>
-              </a:lnSpc>
-              <a:spcAft>
-                <a:spcPts val="200"/>
-              </a:spcAft>
-            </a:pPr>
-            <a:r>
-              <a:rPr sz="950">
-                <a:solidFill>
-                  <a:srgbClr val="222A33"/>
-                </a:solidFill>
-                <a:latin typeface="Calibri"/>
-              </a:rPr>
-              <a:t>•  Connects students, recruiters &amp; faculty on a single authenticated platform</a:t>
-            </a:r>
-          </a:p>
-        </p:txBody>
-      </p:sp>
-      <p:sp>
-        <p:nvSpPr>
-          <p:cNvPr id="15367" name="Rounded Rectangle 15366"/>
-          <p:cNvSpPr/>
-          <p:nvPr/>
-        </p:nvSpPr>
-        <p:spPr>
-          <a:xfrm>
-            <a:off x="4087368" y="2724912"/>
-            <a:ext cx="3538727" cy="1536192"/>
-          </a:xfrm>
-          <a:prstGeom prst="roundRect">
-            <a:avLst>
-              <a:gd name="adj" fmla="val 6000"/>
-            </a:avLst>
-          </a:prstGeom>
-          <a:solidFill>
-            <a:srgbClr val="F1F5FA"/>
-          </a:solidFill>
-          <a:ln>
-            <a:noFill/>
-          </a:ln>
-          <a:effectLst/>
-        </p:spPr>
-        <p:style>
-          <a:lnRef idx="1">
-            <a:schemeClr val="accent1"/>
-          </a:lnRef>
-          <a:fillRef idx="3">
-            <a:schemeClr val="accent1"/>
-          </a:fillRef>
-          <a:effectRef idx="2">
-            <a:schemeClr val="accent1"/>
-          </a:effectRef>
-          <a:fontRef idx="minor">
-            <a:schemeClr val="lt1"/>
-          </a:fontRef>
-        </p:style>
-        <p:txBody>
-          <a:bodyPr rtlCol="0" anchor="ctr"/>
-          <a:lstStyle/>
-          <a:p>
-            <a:pPr algn="ctr"/>
-            <a:endParaRPr/>
-          </a:p>
-        </p:txBody>
-      </p:sp>
-      <p:sp>
-        <p:nvSpPr>
-          <p:cNvPr id="15368" name="Oval 15367"/>
-          <p:cNvSpPr/>
-          <p:nvPr/>
-        </p:nvSpPr>
-        <p:spPr>
-          <a:xfrm>
-            <a:off x="4197096" y="2834639"/>
-            <a:ext cx="365760" cy="365760"/>
+            <a:off x="3878580" y="5166360"/>
+            <a:ext cx="731520" cy="731520"/>
           </a:xfrm>
           <a:prstGeom prst="ellipse">
             <a:avLst/>
@@ -6429,31 +6204,32 @@
           </a:fontRef>
         </p:style>
         <p:txBody>
-          <a:bodyPr lIns="0" tIns="0" rIns="0" bIns="0" rtlCol="0" anchor="ctr"/>
+          <a:bodyPr wrap="square" lIns="25400" rIns="25400" rtlCol="0" anchor="ctr"/>
           <a:lstStyle/>
           <a:p>
             <a:pPr algn="ctr"/>
             <a:r>
-              <a:rPr sz="1300" b="1">
+              <a:rPr sz="1000" b="1">
                 <a:solidFill>
                   <a:srgbClr val="FFFFFF"/>
                 </a:solidFill>
+                <a:latin typeface="Calibri"/>
               </a:rPr>
-              <a:t>H</a:t>
-            </a:r>
-          </a:p>
-        </p:txBody>
-      </p:sp>
-      <p:sp>
-        <p:nvSpPr>
-          <p:cNvPr id="15369" name="TextBox 15368"/>
+              <a:t>Analysts</a:t>
+            </a:r>
+          </a:p>
+        </p:txBody>
+      </p:sp>
+      <p:sp>
+        <p:nvSpPr>
+          <p:cNvPr id="15364" name="TextBox 15363"/>
           <p:cNvSpPr txBox="1"/>
           <p:nvPr/>
         </p:nvSpPr>
         <p:spPr>
           <a:xfrm>
-            <a:off x="4636007" y="2852928"/>
-            <a:ext cx="2807207" cy="365760"/>
+            <a:off x="3649980" y="5923280"/>
+            <a:ext cx="1188720" cy="274320"/>
           </a:xfrm>
           <a:prstGeom prst="rect">
             <a:avLst/>
@@ -6461,556 +6237,28 @@
           <a:noFill/>
         </p:spPr>
         <p:txBody>
-          <a:bodyPr wrap="square" lIns="0" tIns="0" rIns="0" bIns="0" anchor="t">
+          <a:bodyPr wrap="square" lIns="0" tIns="0" rIns="0" bIns="0" anchor="ctr">
             <a:spAutoFit/>
           </a:bodyPr>
           <a:lstStyle/>
           <a:p>
-            <a:pPr algn="l">
-              <a:lnSpc>
-                <a:spcPct val="100000"/>
-              </a:lnSpc>
-            </a:pPr>
-            <a:r>
-              <a:rPr sz="1250" b="1" i="0">
-                <a:solidFill>
-                  <a:srgbClr val="1F3864"/>
-                </a:solidFill>
-                <a:latin typeface="Calibri"/>
-              </a:rPr>
-              <a:t>How It Works</a:t>
-            </a:r>
-          </a:p>
-        </p:txBody>
-      </p:sp>
-      <p:sp>
-        <p:nvSpPr>
-          <p:cNvPr id="15370" name="TextBox 15369"/>
-          <p:cNvSpPr txBox="1"/>
-          <p:nvPr/>
-        </p:nvSpPr>
-        <p:spPr>
-          <a:xfrm>
-            <a:off x="4288536" y="3291840"/>
-            <a:ext cx="3154679" cy="850392"/>
-          </a:xfrm>
-          <a:prstGeom prst="rect">
-            <a:avLst/>
-          </a:prstGeom>
-          <a:noFill/>
-        </p:spPr>
-        <p:txBody>
-          <a:bodyPr wrap="square" lIns="0" tIns="0" rIns="0" bIns="0">
-            <a:spAutoFit/>
-          </a:bodyPr>
-          <a:lstStyle/>
-          <a:p>
-            <a:pPr>
-              <a:lnSpc>
-                <a:spcPct val="105000"/>
-              </a:lnSpc>
-              <a:spcAft>
-                <a:spcPts val="200"/>
-              </a:spcAft>
-            </a:pPr>
-            <a:r>
-              <a:rPr sz="950">
-                <a:solidFill>
-                  <a:srgbClr val="222A33"/>
-                </a:solidFill>
-                <a:latin typeface="Calibri"/>
-              </a:rPr>
-              <a:t>•  NLP resume/JD parser extracts skills → embedding-based matching engine</a:t>
-            </a:r>
-          </a:p>
-          <a:p>
-            <a:pPr>
-              <a:lnSpc>
-                <a:spcPct val="105000"/>
-              </a:lnSpc>
-              <a:spcAft>
-                <a:spcPts val="200"/>
-              </a:spcAft>
-            </a:pPr>
-            <a:r>
-              <a:rPr sz="950">
-                <a:solidFill>
-                  <a:srgbClr val="222A33"/>
-                </a:solidFill>
-                <a:latin typeface="Calibri"/>
-              </a:rPr>
-              <a:t>•  Recommends verified internships ranked by weighted skill-fit score</a:t>
-            </a:r>
-          </a:p>
-        </p:txBody>
-      </p:sp>
-      <p:sp>
-        <p:nvSpPr>
-          <p:cNvPr id="15371" name="Rounded Rectangle 15370"/>
+            <a:pPr algn="ctr"/>
+            <a:endParaRPr/>
+          </a:p>
+        </p:txBody>
+      </p:sp>
+      <p:sp>
+        <p:nvSpPr>
+          <p:cNvPr id="15365" name="Oval 15364"/>
           <p:cNvSpPr/>
           <p:nvPr/>
         </p:nvSpPr>
         <p:spPr>
           <a:xfrm>
-            <a:off x="7763255" y="2724912"/>
-            <a:ext cx="3538727" cy="1536192"/>
-          </a:xfrm>
-          <a:prstGeom prst="roundRect">
-            <a:avLst>
-              <a:gd name="adj" fmla="val 6000"/>
-            </a:avLst>
-          </a:prstGeom>
-          <a:solidFill>
-            <a:srgbClr val="F1F5FA"/>
-          </a:solidFill>
-          <a:ln>
-            <a:noFill/>
-          </a:ln>
-          <a:effectLst/>
-        </p:spPr>
-        <p:style>
-          <a:lnRef idx="1">
-            <a:schemeClr val="accent1"/>
-          </a:lnRef>
-          <a:fillRef idx="3">
-            <a:schemeClr val="accent1"/>
-          </a:fillRef>
-          <a:effectRef idx="2">
-            <a:schemeClr val="accent1"/>
-          </a:effectRef>
-          <a:fontRef idx="minor">
-            <a:schemeClr val="lt1"/>
-          </a:fontRef>
-        </p:style>
-        <p:txBody>
-          <a:bodyPr rtlCol="0" anchor="ctr"/>
-          <a:lstStyle/>
-          <a:p>
-            <a:pPr algn="ctr"/>
-            <a:endParaRPr/>
-          </a:p>
-        </p:txBody>
-      </p:sp>
-      <p:sp>
-        <p:nvSpPr>
-          <p:cNvPr id="15372" name="Oval 15371"/>
-          <p:cNvSpPr/>
-          <p:nvPr/>
-        </p:nvSpPr>
-        <p:spPr>
-          <a:xfrm>
-            <a:off x="7872983" y="2834639"/>
-            <a:ext cx="365760" cy="365760"/>
+            <a:off x="5113020" y="5166360"/>
+            <a:ext cx="731520" cy="731520"/>
           </a:xfrm>
           <a:prstGeom prst="ellipse">
-            <a:avLst/>
-          </a:prstGeom>
-          <a:solidFill>
-            <a:srgbClr val="2E8B57"/>
-          </a:solidFill>
-          <a:ln>
-            <a:noFill/>
-          </a:ln>
-          <a:effectLst/>
-        </p:spPr>
-        <p:style>
-          <a:lnRef idx="1">
-            <a:schemeClr val="accent1"/>
-          </a:lnRef>
-          <a:fillRef idx="3">
-            <a:schemeClr val="accent1"/>
-          </a:fillRef>
-          <a:effectRef idx="2">
-            <a:schemeClr val="accent1"/>
-          </a:effectRef>
-          <a:fontRef idx="minor">
-            <a:schemeClr val="lt1"/>
-          </a:fontRef>
-        </p:style>
-        <p:txBody>
-          <a:bodyPr lIns="0" tIns="0" rIns="0" bIns="0" rtlCol="0" anchor="ctr"/>
-          <a:lstStyle/>
-          <a:p>
-            <a:pPr algn="ctr"/>
-            <a:r>
-              <a:rPr sz="1300" b="1">
-                <a:solidFill>
-                  <a:srgbClr val="FFFFFF"/>
-                </a:solidFill>
-              </a:rPr>
-              <a:t>U</a:t>
-            </a:r>
-          </a:p>
-        </p:txBody>
-      </p:sp>
-      <p:sp>
-        <p:nvSpPr>
-          <p:cNvPr id="15373" name="TextBox 15372"/>
-          <p:cNvSpPr txBox="1"/>
-          <p:nvPr/>
-        </p:nvSpPr>
-        <p:spPr>
-          <a:xfrm>
-            <a:off x="8311895" y="2852928"/>
-            <a:ext cx="2807207" cy="365760"/>
-          </a:xfrm>
-          <a:prstGeom prst="rect">
-            <a:avLst/>
-          </a:prstGeom>
-          <a:noFill/>
-        </p:spPr>
-        <p:txBody>
-          <a:bodyPr wrap="square" lIns="0" tIns="0" rIns="0" bIns="0" anchor="t">
-            <a:spAutoFit/>
-          </a:bodyPr>
-          <a:lstStyle/>
-          <a:p>
-            <a:pPr algn="l">
-              <a:lnSpc>
-                <a:spcPct val="100000"/>
-              </a:lnSpc>
-            </a:pPr>
-            <a:r>
-              <a:rPr sz="1250" b="1" i="0">
-                <a:solidFill>
-                  <a:srgbClr val="1F3864"/>
-                </a:solidFill>
-                <a:latin typeface="Calibri"/>
-              </a:rPr>
-              <a:t>What's Unique</a:t>
-            </a:r>
-          </a:p>
-        </p:txBody>
-      </p:sp>
-      <p:sp>
-        <p:nvSpPr>
-          <p:cNvPr id="15374" name="TextBox 15373"/>
-          <p:cNvSpPr txBox="1"/>
-          <p:nvPr/>
-        </p:nvSpPr>
-        <p:spPr>
-          <a:xfrm>
-            <a:off x="7964423" y="3291840"/>
-            <a:ext cx="3154679" cy="850392"/>
-          </a:xfrm>
-          <a:prstGeom prst="rect">
-            <a:avLst/>
-          </a:prstGeom>
-          <a:noFill/>
-        </p:spPr>
-        <p:txBody>
-          <a:bodyPr wrap="square" lIns="0" tIns="0" rIns="0" bIns="0">
-            <a:spAutoFit/>
-          </a:bodyPr>
-          <a:lstStyle/>
-          <a:p>
-            <a:pPr>
-              <a:lnSpc>
-                <a:spcPct val="105000"/>
-              </a:lnSpc>
-              <a:spcAft>
-                <a:spcPts val="200"/>
-              </a:spcAft>
-            </a:pPr>
-            <a:r>
-              <a:rPr sz="950">
-                <a:solidFill>
-                  <a:srgbClr val="222A33"/>
-                </a:solidFill>
-                <a:latin typeface="Calibri"/>
-              </a:rPr>
-              <a:t>•  AI skill-gap engine + verified marketplace + curriculum feedback loop</a:t>
-            </a:r>
-          </a:p>
-          <a:p>
-            <a:pPr>
-              <a:lnSpc>
-                <a:spcPct val="105000"/>
-              </a:lnSpc>
-              <a:spcAft>
-                <a:spcPts val="200"/>
-              </a:spcAft>
-            </a:pPr>
-            <a:r>
-              <a:rPr sz="950">
-                <a:solidFill>
-                  <a:srgbClr val="222A33"/>
-                </a:solidFill>
-                <a:latin typeface="Calibri"/>
-              </a:rPr>
-              <a:t>•  Purpose-built for the Ayush sector; first unified system of its kind</a:t>
-            </a:r>
-          </a:p>
-        </p:txBody>
-      </p:sp>
-      <p:sp>
-        <p:nvSpPr>
-          <p:cNvPr id="15375" name="TextBox 15374"/>
-          <p:cNvSpPr txBox="1"/>
-          <p:nvPr/>
-        </p:nvSpPr>
-        <p:spPr>
-          <a:xfrm>
-            <a:off x="411480" y="4407408"/>
-            <a:ext cx="5486400" cy="274320"/>
-          </a:xfrm>
-          <a:prstGeom prst="rect">
-            <a:avLst/>
-          </a:prstGeom>
-          <a:noFill/>
-        </p:spPr>
-        <p:txBody>
-          <a:bodyPr wrap="square" lIns="0" tIns="0" rIns="0" bIns="0" anchor="t">
-            <a:spAutoFit/>
-          </a:bodyPr>
-          <a:lstStyle/>
-          <a:p>
-            <a:pPr algn="l">
-              <a:lnSpc>
-                <a:spcPct val="100000"/>
-              </a:lnSpc>
-            </a:pPr>
-            <a:r>
-              <a:rPr sz="1300" b="1" i="0">
-                <a:solidFill>
-                  <a:srgbClr val="1F3864"/>
-                </a:solidFill>
-                <a:latin typeface="Calibri"/>
-              </a:rPr>
-              <a:t>Core Platform Modules</a:t>
-            </a:r>
-          </a:p>
-        </p:txBody>
-      </p:sp>
-      <p:sp>
-        <p:nvSpPr>
-          <p:cNvPr id="15376" name="Rounded Rectangle 15375"/>
-          <p:cNvSpPr/>
-          <p:nvPr/>
-        </p:nvSpPr>
-        <p:spPr>
-          <a:xfrm>
-            <a:off x="411480" y="4709160"/>
-            <a:ext cx="3703320" cy="749808"/>
-          </a:xfrm>
-          <a:prstGeom prst="roundRect">
-            <a:avLst>
-              <a:gd name="adj" fmla="val 6000"/>
-            </a:avLst>
-          </a:prstGeom>
-          <a:solidFill>
-            <a:srgbClr val="F1F5FA"/>
-          </a:solidFill>
-          <a:ln>
-            <a:noFill/>
-          </a:ln>
-          <a:effectLst/>
-        </p:spPr>
-        <p:style>
-          <a:lnRef idx="1">
-            <a:schemeClr val="accent1"/>
-          </a:lnRef>
-          <a:fillRef idx="3">
-            <a:schemeClr val="accent1"/>
-          </a:fillRef>
-          <a:effectRef idx="2">
-            <a:schemeClr val="accent1"/>
-          </a:effectRef>
-          <a:fontRef idx="minor">
-            <a:schemeClr val="lt1"/>
-          </a:fontRef>
-        </p:style>
-        <p:txBody>
-          <a:bodyPr rtlCol="0" anchor="ctr"/>
-          <a:lstStyle/>
-          <a:p>
-            <a:pPr algn="ctr"/>
-            <a:endParaRPr/>
-          </a:p>
-        </p:txBody>
-      </p:sp>
-      <p:sp>
-        <p:nvSpPr>
-          <p:cNvPr id="15377" name="Rectangle 15376"/>
-          <p:cNvSpPr/>
-          <p:nvPr/>
-        </p:nvSpPr>
-        <p:spPr>
-          <a:xfrm>
-            <a:off x="539496" y="4837176"/>
-            <a:ext cx="91440" cy="493775"/>
-          </a:xfrm>
-          <a:prstGeom prst="rect">
-            <a:avLst/>
-          </a:prstGeom>
-          <a:solidFill>
-            <a:srgbClr val="F28C28"/>
-          </a:solidFill>
-          <a:ln>
-            <a:noFill/>
-          </a:ln>
-          <a:effectLst/>
-        </p:spPr>
-        <p:style>
-          <a:lnRef idx="1">
-            <a:schemeClr val="accent1"/>
-          </a:lnRef>
-          <a:fillRef idx="3">
-            <a:schemeClr val="accent1"/>
-          </a:fillRef>
-          <a:effectRef idx="2">
-            <a:schemeClr val="accent1"/>
-          </a:effectRef>
-          <a:fontRef idx="minor">
-            <a:schemeClr val="lt1"/>
-          </a:fontRef>
-        </p:style>
-        <p:txBody>
-          <a:bodyPr rtlCol="0" anchor="ctr"/>
-          <a:lstStyle/>
-          <a:p>
-            <a:pPr algn="ctr"/>
-            <a:endParaRPr/>
-          </a:p>
-        </p:txBody>
-      </p:sp>
-      <p:sp>
-        <p:nvSpPr>
-          <p:cNvPr id="15378" name="TextBox 15377"/>
-          <p:cNvSpPr txBox="1"/>
-          <p:nvPr/>
-        </p:nvSpPr>
-        <p:spPr>
-          <a:xfrm>
-            <a:off x="731520" y="4782312"/>
-            <a:ext cx="3246120" cy="256032"/>
-          </a:xfrm>
-          <a:prstGeom prst="rect">
-            <a:avLst/>
-          </a:prstGeom>
-          <a:noFill/>
-        </p:spPr>
-        <p:txBody>
-          <a:bodyPr wrap="square" lIns="0" tIns="0" rIns="0" bIns="0" anchor="t">
-            <a:spAutoFit/>
-          </a:bodyPr>
-          <a:lstStyle/>
-          <a:p>
-            <a:pPr algn="l">
-              <a:lnSpc>
-                <a:spcPct val="100000"/>
-              </a:lnSpc>
-            </a:pPr>
-            <a:r>
-              <a:rPr sz="950" b="1" i="0">
-                <a:solidFill>
-                  <a:srgbClr val="1F3864"/>
-                </a:solidFill>
-                <a:latin typeface="Calibri"/>
-              </a:rPr>
-              <a:t>Student Skill Profiler</a:t>
-            </a:r>
-          </a:p>
-        </p:txBody>
-      </p:sp>
-      <p:sp>
-        <p:nvSpPr>
-          <p:cNvPr id="15379" name="TextBox 15378"/>
-          <p:cNvSpPr txBox="1"/>
-          <p:nvPr/>
-        </p:nvSpPr>
-        <p:spPr>
-          <a:xfrm>
-            <a:off x="731520" y="5038344"/>
-            <a:ext cx="3246120" cy="384047"/>
-          </a:xfrm>
-          <a:prstGeom prst="rect">
-            <a:avLst/>
-          </a:prstGeom>
-          <a:noFill/>
-        </p:spPr>
-        <p:txBody>
-          <a:bodyPr wrap="square" lIns="0" tIns="0" rIns="0" bIns="0" anchor="t">
-            <a:spAutoFit/>
-          </a:bodyPr>
-          <a:lstStyle/>
-          <a:p>
-            <a:pPr algn="l">
-              <a:lnSpc>
-                <a:spcPct val="100000"/>
-              </a:lnSpc>
-            </a:pPr>
-            <a:r>
-              <a:rPr sz="800" b="0" i="0">
-                <a:solidFill>
-                  <a:srgbClr val="222A33"/>
-                </a:solidFill>
-                <a:latin typeface="Calibri"/>
-              </a:rPr>
-              <a:t>Captures certifications, projects &amp; self-assessed skills into a structured graph</a:t>
-            </a:r>
-          </a:p>
-        </p:txBody>
-      </p:sp>
-      <p:sp>
-        <p:nvSpPr>
-          <p:cNvPr id="15380" name="Rounded Rectangle 15379"/>
-          <p:cNvSpPr/>
-          <p:nvPr/>
-        </p:nvSpPr>
-        <p:spPr>
-          <a:xfrm>
-            <a:off x="4206240" y="4709160"/>
-            <a:ext cx="3703320" cy="749808"/>
-          </a:xfrm>
-          <a:prstGeom prst="roundRect">
-            <a:avLst>
-              <a:gd name="adj" fmla="val 6000"/>
-            </a:avLst>
-          </a:prstGeom>
-          <a:solidFill>
-            <a:srgbClr val="F1F5FA"/>
-          </a:solidFill>
-          <a:ln>
-            <a:noFill/>
-          </a:ln>
-          <a:effectLst/>
-        </p:spPr>
-        <p:style>
-          <a:lnRef idx="1">
-            <a:schemeClr val="accent1"/>
-          </a:lnRef>
-          <a:fillRef idx="3">
-            <a:schemeClr val="accent1"/>
-          </a:fillRef>
-          <a:effectRef idx="2">
-            <a:schemeClr val="accent1"/>
-          </a:effectRef>
-          <a:fontRef idx="minor">
-            <a:schemeClr val="lt1"/>
-          </a:fontRef>
-        </p:style>
-        <p:txBody>
-          <a:bodyPr rtlCol="0" anchor="ctr"/>
-          <a:lstStyle/>
-          <a:p>
-            <a:pPr algn="ctr"/>
-            <a:endParaRPr/>
-          </a:p>
-        </p:txBody>
-      </p:sp>
-      <p:sp>
-        <p:nvSpPr>
-          <p:cNvPr id="15381" name="Rectangle 15380"/>
-          <p:cNvSpPr/>
-          <p:nvPr/>
-        </p:nvSpPr>
-        <p:spPr>
-          <a:xfrm>
-            <a:off x="4334255" y="4837176"/>
-            <a:ext cx="91440" cy="493775"/>
-          </a:xfrm>
-          <a:prstGeom prst="rect">
             <a:avLst/>
           </a:prstGeom>
           <a:solidFill>
@@ -7036,24 +6284,32 @@
           </a:fontRef>
         </p:style>
         <p:txBody>
-          <a:bodyPr rtlCol="0" anchor="ctr"/>
+          <a:bodyPr wrap="square" lIns="25400" rIns="25400" rtlCol="0" anchor="ctr"/>
           <a:lstStyle/>
           <a:p>
             <a:pPr algn="ctr"/>
-            <a:endParaRPr/>
-          </a:p>
-        </p:txBody>
-      </p:sp>
-      <p:sp>
-        <p:nvSpPr>
-          <p:cNvPr id="15382" name="TextBox 15381"/>
+            <a:r>
+              <a:rPr sz="1000" b="1">
+                <a:solidFill>
+                  <a:srgbClr val="FFFFFF"/>
+                </a:solidFill>
+                <a:latin typeface="Calibri"/>
+              </a:rPr>
+              <a:t>Comms Team</a:t>
+            </a:r>
+          </a:p>
+        </p:txBody>
+      </p:sp>
+      <p:sp>
+        <p:nvSpPr>
+          <p:cNvPr id="15366" name="TextBox 15365"/>
           <p:cNvSpPr txBox="1"/>
           <p:nvPr/>
         </p:nvSpPr>
         <p:spPr>
           <a:xfrm>
-            <a:off x="4526279" y="4782312"/>
-            <a:ext cx="3246120" cy="256032"/>
+            <a:off x="4884420" y="5923280"/>
+            <a:ext cx="1188720" cy="274320"/>
           </a:xfrm>
           <a:prstGeom prst="rect">
             <a:avLst/>
@@ -7061,85 +6317,32 @@
           <a:noFill/>
         </p:spPr>
         <p:txBody>
-          <a:bodyPr wrap="square" lIns="0" tIns="0" rIns="0" bIns="0" anchor="t">
+          <a:bodyPr wrap="square" lIns="0" tIns="0" rIns="0" bIns="0" anchor="ctr">
             <a:spAutoFit/>
           </a:bodyPr>
           <a:lstStyle/>
           <a:p>
-            <a:pPr algn="l">
-              <a:lnSpc>
-                <a:spcPct val="100000"/>
-              </a:lnSpc>
-            </a:pPr>
-            <a:r>
-              <a:rPr sz="950" b="1" i="0">
-                <a:solidFill>
-                  <a:srgbClr val="1F3864"/>
-                </a:solidFill>
-                <a:latin typeface="Calibri"/>
-              </a:rPr>
-              <a:t>AI Skill-Gap Engine</a:t>
-            </a:r>
-          </a:p>
-        </p:txBody>
-      </p:sp>
-      <p:sp>
-        <p:nvSpPr>
-          <p:cNvPr id="15383" name="TextBox 15382"/>
-          <p:cNvSpPr txBox="1"/>
+            <a:pPr algn="ctr"/>
+            <a:endParaRPr/>
+          </a:p>
+        </p:txBody>
+      </p:sp>
+      <p:sp>
+        <p:nvSpPr>
+          <p:cNvPr id="15367" name="Oval 15366"/>
+          <p:cNvSpPr/>
           <p:nvPr/>
         </p:nvSpPr>
         <p:spPr>
           <a:xfrm>
-            <a:off x="4526279" y="5038344"/>
-            <a:ext cx="3246120" cy="384047"/>
-          </a:xfrm>
-          <a:prstGeom prst="rect">
+            <a:off x="6347460" y="5166360"/>
+            <a:ext cx="731520" cy="731520"/>
+          </a:xfrm>
+          <a:prstGeom prst="ellipse">
             <a:avLst/>
           </a:prstGeom>
-          <a:noFill/>
-        </p:spPr>
-        <p:txBody>
-          <a:bodyPr wrap="square" lIns="0" tIns="0" rIns="0" bIns="0" anchor="t">
-            <a:spAutoFit/>
-          </a:bodyPr>
-          <a:lstStyle/>
-          <a:p>
-            <a:pPr algn="l">
-              <a:lnSpc>
-                <a:spcPct val="100000"/>
-              </a:lnSpc>
-            </a:pPr>
-            <a:r>
-              <a:rPr sz="800" b="0" i="0">
-                <a:solidFill>
-                  <a:srgbClr val="222A33"/>
-                </a:solidFill>
-                <a:latin typeface="Calibri"/>
-              </a:rPr>
-              <a:t>NLP resume/JD parsing with Sentence-BERT embedding similarity</a:t>
-            </a:r>
-          </a:p>
-        </p:txBody>
-      </p:sp>
-      <p:sp>
-        <p:nvSpPr>
-          <p:cNvPr id="15384" name="Rounded Rectangle 15383"/>
-          <p:cNvSpPr/>
-          <p:nvPr/>
-        </p:nvSpPr>
-        <p:spPr>
-          <a:xfrm>
-            <a:off x="8000999" y="4709160"/>
-            <a:ext cx="3703320" cy="749808"/>
-          </a:xfrm>
-          <a:prstGeom prst="roundRect">
-            <a:avLst>
-              <a:gd name="adj" fmla="val 6000"/>
-            </a:avLst>
-          </a:prstGeom>
           <a:solidFill>
-            <a:srgbClr val="F1F5FA"/>
+            <a:srgbClr val="E88A2E"/>
           </a:solidFill>
           <a:ln>
             <a:noFill/>
@@ -7161,69 +6364,33 @@
           </a:fontRef>
         </p:style>
         <p:txBody>
-          <a:bodyPr rtlCol="0" anchor="ctr"/>
+          <a:bodyPr wrap="square" lIns="25400" rIns="25400" rtlCol="0" anchor="ctr"/>
           <a:lstStyle/>
           <a:p>
             <a:pPr algn="ctr"/>
-            <a:endParaRPr/>
-          </a:p>
-        </p:txBody>
-      </p:sp>
-      <p:sp>
-        <p:nvSpPr>
-          <p:cNvPr id="15385" name="Rectangle 15384"/>
-          <p:cNvSpPr/>
-          <p:nvPr/>
-        </p:nvSpPr>
-        <p:spPr>
-          <a:xfrm>
-            <a:off x="8129015" y="4837176"/>
-            <a:ext cx="91440" cy="493775"/>
-          </a:xfrm>
-          <a:prstGeom prst="rect">
-            <a:avLst/>
-          </a:prstGeom>
-          <a:solidFill>
-            <a:srgbClr val="2E8B57"/>
-          </a:solidFill>
-          <a:ln>
-            <a:noFill/>
-          </a:ln>
-          <a:effectLst/>
-        </p:spPr>
-        <p:style>
-          <a:lnRef idx="1">
-            <a:schemeClr val="accent1"/>
-          </a:lnRef>
-          <a:fillRef idx="3">
-            <a:schemeClr val="accent1"/>
-          </a:fillRef>
-          <a:effectRef idx="2">
-            <a:schemeClr val="accent1"/>
-          </a:effectRef>
-          <a:fontRef idx="minor">
-            <a:schemeClr val="lt1"/>
-          </a:fontRef>
-        </p:style>
-        <p:txBody>
-          <a:bodyPr rtlCol="0" anchor="ctr"/>
-          <a:lstStyle/>
-          <a:p>
-            <a:pPr algn="ctr"/>
-            <a:endParaRPr/>
-          </a:p>
-        </p:txBody>
-      </p:sp>
-      <p:sp>
-        <p:nvSpPr>
-          <p:cNvPr id="15386" name="TextBox 15385"/>
+            <a:r>
+              <a:rPr sz="1000" b="1">
+                <a:solidFill>
+                  <a:srgbClr val="FFFFFF"/>
+                </a:solidFill>
+                <a:latin typeface="Calibri"/>
+              </a:rPr>
+              <a:t>ContentForge
+AI</a:t>
+            </a:r>
+          </a:p>
+        </p:txBody>
+      </p:sp>
+      <p:sp>
+        <p:nvSpPr>
+          <p:cNvPr id="15368" name="TextBox 15367"/>
           <p:cNvSpPr txBox="1"/>
           <p:nvPr/>
         </p:nvSpPr>
         <p:spPr>
           <a:xfrm>
-            <a:off x="8321039" y="4782312"/>
-            <a:ext cx="3246120" cy="256032"/>
+            <a:off x="6118860" y="5923280"/>
+            <a:ext cx="1188720" cy="274320"/>
           </a:xfrm>
           <a:prstGeom prst="rect">
             <a:avLst/>
@@ -7231,296 +6398,28 @@
           <a:noFill/>
         </p:spPr>
         <p:txBody>
-          <a:bodyPr wrap="square" lIns="0" tIns="0" rIns="0" bIns="0" anchor="t">
+          <a:bodyPr wrap="square" lIns="0" tIns="0" rIns="0" bIns="0" anchor="ctr">
             <a:spAutoFit/>
           </a:bodyPr>
           <a:lstStyle/>
           <a:p>
-            <a:pPr algn="l">
-              <a:lnSpc>
-                <a:spcPct val="100000"/>
-              </a:lnSpc>
-            </a:pPr>
-            <a:r>
-              <a:rPr sz="950" b="1" i="0">
-                <a:solidFill>
-                  <a:srgbClr val="1F3864"/>
-                </a:solidFill>
-                <a:latin typeface="Calibri"/>
-              </a:rPr>
-              <a:t>Internship Marketplace</a:t>
-            </a:r>
-          </a:p>
-        </p:txBody>
-      </p:sp>
-      <p:sp>
-        <p:nvSpPr>
-          <p:cNvPr id="15387" name="TextBox 15386"/>
-          <p:cNvSpPr txBox="1"/>
-          <p:nvPr/>
-        </p:nvSpPr>
-        <p:spPr>
-          <a:xfrm>
-            <a:off x="8321039" y="5038344"/>
-            <a:ext cx="3246120" cy="384047"/>
-          </a:xfrm>
-          <a:prstGeom prst="rect">
-            <a:avLst/>
-          </a:prstGeom>
-          <a:noFill/>
-        </p:spPr>
-        <p:txBody>
-          <a:bodyPr wrap="square" lIns="0" tIns="0" rIns="0" bIns="0" anchor="t">
-            <a:spAutoFit/>
-          </a:bodyPr>
-          <a:lstStyle/>
-          <a:p>
-            <a:pPr algn="l">
-              <a:lnSpc>
-                <a:spcPct val="100000"/>
-              </a:lnSpc>
-            </a:pPr>
-            <a:r>
-              <a:rPr sz="800" b="0" i="0">
-                <a:solidFill>
-                  <a:srgbClr val="222A33"/>
-                </a:solidFill>
-                <a:latin typeface="Calibri"/>
-              </a:rPr>
-              <a:t>Verified postings from Ayush hospitals, wellness centres &amp; pharma</a:t>
-            </a:r>
-          </a:p>
-        </p:txBody>
-      </p:sp>
-      <p:sp>
-        <p:nvSpPr>
-          <p:cNvPr id="15388" name="Rounded Rectangle 15387"/>
+            <a:pPr algn="ctr"/>
+            <a:endParaRPr/>
+          </a:p>
+        </p:txBody>
+      </p:sp>
+      <p:sp>
+        <p:nvSpPr>
+          <p:cNvPr id="15369" name="Oval 15368"/>
           <p:cNvSpPr/>
           <p:nvPr/>
         </p:nvSpPr>
         <p:spPr>
           <a:xfrm>
-            <a:off x="411480" y="5568696"/>
-            <a:ext cx="3703320" cy="749808"/>
-          </a:xfrm>
-          <a:prstGeom prst="roundRect">
-            <a:avLst>
-              <a:gd name="adj" fmla="val 6000"/>
-            </a:avLst>
-          </a:prstGeom>
-          <a:solidFill>
-            <a:srgbClr val="F1F5FA"/>
-          </a:solidFill>
-          <a:ln>
-            <a:noFill/>
-          </a:ln>
-          <a:effectLst/>
-        </p:spPr>
-        <p:style>
-          <a:lnRef idx="1">
-            <a:schemeClr val="accent1"/>
-          </a:lnRef>
-          <a:fillRef idx="3">
-            <a:schemeClr val="accent1"/>
-          </a:fillRef>
-          <a:effectRef idx="2">
-            <a:schemeClr val="accent1"/>
-          </a:effectRef>
-          <a:fontRef idx="minor">
-            <a:schemeClr val="lt1"/>
-          </a:fontRef>
-        </p:style>
-        <p:txBody>
-          <a:bodyPr rtlCol="0" anchor="ctr"/>
-          <a:lstStyle/>
-          <a:p>
-            <a:pPr algn="ctr"/>
-            <a:endParaRPr/>
-          </a:p>
-        </p:txBody>
-      </p:sp>
-      <p:sp>
-        <p:nvSpPr>
-          <p:cNvPr id="15389" name="Rectangle 15388"/>
-          <p:cNvSpPr/>
-          <p:nvPr/>
-        </p:nvSpPr>
-        <p:spPr>
-          <a:xfrm>
-            <a:off x="539496" y="5696712"/>
-            <a:ext cx="91440" cy="493775"/>
-          </a:xfrm>
-          <a:prstGeom prst="rect">
-            <a:avLst/>
-          </a:prstGeom>
-          <a:solidFill>
-            <a:srgbClr val="F28C28"/>
-          </a:solidFill>
-          <a:ln>
-            <a:noFill/>
-          </a:ln>
-          <a:effectLst/>
-        </p:spPr>
-        <p:style>
-          <a:lnRef idx="1">
-            <a:schemeClr val="accent1"/>
-          </a:lnRef>
-          <a:fillRef idx="3">
-            <a:schemeClr val="accent1"/>
-          </a:fillRef>
-          <a:effectRef idx="2">
-            <a:schemeClr val="accent1"/>
-          </a:effectRef>
-          <a:fontRef idx="minor">
-            <a:schemeClr val="lt1"/>
-          </a:fontRef>
-        </p:style>
-        <p:txBody>
-          <a:bodyPr rtlCol="0" anchor="ctr"/>
-          <a:lstStyle/>
-          <a:p>
-            <a:pPr algn="ctr"/>
-            <a:endParaRPr/>
-          </a:p>
-        </p:txBody>
-      </p:sp>
-      <p:sp>
-        <p:nvSpPr>
-          <p:cNvPr id="15390" name="TextBox 15389"/>
-          <p:cNvSpPr txBox="1"/>
-          <p:nvPr/>
-        </p:nvSpPr>
-        <p:spPr>
-          <a:xfrm>
-            <a:off x="731520" y="5641848"/>
-            <a:ext cx="3246120" cy="256032"/>
-          </a:xfrm>
-          <a:prstGeom prst="rect">
-            <a:avLst/>
-          </a:prstGeom>
-          <a:noFill/>
-        </p:spPr>
-        <p:txBody>
-          <a:bodyPr wrap="square" lIns="0" tIns="0" rIns="0" bIns="0" anchor="t">
-            <a:spAutoFit/>
-          </a:bodyPr>
-          <a:lstStyle/>
-          <a:p>
-            <a:pPr algn="l">
-              <a:lnSpc>
-                <a:spcPct val="100000"/>
-              </a:lnSpc>
-            </a:pPr>
-            <a:r>
-              <a:rPr sz="950" b="1" i="0">
-                <a:solidFill>
-                  <a:srgbClr val="1F3864"/>
-                </a:solidFill>
-                <a:latin typeface="Calibri"/>
-              </a:rPr>
-              <a:t>Employer Dashboard</a:t>
-            </a:r>
-          </a:p>
-        </p:txBody>
-      </p:sp>
-      <p:sp>
-        <p:nvSpPr>
-          <p:cNvPr id="15391" name="TextBox 15390"/>
-          <p:cNvSpPr txBox="1"/>
-          <p:nvPr/>
-        </p:nvSpPr>
-        <p:spPr>
-          <a:xfrm>
-            <a:off x="731520" y="5897880"/>
-            <a:ext cx="3246120" cy="384047"/>
-          </a:xfrm>
-          <a:prstGeom prst="rect">
-            <a:avLst/>
-          </a:prstGeom>
-          <a:noFill/>
-        </p:spPr>
-        <p:txBody>
-          <a:bodyPr wrap="square" lIns="0" tIns="0" rIns="0" bIns="0" anchor="t">
-            <a:spAutoFit/>
-          </a:bodyPr>
-          <a:lstStyle/>
-          <a:p>
-            <a:pPr algn="l">
-              <a:lnSpc>
-                <a:spcPct val="100000"/>
-              </a:lnSpc>
-            </a:pPr>
-            <a:r>
-              <a:rPr sz="800" b="0" i="0">
-                <a:solidFill>
-                  <a:srgbClr val="222A33"/>
-                </a:solidFill>
-                <a:latin typeface="Calibri"/>
-              </a:rPr>
-              <a:t>Shortlists candidates ranked by matched-competency score</a:t>
-            </a:r>
-          </a:p>
-        </p:txBody>
-      </p:sp>
-      <p:sp>
-        <p:nvSpPr>
-          <p:cNvPr id="15392" name="Rounded Rectangle 15391"/>
-          <p:cNvSpPr/>
-          <p:nvPr/>
-        </p:nvSpPr>
-        <p:spPr>
-          <a:xfrm>
-            <a:off x="4206240" y="5568696"/>
-            <a:ext cx="3703320" cy="749808"/>
-          </a:xfrm>
-          <a:prstGeom prst="roundRect">
-            <a:avLst>
-              <a:gd name="adj" fmla="val 6000"/>
-            </a:avLst>
-          </a:prstGeom>
-          <a:solidFill>
-            <a:srgbClr val="F1F5FA"/>
-          </a:solidFill>
-          <a:ln>
-            <a:noFill/>
-          </a:ln>
-          <a:effectLst/>
-        </p:spPr>
-        <p:style>
-          <a:lnRef idx="1">
-            <a:schemeClr val="accent1"/>
-          </a:lnRef>
-          <a:fillRef idx="3">
-            <a:schemeClr val="accent1"/>
-          </a:fillRef>
-          <a:effectRef idx="2">
-            <a:schemeClr val="accent1"/>
-          </a:effectRef>
-          <a:fontRef idx="minor">
-            <a:schemeClr val="lt1"/>
-          </a:fontRef>
-        </p:style>
-        <p:txBody>
-          <a:bodyPr rtlCol="0" anchor="ctr"/>
-          <a:lstStyle/>
-          <a:p>
-            <a:pPr algn="ctr"/>
-            <a:endParaRPr/>
-          </a:p>
-        </p:txBody>
-      </p:sp>
-      <p:sp>
-        <p:nvSpPr>
-          <p:cNvPr id="15393" name="Rectangle 15392"/>
-          <p:cNvSpPr/>
-          <p:nvPr/>
-        </p:nvSpPr>
-        <p:spPr>
-          <a:xfrm>
-            <a:off x="4334255" y="5696712"/>
-            <a:ext cx="91440" cy="493775"/>
-          </a:xfrm>
-          <a:prstGeom prst="rect">
+            <a:off x="7581900" y="5166360"/>
+            <a:ext cx="731520" cy="731520"/>
+          </a:xfrm>
+          <a:prstGeom prst="ellipse">
             <a:avLst/>
           </a:prstGeom>
           <a:solidFill>
@@ -7546,24 +6445,32 @@
           </a:fontRef>
         </p:style>
         <p:txBody>
-          <a:bodyPr rtlCol="0" anchor="ctr"/>
+          <a:bodyPr wrap="square" lIns="25400" rIns="25400" rtlCol="0" anchor="ctr"/>
           <a:lstStyle/>
           <a:p>
             <a:pPr algn="ctr"/>
-            <a:endParaRPr/>
-          </a:p>
-        </p:txBody>
-      </p:sp>
-      <p:sp>
-        <p:nvSpPr>
-          <p:cNvPr id="15394" name="TextBox 15393"/>
+            <a:r>
+              <a:rPr sz="1000" b="1">
+                <a:solidFill>
+                  <a:srgbClr val="FFFFFF"/>
+                </a:solidFill>
+                <a:latin typeface="Calibri"/>
+              </a:rPr>
+              <a:t>Leaders</a:t>
+            </a:r>
+          </a:p>
+        </p:txBody>
+      </p:sp>
+      <p:sp>
+        <p:nvSpPr>
+          <p:cNvPr id="15370" name="TextBox 15369"/>
           <p:cNvSpPr txBox="1"/>
           <p:nvPr/>
         </p:nvSpPr>
         <p:spPr>
           <a:xfrm>
-            <a:off x="4526279" y="5641848"/>
-            <a:ext cx="3246120" cy="256032"/>
+            <a:off x="7353300" y="5923280"/>
+            <a:ext cx="1188720" cy="274320"/>
           </a:xfrm>
           <a:prstGeom prst="rect">
             <a:avLst/>
@@ -7571,85 +6478,32 @@
           <a:noFill/>
         </p:spPr>
         <p:txBody>
-          <a:bodyPr wrap="square" lIns="0" tIns="0" rIns="0" bIns="0" anchor="t">
+          <a:bodyPr wrap="square" lIns="0" tIns="0" rIns="0" bIns="0" anchor="ctr">
             <a:spAutoFit/>
           </a:bodyPr>
           <a:lstStyle/>
           <a:p>
-            <a:pPr algn="l">
-              <a:lnSpc>
-                <a:spcPct val="100000"/>
-              </a:lnSpc>
-            </a:pPr>
-            <a:r>
-              <a:rPr sz="950" b="1" i="0">
-                <a:solidFill>
-                  <a:srgbClr val="1F3864"/>
-                </a:solidFill>
-                <a:latin typeface="Calibri"/>
-              </a:rPr>
-              <a:t>Institution Analytics</a:t>
-            </a:r>
-          </a:p>
-        </p:txBody>
-      </p:sp>
-      <p:sp>
-        <p:nvSpPr>
-          <p:cNvPr id="15395" name="TextBox 15394"/>
-          <p:cNvSpPr txBox="1"/>
+            <a:pPr algn="ctr"/>
+            <a:endParaRPr/>
+          </a:p>
+        </p:txBody>
+      </p:sp>
+      <p:sp>
+        <p:nvSpPr>
+          <p:cNvPr id="15371" name="Right Arrow 15370"/>
+          <p:cNvSpPr/>
           <p:nvPr/>
         </p:nvSpPr>
         <p:spPr>
           <a:xfrm>
-            <a:off x="4526279" y="5897880"/>
-            <a:ext cx="3246120" cy="384047"/>
-          </a:xfrm>
-          <a:prstGeom prst="rect">
+            <a:off x="4590100" y="5449824"/>
+            <a:ext cx="542920" cy="164592"/>
+          </a:xfrm>
+          <a:prstGeom prst="rightArrow">
             <a:avLst/>
           </a:prstGeom>
-          <a:noFill/>
-        </p:spPr>
-        <p:txBody>
-          <a:bodyPr wrap="square" lIns="0" tIns="0" rIns="0" bIns="0" anchor="t">
-            <a:spAutoFit/>
-          </a:bodyPr>
-          <a:lstStyle/>
-          <a:p>
-            <a:pPr algn="l">
-              <a:lnSpc>
-                <a:spcPct val="100000"/>
-              </a:lnSpc>
-            </a:pPr>
-            <a:r>
-              <a:rPr sz="800" b="0" i="0">
-                <a:solidFill>
-                  <a:srgbClr val="222A33"/>
-                </a:solidFill>
-                <a:latin typeface="Calibri"/>
-              </a:rPr>
-              <a:t>Curriculum-gap heatmaps &amp; real-time placement tracking</a:t>
-            </a:r>
-          </a:p>
-        </p:txBody>
-      </p:sp>
-      <p:sp>
-        <p:nvSpPr>
-          <p:cNvPr id="15396" name="Rounded Rectangle 15395"/>
-          <p:cNvSpPr/>
-          <p:nvPr/>
-        </p:nvSpPr>
-        <p:spPr>
-          <a:xfrm>
-            <a:off x="8000999" y="5568696"/>
-            <a:ext cx="3703320" cy="749808"/>
-          </a:xfrm>
-          <a:prstGeom prst="roundRect">
-            <a:avLst>
-              <a:gd name="adj" fmla="val 6000"/>
-            </a:avLst>
-          </a:prstGeom>
           <a:solidFill>
-            <a:srgbClr val="F1F5FA"/>
+            <a:srgbClr val="B8C4D6"/>
           </a:solidFill>
           <a:ln>
             <a:noFill/>
@@ -7681,20 +6535,20 @@
       </p:sp>
       <p:sp>
         <p:nvSpPr>
-          <p:cNvPr id="15397" name="Rectangle 15396"/>
+          <p:cNvPr id="15372" name="Right Arrow 15371"/>
           <p:cNvSpPr/>
           <p:nvPr/>
         </p:nvSpPr>
         <p:spPr>
           <a:xfrm>
-            <a:off x="8129015" y="5696712"/>
-            <a:ext cx="91440" cy="493775"/>
-          </a:xfrm>
-          <a:prstGeom prst="rect">
+            <a:off x="5824540" y="5449824"/>
+            <a:ext cx="542920" cy="164592"/>
+          </a:xfrm>
+          <a:prstGeom prst="rightArrow">
             <a:avLst/>
           </a:prstGeom>
           <a:solidFill>
-            <a:srgbClr val="2E8B57"/>
+            <a:srgbClr val="B8C4D6"/>
           </a:solidFill>
           <a:ln>
             <a:noFill/>
@@ -7726,14 +6580,59 @@
       </p:sp>
       <p:sp>
         <p:nvSpPr>
-          <p:cNvPr id="15398" name="TextBox 15397"/>
+          <p:cNvPr id="15373" name="Right Arrow 15372"/>
+          <p:cNvSpPr/>
+          <p:nvPr/>
+        </p:nvSpPr>
+        <p:spPr>
+          <a:xfrm>
+            <a:off x="7058980" y="5449824"/>
+            <a:ext cx="542920" cy="164592"/>
+          </a:xfrm>
+          <a:prstGeom prst="rightArrow">
+            <a:avLst/>
+          </a:prstGeom>
+          <a:solidFill>
+            <a:srgbClr val="B8C4D6"/>
+          </a:solidFill>
+          <a:ln>
+            <a:noFill/>
+          </a:ln>
+          <a:effectLst/>
+        </p:spPr>
+        <p:style>
+          <a:lnRef idx="1">
+            <a:schemeClr val="accent1"/>
+          </a:lnRef>
+          <a:fillRef idx="3">
+            <a:schemeClr val="accent1"/>
+          </a:fillRef>
+          <a:effectRef idx="2">
+            <a:schemeClr val="accent1"/>
+          </a:effectRef>
+          <a:fontRef idx="minor">
+            <a:schemeClr val="lt1"/>
+          </a:fontRef>
+        </p:style>
+        <p:txBody>
+          <a:bodyPr rtlCol="0" anchor="ctr"/>
+          <a:lstStyle/>
+          <a:p>
+            <a:pPr algn="ctr"/>
+            <a:endParaRPr/>
+          </a:p>
+        </p:txBody>
+      </p:sp>
+      <p:sp>
+        <p:nvSpPr>
+          <p:cNvPr id="15374" name="TextBox 15373"/>
           <p:cNvSpPr txBox="1"/>
           <p:nvPr/>
         </p:nvSpPr>
         <p:spPr>
           <a:xfrm>
-            <a:off x="8321039" y="5641848"/>
-            <a:ext cx="3246120" cy="256032"/>
+            <a:off x="3878580" y="4800600"/>
+            <a:ext cx="4434840" cy="320040"/>
           </a:xfrm>
           <a:prstGeom prst="rect">
             <a:avLst/>
@@ -7741,63 +6640,20 @@
           <a:noFill/>
         </p:spPr>
         <p:txBody>
-          <a:bodyPr wrap="square" lIns="0" tIns="0" rIns="0" bIns="0" anchor="t">
+          <a:bodyPr wrap="square" lIns="0" tIns="0" rIns="0" bIns="0" anchor="ctr">
             <a:spAutoFit/>
           </a:bodyPr>
           <a:lstStyle/>
           <a:p>
-            <a:pPr algn="l">
-              <a:lnSpc>
-                <a:spcPct val="100000"/>
-              </a:lnSpc>
-            </a:pPr>
-            <a:r>
-              <a:rPr sz="950" b="1" i="0">
+            <a:pPr algn="ctr"/>
+            <a:r>
+              <a:rPr sz="1300" b="1">
                 <a:solidFill>
-                  <a:srgbClr val="1F3864"/>
+                  <a:srgbClr val="1E2A4A"/>
                 </a:solidFill>
                 <a:latin typeface="Calibri"/>
               </a:rPr>
-              <a:t>Admin / Ministry Console</a:t>
-            </a:r>
-          </a:p>
-        </p:txBody>
-      </p:sp>
-      <p:sp>
-        <p:nvSpPr>
-          <p:cNvPr id="15399" name="TextBox 15398"/>
-          <p:cNvSpPr txBox="1"/>
-          <p:nvPr/>
-        </p:nvSpPr>
-        <p:spPr>
-          <a:xfrm>
-            <a:off x="8321039" y="5897880"/>
-            <a:ext cx="3246120" cy="384047"/>
-          </a:xfrm>
-          <a:prstGeom prst="rect">
-            <a:avLst/>
-          </a:prstGeom>
-          <a:noFill/>
-        </p:spPr>
-        <p:txBody>
-          <a:bodyPr wrap="square" lIns="0" tIns="0" rIns="0" bIns="0" anchor="t">
-            <a:spAutoFit/>
-          </a:bodyPr>
-          <a:lstStyle/>
-          <a:p>
-            <a:pPr algn="l">
-              <a:lnSpc>
-                <a:spcPct val="100000"/>
-              </a:lnSpc>
-            </a:pPr>
-            <a:r>
-              <a:rPr sz="800" b="0" i="0">
-                <a:solidFill>
-                  <a:srgbClr val="222A33"/>
-                </a:solidFill>
-                <a:latin typeface="Calibri"/>
-              </a:rPr>
-              <a:t>National skill-mapping dataset, reports &amp; policy insights</a:t>
+              <a:t>One engine, every content format — instantly</a:t>
             </a:r>
           </a:p>
         </p:txBody>
@@ -7901,7 +6757,12 @@
             <p:ph type="title"/>
           </p:nvPr>
         </p:nvSpPr>
-        <p:spPr/>
+        <p:spPr>
+          <a:xfrm>
+            <a:off x="-67789" y="418338"/>
+            <a:ext cx="10972800" cy="1143000"/>
+          </a:xfrm>
+        </p:spPr>
         <p:txBody>
           <a:bodyPr/>
           <a:lstStyle/>
@@ -7914,6 +6775,89 @@
                 <a:cs typeface="Times New Roman" panose="02020603050405020304" pitchFamily="18" charset="0"/>
               </a:rPr>
               <a:t>TECHNICAL APPROACH</a:t>
+            </a:r>
+          </a:p>
+        </p:txBody>
+      </p:sp>
+      <p:sp>
+        <p:nvSpPr>
+          <p:cNvPr id="17410" name="TextBox 8"/>
+          <p:cNvSpPr txBox="1">
+            <a:spLocks noChangeArrowheads="1"/>
+          </p:cNvSpPr>
+          <p:nvPr/>
+        </p:nvSpPr>
+        <p:spPr bwMode="auto">
+          <a:xfrm>
+            <a:off x="609600" y="1728216"/>
+            <a:ext cx="9385300" cy="3200400"/>
+          </a:xfrm>
+          <a:prstGeom prst="rect">
+            <a:avLst/>
+          </a:prstGeom>
+          <a:noFill/>
+          <a:ln w="9525">
+            <a:noFill/>
+            <a:miter lim="800000"/>
+            <a:headEnd/>
+            <a:tailEnd/>
+          </a:ln>
+        </p:spPr>
+        <p:txBody>
+          <a:bodyPr wrap="square">
+            <a:spAutoFit/>
+          </a:bodyPr>
+          <a:lstStyle/>
+          <a:p>
+            <a:pPr marL="342900" indent="-342900" algn="just">
+              <a:buFont typeface="Arial" panose="020B0604020202020204" pitchFamily="34" charset="0"/>
+              <a:buChar char="•"/>
+            </a:pPr>
+            <a:r>
+              <a:rPr lang="en-US" sz="1400" dirty="0">
+                <a:latin typeface="Arial" pitchFamily="34" charset="0"/>
+                <a:cs typeface="Arial" pitchFamily="34" charset="0"/>
+              </a:rPr>
+              <a:t>Frontend: React.js  |  Backend: Node.js / FastAPI  |  Database: PostgreSQL + pgvector &amp; MongoDB  |  AI/ML: Multimodal LLM, LangChain, Whisper ASR, Tesseract OCR  |  Security: Blockchain provenance ledger + on-prem deployment</a:t>
+            </a:r>
+          </a:p>
+          <a:p>
+            <a:pPr marL="342900" indent="-342900" algn="just">
+              <a:buFont typeface="Arial" panose="020B0604020202020204" pitchFamily="34" charset="0"/>
+              <a:buChar char="•"/>
+            </a:pPr>
+            <a:r>
+              <a:rPr lang="en-US" sz="1400" dirty="0">
+                <a:latin typeface="Arial" pitchFamily="34" charset="0"/>
+                <a:cs typeface="Arial" pitchFamily="34" charset="0"/>
+              </a:rPr>
+              <a:t>Source ingestion → context extraction → format-specific generation → review &amp; export, running as parallel jobs (see flow below)</a:t>
+            </a:r>
+          </a:p>
+          <a:p>
+            <a:pPr marL="342900" indent="-342900" algn="just">
+              <a:buFont typeface="Arial" panose="020B0604020202020204" pitchFamily="34" charset="0"/>
+              <a:buChar char="•"/>
+            </a:pPr>
+            <a:r>
+              <a:rPr lang="en-US" sz="1400" dirty="0">
+                <a:latin typeface="Arial" pitchFamily="34" charset="0"/>
+                <a:cs typeface="Arial" pitchFamily="34" charset="0"/>
+              </a:rPr>
+              <a:t>Security &amp; Compliance: on-prem/air-gapped deployment for classified content  |  blockchain-anchored provenance &amp; audit trail  |  RBAC with OAuth 2.0, TLS 1.3 &amp; AES-256  |  DPDP Act 2023-compliant  |  periodic red-team review</a:t>
+            </a:r>
+          </a:p>
+          <a:p>
+            <a:pPr marL="342900" indent="-342900" algn="just">
+              <a:buFont typeface="Arial" panose="020B0604020202020204" pitchFamily="34" charset="0"/>
+              <a:buChar char="•"/>
+            </a:pPr>
+            <a:r>
+              <a:rPr lang="en-US" sz="1400" dirty="0">
+                <a:latin typeface="Arial" pitchFamily="34" charset="0"/>
+                <a:cs typeface="Arial" pitchFamily="34" charset="0"/>
+              </a:rPr>
+              <a:t>DevOps &amp; Scale: Docker + Kubernetes  |  CI/CD via GitHub Actions with blue-green deploys  |  GPU-backed auto-scaling inference cluster  |  Prometheus + Grafana monitoring  |  500+ concurrent transformation requests</a:t>
             </a:r>
           </a:p>
         </p:txBody>
@@ -8007,7 +6951,7 @@
         <p:spPr>
           <a:xfrm>
             <a:off x="329773" y="252246"/>
-            <a:ext cx="1646511" cy="807334"/>
+            <a:ext cx="1251857" cy="807334"/>
           </a:xfrm>
           <a:prstGeom prst="ellipse">
             <a:avLst/>
@@ -8033,10 +6977,7 @@
           <a:p>
             <a:pPr algn="ctr"/>
             <a:r>
-              <a:rPr lang="en-US" b="1" dirty="0">
-                <a:latin typeface="Arial" panose="020B0604020202020204" pitchFamily="34" charset="0"/>
-                <a:cs typeface="Arial" panose="020B0604020202020204" pitchFamily="34" charset="0"/>
-              </a:rPr>
+              <a:rPr lang="en-US" sz="1000" dirty="0"/>
               <a:t>Team Invictus</a:t>
             </a:r>
             <a:endParaRPr lang="en-IN" dirty="0"/>
@@ -8075,61 +7016,20 @@
       </p:pic>
       <p:sp>
         <p:nvSpPr>
-          <p:cNvPr id="17410" name="TextBox 17409"/>
-          <p:cNvSpPr txBox="1"/>
-          <p:nvPr/>
-        </p:nvSpPr>
-        <p:spPr>
-          <a:xfrm>
-            <a:off x="411480" y="1847088"/>
-            <a:ext cx="7315200" cy="274320"/>
-          </a:xfrm>
-          <a:prstGeom prst="rect">
-            <a:avLst/>
-          </a:prstGeom>
-          <a:noFill/>
-        </p:spPr>
-        <p:txBody>
-          <a:bodyPr wrap="square" lIns="0" tIns="0" rIns="0" bIns="0" anchor="t">
-            <a:spAutoFit/>
-          </a:bodyPr>
-          <a:lstStyle/>
-          <a:p>
-            <a:pPr algn="l">
-              <a:lnSpc>
-                <a:spcPct val="100000"/>
-              </a:lnSpc>
-            </a:pPr>
-            <a:r>
-              <a:rPr sz="1300" b="1" i="0">
-                <a:solidFill>
-                  <a:srgbClr val="1F3864"/>
-                </a:solidFill>
-                <a:latin typeface="Calibri"/>
-              </a:rPr>
-              <a:t>System Architecture</a:t>
-            </a:r>
-          </a:p>
-        </p:txBody>
-      </p:sp>
-      <p:sp>
-        <p:nvSpPr>
           <p:cNvPr id="17411" name="Rounded Rectangle 17410"/>
           <p:cNvSpPr/>
           <p:nvPr/>
         </p:nvSpPr>
         <p:spPr>
           <a:xfrm>
-            <a:off x="411480" y="2148840"/>
-            <a:ext cx="2084831" cy="1051560"/>
+            <a:off x="815340" y="4526280"/>
+            <a:ext cx="1783080" cy="868680"/>
           </a:xfrm>
           <a:prstGeom prst="roundRect">
-            <a:avLst>
-              <a:gd name="adj" fmla="val 6000"/>
-            </a:avLst>
+            <a:avLst/>
           </a:prstGeom>
           <a:solidFill>
-            <a:srgbClr val="F1F5FA"/>
+            <a:srgbClr val="0070C0"/>
           </a:solidFill>
           <a:ln>
             <a:noFill/>
@@ -8151,60 +7051,526 @@
           </a:fontRef>
         </p:style>
         <p:txBody>
-          <a:bodyPr wrap="square" tIns="25400" bIns="25400" rtlCol="0" anchor="ctr"/>
+          <a:bodyPr wrap="square" lIns="50800" tIns="25400" rIns="50800" bIns="25400" rtlCol="0" anchor="ctr"/>
           <a:lstStyle/>
           <a:p>
             <a:pPr algn="ctr"/>
             <a:r>
-              <a:rPr sz="1050" b="1">
+              <a:rPr sz="1150" b="1">
                 <a:solidFill>
-                  <a:srgbClr val="1F3864"/>
+                  <a:srgbClr val="FFFFFF"/>
                 </a:solidFill>
+                <a:latin typeface="Calibri"/>
               </a:rPr>
-              <a:t>Client Layer</a:t>
-            </a:r>
-          </a:p>
+              <a:t>Content
+Ingestion</a:t>
+            </a:r>
+          </a:p>
+        </p:txBody>
+      </p:sp>
+      <p:sp>
+        <p:nvSpPr>
+          <p:cNvPr id="17412" name="Right Arrow 17411"/>
+          <p:cNvSpPr/>
+          <p:nvPr/>
+        </p:nvSpPr>
+        <p:spPr>
+          <a:xfrm>
+            <a:off x="2598420" y="4860036"/>
+            <a:ext cx="411480" cy="201168"/>
+          </a:xfrm>
+          <a:prstGeom prst="rightArrow">
+            <a:avLst/>
+          </a:prstGeom>
+          <a:solidFill>
+            <a:srgbClr val="1E2A4A"/>
+          </a:solidFill>
+          <a:ln>
+            <a:noFill/>
+          </a:ln>
+          <a:effectLst/>
+        </p:spPr>
+        <p:style>
+          <a:lnRef idx="1">
+            <a:schemeClr val="accent1"/>
+          </a:lnRef>
+          <a:fillRef idx="3">
+            <a:schemeClr val="accent1"/>
+          </a:fillRef>
+          <a:effectRef idx="2">
+            <a:schemeClr val="accent1"/>
+          </a:effectRef>
+          <a:fontRef idx="minor">
+            <a:schemeClr val="lt1"/>
+          </a:fontRef>
+        </p:style>
+        <p:txBody>
+          <a:bodyPr rtlCol="0" anchor="ctr"/>
+          <a:lstStyle/>
           <a:p>
             <a:pPr algn="ctr"/>
-            <a:r>
-              <a:rPr sz="800">
+            <a:endParaRPr/>
+          </a:p>
+        </p:txBody>
+      </p:sp>
+      <p:sp>
+        <p:nvSpPr>
+          <p:cNvPr id="17413" name="Rounded Rectangle 17412"/>
+          <p:cNvSpPr/>
+          <p:nvPr/>
+        </p:nvSpPr>
+        <p:spPr>
+          <a:xfrm>
+            <a:off x="3009900" y="4526280"/>
+            <a:ext cx="1783080" cy="868680"/>
+          </a:xfrm>
+          <a:prstGeom prst="roundRect">
+            <a:avLst/>
+          </a:prstGeom>
+          <a:solidFill>
+            <a:srgbClr val="E88A2E"/>
+          </a:solidFill>
+          <a:ln>
+            <a:noFill/>
+          </a:ln>
+          <a:effectLst/>
+        </p:spPr>
+        <p:style>
+          <a:lnRef idx="1">
+            <a:schemeClr val="accent1"/>
+          </a:lnRef>
+          <a:fillRef idx="3">
+            <a:schemeClr val="accent1"/>
+          </a:fillRef>
+          <a:effectRef idx="2">
+            <a:schemeClr val="accent1"/>
+          </a:effectRef>
+          <a:fontRef idx="minor">
+            <a:schemeClr val="lt1"/>
+          </a:fontRef>
+        </p:style>
+        <p:txBody>
+          <a:bodyPr wrap="square" lIns="50800" tIns="25400" rIns="50800" bIns="25400" rtlCol="0" anchor="ctr"/>
+          <a:lstStyle/>
+          <a:p>
+            <a:pPr algn="ctr"/>
+            <a:r>
+              <a:rPr sz="1150" b="1">
                 <a:solidFill>
-                  <a:srgbClr val="1F3864"/>
+                  <a:srgbClr val="FFFFFF"/>
                 </a:solidFill>
+                <a:latin typeface="Calibri"/>
               </a:rPr>
-              <a:t>React PWA</a:t>
-            </a:r>
-            <a:br/>
-            <a:r>
-              <a:rPr sz="800">
+              <a:t>Context &amp;
+Intent Extraction</a:t>
+            </a:r>
+          </a:p>
+        </p:txBody>
+      </p:sp>
+      <p:sp>
+        <p:nvSpPr>
+          <p:cNvPr id="17414" name="Right Arrow 17413"/>
+          <p:cNvSpPr/>
+          <p:nvPr/>
+        </p:nvSpPr>
+        <p:spPr>
+          <a:xfrm>
+            <a:off x="4792980" y="4860036"/>
+            <a:ext cx="411480" cy="201168"/>
+          </a:xfrm>
+          <a:prstGeom prst="rightArrow">
+            <a:avLst/>
+          </a:prstGeom>
+          <a:solidFill>
+            <a:srgbClr val="1E2A4A"/>
+          </a:solidFill>
+          <a:ln>
+            <a:noFill/>
+          </a:ln>
+          <a:effectLst/>
+        </p:spPr>
+        <p:style>
+          <a:lnRef idx="1">
+            <a:schemeClr val="accent1"/>
+          </a:lnRef>
+          <a:fillRef idx="3">
+            <a:schemeClr val="accent1"/>
+          </a:fillRef>
+          <a:effectRef idx="2">
+            <a:schemeClr val="accent1"/>
+          </a:effectRef>
+          <a:fontRef idx="minor">
+            <a:schemeClr val="lt1"/>
+          </a:fontRef>
+        </p:style>
+        <p:txBody>
+          <a:bodyPr rtlCol="0" anchor="ctr"/>
+          <a:lstStyle/>
+          <a:p>
+            <a:pPr algn="ctr"/>
+            <a:endParaRPr/>
+          </a:p>
+        </p:txBody>
+      </p:sp>
+      <p:sp>
+        <p:nvSpPr>
+          <p:cNvPr id="17415" name="Rounded Rectangle 17414"/>
+          <p:cNvSpPr/>
+          <p:nvPr/>
+        </p:nvSpPr>
+        <p:spPr>
+          <a:xfrm>
+            <a:off x="5204460" y="4526280"/>
+            <a:ext cx="1783080" cy="868680"/>
+          </a:xfrm>
+          <a:prstGeom prst="roundRect">
+            <a:avLst/>
+          </a:prstGeom>
+          <a:solidFill>
+            <a:srgbClr val="0070C0"/>
+          </a:solidFill>
+          <a:ln>
+            <a:noFill/>
+          </a:ln>
+          <a:effectLst/>
+        </p:spPr>
+        <p:style>
+          <a:lnRef idx="1">
+            <a:schemeClr val="accent1"/>
+          </a:lnRef>
+          <a:fillRef idx="3">
+            <a:schemeClr val="accent1"/>
+          </a:fillRef>
+          <a:effectRef idx="2">
+            <a:schemeClr val="accent1"/>
+          </a:effectRef>
+          <a:fontRef idx="minor">
+            <a:schemeClr val="lt1"/>
+          </a:fontRef>
+        </p:style>
+        <p:txBody>
+          <a:bodyPr wrap="square" lIns="50800" tIns="25400" rIns="50800" bIns="25400" rtlCol="0" anchor="ctr"/>
+          <a:lstStyle/>
+          <a:p>
+            <a:pPr algn="ctr"/>
+            <a:r>
+              <a:rPr sz="1150" b="1">
                 <a:solidFill>
-                  <a:srgbClr val="1F3864"/>
+                  <a:srgbClr val="FFFFFF"/>
                 </a:solidFill>
+                <a:latin typeface="Calibri"/>
               </a:rPr>
-              <a:t>(Web + Mobile)</a:t>
+              <a:t>Format
+Generation</a:t>
+            </a:r>
+          </a:p>
+        </p:txBody>
+      </p:sp>
+      <p:sp>
+        <p:nvSpPr>
+          <p:cNvPr id="17416" name="Right Arrow 17415"/>
+          <p:cNvSpPr/>
+          <p:nvPr/>
+        </p:nvSpPr>
+        <p:spPr>
+          <a:xfrm>
+            <a:off x="6987540" y="4860036"/>
+            <a:ext cx="411480" cy="201168"/>
+          </a:xfrm>
+          <a:prstGeom prst="rightArrow">
+            <a:avLst/>
+          </a:prstGeom>
+          <a:solidFill>
+            <a:srgbClr val="1E2A4A"/>
+          </a:solidFill>
+          <a:ln>
+            <a:noFill/>
+          </a:ln>
+          <a:effectLst/>
+        </p:spPr>
+        <p:style>
+          <a:lnRef idx="1">
+            <a:schemeClr val="accent1"/>
+          </a:lnRef>
+          <a:fillRef idx="3">
+            <a:schemeClr val="accent1"/>
+          </a:fillRef>
+          <a:effectRef idx="2">
+            <a:schemeClr val="accent1"/>
+          </a:effectRef>
+          <a:fontRef idx="minor">
+            <a:schemeClr val="lt1"/>
+          </a:fontRef>
+        </p:style>
+        <p:txBody>
+          <a:bodyPr rtlCol="0" anchor="ctr"/>
+          <a:lstStyle/>
+          <a:p>
+            <a:pPr algn="ctr"/>
+            <a:endParaRPr/>
+          </a:p>
+        </p:txBody>
+      </p:sp>
+      <p:sp>
+        <p:nvSpPr>
+          <p:cNvPr id="17417" name="Rounded Rectangle 17416"/>
+          <p:cNvSpPr/>
+          <p:nvPr/>
+        </p:nvSpPr>
+        <p:spPr>
+          <a:xfrm>
+            <a:off x="7399020" y="4526280"/>
+            <a:ext cx="1783080" cy="868680"/>
+          </a:xfrm>
+          <a:prstGeom prst="roundRect">
+            <a:avLst/>
+          </a:prstGeom>
+          <a:solidFill>
+            <a:srgbClr val="0070C0"/>
+          </a:solidFill>
+          <a:ln>
+            <a:noFill/>
+          </a:ln>
+          <a:effectLst/>
+        </p:spPr>
+        <p:style>
+          <a:lnRef idx="1">
+            <a:schemeClr val="accent1"/>
+          </a:lnRef>
+          <a:fillRef idx="3">
+            <a:schemeClr val="accent1"/>
+          </a:fillRef>
+          <a:effectRef idx="2">
+            <a:schemeClr val="accent1"/>
+          </a:effectRef>
+          <a:fontRef idx="minor">
+            <a:schemeClr val="lt1"/>
+          </a:fontRef>
+        </p:style>
+        <p:txBody>
+          <a:bodyPr wrap="square" lIns="50800" tIns="25400" rIns="50800" bIns="25400" rtlCol="0" anchor="ctr"/>
+          <a:lstStyle/>
+          <a:p>
+            <a:pPr algn="ctr"/>
+            <a:r>
+              <a:rPr sz="1150" b="1">
+                <a:solidFill>
+                  <a:srgbClr val="FFFFFF"/>
+                </a:solidFill>
+                <a:latin typeface="Calibri"/>
+              </a:rPr>
+              <a:t>Generated
+Deliverables</a:t>
+            </a:r>
+          </a:p>
+        </p:txBody>
+      </p:sp>
+      <p:sp>
+        <p:nvSpPr>
+          <p:cNvPr id="17418" name="Right Arrow 17417"/>
+          <p:cNvSpPr/>
+          <p:nvPr/>
+        </p:nvSpPr>
+        <p:spPr>
+          <a:xfrm>
+            <a:off x="9182100" y="4860036"/>
+            <a:ext cx="411480" cy="201168"/>
+          </a:xfrm>
+          <a:prstGeom prst="rightArrow">
+            <a:avLst/>
+          </a:prstGeom>
+          <a:solidFill>
+            <a:srgbClr val="1E2A4A"/>
+          </a:solidFill>
+          <a:ln>
+            <a:noFill/>
+          </a:ln>
+          <a:effectLst/>
+        </p:spPr>
+        <p:style>
+          <a:lnRef idx="1">
+            <a:schemeClr val="accent1"/>
+          </a:lnRef>
+          <a:fillRef idx="3">
+            <a:schemeClr val="accent1"/>
+          </a:fillRef>
+          <a:effectRef idx="2">
+            <a:schemeClr val="accent1"/>
+          </a:effectRef>
+          <a:fontRef idx="minor">
+            <a:schemeClr val="lt1"/>
+          </a:fontRef>
+        </p:style>
+        <p:txBody>
+          <a:bodyPr rtlCol="0" anchor="ctr"/>
+          <a:lstStyle/>
+          <a:p>
+            <a:pPr algn="ctr"/>
+            <a:endParaRPr/>
+          </a:p>
+        </p:txBody>
+      </p:sp>
+      <p:sp>
+        <p:nvSpPr>
+          <p:cNvPr id="17419" name="Rounded Rectangle 17418"/>
+          <p:cNvSpPr/>
+          <p:nvPr/>
+        </p:nvSpPr>
+        <p:spPr>
+          <a:xfrm>
+            <a:off x="9593580" y="4526280"/>
+            <a:ext cx="1783080" cy="868680"/>
+          </a:xfrm>
+          <a:prstGeom prst="roundRect">
+            <a:avLst/>
+          </a:prstGeom>
+          <a:solidFill>
+            <a:srgbClr val="0070C0"/>
+          </a:solidFill>
+          <a:ln>
+            <a:noFill/>
+          </a:ln>
+          <a:effectLst/>
+        </p:spPr>
+        <p:style>
+          <a:lnRef idx="1">
+            <a:schemeClr val="accent1"/>
+          </a:lnRef>
+          <a:fillRef idx="3">
+            <a:schemeClr val="accent1"/>
+          </a:fillRef>
+          <a:effectRef idx="2">
+            <a:schemeClr val="accent1"/>
+          </a:effectRef>
+          <a:fontRef idx="minor">
+            <a:schemeClr val="lt1"/>
+          </a:fontRef>
+        </p:style>
+        <p:txBody>
+          <a:bodyPr wrap="square" lIns="50800" tIns="25400" rIns="50800" bIns="25400" rtlCol="0" anchor="ctr"/>
+          <a:lstStyle/>
+          <a:p>
+            <a:pPr algn="ctr"/>
+            <a:r>
+              <a:rPr sz="1150" b="1">
+                <a:solidFill>
+                  <a:srgbClr val="FFFFFF"/>
+                </a:solidFill>
+                <a:latin typeface="Calibri"/>
+              </a:rPr>
+              <a:t>Review &amp;
+Export</a:t>
+            </a:r>
+          </a:p>
+        </p:txBody>
+      </p:sp>
+      <p:sp>
+        <p:nvSpPr>
+          <p:cNvPr id="17420" name="TextBox 17419"/>
+          <p:cNvSpPr txBox="1"/>
+          <p:nvPr/>
+        </p:nvSpPr>
+        <p:spPr>
+          <a:xfrm>
+            <a:off x="815340" y="4142232"/>
+            <a:ext cx="10561320" cy="320040"/>
+          </a:xfrm>
+          <a:prstGeom prst="rect">
+            <a:avLst/>
+          </a:prstGeom>
+          <a:noFill/>
+        </p:spPr>
+        <p:txBody>
+          <a:bodyPr wrap="square" lIns="0" tIns="0" rIns="0" bIns="0" anchor="ctr">
+            <a:spAutoFit/>
+          </a:bodyPr>
+          <a:lstStyle/>
+          <a:p>
+            <a:pPr algn="ctr"/>
+            <a:r>
+              <a:rPr sz="1300" b="1">
+                <a:solidFill>
+                  <a:srgbClr val="1E2A4A"/>
+                </a:solidFill>
+                <a:latin typeface="Calibri"/>
+              </a:rPr>
+              <a:t>End-to-end system flow</a:t>
+            </a:r>
+          </a:p>
+        </p:txBody>
+      </p:sp>
+      <p:sp>
+        <p:nvSpPr>
+          <p:cNvPr id="17421" name="Rounded Rectangle 17420"/>
+          <p:cNvSpPr/>
+          <p:nvPr/>
+        </p:nvSpPr>
+        <p:spPr>
+          <a:xfrm>
+            <a:off x="5204460" y="5715000"/>
+            <a:ext cx="1783080" cy="502920"/>
+          </a:xfrm>
+          <a:prstGeom prst="roundRect">
+            <a:avLst/>
+          </a:prstGeom>
+          <a:solidFill>
+            <a:srgbClr val="EEF2F7"/>
+          </a:solidFill>
+          <a:ln>
+            <a:noFill/>
+          </a:ln>
+          <a:effectLst/>
+        </p:spPr>
+        <p:style>
+          <a:lnRef idx="1">
+            <a:schemeClr val="accent1"/>
+          </a:lnRef>
+          <a:fillRef idx="3">
+            <a:schemeClr val="accent1"/>
+          </a:fillRef>
+          <a:effectRef idx="2">
+            <a:schemeClr val="accent1"/>
+          </a:effectRef>
+          <a:fontRef idx="minor">
+            <a:schemeClr val="lt1"/>
+          </a:fontRef>
+        </p:style>
+        <p:txBody>
+          <a:bodyPr wrap="square" lIns="50800" tIns="25400" rIns="50800" bIns="25400" rtlCol="0" anchor="ctr"/>
+          <a:lstStyle/>
+          <a:p>
+            <a:pPr algn="ctr"/>
+            <a:r>
+              <a:rPr sz="950" b="0">
+                <a:solidFill>
+                  <a:srgbClr val="1E2A4A"/>
+                </a:solidFill>
+                <a:latin typeface="Calibri"/>
+              </a:rPr>
+              <a:t>Operator selects
+source &amp; output types</a:t>
             </a:r>
           </a:p>
         </p:txBody>
       </p:sp>
       <p:cxnSp>
         <p:nvCxnSpPr>
-          <p:cNvPr id="17412" name="Connector 17411"/>
+          <p:cNvPr id="17422" name="Connector 17421"/>
           <p:cNvCxnSpPr/>
           <p:nvPr/>
         </p:nvCxnSpPr>
         <p:spPr>
-          <a:xfrm>
-            <a:off x="2514600" y="2674620"/>
-            <a:ext cx="132588" cy="0"/>
+          <a:xfrm flipV="1">
+            <a:off x="6096000" y="5394960"/>
+            <a:ext cx="0" cy="320040"/>
           </a:xfrm>
           <a:prstGeom prst="line">
             <a:avLst/>
           </a:prstGeom>
-          <a:ln w="19050">
+          <a:ln w="15875">
             <a:solidFill>
-              <a:srgbClr val="5B6B78"/>
+              <a:srgbClr val="555555"/>
             </a:solidFill>
-            <a:tailEnd type="triangle" w="med" len="med"/>
           </a:ln>
         </p:spPr>
         <p:style>
@@ -8222,1282 +7588,6 @@
           </a:fontRef>
         </p:style>
       </p:cxnSp>
-      <p:sp>
-        <p:nvSpPr>
-          <p:cNvPr id="17413" name="Rounded Rectangle 17412"/>
-          <p:cNvSpPr/>
-          <p:nvPr/>
-        </p:nvSpPr>
-        <p:spPr>
-          <a:xfrm>
-            <a:off x="2665476" y="2148840"/>
-            <a:ext cx="2084831" cy="1051560"/>
-          </a:xfrm>
-          <a:prstGeom prst="roundRect">
-            <a:avLst>
-              <a:gd name="adj" fmla="val 6000"/>
-            </a:avLst>
-          </a:prstGeom>
-          <a:solidFill>
-            <a:srgbClr val="F1F5FA"/>
-          </a:solidFill>
-          <a:ln>
-            <a:noFill/>
-          </a:ln>
-          <a:effectLst/>
-        </p:spPr>
-        <p:style>
-          <a:lnRef idx="1">
-            <a:schemeClr val="accent1"/>
-          </a:lnRef>
-          <a:fillRef idx="3">
-            <a:schemeClr val="accent1"/>
-          </a:fillRef>
-          <a:effectRef idx="2">
-            <a:schemeClr val="accent1"/>
-          </a:effectRef>
-          <a:fontRef idx="minor">
-            <a:schemeClr val="lt1"/>
-          </a:fontRef>
-        </p:style>
-        <p:txBody>
-          <a:bodyPr wrap="square" tIns="25400" bIns="25400" rtlCol="0" anchor="ctr"/>
-          <a:lstStyle/>
-          <a:p>
-            <a:pPr algn="ctr"/>
-            <a:r>
-              <a:rPr sz="1050" b="1">
-                <a:solidFill>
-                  <a:srgbClr val="1F3864"/>
-                </a:solidFill>
-              </a:rPr>
-              <a:t>API Gateway</a:t>
-            </a:r>
-          </a:p>
-          <a:p>
-            <a:pPr algn="ctr"/>
-            <a:r>
-              <a:rPr sz="800">
-                <a:solidFill>
-                  <a:srgbClr val="1F3864"/>
-                </a:solidFill>
-              </a:rPr>
-              <a:t>Node.js / Express</a:t>
-            </a:r>
-            <a:br/>
-            <a:r>
-              <a:rPr sz="800">
-                <a:solidFill>
-                  <a:srgbClr val="1F3864"/>
-                </a:solidFill>
-              </a:rPr>
-              <a:t>JWT Auth, Rate-Limit</a:t>
-            </a:r>
-          </a:p>
-        </p:txBody>
-      </p:sp>
-      <p:cxnSp>
-        <p:nvCxnSpPr>
-          <p:cNvPr id="17414" name="Connector 17413"/>
-          <p:cNvCxnSpPr/>
-          <p:nvPr/>
-        </p:nvCxnSpPr>
-        <p:spPr>
-          <a:xfrm>
-            <a:off x="4768596" y="2674620"/>
-            <a:ext cx="132588" cy="0"/>
-          </a:xfrm>
-          <a:prstGeom prst="line">
-            <a:avLst/>
-          </a:prstGeom>
-          <a:ln w="19050">
-            <a:solidFill>
-              <a:srgbClr val="5B6B78"/>
-            </a:solidFill>
-            <a:tailEnd type="triangle" w="med" len="med"/>
-          </a:ln>
-        </p:spPr>
-        <p:style>
-          <a:lnRef idx="2">
-            <a:schemeClr val="accent1"/>
-          </a:lnRef>
-          <a:fillRef idx="0">
-            <a:schemeClr val="accent1"/>
-          </a:fillRef>
-          <a:effectRef idx="1">
-            <a:schemeClr val="accent1"/>
-          </a:effectRef>
-          <a:fontRef idx="minor">
-            <a:schemeClr val="tx1"/>
-          </a:fontRef>
-        </p:style>
-      </p:cxnSp>
-      <p:sp>
-        <p:nvSpPr>
-          <p:cNvPr id="17415" name="Rounded Rectangle 17414"/>
-          <p:cNvSpPr/>
-          <p:nvPr/>
-        </p:nvSpPr>
-        <p:spPr>
-          <a:xfrm>
-            <a:off x="4919472" y="2148840"/>
-            <a:ext cx="2084831" cy="1051560"/>
-          </a:xfrm>
-          <a:prstGeom prst="roundRect">
-            <a:avLst>
-              <a:gd name="adj" fmla="val 6000"/>
-            </a:avLst>
-          </a:prstGeom>
-          <a:solidFill>
-            <a:srgbClr val="1F3864"/>
-          </a:solidFill>
-          <a:ln>
-            <a:noFill/>
-          </a:ln>
-          <a:effectLst/>
-        </p:spPr>
-        <p:style>
-          <a:lnRef idx="1">
-            <a:schemeClr val="accent1"/>
-          </a:lnRef>
-          <a:fillRef idx="3">
-            <a:schemeClr val="accent1"/>
-          </a:fillRef>
-          <a:effectRef idx="2">
-            <a:schemeClr val="accent1"/>
-          </a:effectRef>
-          <a:fontRef idx="minor">
-            <a:schemeClr val="lt1"/>
-          </a:fontRef>
-        </p:style>
-        <p:txBody>
-          <a:bodyPr wrap="square" tIns="25400" bIns="25400" rtlCol="0" anchor="ctr"/>
-          <a:lstStyle/>
-          <a:p>
-            <a:pPr algn="ctr"/>
-            <a:r>
-              <a:rPr sz="1050" b="1">
-                <a:solidFill>
-                  <a:srgbClr val="FFFFFF"/>
-                </a:solidFill>
-              </a:rPr>
-              <a:t>Microservices</a:t>
-            </a:r>
-          </a:p>
-          <a:p>
-            <a:pPr algn="ctr"/>
-            <a:r>
-              <a:rPr sz="800">
-                <a:solidFill>
-                  <a:srgbClr val="FFFFFF"/>
-                </a:solidFill>
-              </a:rPr>
-              <a:t>Profile · Matching ·</a:t>
-            </a:r>
-            <a:br/>
-            <a:r>
-              <a:rPr sz="800">
-                <a:solidFill>
-                  <a:srgbClr val="FFFFFF"/>
-                </a:solidFill>
-              </a:rPr>
-              <a:t>Internship · Notify</a:t>
-            </a:r>
-          </a:p>
-        </p:txBody>
-      </p:sp>
-      <p:cxnSp>
-        <p:nvCxnSpPr>
-          <p:cNvPr id="17416" name="Connector 17415"/>
-          <p:cNvCxnSpPr/>
-          <p:nvPr/>
-        </p:nvCxnSpPr>
-        <p:spPr>
-          <a:xfrm>
-            <a:off x="7022592" y="2674620"/>
-            <a:ext cx="132588" cy="0"/>
-          </a:xfrm>
-          <a:prstGeom prst="line">
-            <a:avLst/>
-          </a:prstGeom>
-          <a:ln w="19050">
-            <a:solidFill>
-              <a:srgbClr val="5B6B78"/>
-            </a:solidFill>
-            <a:tailEnd type="triangle" w="med" len="med"/>
-          </a:ln>
-        </p:spPr>
-        <p:style>
-          <a:lnRef idx="2">
-            <a:schemeClr val="accent1"/>
-          </a:lnRef>
-          <a:fillRef idx="0">
-            <a:schemeClr val="accent1"/>
-          </a:fillRef>
-          <a:effectRef idx="1">
-            <a:schemeClr val="accent1"/>
-          </a:effectRef>
-          <a:fontRef idx="minor">
-            <a:schemeClr val="tx1"/>
-          </a:fontRef>
-        </p:style>
-      </p:cxnSp>
-      <p:sp>
-        <p:nvSpPr>
-          <p:cNvPr id="17417" name="Rounded Rectangle 17416"/>
-          <p:cNvSpPr/>
-          <p:nvPr/>
-        </p:nvSpPr>
-        <p:spPr>
-          <a:xfrm>
-            <a:off x="7173468" y="2148840"/>
-            <a:ext cx="2084831" cy="1051560"/>
-          </a:xfrm>
-          <a:prstGeom prst="roundRect">
-            <a:avLst>
-              <a:gd name="adj" fmla="val 6000"/>
-            </a:avLst>
-          </a:prstGeom>
-          <a:solidFill>
-            <a:srgbClr val="F1F5FA"/>
-          </a:solidFill>
-          <a:ln>
-            <a:noFill/>
-          </a:ln>
-          <a:effectLst/>
-        </p:spPr>
-        <p:style>
-          <a:lnRef idx="1">
-            <a:schemeClr val="accent1"/>
-          </a:lnRef>
-          <a:fillRef idx="3">
-            <a:schemeClr val="accent1"/>
-          </a:fillRef>
-          <a:effectRef idx="2">
-            <a:schemeClr val="accent1"/>
-          </a:effectRef>
-          <a:fontRef idx="minor">
-            <a:schemeClr val="lt1"/>
-          </a:fontRef>
-        </p:style>
-        <p:txBody>
-          <a:bodyPr wrap="square" tIns="25400" bIns="25400" rtlCol="0" anchor="ctr"/>
-          <a:lstStyle/>
-          <a:p>
-            <a:pPr algn="ctr"/>
-            <a:r>
-              <a:rPr sz="1050" b="1">
-                <a:solidFill>
-                  <a:srgbClr val="1F3864"/>
-                </a:solidFill>
-              </a:rPr>
-              <a:t>AI / ML Layer</a:t>
-            </a:r>
-          </a:p>
-          <a:p>
-            <a:pPr algn="ctr"/>
-            <a:r>
-              <a:rPr sz="800">
-                <a:solidFill>
-                  <a:srgbClr val="1F3864"/>
-                </a:solidFill>
-              </a:rPr>
-              <a:t>NLP Parser +</a:t>
-            </a:r>
-            <a:br/>
-            <a:r>
-              <a:rPr sz="800">
-                <a:solidFill>
-                  <a:srgbClr val="1F3864"/>
-                </a:solidFill>
-              </a:rPr>
-              <a:t>Embedding Model</a:t>
-            </a:r>
-          </a:p>
-        </p:txBody>
-      </p:sp>
-      <p:cxnSp>
-        <p:nvCxnSpPr>
-          <p:cNvPr id="17418" name="Connector 17417"/>
-          <p:cNvCxnSpPr/>
-          <p:nvPr/>
-        </p:nvCxnSpPr>
-        <p:spPr>
-          <a:xfrm>
-            <a:off x="9276588" y="2674620"/>
-            <a:ext cx="132588" cy="0"/>
-          </a:xfrm>
-          <a:prstGeom prst="line">
-            <a:avLst/>
-          </a:prstGeom>
-          <a:ln w="19050">
-            <a:solidFill>
-              <a:srgbClr val="5B6B78"/>
-            </a:solidFill>
-            <a:tailEnd type="triangle" w="med" len="med"/>
-          </a:ln>
-        </p:spPr>
-        <p:style>
-          <a:lnRef idx="2">
-            <a:schemeClr val="accent1"/>
-          </a:lnRef>
-          <a:fillRef idx="0">
-            <a:schemeClr val="accent1"/>
-          </a:fillRef>
-          <a:effectRef idx="1">
-            <a:schemeClr val="accent1"/>
-          </a:effectRef>
-          <a:fontRef idx="minor">
-            <a:schemeClr val="tx1"/>
-          </a:fontRef>
-        </p:style>
-      </p:cxnSp>
-      <p:sp>
-        <p:nvSpPr>
-          <p:cNvPr id="17419" name="Rounded Rectangle 17418"/>
-          <p:cNvSpPr/>
-          <p:nvPr/>
-        </p:nvSpPr>
-        <p:spPr>
-          <a:xfrm>
-            <a:off x="9427463" y="2148840"/>
-            <a:ext cx="2084831" cy="1051560"/>
-          </a:xfrm>
-          <a:prstGeom prst="roundRect">
-            <a:avLst>
-              <a:gd name="adj" fmla="val 6000"/>
-            </a:avLst>
-          </a:prstGeom>
-          <a:solidFill>
-            <a:srgbClr val="F1F5FA"/>
-          </a:solidFill>
-          <a:ln>
-            <a:noFill/>
-          </a:ln>
-          <a:effectLst/>
-        </p:spPr>
-        <p:style>
-          <a:lnRef idx="1">
-            <a:schemeClr val="accent1"/>
-          </a:lnRef>
-          <a:fillRef idx="3">
-            <a:schemeClr val="accent1"/>
-          </a:fillRef>
-          <a:effectRef idx="2">
-            <a:schemeClr val="accent1"/>
-          </a:effectRef>
-          <a:fontRef idx="minor">
-            <a:schemeClr val="lt1"/>
-          </a:fontRef>
-        </p:style>
-        <p:txBody>
-          <a:bodyPr wrap="square" tIns="25400" bIns="25400" rtlCol="0" anchor="ctr"/>
-          <a:lstStyle/>
-          <a:p>
-            <a:pPr algn="ctr"/>
-            <a:r>
-              <a:rPr sz="1050" b="1">
-                <a:solidFill>
-                  <a:srgbClr val="1F3864"/>
-                </a:solidFill>
-              </a:rPr>
-              <a:t>Data Layer</a:t>
-            </a:r>
-          </a:p>
-          <a:p>
-            <a:pPr algn="ctr"/>
-            <a:r>
-              <a:rPr sz="800">
-                <a:solidFill>
-                  <a:srgbClr val="1F3864"/>
-                </a:solidFill>
-              </a:rPr>
-              <a:t>PostgreSQL · MongoDB</a:t>
-            </a:r>
-            <a:br/>
-            <a:r>
-              <a:rPr sz="800">
-                <a:solidFill>
-                  <a:srgbClr val="1F3864"/>
-                </a:solidFill>
-              </a:rPr>
-              <a:t>Redis · S3</a:t>
-            </a:r>
-          </a:p>
-        </p:txBody>
-      </p:sp>
-      <p:sp>
-        <p:nvSpPr>
-          <p:cNvPr id="17420" name="TextBox 17419"/>
-          <p:cNvSpPr txBox="1"/>
-          <p:nvPr/>
-        </p:nvSpPr>
-        <p:spPr>
-          <a:xfrm>
-            <a:off x="411480" y="3337560"/>
-            <a:ext cx="11338560" cy="256032"/>
-          </a:xfrm>
-          <a:prstGeom prst="rect">
-            <a:avLst/>
-          </a:prstGeom>
-          <a:noFill/>
-        </p:spPr>
-        <p:txBody>
-          <a:bodyPr wrap="square" lIns="0" tIns="0" rIns="0" bIns="0" anchor="t">
-            <a:spAutoFit/>
-          </a:bodyPr>
-          <a:lstStyle/>
-          <a:p>
-            <a:pPr algn="l">
-              <a:lnSpc>
-                <a:spcPct val="100000"/>
-              </a:lnSpc>
-            </a:pPr>
-            <a:r>
-              <a:rPr sz="1200" b="1" i="0">
-                <a:solidFill>
-                  <a:srgbClr val="1F3864"/>
-                </a:solidFill>
-                <a:latin typeface="Calibri"/>
-              </a:rPr>
-              <a:t>Skill-Matching Algorithm</a:t>
-            </a:r>
-          </a:p>
-        </p:txBody>
-      </p:sp>
-      <p:sp>
-        <p:nvSpPr>
-          <p:cNvPr id="17421" name="Rounded Rectangle 17420"/>
-          <p:cNvSpPr/>
-          <p:nvPr/>
-        </p:nvSpPr>
-        <p:spPr>
-          <a:xfrm>
-            <a:off x="411480" y="3611880"/>
-            <a:ext cx="11338560" cy="777240"/>
-          </a:xfrm>
-          <a:prstGeom prst="roundRect">
-            <a:avLst>
-              <a:gd name="adj" fmla="val 6000"/>
-            </a:avLst>
-          </a:prstGeom>
-          <a:solidFill>
-            <a:srgbClr val="EAF0F8"/>
-          </a:solidFill>
-          <a:ln>
-            <a:noFill/>
-          </a:ln>
-          <a:effectLst/>
-        </p:spPr>
-        <p:style>
-          <a:lnRef idx="1">
-            <a:schemeClr val="accent1"/>
-          </a:lnRef>
-          <a:fillRef idx="3">
-            <a:schemeClr val="accent1"/>
-          </a:fillRef>
-          <a:effectRef idx="2">
-            <a:schemeClr val="accent1"/>
-          </a:effectRef>
-          <a:fontRef idx="minor">
-            <a:schemeClr val="lt1"/>
-          </a:fontRef>
-        </p:style>
-        <p:txBody>
-          <a:bodyPr rtlCol="0" anchor="ctr"/>
-          <a:lstStyle/>
-          <a:p>
-            <a:pPr algn="ctr"/>
-            <a:endParaRPr/>
-          </a:p>
-        </p:txBody>
-      </p:sp>
-      <p:sp>
-        <p:nvSpPr>
-          <p:cNvPr id="17422" name="TextBox 17421"/>
-          <p:cNvSpPr txBox="1"/>
-          <p:nvPr/>
-        </p:nvSpPr>
-        <p:spPr>
-          <a:xfrm>
-            <a:off x="594360" y="3685032"/>
-            <a:ext cx="10972800" cy="658368"/>
-          </a:xfrm>
-          <a:prstGeom prst="rect">
-            <a:avLst/>
-          </a:prstGeom>
-          <a:noFill/>
-        </p:spPr>
-        <p:txBody>
-          <a:bodyPr wrap="square" lIns="0" tIns="0" rIns="0" bIns="0" anchor="t">
-            <a:spAutoFit/>
-          </a:bodyPr>
-          <a:lstStyle/>
-          <a:p>
-            <a:pPr algn="l">
-              <a:lnSpc>
-                <a:spcPct val="115000"/>
-              </a:lnSpc>
-            </a:pPr>
-            <a:r>
-              <a:rPr sz="950" b="0" i="0">
-                <a:solidFill>
-                  <a:srgbClr val="222A33"/>
-                </a:solidFill>
-                <a:latin typeface="Calibri"/>
-              </a:rPr>
-              <a:t>Resume / JD text → tokenization &amp; Sentence-BERT embeddings → cosine similarity vs. skill-taxonomy graph → weighted score = 0.60 × skill-match + 0.25 × experience relevance + 0.15 × location/availability → top-N ranked recommendations, refreshed nightly via an Airflow batch job; cold-start users get rule-based fallback matches.</a:t>
-            </a:r>
-          </a:p>
-        </p:txBody>
-      </p:sp>
-      <p:sp>
-        <p:nvSpPr>
-          <p:cNvPr id="17423" name="Rounded Rectangle 17422"/>
-          <p:cNvSpPr/>
-          <p:nvPr/>
-        </p:nvSpPr>
-        <p:spPr>
-          <a:xfrm>
-            <a:off x="411480" y="4572000"/>
-            <a:ext cx="3602735" cy="1691640"/>
-          </a:xfrm>
-          <a:prstGeom prst="roundRect">
-            <a:avLst>
-              <a:gd name="adj" fmla="val 6000"/>
-            </a:avLst>
-          </a:prstGeom>
-          <a:solidFill>
-            <a:srgbClr val="F1F5FA"/>
-          </a:solidFill>
-          <a:ln>
-            <a:noFill/>
-          </a:ln>
-          <a:effectLst/>
-        </p:spPr>
-        <p:style>
-          <a:lnRef idx="1">
-            <a:schemeClr val="accent1"/>
-          </a:lnRef>
-          <a:fillRef idx="3">
-            <a:schemeClr val="accent1"/>
-          </a:fillRef>
-          <a:effectRef idx="2">
-            <a:schemeClr val="accent1"/>
-          </a:effectRef>
-          <a:fontRef idx="minor">
-            <a:schemeClr val="lt1"/>
-          </a:fontRef>
-        </p:style>
-        <p:txBody>
-          <a:bodyPr rtlCol="0" anchor="ctr"/>
-          <a:lstStyle/>
-          <a:p>
-            <a:pPr algn="ctr"/>
-            <a:endParaRPr/>
-          </a:p>
-        </p:txBody>
-      </p:sp>
-      <p:sp>
-        <p:nvSpPr>
-          <p:cNvPr id="17424" name="Rectangle 17423"/>
-          <p:cNvSpPr/>
-          <p:nvPr/>
-        </p:nvSpPr>
-        <p:spPr>
-          <a:xfrm>
-            <a:off x="557784" y="4700016"/>
-            <a:ext cx="109728" cy="109728"/>
-          </a:xfrm>
-          <a:prstGeom prst="rect">
-            <a:avLst/>
-          </a:prstGeom>
-          <a:solidFill>
-            <a:srgbClr val="1F3864"/>
-          </a:solidFill>
-          <a:ln>
-            <a:noFill/>
-          </a:ln>
-          <a:effectLst/>
-        </p:spPr>
-        <p:style>
-          <a:lnRef idx="1">
-            <a:schemeClr val="accent1"/>
-          </a:lnRef>
-          <a:fillRef idx="3">
-            <a:schemeClr val="accent1"/>
-          </a:fillRef>
-          <a:effectRef idx="2">
-            <a:schemeClr val="accent1"/>
-          </a:effectRef>
-          <a:fontRef idx="minor">
-            <a:schemeClr val="lt1"/>
-          </a:fontRef>
-        </p:style>
-        <p:txBody>
-          <a:bodyPr rtlCol="0" anchor="ctr"/>
-          <a:lstStyle/>
-          <a:p>
-            <a:pPr algn="ctr"/>
-            <a:endParaRPr/>
-          </a:p>
-        </p:txBody>
-      </p:sp>
-      <p:sp>
-        <p:nvSpPr>
-          <p:cNvPr id="17425" name="TextBox 17424"/>
-          <p:cNvSpPr txBox="1"/>
-          <p:nvPr/>
-        </p:nvSpPr>
-        <p:spPr>
-          <a:xfrm>
-            <a:off x="777240" y="4645152"/>
-            <a:ext cx="3163823" cy="274320"/>
-          </a:xfrm>
-          <a:prstGeom prst="rect">
-            <a:avLst/>
-          </a:prstGeom>
-          <a:noFill/>
-        </p:spPr>
-        <p:txBody>
-          <a:bodyPr wrap="square" lIns="0" tIns="0" rIns="0" bIns="0" anchor="t">
-            <a:spAutoFit/>
-          </a:bodyPr>
-          <a:lstStyle/>
-          <a:p>
-            <a:pPr algn="l">
-              <a:lnSpc>
-                <a:spcPct val="100000"/>
-              </a:lnSpc>
-            </a:pPr>
-            <a:r>
-              <a:rPr sz="1050" b="1" i="0">
-                <a:solidFill>
-                  <a:srgbClr val="1F3864"/>
-                </a:solidFill>
-                <a:latin typeface="Calibri"/>
-              </a:rPr>
-              <a:t>Tech Stack</a:t>
-            </a:r>
-          </a:p>
-        </p:txBody>
-      </p:sp>
-      <p:sp>
-        <p:nvSpPr>
-          <p:cNvPr id="17426" name="TextBox 17425"/>
-          <p:cNvSpPr txBox="1"/>
-          <p:nvPr/>
-        </p:nvSpPr>
-        <p:spPr>
-          <a:xfrm>
-            <a:off x="576072" y="4956048"/>
-            <a:ext cx="3383279" cy="1234440"/>
-          </a:xfrm>
-          <a:prstGeom prst="rect">
-            <a:avLst/>
-          </a:prstGeom>
-          <a:noFill/>
-        </p:spPr>
-        <p:txBody>
-          <a:bodyPr wrap="square" lIns="0" tIns="0" rIns="0" bIns="0">
-            <a:spAutoFit/>
-          </a:bodyPr>
-          <a:lstStyle/>
-          <a:p>
-            <a:pPr>
-              <a:lnSpc>
-                <a:spcPct val="105000"/>
-              </a:lnSpc>
-              <a:spcAft>
-                <a:spcPts val="200"/>
-              </a:spcAft>
-            </a:pPr>
-            <a:r>
-              <a:rPr sz="800">
-                <a:solidFill>
-                  <a:srgbClr val="222A33"/>
-                </a:solidFill>
-                <a:latin typeface="Calibri"/>
-              </a:rPr>
-              <a:t>•  Frontend: React.js, Redux, Tailwind CSS</a:t>
-            </a:r>
-          </a:p>
-          <a:p>
-            <a:pPr>
-              <a:lnSpc>
-                <a:spcPct val="105000"/>
-              </a:lnSpc>
-              <a:spcAft>
-                <a:spcPts val="200"/>
-              </a:spcAft>
-            </a:pPr>
-            <a:r>
-              <a:rPr sz="800">
-                <a:solidFill>
-                  <a:srgbClr val="222A33"/>
-                </a:solidFill>
-                <a:latin typeface="Calibri"/>
-              </a:rPr>
-              <a:t>•  Backend: Node.js, Express, REST + GraphQL</a:t>
-            </a:r>
-          </a:p>
-          <a:p>
-            <a:pPr>
-              <a:lnSpc>
-                <a:spcPct val="105000"/>
-              </a:lnSpc>
-              <a:spcAft>
-                <a:spcPts val="200"/>
-              </a:spcAft>
-            </a:pPr>
-            <a:r>
-              <a:rPr sz="800">
-                <a:solidFill>
-                  <a:srgbClr val="222A33"/>
-                </a:solidFill>
-                <a:latin typeface="Calibri"/>
-              </a:rPr>
-              <a:t>•  Database: PostgreSQL (relational), MongoDB (profiles)</a:t>
-            </a:r>
-          </a:p>
-          <a:p>
-            <a:pPr>
-              <a:lnSpc>
-                <a:spcPct val="105000"/>
-              </a:lnSpc>
-              <a:spcAft>
-                <a:spcPts val="200"/>
-              </a:spcAft>
-            </a:pPr>
-            <a:r>
-              <a:rPr sz="800">
-                <a:solidFill>
-                  <a:srgbClr val="222A33"/>
-                </a:solidFill>
-                <a:latin typeface="Calibri"/>
-              </a:rPr>
-              <a:t>•  AI/ML: Python, spaCy, Sentence-BERT, scikit-learn</a:t>
-            </a:r>
-          </a:p>
-          <a:p>
-            <a:pPr>
-              <a:lnSpc>
-                <a:spcPct val="105000"/>
-              </a:lnSpc>
-              <a:spcAft>
-                <a:spcPts val="200"/>
-              </a:spcAft>
-            </a:pPr>
-            <a:r>
-              <a:rPr sz="800">
-                <a:solidFill>
-                  <a:srgbClr val="222A33"/>
-                </a:solidFill>
-                <a:latin typeface="Calibri"/>
-              </a:rPr>
-              <a:t>•  Cache/Queue: Redis, RabbitMQ for async jobs</a:t>
-            </a:r>
-          </a:p>
-        </p:txBody>
-      </p:sp>
-      <p:sp>
-        <p:nvSpPr>
-          <p:cNvPr id="17427" name="Rounded Rectangle 17426"/>
-          <p:cNvSpPr/>
-          <p:nvPr/>
-        </p:nvSpPr>
-        <p:spPr>
-          <a:xfrm>
-            <a:off x="4123944" y="4572000"/>
-            <a:ext cx="3602735" cy="1691640"/>
-          </a:xfrm>
-          <a:prstGeom prst="roundRect">
-            <a:avLst>
-              <a:gd name="adj" fmla="val 6000"/>
-            </a:avLst>
-          </a:prstGeom>
-          <a:solidFill>
-            <a:srgbClr val="F1F5FA"/>
-          </a:solidFill>
-          <a:ln>
-            <a:noFill/>
-          </a:ln>
-          <a:effectLst/>
-        </p:spPr>
-        <p:style>
-          <a:lnRef idx="1">
-            <a:schemeClr val="accent1"/>
-          </a:lnRef>
-          <a:fillRef idx="3">
-            <a:schemeClr val="accent1"/>
-          </a:fillRef>
-          <a:effectRef idx="2">
-            <a:schemeClr val="accent1"/>
-          </a:effectRef>
-          <a:fontRef idx="minor">
-            <a:schemeClr val="lt1"/>
-          </a:fontRef>
-        </p:style>
-        <p:txBody>
-          <a:bodyPr rtlCol="0" anchor="ctr"/>
-          <a:lstStyle/>
-          <a:p>
-            <a:pPr algn="ctr"/>
-            <a:endParaRPr/>
-          </a:p>
-        </p:txBody>
-      </p:sp>
-      <p:sp>
-        <p:nvSpPr>
-          <p:cNvPr id="17428" name="Rectangle 17427"/>
-          <p:cNvSpPr/>
-          <p:nvPr/>
-        </p:nvSpPr>
-        <p:spPr>
-          <a:xfrm>
-            <a:off x="4270248" y="4700016"/>
-            <a:ext cx="109728" cy="109728"/>
-          </a:xfrm>
-          <a:prstGeom prst="rect">
-            <a:avLst/>
-          </a:prstGeom>
-          <a:solidFill>
-            <a:srgbClr val="C0504D"/>
-          </a:solidFill>
-          <a:ln>
-            <a:noFill/>
-          </a:ln>
-          <a:effectLst/>
-        </p:spPr>
-        <p:style>
-          <a:lnRef idx="1">
-            <a:schemeClr val="accent1"/>
-          </a:lnRef>
-          <a:fillRef idx="3">
-            <a:schemeClr val="accent1"/>
-          </a:fillRef>
-          <a:effectRef idx="2">
-            <a:schemeClr val="accent1"/>
-          </a:effectRef>
-          <a:fontRef idx="minor">
-            <a:schemeClr val="lt1"/>
-          </a:fontRef>
-        </p:style>
-        <p:txBody>
-          <a:bodyPr rtlCol="0" anchor="ctr"/>
-          <a:lstStyle/>
-          <a:p>
-            <a:pPr algn="ctr"/>
-            <a:endParaRPr/>
-          </a:p>
-        </p:txBody>
-      </p:sp>
-      <p:sp>
-        <p:nvSpPr>
-          <p:cNvPr id="17429" name="TextBox 17428"/>
-          <p:cNvSpPr txBox="1"/>
-          <p:nvPr/>
-        </p:nvSpPr>
-        <p:spPr>
-          <a:xfrm>
-            <a:off x="4489704" y="4645152"/>
-            <a:ext cx="3163823" cy="274320"/>
-          </a:xfrm>
-          <a:prstGeom prst="rect">
-            <a:avLst/>
-          </a:prstGeom>
-          <a:noFill/>
-        </p:spPr>
-        <p:txBody>
-          <a:bodyPr wrap="square" lIns="0" tIns="0" rIns="0" bIns="0" anchor="t">
-            <a:spAutoFit/>
-          </a:bodyPr>
-          <a:lstStyle/>
-          <a:p>
-            <a:pPr algn="l">
-              <a:lnSpc>
-                <a:spcPct val="100000"/>
-              </a:lnSpc>
-            </a:pPr>
-            <a:r>
-              <a:rPr sz="1050" b="1" i="0">
-                <a:solidFill>
-                  <a:srgbClr val="1F3864"/>
-                </a:solidFill>
-                <a:latin typeface="Calibri"/>
-              </a:rPr>
-              <a:t>Security &amp; Compliance</a:t>
-            </a:r>
-          </a:p>
-        </p:txBody>
-      </p:sp>
-      <p:sp>
-        <p:nvSpPr>
-          <p:cNvPr id="17430" name="TextBox 17429"/>
-          <p:cNvSpPr txBox="1"/>
-          <p:nvPr/>
-        </p:nvSpPr>
-        <p:spPr>
-          <a:xfrm>
-            <a:off x="4288536" y="4956048"/>
-            <a:ext cx="3383279" cy="1234440"/>
-          </a:xfrm>
-          <a:prstGeom prst="rect">
-            <a:avLst/>
-          </a:prstGeom>
-          <a:noFill/>
-        </p:spPr>
-        <p:txBody>
-          <a:bodyPr wrap="square" lIns="0" tIns="0" rIns="0" bIns="0">
-            <a:spAutoFit/>
-          </a:bodyPr>
-          <a:lstStyle/>
-          <a:p>
-            <a:pPr>
-              <a:lnSpc>
-                <a:spcPct val="105000"/>
-              </a:lnSpc>
-              <a:spcAft>
-                <a:spcPts val="200"/>
-              </a:spcAft>
-            </a:pPr>
-            <a:r>
-              <a:rPr sz="800">
-                <a:solidFill>
-                  <a:srgbClr val="222A33"/>
-                </a:solidFill>
-                <a:latin typeface="Calibri"/>
-              </a:rPr>
-              <a:t>•  OAuth 2.0 + JWT with role-based access control</a:t>
-            </a:r>
-          </a:p>
-          <a:p>
-            <a:pPr>
-              <a:lnSpc>
-                <a:spcPct val="105000"/>
-              </a:lnSpc>
-              <a:spcAft>
-                <a:spcPts val="200"/>
-              </a:spcAft>
-            </a:pPr>
-            <a:r>
-              <a:rPr sz="800">
-                <a:solidFill>
-                  <a:srgbClr val="222A33"/>
-                </a:solidFill>
-                <a:latin typeface="Calibri"/>
-              </a:rPr>
-              <a:t>•  TLS 1.3 in transit, AES-256 encryption at rest</a:t>
-            </a:r>
-          </a:p>
-          <a:p>
-            <a:pPr>
-              <a:lnSpc>
-                <a:spcPct val="105000"/>
-              </a:lnSpc>
-              <a:spcAft>
-                <a:spcPts val="200"/>
-              </a:spcAft>
-            </a:pPr>
-            <a:r>
-              <a:rPr sz="800">
-                <a:solidFill>
-                  <a:srgbClr val="222A33"/>
-                </a:solidFill>
-                <a:latin typeface="Calibri"/>
-              </a:rPr>
-              <a:t>•  DPDP Act 2023-compliant consent management</a:t>
-            </a:r>
-          </a:p>
-          <a:p>
-            <a:pPr>
-              <a:lnSpc>
-                <a:spcPct val="105000"/>
-              </a:lnSpc>
-              <a:spcAft>
-                <a:spcPts val="200"/>
-              </a:spcAft>
-            </a:pPr>
-            <a:r>
-              <a:rPr sz="800">
-                <a:solidFill>
-                  <a:srgbClr val="222A33"/>
-                </a:solidFill>
-                <a:latin typeface="Calibri"/>
-              </a:rPr>
-              <a:t>•  Audit logging &amp; anomaly detection on admin actions</a:t>
-            </a:r>
-          </a:p>
-          <a:p>
-            <a:pPr>
-              <a:lnSpc>
-                <a:spcPct val="105000"/>
-              </a:lnSpc>
-              <a:spcAft>
-                <a:spcPts val="200"/>
-              </a:spcAft>
-            </a:pPr>
-            <a:r>
-              <a:rPr sz="800">
-                <a:solidFill>
-                  <a:srgbClr val="222A33"/>
-                </a:solidFill>
-                <a:latin typeface="Calibri"/>
-              </a:rPr>
-              <a:t>•  Periodic third-party penetration testing</a:t>
-            </a:r>
-          </a:p>
-        </p:txBody>
-      </p:sp>
-      <p:sp>
-        <p:nvSpPr>
-          <p:cNvPr id="17431" name="Rounded Rectangle 17430"/>
-          <p:cNvSpPr/>
-          <p:nvPr/>
-        </p:nvSpPr>
-        <p:spPr>
-          <a:xfrm>
-            <a:off x="7836408" y="4572000"/>
-            <a:ext cx="3602735" cy="1691640"/>
-          </a:xfrm>
-          <a:prstGeom prst="roundRect">
-            <a:avLst>
-              <a:gd name="adj" fmla="val 6000"/>
-            </a:avLst>
-          </a:prstGeom>
-          <a:solidFill>
-            <a:srgbClr val="F1F5FA"/>
-          </a:solidFill>
-          <a:ln>
-            <a:noFill/>
-          </a:ln>
-          <a:effectLst/>
-        </p:spPr>
-        <p:style>
-          <a:lnRef idx="1">
-            <a:schemeClr val="accent1"/>
-          </a:lnRef>
-          <a:fillRef idx="3">
-            <a:schemeClr val="accent1"/>
-          </a:fillRef>
-          <a:effectRef idx="2">
-            <a:schemeClr val="accent1"/>
-          </a:effectRef>
-          <a:fontRef idx="minor">
-            <a:schemeClr val="lt1"/>
-          </a:fontRef>
-        </p:style>
-        <p:txBody>
-          <a:bodyPr rtlCol="0" anchor="ctr"/>
-          <a:lstStyle/>
-          <a:p>
-            <a:pPr algn="ctr"/>
-            <a:endParaRPr/>
-          </a:p>
-        </p:txBody>
-      </p:sp>
-      <p:sp>
-        <p:nvSpPr>
-          <p:cNvPr id="17432" name="Rectangle 17431"/>
-          <p:cNvSpPr/>
-          <p:nvPr/>
-        </p:nvSpPr>
-        <p:spPr>
-          <a:xfrm>
-            <a:off x="7982712" y="4700016"/>
-            <a:ext cx="109728" cy="109728"/>
-          </a:xfrm>
-          <a:prstGeom prst="rect">
-            <a:avLst/>
-          </a:prstGeom>
-          <a:solidFill>
-            <a:srgbClr val="2E8B57"/>
-          </a:solidFill>
-          <a:ln>
-            <a:noFill/>
-          </a:ln>
-          <a:effectLst/>
-        </p:spPr>
-        <p:style>
-          <a:lnRef idx="1">
-            <a:schemeClr val="accent1"/>
-          </a:lnRef>
-          <a:fillRef idx="3">
-            <a:schemeClr val="accent1"/>
-          </a:fillRef>
-          <a:effectRef idx="2">
-            <a:schemeClr val="accent1"/>
-          </a:effectRef>
-          <a:fontRef idx="minor">
-            <a:schemeClr val="lt1"/>
-          </a:fontRef>
-        </p:style>
-        <p:txBody>
-          <a:bodyPr rtlCol="0" anchor="ctr"/>
-          <a:lstStyle/>
-          <a:p>
-            <a:pPr algn="ctr"/>
-            <a:endParaRPr/>
-          </a:p>
-        </p:txBody>
-      </p:sp>
-      <p:sp>
-        <p:nvSpPr>
-          <p:cNvPr id="17433" name="TextBox 17432"/>
-          <p:cNvSpPr txBox="1"/>
-          <p:nvPr/>
-        </p:nvSpPr>
-        <p:spPr>
-          <a:xfrm>
-            <a:off x="8202168" y="4645152"/>
-            <a:ext cx="3163823" cy="274320"/>
-          </a:xfrm>
-          <a:prstGeom prst="rect">
-            <a:avLst/>
-          </a:prstGeom>
-          <a:noFill/>
-        </p:spPr>
-        <p:txBody>
-          <a:bodyPr wrap="square" lIns="0" tIns="0" rIns="0" bIns="0" anchor="t">
-            <a:spAutoFit/>
-          </a:bodyPr>
-          <a:lstStyle/>
-          <a:p>
-            <a:pPr algn="l">
-              <a:lnSpc>
-                <a:spcPct val="100000"/>
-              </a:lnSpc>
-            </a:pPr>
-            <a:r>
-              <a:rPr sz="1050" b="1" i="0">
-                <a:solidFill>
-                  <a:srgbClr val="1F3864"/>
-                </a:solidFill>
-                <a:latin typeface="Calibri"/>
-              </a:rPr>
-              <a:t>DevOps &amp; Scalability</a:t>
-            </a:r>
-          </a:p>
-        </p:txBody>
-      </p:sp>
-      <p:sp>
-        <p:nvSpPr>
-          <p:cNvPr id="17434" name="TextBox 17433"/>
-          <p:cNvSpPr txBox="1"/>
-          <p:nvPr/>
-        </p:nvSpPr>
-        <p:spPr>
-          <a:xfrm>
-            <a:off x="8001000" y="4956048"/>
-            <a:ext cx="3383279" cy="1234440"/>
-          </a:xfrm>
-          <a:prstGeom prst="rect">
-            <a:avLst/>
-          </a:prstGeom>
-          <a:noFill/>
-        </p:spPr>
-        <p:txBody>
-          <a:bodyPr wrap="square" lIns="0" tIns="0" rIns="0" bIns="0">
-            <a:spAutoFit/>
-          </a:bodyPr>
-          <a:lstStyle/>
-          <a:p>
-            <a:pPr>
-              <a:lnSpc>
-                <a:spcPct val="105000"/>
-              </a:lnSpc>
-              <a:spcAft>
-                <a:spcPts val="200"/>
-              </a:spcAft>
-            </a:pPr>
-            <a:r>
-              <a:rPr sz="800">
-                <a:solidFill>
-                  <a:srgbClr val="222A33"/>
-                </a:solidFill>
-                <a:latin typeface="Calibri"/>
-              </a:rPr>
-              <a:t>•  Docker containers orchestrated with Kubernetes</a:t>
-            </a:r>
-          </a:p>
-          <a:p>
-            <a:pPr>
-              <a:lnSpc>
-                <a:spcPct val="105000"/>
-              </a:lnSpc>
-              <a:spcAft>
-                <a:spcPts val="200"/>
-              </a:spcAft>
-            </a:pPr>
-            <a:r>
-              <a:rPr sz="800">
-                <a:solidFill>
-                  <a:srgbClr val="222A33"/>
-                </a:solidFill>
-                <a:latin typeface="Calibri"/>
-              </a:rPr>
-              <a:t>•  CI/CD via GitHub Actions; blue-green deployments</a:t>
-            </a:r>
-          </a:p>
-          <a:p>
-            <a:pPr>
-              <a:lnSpc>
-                <a:spcPct val="105000"/>
-              </a:lnSpc>
-              <a:spcAft>
-                <a:spcPts val="200"/>
-              </a:spcAft>
-            </a:pPr>
-            <a:r>
-              <a:rPr sz="800">
-                <a:solidFill>
-                  <a:srgbClr val="222A33"/>
-                </a:solidFill>
-                <a:latin typeface="Calibri"/>
-              </a:rPr>
-              <a:t>•  Hosted on AWS / NIC Cloud with auto-scaling groups</a:t>
-            </a:r>
-          </a:p>
-          <a:p>
-            <a:pPr>
-              <a:lnSpc>
-                <a:spcPct val="105000"/>
-              </a:lnSpc>
-              <a:spcAft>
-                <a:spcPts val="200"/>
-              </a:spcAft>
-            </a:pPr>
-            <a:r>
-              <a:rPr sz="800">
-                <a:solidFill>
-                  <a:srgbClr val="222A33"/>
-                </a:solidFill>
-                <a:latin typeface="Calibri"/>
-              </a:rPr>
-              <a:t>•  Prometheus + Grafana for monitoring &amp; alerting</a:t>
-            </a:r>
-          </a:p>
-          <a:p>
-            <a:pPr>
-              <a:lnSpc>
-                <a:spcPct val="105000"/>
-              </a:lnSpc>
-              <a:spcAft>
-                <a:spcPts val="200"/>
-              </a:spcAft>
-            </a:pPr>
-            <a:r>
-              <a:rPr sz="800">
-                <a:solidFill>
-                  <a:srgbClr val="222A33"/>
-                </a:solidFill>
-                <a:latin typeface="Calibri"/>
-              </a:rPr>
-              <a:t>•  Load-tested for 50,000+ concurrent users</a:t>
-            </a:r>
-          </a:p>
-        </p:txBody>
-      </p:sp>
     </p:spTree>
   </p:cSld>
   <p:clrMapOvr>
@@ -9624,7 +7714,196 @@
                 <a:ea typeface="ＭＳ Ｐゴシック" pitchFamily="1" charset="-128"/>
                 <a:cs typeface="Times New Roman" panose="02020603050405020304" pitchFamily="18" charset="0"/>
               </a:rPr>
-              <a:t>IMPACT AND BENEFITS</a:t>
+              <a:t>FEASIBILITY AND VIABILITY</a:t>
+            </a:r>
+          </a:p>
+        </p:txBody>
+      </p:sp>
+      <p:sp>
+        <p:nvSpPr>
+          <p:cNvPr id="17410" name="TextBox 8"/>
+          <p:cNvSpPr txBox="1">
+            <a:spLocks noChangeArrowheads="1"/>
+          </p:cNvSpPr>
+          <p:nvPr/>
+        </p:nvSpPr>
+        <p:spPr bwMode="auto">
+          <a:xfrm>
+            <a:off x="609600" y="1188720"/>
+            <a:ext cx="9385300" cy="1828800"/>
+          </a:xfrm>
+          <a:prstGeom prst="rect">
+            <a:avLst/>
+          </a:prstGeom>
+          <a:noFill/>
+          <a:ln w="9525">
+            <a:noFill/>
+            <a:miter lim="800000"/>
+            <a:headEnd/>
+            <a:tailEnd/>
+          </a:ln>
+        </p:spPr>
+        <p:txBody>
+          <a:bodyPr wrap="square">
+            <a:spAutoFit/>
+          </a:bodyPr>
+          <a:lstStyle/>
+          <a:p>
+            <a:pPr marL="342900" marR="0" lvl="0" indent="-342900" algn="just" defTabSz="457200" rtl="0" eaLnBrk="1" fontAlgn="base" latinLnBrk="0" hangingPunct="1">
+              <a:lnSpc>
+                <a:spcPct val="100000"/>
+              </a:lnSpc>
+              <a:spcBef>
+                <a:spcPct val="0"/>
+              </a:spcBef>
+              <a:spcAft>
+                <a:spcPct val="0"/>
+              </a:spcAft>
+              <a:buClrTx/>
+              <a:buSzTx/>
+              <a:buFont typeface="Arial" panose="020B0604020202020204" pitchFamily="34" charset="0"/>
+              <a:buChar char="•"/>
+              <a:tabLst/>
+              <a:defRPr/>
+            </a:pPr>
+            <a:r>
+              <a:rPr lang="en-US" sz="1300" dirty="0">
+                <a:solidFill>
+                  <a:prstClr val="black"/>
+                </a:solidFill>
+                <a:latin typeface="Arial" pitchFamily="34" charset="0"/>
+                <a:cs typeface="Arial" pitchFamily="34" charset="0"/>
+              </a:rPr>
+              <a:t>Built entirely on proven, freely available technology (React, FastAPI, PostgreSQL, open-weight LLMs); modular pipeline lets us ship text-format generation first and layer on video/infographic next</a:t>
+            </a:r>
+            <a:endParaRPr kumimoji="0" lang="en-US" sz="1800" b="0" i="0" u="none" strike="noStrike" kern="1200" cap="none" spc="0" normalizeH="0" baseline="0" noProof="0" dirty="0">
+              <a:ln>
+                <a:noFill/>
+              </a:ln>
+              <a:solidFill>
+                <a:prstClr val="black"/>
+              </a:solidFill>
+              <a:effectLst/>
+              <a:uLnTx/>
+              <a:uFillTx/>
+              <a:latin typeface="Arial" pitchFamily="34" charset="0"/>
+              <a:ea typeface="ＭＳ Ｐゴシック" pitchFamily="1" charset="-128"/>
+              <a:cs typeface="Arial" pitchFamily="34" charset="0"/>
+            </a:endParaRPr>
+          </a:p>
+          <a:p>
+            <a:pPr marL="342900" marR="0" lvl="0" indent="-342900" algn="just" defTabSz="457200" rtl="0" eaLnBrk="1" fontAlgn="base" latinLnBrk="0" hangingPunct="1">
+              <a:lnSpc>
+                <a:spcPct val="100000"/>
+              </a:lnSpc>
+              <a:spcBef>
+                <a:spcPct val="0"/>
+              </a:spcBef>
+              <a:spcAft>
+                <a:spcPct val="0"/>
+              </a:spcAft>
+              <a:buClrTx/>
+              <a:buSzTx/>
+              <a:buFont typeface="Arial" panose="020B0604020202020204" pitchFamily="34" charset="0"/>
+              <a:buChar char="•"/>
+              <a:tabLst/>
+              <a:defRPr/>
+            </a:pPr>
+            <a:r>
+              <a:rPr lang="en-US" sz="1300" dirty="0">
+                <a:solidFill>
+                  <a:prstClr val="black"/>
+                </a:solidFill>
+                <a:latin typeface="Arial" pitchFamily="34" charset="0"/>
+                <a:cs typeface="Arial" pitchFamily="34" charset="0"/>
+              </a:rPr>
+              <a:t>Regulatory: aligned with govt. data-classification &amp; on-prem hosting norms  |  DPDP Act 2023-compliant handling of personal data  |  role-based access enforces least-privilege exposure</a:t>
+            </a:r>
+            <a:endParaRPr kumimoji="0" lang="en-US" sz="1800" b="0" i="0" u="none" strike="noStrike" kern="1200" cap="none" spc="0" normalizeH="0" baseline="0" noProof="0" dirty="0">
+              <a:ln>
+                <a:noFill/>
+              </a:ln>
+              <a:solidFill>
+                <a:prstClr val="black"/>
+              </a:solidFill>
+              <a:effectLst/>
+              <a:uLnTx/>
+              <a:uFillTx/>
+              <a:latin typeface="Arial" pitchFamily="34" charset="0"/>
+              <a:ea typeface="ＭＳ Ｐゴシック" pitchFamily="1" charset="-128"/>
+              <a:cs typeface="Arial" pitchFamily="34" charset="0"/>
+            </a:endParaRPr>
+          </a:p>
+          <a:p>
+            <a:pPr marL="342900" marR="0" lvl="0" indent="-342900" algn="just" defTabSz="457200" rtl="0" eaLnBrk="1" fontAlgn="base" latinLnBrk="0" hangingPunct="1">
+              <a:lnSpc>
+                <a:spcPct val="100000"/>
+              </a:lnSpc>
+              <a:spcBef>
+                <a:spcPct val="0"/>
+              </a:spcBef>
+              <a:spcAft>
+                <a:spcPct val="0"/>
+              </a:spcAft>
+              <a:buClrTx/>
+              <a:buSzTx/>
+              <a:buFont typeface="Arial" panose="020B0604020202020204" pitchFamily="34" charset="0"/>
+              <a:buChar char="•"/>
+              <a:tabLst/>
+              <a:defRPr/>
+            </a:pPr>
+            <a:r>
+              <a:rPr lang="en-US" sz="1300" dirty="0">
+                <a:solidFill>
+                  <a:prstClr val="black"/>
+                </a:solidFill>
+                <a:latin typeface="Arial" pitchFamily="34" charset="0"/>
+                <a:cs typeface="Arial" pitchFamily="34" charset="0"/>
+              </a:rPr>
+              <a:t>Economic: low opex via self-hosted open-weight models vs. paid APIs  |  tiered licensing (departmental self-host or managed SaaS)  |  central govt. cybersecurity/communication grant potential</a:t>
+            </a:r>
+            <a:endParaRPr kumimoji="0" lang="en-US" sz="1800" b="0" i="0" u="none" strike="noStrike" kern="1200" cap="none" spc="0" normalizeH="0" baseline="0" noProof="0" dirty="0">
+              <a:ln>
+                <a:noFill/>
+              </a:ln>
+              <a:solidFill>
+                <a:prstClr val="black"/>
+              </a:solidFill>
+              <a:effectLst/>
+              <a:uLnTx/>
+              <a:uFillTx/>
+              <a:latin typeface="Arial" pitchFamily="34" charset="0"/>
+              <a:ea typeface="ＭＳ Ｐゴシック" pitchFamily="1" charset="-128"/>
+              <a:cs typeface="Arial" pitchFamily="34" charset="0"/>
+            </a:endParaRPr>
+          </a:p>
+          <a:p>
+            <a:pPr marL="342900" marR="0" lvl="0" indent="-342900" algn="just" defTabSz="457200" rtl="0" eaLnBrk="1" fontAlgn="base" latinLnBrk="0" hangingPunct="1">
+              <a:lnSpc>
+                <a:spcPct val="100000"/>
+              </a:lnSpc>
+              <a:spcBef>
+                <a:spcPct val="0"/>
+              </a:spcBef>
+              <a:spcAft>
+                <a:spcPct val="0"/>
+              </a:spcAft>
+              <a:buClrTx/>
+              <a:buSzTx/>
+              <a:buFont typeface="Arial" panose="020B0604020202020204" pitchFamily="34" charset="0"/>
+              <a:buChar char="•"/>
+              <a:tabLst/>
+              <a:defRPr/>
+            </a:pPr>
+            <a:r>
+              <a:rPr lang="en-US" sz="1300" dirty="0">
+                <a:solidFill>
+                  <a:prstClr val="black"/>
+                </a:solidFill>
+                <a:latin typeface="Arial" pitchFamily="34" charset="0"/>
+                <a:cs typeface="Arial" pitchFamily="34" charset="0"/>
+              </a:rPr>
+              <a:t>Key risks identified, with a mitigation strategy for each:</a:t>
             </a:r>
           </a:p>
         </p:txBody>
@@ -9801,7 +8080,7 @@
         <p:spPr>
           <a:xfrm>
             <a:off x="329773" y="252246"/>
-            <a:ext cx="1607182" cy="807334"/>
+            <a:ext cx="1251857" cy="807334"/>
           </a:xfrm>
           <a:prstGeom prst="ellipse">
             <a:avLst/>
@@ -9827,10 +8106,7 @@
           <a:p>
             <a:pPr algn="ctr"/>
             <a:r>
-              <a:rPr lang="en-US" b="1" dirty="0">
-                <a:latin typeface="Arial" panose="020B0604020202020204" pitchFamily="34" charset="0"/>
-                <a:cs typeface="Arial" panose="020B0604020202020204" pitchFamily="34" charset="0"/>
-              </a:rPr>
+              <a:rPr lang="en-US" sz="1000" dirty="0"/>
               <a:t>Team Invictus</a:t>
             </a:r>
             <a:endParaRPr lang="en-IN" dirty="0"/>
@@ -9869,14 +8145,14 @@
       </p:pic>
       <p:sp>
         <p:nvSpPr>
-          <p:cNvPr id="17410" name="TextBox 17409"/>
+          <p:cNvPr id="17411" name="TextBox 17410"/>
           <p:cNvSpPr txBox="1"/>
           <p:nvPr/>
         </p:nvSpPr>
         <p:spPr>
           <a:xfrm>
-            <a:off x="411480" y="1847088"/>
-            <a:ext cx="7315200" cy="274320"/>
+            <a:off x="822960" y="3063240"/>
+            <a:ext cx="4160520" cy="274320"/>
           </a:xfrm>
           <a:prstGeom prst="rect">
             <a:avLst/>
@@ -9884,619 +8160,24 @@
           <a:noFill/>
         </p:spPr>
         <p:txBody>
-          <a:bodyPr wrap="square" lIns="0" tIns="0" rIns="0" bIns="0" anchor="t">
+          <a:bodyPr wrap="square" lIns="0" tIns="0" rIns="0" bIns="0" anchor="ctr">
             <a:spAutoFit/>
           </a:bodyPr>
           <a:lstStyle/>
           <a:p>
-            <a:pPr algn="l">
-              <a:lnSpc>
-                <a:spcPct val="100000"/>
-              </a:lnSpc>
-            </a:pPr>
-            <a:r>
-              <a:rPr sz="1300" b="1" i="0">
+            <a:pPr algn="ctr"/>
+            <a:r>
+              <a:rPr sz="1200" b="1">
                 <a:solidFill>
-                  <a:srgbClr val="1F3864"/>
+                  <a:srgbClr val="B03A2E"/>
                 </a:solidFill>
                 <a:latin typeface="Calibri"/>
               </a:rPr>
-              <a:t>Stakeholder Impact</a:t>
-            </a:r>
-          </a:p>
-        </p:txBody>
-      </p:sp>
-      <p:graphicFrame>
-        <p:nvGraphicFramePr>
-          <p:cNvPr id="17411" name="Table 17410"/>
-          <p:cNvGraphicFramePr>
-            <a:graphicFrameLocks noGrp="1"/>
-          </p:cNvGraphicFramePr>
-          <p:nvPr/>
-        </p:nvGraphicFramePr>
-        <p:xfrm>
-          <a:off x="411480" y="2176272"/>
-          <a:ext cx="11338560" cy="1828800"/>
-        </p:xfrm>
-        <a:graphic>
-          <a:graphicData uri="http://schemas.openxmlformats.org/drawingml/2006/table">
-            <a:tbl>
-              <a:tblPr firstRow="1" bandRow="1">
-                <a:tableStyleId>{5C22544A-7EE6-4342-B048-85BDC9FD1C3A}</a:tableStyleId>
-              </a:tblPr>
-              <a:tblGrid>
-                <a:gridCol w="2011680">
-                  <a:extLst>
-                    <a:ext uri="{9D8B030D-6E8A-4147-A177-3AD203B41FA5}">
-                      <a16:colId xmlns:a16="http://schemas.microsoft.com/office/drawing/2014/main" val="20000"/>
-                    </a:ext>
-                  </a:extLst>
-                </a:gridCol>
-                <a:gridCol w="3291840">
-                  <a:extLst>
-                    <a:ext uri="{9D8B030D-6E8A-4147-A177-3AD203B41FA5}">
-                      <a16:colId xmlns:a16="http://schemas.microsoft.com/office/drawing/2014/main" val="20001"/>
-                    </a:ext>
-                  </a:extLst>
-                </a:gridCol>
-                <a:gridCol w="3931920">
-                  <a:extLst>
-                    <a:ext uri="{9D8B030D-6E8A-4147-A177-3AD203B41FA5}">
-                      <a16:colId xmlns:a16="http://schemas.microsoft.com/office/drawing/2014/main" val="20002"/>
-                    </a:ext>
-                  </a:extLst>
-                </a:gridCol>
-                <a:gridCol w="2103120">
-                  <a:extLst>
-                    <a:ext uri="{9D8B030D-6E8A-4147-A177-3AD203B41FA5}">
-                      <a16:colId xmlns:a16="http://schemas.microsoft.com/office/drawing/2014/main" val="20003"/>
-                    </a:ext>
-                  </a:extLst>
-                </a:gridCol>
-              </a:tblGrid>
-              <a:tr h="365760">
-                <a:tc>
-                  <a:txBody>
-                    <a:bodyPr/>
-                    <a:lstStyle/>
-                    <a:p>
-                      <a:pPr algn="l"/>
-                      <a:r>
-                        <a:rPr sz="950" b="1">
-                          <a:solidFill>
-                            <a:srgbClr val="FFFFFF"/>
-                          </a:solidFill>
-                        </a:rPr>
-                        <a:t>Stakeholder</a:t>
-                      </a:r>
-                    </a:p>
-                  </a:txBody>
-                  <a:tcPr marL="76200" marR="50800" marT="38100" marB="38100">
-                    <a:solidFill>
-                      <a:srgbClr val="1F3864"/>
-                    </a:solidFill>
-                  </a:tcPr>
-                </a:tc>
-                <a:tc>
-                  <a:txBody>
-                    <a:bodyPr/>
-                    <a:lstStyle/>
-                    <a:p>
-                      <a:pPr algn="l"/>
-                      <a:r>
-                        <a:rPr sz="950" b="1">
-                          <a:solidFill>
-                            <a:srgbClr val="FFFFFF"/>
-                          </a:solidFill>
-                        </a:rPr>
-                        <a:t>Pain Point Today</a:t>
-                      </a:r>
-                    </a:p>
-                  </a:txBody>
-                  <a:tcPr marL="76200" marR="50800" marT="38100" marB="38100">
-                    <a:solidFill>
-                      <a:srgbClr val="1F3864"/>
-                    </a:solidFill>
-                  </a:tcPr>
-                </a:tc>
-                <a:tc>
-                  <a:txBody>
-                    <a:bodyPr/>
-                    <a:lstStyle/>
-                    <a:p>
-                      <a:pPr algn="l"/>
-                      <a:r>
-                        <a:rPr sz="950" b="1">
-                          <a:solidFill>
-                            <a:srgbClr val="FFFFFF"/>
-                          </a:solidFill>
-                        </a:rPr>
-                        <a:t>Impact with SKILL-SETU</a:t>
-                      </a:r>
-                    </a:p>
-                  </a:txBody>
-                  <a:tcPr marL="76200" marR="50800" marT="38100" marB="38100">
-                    <a:solidFill>
-                      <a:srgbClr val="1F3864"/>
-                    </a:solidFill>
-                  </a:tcPr>
-                </a:tc>
-                <a:tc>
-                  <a:txBody>
-                    <a:bodyPr/>
-                    <a:lstStyle/>
-                    <a:p>
-                      <a:pPr algn="l"/>
-                      <a:r>
-                        <a:rPr sz="950" b="1">
-                          <a:solidFill>
-                            <a:srgbClr val="FFFFFF"/>
-                          </a:solidFill>
-                        </a:rPr>
-                        <a:t>Est. KPI</a:t>
-                      </a:r>
-                    </a:p>
-                  </a:txBody>
-                  <a:tcPr marL="76200" marR="50800" marT="38100" marB="38100">
-                    <a:solidFill>
-                      <a:srgbClr val="1F3864"/>
-                    </a:solidFill>
-                  </a:tcPr>
-                </a:tc>
-                <a:extLst>
-                  <a:ext uri="{0D108BD9-81ED-4DB2-BD59-A6C34878D82A}">
-                    <a16:rowId xmlns:a16="http://schemas.microsoft.com/office/drawing/2014/main" val="10000"/>
-                  </a:ext>
-                </a:extLst>
-              </a:tr>
-              <a:tr h="365760">
-                <a:tc>
-                  <a:txBody>
-                    <a:bodyPr/>
-                    <a:lstStyle/>
-                    <a:p>
-                      <a:pPr>
-                        <a:lnSpc>
-                          <a:spcPct val="100000"/>
-                        </a:lnSpc>
-                      </a:pPr>
-                      <a:r>
-                        <a:rPr sz="850">
-                          <a:solidFill>
-                            <a:srgbClr val="222A33"/>
-                          </a:solidFill>
-                        </a:rPr>
-                        <a:t>Students</a:t>
-                      </a:r>
-                    </a:p>
-                  </a:txBody>
-                  <a:tcPr marL="76200" marR="50800" marT="38100" marB="38100">
-                    <a:solidFill>
-                      <a:srgbClr val="FFFFFF"/>
-                    </a:solidFill>
-                  </a:tcPr>
-                </a:tc>
-                <a:tc>
-                  <a:txBody>
-                    <a:bodyPr/>
-                    <a:lstStyle/>
-                    <a:p>
-                      <a:pPr>
-                        <a:lnSpc>
-                          <a:spcPct val="100000"/>
-                        </a:lnSpc>
-                      </a:pPr>
-                      <a:r>
-                        <a:rPr sz="850">
-                          <a:solidFill>
-                            <a:srgbClr val="222A33"/>
-                          </a:solidFill>
-                        </a:rPr>
-                        <a:t>No clarity on industry-required skills</a:t>
-                      </a:r>
-                    </a:p>
-                  </a:txBody>
-                  <a:tcPr marL="76200" marR="50800" marT="38100" marB="38100">
-                    <a:solidFill>
-                      <a:srgbClr val="FFFFFF"/>
-                    </a:solidFill>
-                  </a:tcPr>
-                </a:tc>
-                <a:tc>
-                  <a:txBody>
-                    <a:bodyPr/>
-                    <a:lstStyle/>
-                    <a:p>
-                      <a:pPr>
-                        <a:lnSpc>
-                          <a:spcPct val="100000"/>
-                        </a:lnSpc>
-                      </a:pPr>
-                      <a:r>
-                        <a:rPr sz="850">
-                          <a:solidFill>
-                            <a:srgbClr val="222A33"/>
-                          </a:solidFill>
-                        </a:rPr>
-                        <a:t>Personalised skill-gap report + internship matches</a:t>
-                      </a:r>
-                    </a:p>
-                  </a:txBody>
-                  <a:tcPr marL="76200" marR="50800" marT="38100" marB="38100">
-                    <a:solidFill>
-                      <a:srgbClr val="FFFFFF"/>
-                    </a:solidFill>
-                  </a:tcPr>
-                </a:tc>
-                <a:tc>
-                  <a:txBody>
-                    <a:bodyPr/>
-                    <a:lstStyle/>
-                    <a:p>
-                      <a:pPr>
-                        <a:lnSpc>
-                          <a:spcPct val="100000"/>
-                        </a:lnSpc>
-                      </a:pPr>
-                      <a:r>
-                        <a:rPr sz="850">
-                          <a:solidFill>
-                            <a:srgbClr val="222A33"/>
-                          </a:solidFill>
-                        </a:rPr>
-                        <a:t>40%+ faster matching</a:t>
-                      </a:r>
-                    </a:p>
-                  </a:txBody>
-                  <a:tcPr marL="76200" marR="50800" marT="38100" marB="38100">
-                    <a:solidFill>
-                      <a:srgbClr val="FFFFFF"/>
-                    </a:solidFill>
-                  </a:tcPr>
-                </a:tc>
-                <a:extLst>
-                  <a:ext uri="{0D108BD9-81ED-4DB2-BD59-A6C34878D82A}">
-                    <a16:rowId xmlns:a16="http://schemas.microsoft.com/office/drawing/2014/main" val="10001"/>
-                  </a:ext>
-                </a:extLst>
-              </a:tr>
-              <a:tr h="365760">
-                <a:tc>
-                  <a:txBody>
-                    <a:bodyPr/>
-                    <a:lstStyle/>
-                    <a:p>
-                      <a:pPr>
-                        <a:lnSpc>
-                          <a:spcPct val="100000"/>
-                        </a:lnSpc>
-                      </a:pPr>
-                      <a:r>
-                        <a:rPr sz="850">
-                          <a:solidFill>
-                            <a:srgbClr val="222A33"/>
-                          </a:solidFill>
-                        </a:rPr>
-                        <a:t>Industry / Recruiters</a:t>
-                      </a:r>
-                    </a:p>
-                  </a:txBody>
-                  <a:tcPr marL="76200" marR="50800" marT="38100" marB="38100">
-                    <a:solidFill>
-                      <a:srgbClr val="F4F7FA"/>
-                    </a:solidFill>
-                  </a:tcPr>
-                </a:tc>
-                <a:tc>
-                  <a:txBody>
-                    <a:bodyPr/>
-                    <a:lstStyle/>
-                    <a:p>
-                      <a:pPr>
-                        <a:lnSpc>
-                          <a:spcPct val="100000"/>
-                        </a:lnSpc>
-                      </a:pPr>
-                      <a:r>
-                        <a:rPr sz="850">
-                          <a:solidFill>
-                            <a:srgbClr val="222A33"/>
-                          </a:solidFill>
-                        </a:rPr>
-                        <a:t>Hard to find verified, job-ready talent</a:t>
-                      </a:r>
-                    </a:p>
-                  </a:txBody>
-                  <a:tcPr marL="76200" marR="50800" marT="38100" marB="38100">
-                    <a:solidFill>
-                      <a:srgbClr val="F4F7FA"/>
-                    </a:solidFill>
-                  </a:tcPr>
-                </a:tc>
-                <a:tc>
-                  <a:txBody>
-                    <a:bodyPr/>
-                    <a:lstStyle/>
-                    <a:p>
-                      <a:pPr>
-                        <a:lnSpc>
-                          <a:spcPct val="100000"/>
-                        </a:lnSpc>
-                      </a:pPr>
-                      <a:r>
-                        <a:rPr sz="850">
-                          <a:solidFill>
-                            <a:srgbClr val="222A33"/>
-                          </a:solidFill>
-                        </a:rPr>
-                        <a:t>Ranked candidate shortlist by competency score</a:t>
-                      </a:r>
-                    </a:p>
-                  </a:txBody>
-                  <a:tcPr marL="76200" marR="50800" marT="38100" marB="38100">
-                    <a:solidFill>
-                      <a:srgbClr val="F4F7FA"/>
-                    </a:solidFill>
-                  </a:tcPr>
-                </a:tc>
-                <a:tc>
-                  <a:txBody>
-                    <a:bodyPr/>
-                    <a:lstStyle/>
-                    <a:p>
-                      <a:pPr>
-                        <a:lnSpc>
-                          <a:spcPct val="100000"/>
-                        </a:lnSpc>
-                      </a:pPr>
-                      <a:r>
-                        <a:rPr sz="850">
-                          <a:solidFill>
-                            <a:srgbClr val="222A33"/>
-                          </a:solidFill>
-                        </a:rPr>
-                        <a:t>30% lower screening time</a:t>
-                      </a:r>
-                    </a:p>
-                  </a:txBody>
-                  <a:tcPr marL="76200" marR="50800" marT="38100" marB="38100">
-                    <a:solidFill>
-                      <a:srgbClr val="F4F7FA"/>
-                    </a:solidFill>
-                  </a:tcPr>
-                </a:tc>
-                <a:extLst>
-                  <a:ext uri="{0D108BD9-81ED-4DB2-BD59-A6C34878D82A}">
-                    <a16:rowId xmlns:a16="http://schemas.microsoft.com/office/drawing/2014/main" val="10002"/>
-                  </a:ext>
-                </a:extLst>
-              </a:tr>
-              <a:tr h="365760">
-                <a:tc>
-                  <a:txBody>
-                    <a:bodyPr/>
-                    <a:lstStyle/>
-                    <a:p>
-                      <a:pPr>
-                        <a:lnSpc>
-                          <a:spcPct val="100000"/>
-                        </a:lnSpc>
-                      </a:pPr>
-                      <a:r>
-                        <a:rPr sz="850">
-                          <a:solidFill>
-                            <a:srgbClr val="222A33"/>
-                          </a:solidFill>
-                        </a:rPr>
-                        <a:t>Academia / Faculty</a:t>
-                      </a:r>
-                    </a:p>
-                  </a:txBody>
-                  <a:tcPr marL="76200" marR="50800" marT="38100" marB="38100">
-                    <a:solidFill>
-                      <a:srgbClr val="FFFFFF"/>
-                    </a:solidFill>
-                  </a:tcPr>
-                </a:tc>
-                <a:tc>
-                  <a:txBody>
-                    <a:bodyPr/>
-                    <a:lstStyle/>
-                    <a:p>
-                      <a:pPr>
-                        <a:lnSpc>
-                          <a:spcPct val="100000"/>
-                        </a:lnSpc>
-                      </a:pPr>
-                      <a:r>
-                        <a:rPr sz="850">
-                          <a:solidFill>
-                            <a:srgbClr val="222A33"/>
-                          </a:solidFill>
-                        </a:rPr>
-                        <a:t>No visibility into placement or curriculum gaps</a:t>
-                      </a:r>
-                    </a:p>
-                  </a:txBody>
-                  <a:tcPr marL="76200" marR="50800" marT="38100" marB="38100">
-                    <a:solidFill>
-                      <a:srgbClr val="FFFFFF"/>
-                    </a:solidFill>
-                  </a:tcPr>
-                </a:tc>
-                <a:tc>
-                  <a:txBody>
-                    <a:bodyPr/>
-                    <a:lstStyle/>
-                    <a:p>
-                      <a:pPr>
-                        <a:lnSpc>
-                          <a:spcPct val="100000"/>
-                        </a:lnSpc>
-                      </a:pPr>
-                      <a:r>
-                        <a:rPr sz="850">
-                          <a:solidFill>
-                            <a:srgbClr val="222A33"/>
-                          </a:solidFill>
-                        </a:rPr>
-                        <a:t>Live curriculum-gap heatmaps &amp; placement dashboard</a:t>
-                      </a:r>
-                    </a:p>
-                  </a:txBody>
-                  <a:tcPr marL="76200" marR="50800" marT="38100" marB="38100">
-                    <a:solidFill>
-                      <a:srgbClr val="FFFFFF"/>
-                    </a:solidFill>
-                  </a:tcPr>
-                </a:tc>
-                <a:tc>
-                  <a:txBody>
-                    <a:bodyPr/>
-                    <a:lstStyle/>
-                    <a:p>
-                      <a:pPr>
-                        <a:lnSpc>
-                          <a:spcPct val="100000"/>
-                        </a:lnSpc>
-                      </a:pPr>
-                      <a:r>
-                        <a:rPr sz="850">
-                          <a:solidFill>
-                            <a:srgbClr val="222A33"/>
-                          </a:solidFill>
-                        </a:rPr>
-                        <a:t>360° institutional visibility</a:t>
-                      </a:r>
-                    </a:p>
-                  </a:txBody>
-                  <a:tcPr marL="76200" marR="50800" marT="38100" marB="38100">
-                    <a:solidFill>
-                      <a:srgbClr val="FFFFFF"/>
-                    </a:solidFill>
-                  </a:tcPr>
-                </a:tc>
-                <a:extLst>
-                  <a:ext uri="{0D108BD9-81ED-4DB2-BD59-A6C34878D82A}">
-                    <a16:rowId xmlns:a16="http://schemas.microsoft.com/office/drawing/2014/main" val="10003"/>
-                  </a:ext>
-                </a:extLst>
-              </a:tr>
-              <a:tr h="365760">
-                <a:tc>
-                  <a:txBody>
-                    <a:bodyPr/>
-                    <a:lstStyle/>
-                    <a:p>
-                      <a:pPr>
-                        <a:lnSpc>
-                          <a:spcPct val="100000"/>
-                        </a:lnSpc>
-                      </a:pPr>
-                      <a:r>
-                        <a:rPr sz="850">
-                          <a:solidFill>
-                            <a:srgbClr val="222A33"/>
-                          </a:solidFill>
-                        </a:rPr>
-                        <a:t>Ministry of Ayush</a:t>
-                      </a:r>
-                    </a:p>
-                  </a:txBody>
-                  <a:tcPr marL="76200" marR="50800" marT="38100" marB="38100">
-                    <a:solidFill>
-                      <a:srgbClr val="F4F7FA"/>
-                    </a:solidFill>
-                  </a:tcPr>
-                </a:tc>
-                <a:tc>
-                  <a:txBody>
-                    <a:bodyPr/>
-                    <a:lstStyle/>
-                    <a:p>
-                      <a:pPr>
-                        <a:lnSpc>
-                          <a:spcPct val="100000"/>
-                        </a:lnSpc>
-                      </a:pPr>
-                      <a:r>
-                        <a:rPr sz="850">
-                          <a:solidFill>
-                            <a:srgbClr val="222A33"/>
-                          </a:solidFill>
-                        </a:rPr>
-                        <a:t>Fragmented, manual skill &amp; placement data</a:t>
-                      </a:r>
-                    </a:p>
-                  </a:txBody>
-                  <a:tcPr marL="76200" marR="50800" marT="38100" marB="38100">
-                    <a:solidFill>
-                      <a:srgbClr val="F4F7FA"/>
-                    </a:solidFill>
-                  </a:tcPr>
-                </a:tc>
-                <a:tc>
-                  <a:txBody>
-                    <a:bodyPr/>
-                    <a:lstStyle/>
-                    <a:p>
-                      <a:pPr>
-                        <a:lnSpc>
-                          <a:spcPct val="100000"/>
-                        </a:lnSpc>
-                      </a:pPr>
-                      <a:r>
-                        <a:rPr sz="850">
-                          <a:solidFill>
-                            <a:srgbClr val="222A33"/>
-                          </a:solidFill>
-                        </a:rPr>
-                        <a:t>Unified national skill-mapping dataset</a:t>
-                      </a:r>
-                    </a:p>
-                  </a:txBody>
-                  <a:tcPr marL="76200" marR="50800" marT="38100" marB="38100">
-                    <a:solidFill>
-                      <a:srgbClr val="F4F7FA"/>
-                    </a:solidFill>
-                  </a:tcPr>
-                </a:tc>
-                <a:tc>
-                  <a:txBody>
-                    <a:bodyPr/>
-                    <a:lstStyle/>
-                    <a:p>
-                      <a:pPr>
-                        <a:lnSpc>
-                          <a:spcPct val="100000"/>
-                        </a:lnSpc>
-                      </a:pPr>
-                      <a:r>
-                        <a:rPr sz="850">
-                          <a:solidFill>
-                            <a:srgbClr val="222A33"/>
-                          </a:solidFill>
-                        </a:rPr>
-                        <a:t>1 national data source</a:t>
-                      </a:r>
-                    </a:p>
-                  </a:txBody>
-                  <a:tcPr marL="76200" marR="50800" marT="38100" marB="38100">
-                    <a:solidFill>
-                      <a:srgbClr val="F4F7FA"/>
-                    </a:solidFill>
-                  </a:tcPr>
-                </a:tc>
-                <a:extLst>
-                  <a:ext uri="{0D108BD9-81ED-4DB2-BD59-A6C34878D82A}">
-                    <a16:rowId xmlns:a16="http://schemas.microsoft.com/office/drawing/2014/main" val="10004"/>
-                  </a:ext>
-                </a:extLst>
-              </a:tr>
-            </a:tbl>
-          </a:graphicData>
-        </a:graphic>
-      </p:graphicFrame>
+              <a:t>Risk</a:t>
+            </a:r>
+          </a:p>
+        </p:txBody>
+      </p:sp>
       <p:sp>
         <p:nvSpPr>
           <p:cNvPr id="17412" name="TextBox 17411"/>
@@ -10505,8 +8186,8 @@
         </p:nvSpPr>
         <p:spPr>
           <a:xfrm>
-            <a:off x="411480" y="4251960"/>
-            <a:ext cx="5486400" cy="274320"/>
+            <a:off x="5486400" y="3063240"/>
+            <a:ext cx="4160520" cy="274320"/>
           </a:xfrm>
           <a:prstGeom prst="rect">
             <a:avLst/>
@@ -10514,24 +8195,20 @@
           <a:noFill/>
         </p:spPr>
         <p:txBody>
-          <a:bodyPr wrap="square" lIns="0" tIns="0" rIns="0" bIns="0" anchor="t">
+          <a:bodyPr wrap="square" lIns="0" tIns="0" rIns="0" bIns="0" anchor="ctr">
             <a:spAutoFit/>
           </a:bodyPr>
           <a:lstStyle/>
           <a:p>
-            <a:pPr algn="l">
-              <a:lnSpc>
-                <a:spcPct val="100000"/>
-              </a:lnSpc>
-            </a:pPr>
-            <a:r>
-              <a:rPr sz="1300" b="1" i="0">
+            <a:pPr algn="ctr"/>
+            <a:r>
+              <a:rPr sz="1200" b="1">
                 <a:solidFill>
-                  <a:srgbClr val="1F3864"/>
+                  <a:srgbClr val="0070C0"/>
                 </a:solidFill>
                 <a:latin typeface="Calibri"/>
               </a:rPr>
-              <a:t>Key Outcomes</a:t>
+              <a:t>Mitigation</a:t>
             </a:r>
           </a:p>
         </p:txBody>
@@ -10544,16 +8221,14 @@
         </p:nvSpPr>
         <p:spPr>
           <a:xfrm>
-            <a:off x="411480" y="4572000"/>
-            <a:ext cx="2633472" cy="1234440"/>
+            <a:off x="822960" y="3383280"/>
+            <a:ext cx="4160520" cy="420624"/>
           </a:xfrm>
           <a:prstGeom prst="roundRect">
-            <a:avLst>
-              <a:gd name="adj" fmla="val 6000"/>
-            </a:avLst>
+            <a:avLst/>
           </a:prstGeom>
           <a:solidFill>
-            <a:srgbClr val="1F3864"/>
+            <a:srgbClr val="F6E1DD"/>
           </a:solidFill>
           <a:ln>
             <a:noFill/>
@@ -10575,124 +8250,38 @@
           </a:fontRef>
         </p:style>
         <p:txBody>
-          <a:bodyPr rtlCol="0" anchor="ctr"/>
+          <a:bodyPr wrap="square" lIns="50800" tIns="25400" rIns="50800" bIns="25400" rtlCol="0" anchor="ctr"/>
           <a:lstStyle/>
           <a:p>
             <a:pPr algn="ctr"/>
-            <a:endParaRPr/>
-          </a:p>
-        </p:txBody>
-      </p:sp>
-      <p:sp>
-        <p:nvSpPr>
-          <p:cNvPr id="17414" name="TextBox 17413"/>
-          <p:cNvSpPr txBox="1"/>
-          <p:nvPr/>
-        </p:nvSpPr>
-        <p:spPr>
-          <a:xfrm>
-            <a:off x="548640" y="4645152"/>
-            <a:ext cx="2359152" cy="555498"/>
-          </a:xfrm>
-          <a:prstGeom prst="rect">
-            <a:avLst/>
-          </a:prstGeom>
-          <a:noFill/>
-        </p:spPr>
-        <p:txBody>
-          <a:bodyPr wrap="square" lIns="0" tIns="0" rIns="0" bIns="0" anchor="t">
-            <a:spAutoFit/>
-          </a:bodyPr>
-          <a:lstStyle/>
-          <a:p>
-            <a:pPr algn="ctr">
-              <a:lnSpc>
-                <a:spcPct val="100000"/>
-              </a:lnSpc>
-            </a:pPr>
-            <a:r>
-              <a:rPr sz="2000" b="1" i="0">
+            <a:r>
+              <a:rPr sz="1100" b="0">
                 <a:solidFill>
-                  <a:srgbClr val="F28C28"/>
+                  <a:srgbClr val="B03A2E"/>
                 </a:solidFill>
                 <a:latin typeface="Calibri"/>
               </a:rPr>
-              <a:t>40%+</a:t>
-            </a:r>
-          </a:p>
-        </p:txBody>
-      </p:sp>
-      <p:sp>
-        <p:nvSpPr>
-          <p:cNvPr id="17415" name="TextBox 17414"/>
-          <p:cNvSpPr txBox="1"/>
+              <a:t>Hallucinated or inaccurate generated content</a:t>
+            </a:r>
+          </a:p>
+        </p:txBody>
+      </p:sp>
+      <p:sp>
+        <p:nvSpPr>
+          <p:cNvPr id="17414" name="Right Arrow 17413"/>
+          <p:cNvSpPr/>
           <p:nvPr/>
         </p:nvSpPr>
         <p:spPr>
           <a:xfrm>
-            <a:off x="502920" y="5213908"/>
-            <a:ext cx="2450591" cy="555498"/>
-          </a:xfrm>
-          <a:prstGeom prst="rect">
+            <a:off x="5029200" y="3511296"/>
+            <a:ext cx="384048" cy="164592"/>
+          </a:xfrm>
+          <a:prstGeom prst="rightArrow">
             <a:avLst/>
           </a:prstGeom>
-          <a:noFill/>
-        </p:spPr>
-        <p:txBody>
-          <a:bodyPr wrap="square" lIns="0" tIns="0" rIns="0" bIns="0">
-            <a:spAutoFit/>
-          </a:bodyPr>
-          <a:lstStyle/>
-          <a:p>
-            <a:pPr algn="ctr">
-              <a:lnSpc>
-                <a:spcPct val="100000"/>
-              </a:lnSpc>
-            </a:pPr>
-            <a:r>
-              <a:rPr sz="850">
-                <a:solidFill>
-                  <a:srgbClr val="FFFFFF"/>
-                </a:solidFill>
-              </a:rPr>
-              <a:t>Faster student-to-</a:t>
-            </a:r>
-          </a:p>
-          <a:p>
-            <a:pPr algn="ctr">
-              <a:lnSpc>
-                <a:spcPct val="100000"/>
-              </a:lnSpc>
-            </a:pPr>
-            <a:r>
-              <a:rPr sz="850">
-                <a:solidFill>
-                  <a:srgbClr val="FFFFFF"/>
-                </a:solidFill>
-              </a:rPr>
-              <a:t>internship matching</a:t>
-            </a:r>
-          </a:p>
-        </p:txBody>
-      </p:sp>
-      <p:sp>
-        <p:nvSpPr>
-          <p:cNvPr id="17416" name="Rounded Rectangle 17415"/>
-          <p:cNvSpPr/>
-          <p:nvPr/>
-        </p:nvSpPr>
-        <p:spPr>
-          <a:xfrm>
-            <a:off x="3172968" y="4572000"/>
-            <a:ext cx="2633472" cy="1234440"/>
-          </a:xfrm>
-          <a:prstGeom prst="roundRect">
-            <a:avLst>
-              <a:gd name="adj" fmla="val 6000"/>
-            </a:avLst>
-          </a:prstGeom>
           <a:solidFill>
-            <a:srgbClr val="1F3864"/>
+            <a:srgbClr val="1E2A4A"/>
           </a:solidFill>
           <a:ln>
             <a:noFill/>
@@ -10724,114 +8313,20 @@
       </p:sp>
       <p:sp>
         <p:nvSpPr>
-          <p:cNvPr id="17417" name="TextBox 17416"/>
-          <p:cNvSpPr txBox="1"/>
+          <p:cNvPr id="17415" name="Rounded Rectangle 17414"/>
+          <p:cNvSpPr/>
           <p:nvPr/>
         </p:nvSpPr>
         <p:spPr>
           <a:xfrm>
-            <a:off x="3310128" y="4645152"/>
-            <a:ext cx="2359152" cy="555498"/>
-          </a:xfrm>
-          <a:prstGeom prst="rect">
+            <a:off x="5486400" y="3383280"/>
+            <a:ext cx="4160520" cy="420624"/>
+          </a:xfrm>
+          <a:prstGeom prst="roundRect">
             <a:avLst/>
           </a:prstGeom>
-          <a:noFill/>
-        </p:spPr>
-        <p:txBody>
-          <a:bodyPr wrap="square" lIns="0" tIns="0" rIns="0" bIns="0" anchor="t">
-            <a:spAutoFit/>
-          </a:bodyPr>
-          <a:lstStyle/>
-          <a:p>
-            <a:pPr algn="ctr">
-              <a:lnSpc>
-                <a:spcPct val="100000"/>
-              </a:lnSpc>
-            </a:pPr>
-            <a:r>
-              <a:rPr sz="2000" b="1" i="0">
-                <a:solidFill>
-                  <a:srgbClr val="F28C28"/>
-                </a:solidFill>
-                <a:latin typeface="Calibri"/>
-              </a:rPr>
-              <a:t>360°</a:t>
-            </a:r>
-          </a:p>
-        </p:txBody>
-      </p:sp>
-      <p:sp>
-        <p:nvSpPr>
-          <p:cNvPr id="17418" name="TextBox 17417"/>
-          <p:cNvSpPr txBox="1"/>
-          <p:nvPr/>
-        </p:nvSpPr>
-        <p:spPr>
-          <a:xfrm>
-            <a:off x="3264408" y="5213908"/>
-            <a:ext cx="2450591" cy="555498"/>
-          </a:xfrm>
-          <a:prstGeom prst="rect">
-            <a:avLst/>
-          </a:prstGeom>
-          <a:noFill/>
-        </p:spPr>
-        <p:txBody>
-          <a:bodyPr wrap="square" lIns="0" tIns="0" rIns="0" bIns="0">
-            <a:spAutoFit/>
-          </a:bodyPr>
-          <a:lstStyle/>
-          <a:p>
-            <a:pPr algn="ctr">
-              <a:lnSpc>
-                <a:spcPct val="100000"/>
-              </a:lnSpc>
-            </a:pPr>
-            <a:r>
-              <a:rPr sz="850">
-                <a:solidFill>
-                  <a:srgbClr val="FFFFFF"/>
-                </a:solidFill>
-              </a:rPr>
-              <a:t>Visibility across academia,</a:t>
-            </a:r>
-          </a:p>
-          <a:p>
-            <a:pPr algn="ctr">
-              <a:lnSpc>
-                <a:spcPct val="100000"/>
-              </a:lnSpc>
-            </a:pPr>
-            <a:r>
-              <a:rPr sz="850">
-                <a:solidFill>
-                  <a:srgbClr val="FFFFFF"/>
-                </a:solidFill>
-              </a:rPr>
-              <a:t>industry &amp; government</a:t>
-            </a:r>
-          </a:p>
-        </p:txBody>
-      </p:sp>
-      <p:sp>
-        <p:nvSpPr>
-          <p:cNvPr id="17419" name="Rounded Rectangle 17418"/>
-          <p:cNvSpPr/>
-          <p:nvPr/>
-        </p:nvSpPr>
-        <p:spPr>
-          <a:xfrm>
-            <a:off x="5934456" y="4572000"/>
-            <a:ext cx="2633472" cy="1234440"/>
-          </a:xfrm>
-          <a:prstGeom prst="roundRect">
-            <a:avLst>
-              <a:gd name="adj" fmla="val 6000"/>
-            </a:avLst>
-          </a:prstGeom>
           <a:solidFill>
-            <a:srgbClr val="1F3864"/>
+            <a:srgbClr val="DDECF7"/>
           </a:solidFill>
           <a:ln>
             <a:noFill/>
@@ -10853,124 +8348,38 @@
           </a:fontRef>
         </p:style>
         <p:txBody>
-          <a:bodyPr rtlCol="0" anchor="ctr"/>
+          <a:bodyPr wrap="square" lIns="50800" tIns="25400" rIns="50800" bIns="25400" rtlCol="0" anchor="ctr"/>
           <a:lstStyle/>
           <a:p>
             <a:pPr algn="ctr"/>
-            <a:endParaRPr/>
-          </a:p>
-        </p:txBody>
-      </p:sp>
-      <p:sp>
-        <p:nvSpPr>
-          <p:cNvPr id="17420" name="TextBox 17419"/>
-          <p:cNvSpPr txBox="1"/>
-          <p:nvPr/>
-        </p:nvSpPr>
-        <p:spPr>
-          <a:xfrm>
-            <a:off x="6071616" y="4645152"/>
-            <a:ext cx="2359152" cy="555498"/>
-          </a:xfrm>
-          <a:prstGeom prst="rect">
-            <a:avLst/>
-          </a:prstGeom>
-          <a:noFill/>
-        </p:spPr>
-        <p:txBody>
-          <a:bodyPr wrap="square" lIns="0" tIns="0" rIns="0" bIns="0" anchor="t">
-            <a:spAutoFit/>
-          </a:bodyPr>
-          <a:lstStyle/>
-          <a:p>
-            <a:pPr algn="ctr">
-              <a:lnSpc>
-                <a:spcPct val="100000"/>
-              </a:lnSpc>
-            </a:pPr>
-            <a:r>
-              <a:rPr sz="2000" b="1" i="0">
+            <a:r>
+              <a:rPr sz="1100" b="0">
                 <a:solidFill>
-                  <a:srgbClr val="F28C28"/>
+                  <a:srgbClr val="1E2A4A"/>
                 </a:solidFill>
                 <a:latin typeface="Calibri"/>
               </a:rPr>
-              <a:t>50K+</a:t>
-            </a:r>
-          </a:p>
-        </p:txBody>
-      </p:sp>
-      <p:sp>
-        <p:nvSpPr>
-          <p:cNvPr id="17421" name="TextBox 17420"/>
-          <p:cNvSpPr txBox="1"/>
+              <a:t>Human-in-the-loop review + retrieval-grounded generation</a:t>
+            </a:r>
+          </a:p>
+        </p:txBody>
+      </p:sp>
+      <p:sp>
+        <p:nvSpPr>
+          <p:cNvPr id="17416" name="Rounded Rectangle 17415"/>
+          <p:cNvSpPr/>
           <p:nvPr/>
         </p:nvSpPr>
         <p:spPr>
           <a:xfrm>
-            <a:off x="6025896" y="5213908"/>
-            <a:ext cx="2450591" cy="555498"/>
-          </a:xfrm>
-          <a:prstGeom prst="rect">
+            <a:off x="822960" y="3895344"/>
+            <a:ext cx="4160520" cy="420624"/>
+          </a:xfrm>
+          <a:prstGeom prst="roundRect">
             <a:avLst/>
           </a:prstGeom>
-          <a:noFill/>
-        </p:spPr>
-        <p:txBody>
-          <a:bodyPr wrap="square" lIns="0" tIns="0" rIns="0" bIns="0">
-            <a:spAutoFit/>
-          </a:bodyPr>
-          <a:lstStyle/>
-          <a:p>
-            <a:pPr algn="ctr">
-              <a:lnSpc>
-                <a:spcPct val="100000"/>
-              </a:lnSpc>
-            </a:pPr>
-            <a:r>
-              <a:rPr sz="850">
-                <a:solidFill>
-                  <a:srgbClr val="FFFFFF"/>
-                </a:solidFill>
-              </a:rPr>
-              <a:t>Concurrent users supported</a:t>
-            </a:r>
-          </a:p>
-          <a:p>
-            <a:pPr algn="ctr">
-              <a:lnSpc>
-                <a:spcPct val="100000"/>
-              </a:lnSpc>
-            </a:pPr>
-            <a:r>
-              <a:rPr sz="850">
-                <a:solidFill>
-                  <a:srgbClr val="FFFFFF"/>
-                </a:solidFill>
-              </a:rPr>
-              <a:t>at scale</a:t>
-            </a:r>
-          </a:p>
-        </p:txBody>
-      </p:sp>
-      <p:sp>
-        <p:nvSpPr>
-          <p:cNvPr id="17422" name="Rounded Rectangle 17421"/>
-          <p:cNvSpPr/>
-          <p:nvPr/>
-        </p:nvSpPr>
-        <p:spPr>
-          <a:xfrm>
-            <a:off x="8695944" y="4572000"/>
-            <a:ext cx="2633472" cy="1234440"/>
-          </a:xfrm>
-          <a:prstGeom prst="roundRect">
-            <a:avLst>
-              <a:gd name="adj" fmla="val 6000"/>
-            </a:avLst>
-          </a:prstGeom>
           <a:solidFill>
-            <a:srgbClr val="1F3864"/>
+            <a:srgbClr val="F6E1DD"/>
           </a:solidFill>
           <a:ln>
             <a:noFill/>
@@ -10992,141 +8401,569 @@
           </a:fontRef>
         </p:style>
         <p:txBody>
-          <a:bodyPr rtlCol="0" anchor="ctr"/>
+          <a:bodyPr wrap="square" lIns="50800" tIns="25400" rIns="50800" bIns="25400" rtlCol="0" anchor="ctr"/>
           <a:lstStyle/>
           <a:p>
             <a:pPr algn="ctr"/>
-            <a:endParaRPr/>
-          </a:p>
-        </p:txBody>
-      </p:sp>
-      <p:sp>
-        <p:nvSpPr>
-          <p:cNvPr id="17423" name="TextBox 17422"/>
-          <p:cNvSpPr txBox="1"/>
-          <p:nvPr/>
-        </p:nvSpPr>
-        <p:spPr>
-          <a:xfrm>
-            <a:off x="8833104" y="4645152"/>
-            <a:ext cx="2359152" cy="555498"/>
-          </a:xfrm>
-          <a:prstGeom prst="rect">
-            <a:avLst/>
-          </a:prstGeom>
-          <a:noFill/>
-        </p:spPr>
-        <p:txBody>
-          <a:bodyPr wrap="square" lIns="0" tIns="0" rIns="0" bIns="0" anchor="t">
-            <a:spAutoFit/>
-          </a:bodyPr>
-          <a:lstStyle/>
-          <a:p>
-            <a:pPr algn="ctr">
-              <a:lnSpc>
-                <a:spcPct val="100000"/>
-              </a:lnSpc>
-            </a:pPr>
-            <a:r>
-              <a:rPr sz="2000" b="1" i="0">
+            <a:r>
+              <a:rPr sz="1100" b="0">
                 <a:solidFill>
-                  <a:srgbClr val="F28C28"/>
+                  <a:srgbClr val="B03A2E"/>
                 </a:solidFill>
                 <a:latin typeface="Calibri"/>
               </a:rPr>
-              <a:t>SDG 4 &amp; 8</a:t>
-            </a:r>
-          </a:p>
-        </p:txBody>
-      </p:sp>
-      <p:sp>
-        <p:nvSpPr>
-          <p:cNvPr id="17424" name="TextBox 17423"/>
-          <p:cNvSpPr txBox="1"/>
+              <a:t>High compute cost for video/infographic generation</a:t>
+            </a:r>
+          </a:p>
+        </p:txBody>
+      </p:sp>
+      <p:sp>
+        <p:nvSpPr>
+          <p:cNvPr id="17417" name="Right Arrow 17416"/>
+          <p:cNvSpPr/>
           <p:nvPr/>
         </p:nvSpPr>
         <p:spPr>
           <a:xfrm>
-            <a:off x="8787384" y="5213908"/>
-            <a:ext cx="2450591" cy="555498"/>
-          </a:xfrm>
-          <a:prstGeom prst="rect">
+            <a:off x="5029200" y="4023360"/>
+            <a:ext cx="384048" cy="164592"/>
+          </a:xfrm>
+          <a:prstGeom prst="rightArrow">
             <a:avLst/>
           </a:prstGeom>
-          <a:noFill/>
-        </p:spPr>
-        <p:txBody>
-          <a:bodyPr wrap="square" lIns="0" tIns="0" rIns="0" bIns="0">
-            <a:spAutoFit/>
-          </a:bodyPr>
+          <a:solidFill>
+            <a:srgbClr val="1E2A4A"/>
+          </a:solidFill>
+          <a:ln>
+            <a:noFill/>
+          </a:ln>
+          <a:effectLst/>
+        </p:spPr>
+        <p:style>
+          <a:lnRef idx="1">
+            <a:schemeClr val="accent1"/>
+          </a:lnRef>
+          <a:fillRef idx="3">
+            <a:schemeClr val="accent1"/>
+          </a:fillRef>
+          <a:effectRef idx="2">
+            <a:schemeClr val="accent1"/>
+          </a:effectRef>
+          <a:fontRef idx="minor">
+            <a:schemeClr val="lt1"/>
+          </a:fontRef>
+        </p:style>
+        <p:txBody>
+          <a:bodyPr rtlCol="0" anchor="ctr"/>
           <a:lstStyle/>
           <a:p>
-            <a:pPr algn="ctr">
-              <a:lnSpc>
-                <a:spcPct val="100000"/>
-              </a:lnSpc>
-            </a:pPr>
-            <a:r>
-              <a:rPr sz="850">
-                <a:solidFill>
-                  <a:srgbClr val="FFFFFF"/>
-                </a:solidFill>
-              </a:rPr>
-              <a:t>Quality Education &amp;</a:t>
-            </a:r>
-          </a:p>
-          <a:p>
-            <a:pPr algn="ctr">
-              <a:lnSpc>
-                <a:spcPct val="100000"/>
-              </a:lnSpc>
-            </a:pPr>
-            <a:r>
-              <a:rPr sz="850">
-                <a:solidFill>
-                  <a:srgbClr val="FFFFFF"/>
-                </a:solidFill>
-              </a:rPr>
-              <a:t>Decent Work alignment</a:t>
-            </a:r>
-          </a:p>
-        </p:txBody>
-      </p:sp>
-      <p:sp>
-        <p:nvSpPr>
-          <p:cNvPr id="17425" name="TextBox 17424"/>
-          <p:cNvSpPr txBox="1"/>
+            <a:pPr algn="ctr"/>
+            <a:endParaRPr/>
+          </a:p>
+        </p:txBody>
+      </p:sp>
+      <p:sp>
+        <p:nvSpPr>
+          <p:cNvPr id="17418" name="Rounded Rectangle 17417"/>
+          <p:cNvSpPr/>
           <p:nvPr/>
         </p:nvSpPr>
         <p:spPr>
           <a:xfrm>
-            <a:off x="411480" y="5943600"/>
-            <a:ext cx="11338560" cy="365760"/>
-          </a:xfrm>
-          <a:prstGeom prst="rect">
+            <a:off x="5486400" y="3895344"/>
+            <a:ext cx="4160520" cy="420624"/>
+          </a:xfrm>
+          <a:prstGeom prst="roundRect">
             <a:avLst/>
           </a:prstGeom>
-          <a:noFill/>
-        </p:spPr>
-        <p:txBody>
-          <a:bodyPr wrap="square" lIns="0" tIns="0" rIns="0" bIns="0" anchor="t">
-            <a:spAutoFit/>
-          </a:bodyPr>
+          <a:solidFill>
+            <a:srgbClr val="DDECF7"/>
+          </a:solidFill>
+          <a:ln>
+            <a:noFill/>
+          </a:ln>
+          <a:effectLst/>
+        </p:spPr>
+        <p:style>
+          <a:lnRef idx="1">
+            <a:schemeClr val="accent1"/>
+          </a:lnRef>
+          <a:fillRef idx="3">
+            <a:schemeClr val="accent1"/>
+          </a:fillRef>
+          <a:effectRef idx="2">
+            <a:schemeClr val="accent1"/>
+          </a:effectRef>
+          <a:fontRef idx="minor">
+            <a:schemeClr val="lt1"/>
+          </a:fontRef>
+        </p:style>
+        <p:txBody>
+          <a:bodyPr wrap="square" lIns="50800" tIns="25400" rIns="50800" bIns="25400" rtlCol="0" anchor="ctr"/>
           <a:lstStyle/>
           <a:p>
-            <a:pPr algn="l">
-              <a:lnSpc>
-                <a:spcPct val="100000"/>
-              </a:lnSpc>
-            </a:pPr>
-            <a:r>
-              <a:rPr sz="1000" b="0" i="1">
+            <a:pPr algn="ctr"/>
+            <a:r>
+              <a:rPr sz="1100" b="0">
                 <a:solidFill>
-                  <a:srgbClr val="5B6B78"/>
+                  <a:srgbClr val="1E2A4A"/>
                 </a:solidFill>
                 <a:latin typeface="Calibri"/>
               </a:rPr>
-              <a:t>Reduces youth unemployment &amp; skill mismatch in India's traditional-medicine sector; strengthens the national Ayush workforce pipeline</a:t>
+              <a:t>Templated storyboard/layout generation instead of full media synthesis</a:t>
+            </a:r>
+          </a:p>
+        </p:txBody>
+      </p:sp>
+      <p:sp>
+        <p:nvSpPr>
+          <p:cNvPr id="17419" name="Rounded Rectangle 17418"/>
+          <p:cNvSpPr/>
+          <p:nvPr/>
+        </p:nvSpPr>
+        <p:spPr>
+          <a:xfrm>
+            <a:off x="822960" y="4407408"/>
+            <a:ext cx="4160520" cy="420624"/>
+          </a:xfrm>
+          <a:prstGeom prst="roundRect">
+            <a:avLst/>
+          </a:prstGeom>
+          <a:solidFill>
+            <a:srgbClr val="F6E1DD"/>
+          </a:solidFill>
+          <a:ln>
+            <a:noFill/>
+          </a:ln>
+          <a:effectLst/>
+        </p:spPr>
+        <p:style>
+          <a:lnRef idx="1">
+            <a:schemeClr val="accent1"/>
+          </a:lnRef>
+          <a:fillRef idx="3">
+            <a:schemeClr val="accent1"/>
+          </a:fillRef>
+          <a:effectRef idx="2">
+            <a:schemeClr val="accent1"/>
+          </a:effectRef>
+          <a:fontRef idx="minor">
+            <a:schemeClr val="lt1"/>
+          </a:fontRef>
+        </p:style>
+        <p:txBody>
+          <a:bodyPr wrap="square" lIns="50800" tIns="25400" rIns="50800" bIns="25400" rtlCol="0" anchor="ctr"/>
+          <a:lstStyle/>
+          <a:p>
+            <a:pPr algn="ctr"/>
+            <a:r>
+              <a:rPr sz="1100" b="0">
+                <a:solidFill>
+                  <a:srgbClr val="B03A2E"/>
+                </a:solidFill>
+                <a:latin typeface="Calibri"/>
+              </a:rPr>
+              <a:t>Sensitive source content leakage</a:t>
+            </a:r>
+          </a:p>
+        </p:txBody>
+      </p:sp>
+      <p:sp>
+        <p:nvSpPr>
+          <p:cNvPr id="17420" name="Right Arrow 17419"/>
+          <p:cNvSpPr/>
+          <p:nvPr/>
+        </p:nvSpPr>
+        <p:spPr>
+          <a:xfrm>
+            <a:off x="5029200" y="4535424"/>
+            <a:ext cx="384048" cy="164592"/>
+          </a:xfrm>
+          <a:prstGeom prst="rightArrow">
+            <a:avLst/>
+          </a:prstGeom>
+          <a:solidFill>
+            <a:srgbClr val="1E2A4A"/>
+          </a:solidFill>
+          <a:ln>
+            <a:noFill/>
+          </a:ln>
+          <a:effectLst/>
+        </p:spPr>
+        <p:style>
+          <a:lnRef idx="1">
+            <a:schemeClr val="accent1"/>
+          </a:lnRef>
+          <a:fillRef idx="3">
+            <a:schemeClr val="accent1"/>
+          </a:fillRef>
+          <a:effectRef idx="2">
+            <a:schemeClr val="accent1"/>
+          </a:effectRef>
+          <a:fontRef idx="minor">
+            <a:schemeClr val="lt1"/>
+          </a:fontRef>
+        </p:style>
+        <p:txBody>
+          <a:bodyPr rtlCol="0" anchor="ctr"/>
+          <a:lstStyle/>
+          <a:p>
+            <a:pPr algn="ctr"/>
+            <a:endParaRPr/>
+          </a:p>
+        </p:txBody>
+      </p:sp>
+      <p:sp>
+        <p:nvSpPr>
+          <p:cNvPr id="17421" name="Rounded Rectangle 17420"/>
+          <p:cNvSpPr/>
+          <p:nvPr/>
+        </p:nvSpPr>
+        <p:spPr>
+          <a:xfrm>
+            <a:off x="5486400" y="4407408"/>
+            <a:ext cx="4160520" cy="420624"/>
+          </a:xfrm>
+          <a:prstGeom prst="roundRect">
+            <a:avLst/>
+          </a:prstGeom>
+          <a:solidFill>
+            <a:srgbClr val="DDECF7"/>
+          </a:solidFill>
+          <a:ln>
+            <a:noFill/>
+          </a:ln>
+          <a:effectLst/>
+        </p:spPr>
+        <p:style>
+          <a:lnRef idx="1">
+            <a:schemeClr val="accent1"/>
+          </a:lnRef>
+          <a:fillRef idx="3">
+            <a:schemeClr val="accent1"/>
+          </a:fillRef>
+          <a:effectRef idx="2">
+            <a:schemeClr val="accent1"/>
+          </a:effectRef>
+          <a:fontRef idx="minor">
+            <a:schemeClr val="lt1"/>
+          </a:fontRef>
+        </p:style>
+        <p:txBody>
+          <a:bodyPr wrap="square" lIns="50800" tIns="25400" rIns="50800" bIns="25400" rtlCol="0" anchor="ctr"/>
+          <a:lstStyle/>
+          <a:p>
+            <a:pPr algn="ctr"/>
+            <a:r>
+              <a:rPr sz="1100" b="0">
+                <a:solidFill>
+                  <a:srgbClr val="1E2A4A"/>
+                </a:solidFill>
+                <a:latin typeface="Calibri"/>
+              </a:rPr>
+              <a:t>On-prem/air-gapped deployment, encryption &amp; strict RBAC</a:t>
+            </a:r>
+          </a:p>
+        </p:txBody>
+      </p:sp>
+      <p:sp>
+        <p:nvSpPr>
+          <p:cNvPr id="90001" name="Rounded Rectangle 17412"/>
+          <p:cNvSpPr/>
+          <p:nvPr/>
+        </p:nvSpPr>
+        <p:spPr>
+          <a:xfrm>
+            <a:off x="822960" y="4919472"/>
+            <a:ext cx="4160520" cy="420624"/>
+          </a:xfrm>
+          <a:prstGeom prst="roundRect">
+            <a:avLst/>
+          </a:prstGeom>
+          <a:solidFill>
+            <a:srgbClr val="F6E1DD"/>
+          </a:solidFill>
+          <a:ln>
+            <a:noFill/>
+          </a:ln>
+          <a:effectLst/>
+        </p:spPr>
+        <p:style>
+          <a:lnRef idx="1">
+            <a:schemeClr val="accent1"/>
+          </a:lnRef>
+          <a:fillRef idx="3">
+            <a:schemeClr val="accent1"/>
+          </a:fillRef>
+          <a:effectRef idx="2">
+            <a:schemeClr val="accent1"/>
+          </a:effectRef>
+          <a:fontRef idx="minor">
+            <a:schemeClr val="lt1"/>
+          </a:fontRef>
+        </p:style>
+        <p:txBody>
+          <a:bodyPr wrap="square" lIns="50800" tIns="25400" rIns="50800" bIns="25400" rtlCol="0" anchor="ctr"/>
+          <a:lstStyle/>
+          <a:p>
+            <a:pPr algn="ctr"/>
+            <a:r>
+              <a:rPr sz="1100" b="0">
+                <a:solidFill>
+                  <a:srgbClr val="B03A2E"/>
+                </a:solidFill>
+                <a:latin typeface="Calibri"/>
+              </a:rPr>
+              <a:t>Inconsistent quality across output formats</a:t>
+            </a:r>
+          </a:p>
+        </p:txBody>
+      </p:sp>
+      <p:sp>
+        <p:nvSpPr>
+          <p:cNvPr id="90002" name="Right Arrow 17413"/>
+          <p:cNvSpPr/>
+          <p:nvPr/>
+        </p:nvSpPr>
+        <p:spPr>
+          <a:xfrm>
+            <a:off x="5029200" y="5047488"/>
+            <a:ext cx="384048" cy="164592"/>
+          </a:xfrm>
+          <a:prstGeom prst="rightArrow">
+            <a:avLst/>
+          </a:prstGeom>
+          <a:solidFill>
+            <a:srgbClr val="1E2A4A"/>
+          </a:solidFill>
+          <a:ln>
+            <a:noFill/>
+          </a:ln>
+          <a:effectLst/>
+        </p:spPr>
+        <p:style>
+          <a:lnRef idx="1">
+            <a:schemeClr val="accent1"/>
+          </a:lnRef>
+          <a:fillRef idx="3">
+            <a:schemeClr val="accent1"/>
+          </a:fillRef>
+          <a:effectRef idx="2">
+            <a:schemeClr val="accent1"/>
+          </a:effectRef>
+          <a:fontRef idx="minor">
+            <a:schemeClr val="lt1"/>
+          </a:fontRef>
+        </p:style>
+        <p:txBody>
+          <a:bodyPr rtlCol="0" anchor="ctr"/>
+          <a:lstStyle/>
+          <a:p>
+            <a:pPr algn="ctr"/>
+            <a:endParaRPr/>
+          </a:p>
+        </p:txBody>
+      </p:sp>
+      <p:sp>
+        <p:nvSpPr>
+          <p:cNvPr id="90003" name="Rounded Rectangle 17414"/>
+          <p:cNvSpPr/>
+          <p:nvPr/>
+        </p:nvSpPr>
+        <p:spPr>
+          <a:xfrm>
+            <a:off x="5486400" y="4919472"/>
+            <a:ext cx="4160520" cy="420624"/>
+          </a:xfrm>
+          <a:prstGeom prst="roundRect">
+            <a:avLst/>
+          </a:prstGeom>
+          <a:solidFill>
+            <a:srgbClr val="DDECF7"/>
+          </a:solidFill>
+          <a:ln>
+            <a:noFill/>
+          </a:ln>
+          <a:effectLst/>
+        </p:spPr>
+        <p:style>
+          <a:lnRef idx="1">
+            <a:schemeClr val="accent1"/>
+          </a:lnRef>
+          <a:fillRef idx="3">
+            <a:schemeClr val="accent1"/>
+          </a:fillRef>
+          <a:effectRef idx="2">
+            <a:schemeClr val="accent1"/>
+          </a:effectRef>
+          <a:fontRef idx="minor">
+            <a:schemeClr val="lt1"/>
+          </a:fontRef>
+        </p:style>
+        <p:txBody>
+          <a:bodyPr wrap="square" lIns="50800" tIns="25400" rIns="50800" bIns="25400" rtlCol="0" anchor="ctr"/>
+          <a:lstStyle/>
+          <a:p>
+            <a:pPr algn="ctr"/>
+            <a:r>
+              <a:rPr sz="1100" b="0">
+                <a:solidFill>
+                  <a:srgbClr val="1E2A4A"/>
+                </a:solidFill>
+                <a:latin typeface="Calibri"/>
+              </a:rPr>
+              <a:t>Format-specific fine-tuned templates + automated QA scoring</a:t>
+            </a:r>
+          </a:p>
+        </p:txBody>
+      </p:sp>
+      <p:sp>
+        <p:nvSpPr>
+          <p:cNvPr id="90004" name="Rounded Rectangle 17412"/>
+          <p:cNvSpPr/>
+          <p:nvPr/>
+        </p:nvSpPr>
+        <p:spPr>
+          <a:xfrm>
+            <a:off x="822960" y="5431536"/>
+            <a:ext cx="4160520" cy="420624"/>
+          </a:xfrm>
+          <a:prstGeom prst="roundRect">
+            <a:avLst/>
+          </a:prstGeom>
+          <a:solidFill>
+            <a:srgbClr val="F6E1DD"/>
+          </a:solidFill>
+          <a:ln>
+            <a:noFill/>
+          </a:ln>
+          <a:effectLst/>
+        </p:spPr>
+        <p:style>
+          <a:lnRef idx="1">
+            <a:schemeClr val="accent1"/>
+          </a:lnRef>
+          <a:fillRef idx="3">
+            <a:schemeClr val="accent1"/>
+          </a:fillRef>
+          <a:effectRef idx="2">
+            <a:schemeClr val="accent1"/>
+          </a:effectRef>
+          <a:fontRef idx="minor">
+            <a:schemeClr val="lt1"/>
+          </a:fontRef>
+        </p:style>
+        <p:txBody>
+          <a:bodyPr wrap="square" lIns="50800" tIns="25400" rIns="50800" bIns="25400" rtlCol="0" anchor="ctr"/>
+          <a:lstStyle/>
+          <a:p>
+            <a:pPr algn="ctr"/>
+            <a:r>
+              <a:rPr sz="1100" b="0">
+                <a:solidFill>
+                  <a:srgbClr val="B03A2E"/>
+                </a:solidFill>
+                <a:latin typeface="Calibri"/>
+              </a:rPr>
+              <a:t>Multilingual / tone requirements not met</a:t>
+            </a:r>
+          </a:p>
+        </p:txBody>
+      </p:sp>
+      <p:sp>
+        <p:nvSpPr>
+          <p:cNvPr id="90005" name="Right Arrow 17413"/>
+          <p:cNvSpPr/>
+          <p:nvPr/>
+        </p:nvSpPr>
+        <p:spPr>
+          <a:xfrm>
+            <a:off x="5029200" y="5559552"/>
+            <a:ext cx="384048" cy="164592"/>
+          </a:xfrm>
+          <a:prstGeom prst="rightArrow">
+            <a:avLst/>
+          </a:prstGeom>
+          <a:solidFill>
+            <a:srgbClr val="1E2A4A"/>
+          </a:solidFill>
+          <a:ln>
+            <a:noFill/>
+          </a:ln>
+          <a:effectLst/>
+        </p:spPr>
+        <p:style>
+          <a:lnRef idx="1">
+            <a:schemeClr val="accent1"/>
+          </a:lnRef>
+          <a:fillRef idx="3">
+            <a:schemeClr val="accent1"/>
+          </a:fillRef>
+          <a:effectRef idx="2">
+            <a:schemeClr val="accent1"/>
+          </a:effectRef>
+          <a:fontRef idx="minor">
+            <a:schemeClr val="lt1"/>
+          </a:fontRef>
+        </p:style>
+        <p:txBody>
+          <a:bodyPr rtlCol="0" anchor="ctr"/>
+          <a:lstStyle/>
+          <a:p>
+            <a:pPr algn="ctr"/>
+            <a:endParaRPr/>
+          </a:p>
+        </p:txBody>
+      </p:sp>
+      <p:sp>
+        <p:nvSpPr>
+          <p:cNvPr id="90006" name="Rounded Rectangle 17414"/>
+          <p:cNvSpPr/>
+          <p:nvPr/>
+        </p:nvSpPr>
+        <p:spPr>
+          <a:xfrm>
+            <a:off x="5486400" y="5431536"/>
+            <a:ext cx="4160520" cy="420624"/>
+          </a:xfrm>
+          <a:prstGeom prst="roundRect">
+            <a:avLst/>
+          </a:prstGeom>
+          <a:solidFill>
+            <a:srgbClr val="DDECF7"/>
+          </a:solidFill>
+          <a:ln>
+            <a:noFill/>
+          </a:ln>
+          <a:effectLst/>
+        </p:spPr>
+        <p:style>
+          <a:lnRef idx="1">
+            <a:schemeClr val="accent1"/>
+          </a:lnRef>
+          <a:fillRef idx="3">
+            <a:schemeClr val="accent1"/>
+          </a:fillRef>
+          <a:effectRef idx="2">
+            <a:schemeClr val="accent1"/>
+          </a:effectRef>
+          <a:fontRef idx="minor">
+            <a:schemeClr val="lt1"/>
+          </a:fontRef>
+        </p:style>
+        <p:txBody>
+          <a:bodyPr wrap="square" lIns="50800" tIns="25400" rIns="50800" bIns="25400" rtlCol="0" anchor="ctr"/>
+          <a:lstStyle/>
+          <a:p>
+            <a:pPr algn="ctr"/>
+            <a:r>
+              <a:rPr sz="1100" b="0">
+                <a:solidFill>
+                  <a:srgbClr val="1E2A4A"/>
+                </a:solidFill>
+                <a:latin typeface="Calibri"/>
+              </a:rPr>
+              <a:t>Configurable tone, audience &amp; language parameters with style calibration</a:t>
             </a:r>
           </a:p>
         </p:txBody>
@@ -11134,7 +8971,7 @@
     </p:spTree>
     <p:extLst>
       <p:ext uri="{BB962C8B-B14F-4D97-AF65-F5344CB8AC3E}">
-        <p14:creationId xmlns:p14="http://schemas.microsoft.com/office/powerpoint/2010/main" val="2997144140"/>
+        <p14:creationId xmlns:p14="http://schemas.microsoft.com/office/powerpoint/2010/main" val="3753387913"/>
       </p:ext>
     </p:extLst>
   </p:cSld>
@@ -11250,7 +9087,12 @@
             <p:ph type="title"/>
           </p:nvPr>
         </p:nvSpPr>
-        <p:spPr/>
+        <p:spPr>
+          <a:xfrm>
+            <a:off x="194458" y="90938"/>
+            <a:ext cx="10972800" cy="1143000"/>
+          </a:xfrm>
+        </p:spPr>
         <p:txBody>
           <a:bodyPr/>
           <a:lstStyle/>
@@ -11262,8 +9104,128 @@
                 <a:ea typeface="ＭＳ Ｐゴシック" pitchFamily="1" charset="-128"/>
                 <a:cs typeface="Times New Roman" panose="02020603050405020304" pitchFamily="18" charset="0"/>
               </a:rPr>
-              <a:t>FEASIBILITY AND VIABILITY</a:t>
-            </a:r>
+              <a:t>IMPACT AND BENEFITS</a:t>
+            </a:r>
+          </a:p>
+        </p:txBody>
+      </p:sp>
+      <p:sp>
+        <p:nvSpPr>
+          <p:cNvPr id="17410" name="TextBox 8"/>
+          <p:cNvSpPr txBox="1">
+            <a:spLocks noChangeArrowheads="1"/>
+          </p:cNvSpPr>
+          <p:nvPr/>
+        </p:nvSpPr>
+        <p:spPr bwMode="auto">
+          <a:xfrm>
+            <a:off x="499872" y="1370460"/>
+            <a:ext cx="9385300" cy="2308324"/>
+          </a:xfrm>
+          <a:prstGeom prst="rect">
+            <a:avLst/>
+          </a:prstGeom>
+          <a:noFill/>
+          <a:ln w="9525">
+            <a:noFill/>
+            <a:miter lim="800000"/>
+            <a:headEnd/>
+            <a:tailEnd/>
+          </a:ln>
+        </p:spPr>
+        <p:txBody>
+          <a:bodyPr wrap="square">
+            <a:spAutoFit/>
+          </a:bodyPr>
+          <a:lstStyle/>
+          <a:p>
+            <a:pPr marL="342900" marR="0" lvl="0" indent="-342900" algn="just" defTabSz="457200" rtl="0" eaLnBrk="1" fontAlgn="base" latinLnBrk="0" hangingPunct="1">
+              <a:lnSpc>
+                <a:spcPct val="100000"/>
+              </a:lnSpc>
+              <a:spcBef>
+                <a:spcPct val="0"/>
+              </a:spcBef>
+              <a:spcAft>
+                <a:spcPct val="0"/>
+              </a:spcAft>
+              <a:buClrTx/>
+              <a:buSzTx/>
+              <a:buFont typeface="Arial" panose="020B0604020202020204" pitchFamily="34" charset="0"/>
+              <a:buChar char="•"/>
+              <a:tabLst/>
+              <a:defRPr/>
+            </a:pPr>
+            <a:r>
+              <a:rPr kumimoji="0" lang="en-US" sz="1800" b="0" i="0" u="none" strike="noStrike" kern="1200" cap="none" spc="0" normalizeH="0" baseline="0" noProof="0" dirty="0">
+                <a:ln>
+                  <a:noFill/>
+                </a:ln>
+                <a:solidFill>
+                  <a:prstClr val="black"/>
+                </a:solidFill>
+                <a:effectLst/>
+                <a:uLnTx/>
+                <a:uFillTx/>
+                <a:latin typeface="Arial" pitchFamily="34" charset="0"/>
+                <a:ea typeface="ＭＳ Ｐゴシック" pitchFamily="1" charset="-128"/>
+                <a:cs typeface="Arial" pitchFamily="34" charset="0"/>
+              </a:rPr>
+              <a:t>Directly benefits security teams, communicators and leadership across any organisation that must repeatedly repurpose critical content for different audiences</a:t>
+            </a:r>
+          </a:p>
+          <a:p>
+            <a:pPr marL="342900" marR="0" lvl="0" indent="-342900" algn="just" defTabSz="457200" rtl="0" eaLnBrk="1" fontAlgn="base" latinLnBrk="0" hangingPunct="1">
+              <a:lnSpc>
+                <a:spcPct val="100000"/>
+              </a:lnSpc>
+              <a:spcBef>
+                <a:spcPct val="0"/>
+              </a:spcBef>
+              <a:spcAft>
+                <a:spcPct val="0"/>
+              </a:spcAft>
+              <a:buClrTx/>
+              <a:buSzTx/>
+              <a:buFont typeface="Arial" panose="020B0604020202020204" pitchFamily="34" charset="0"/>
+              <a:buChar char="•"/>
+              <a:tabLst/>
+              <a:defRPr/>
+            </a:pPr>
+            <a:r>
+              <a:rPr lang="en-US" sz="1800" dirty="0">
+                <a:solidFill>
+                  <a:prstClr val="black"/>
+                </a:solidFill>
+                <a:latin typeface="Arial" pitchFamily="34" charset="0"/>
+                <a:cs typeface="Arial" pitchFamily="34" charset="0"/>
+              </a:rPr>
+              <a:t>Economic: 70%+ faster content turnaround &amp; lower content-ops cost. Social: consistent, trustworthy dissemination of information. Governance: blockchain-verified provenance curbs misinformation</a:t>
+            </a:r>
+          </a:p>
+          <a:p>
+            <a:pPr marL="342900" lvl="0" indent="-342900" algn="just">
+              <a:buFont typeface="Arial" panose="020B0604020202020204" pitchFamily="34" charset="0"/>
+              <a:buChar char="•"/>
+              <a:defRPr/>
+            </a:pPr>
+            <a:r>
+              <a:rPr lang="en-US" dirty="0">
+                <a:solidFill>
+                  <a:prstClr val="black"/>
+                </a:solidFill>
+                <a:latin typeface="Arial" pitchFamily="34" charset="0"/>
+                <a:cs typeface="Arial" pitchFamily="34" charset="0"/>
+              </a:rPr>
+              <a:t>Operational Efficiency: Reduces repetitive manual content creation and enables teams to repurpose critical information across multiple formats from a single source, saving significant time and resources.</a:t>
+            </a:r>
+            <a:endParaRPr lang="en-US" sz="1800" dirty="0">
+              <a:solidFill>
+                <a:prstClr val="black"/>
+              </a:solidFill>
+              <a:latin typeface="Arial" pitchFamily="34" charset="0"/>
+              <a:cs typeface="Arial" pitchFamily="34" charset="0"/>
+            </a:endParaRPr>
           </a:p>
         </p:txBody>
       </p:sp>
@@ -11439,7 +9401,7 @@
         <p:spPr>
           <a:xfrm>
             <a:off x="329773" y="252246"/>
-            <a:ext cx="1656343" cy="807334"/>
+            <a:ext cx="1251857" cy="807334"/>
           </a:xfrm>
           <a:prstGeom prst="ellipse">
             <a:avLst/>
@@ -11465,10 +9427,7 @@
           <a:p>
             <a:pPr algn="ctr"/>
             <a:r>
-              <a:rPr lang="en-US" b="1" dirty="0">
-                <a:latin typeface="Arial" panose="020B0604020202020204" pitchFamily="34" charset="0"/>
-                <a:cs typeface="Arial" panose="020B0604020202020204" pitchFamily="34" charset="0"/>
-              </a:rPr>
+              <a:rPr lang="en-US" sz="1000" dirty="0"/>
               <a:t>Team Invictus</a:t>
             </a:r>
             <a:endParaRPr lang="en-IN" dirty="0"/>
@@ -11507,61 +9466,20 @@
       </p:pic>
       <p:sp>
         <p:nvSpPr>
-          <p:cNvPr id="17410" name="TextBox 17409"/>
-          <p:cNvSpPr txBox="1"/>
-          <p:nvPr/>
-        </p:nvSpPr>
-        <p:spPr>
-          <a:xfrm>
-            <a:off x="411480" y="1847088"/>
-            <a:ext cx="7315200" cy="274320"/>
-          </a:xfrm>
-          <a:prstGeom prst="rect">
-            <a:avLst/>
-          </a:prstGeom>
-          <a:noFill/>
-        </p:spPr>
-        <p:txBody>
-          <a:bodyPr wrap="square" lIns="0" tIns="0" rIns="0" bIns="0" anchor="t">
-            <a:spAutoFit/>
-          </a:bodyPr>
-          <a:lstStyle/>
-          <a:p>
-            <a:pPr algn="l">
-              <a:lnSpc>
-                <a:spcPct val="100000"/>
-              </a:lnSpc>
-            </a:pPr>
-            <a:r>
-              <a:rPr sz="1300" b="1" i="0">
-                <a:solidFill>
-                  <a:srgbClr val="1F3864"/>
-                </a:solidFill>
-                <a:latin typeface="Calibri"/>
-              </a:rPr>
-              <a:t>Feasibility Analysis</a:t>
-            </a:r>
-          </a:p>
-        </p:txBody>
-      </p:sp>
-      <p:sp>
-        <p:nvSpPr>
           <p:cNvPr id="17411" name="Rounded Rectangle 17410"/>
           <p:cNvSpPr/>
           <p:nvPr/>
         </p:nvSpPr>
         <p:spPr>
           <a:xfrm>
-            <a:off x="411480" y="2148840"/>
-            <a:ext cx="3538727" cy="1691640"/>
+            <a:off x="906780" y="4206240"/>
+            <a:ext cx="3246120" cy="1417320"/>
           </a:xfrm>
           <a:prstGeom prst="roundRect">
-            <a:avLst>
-              <a:gd name="adj" fmla="val 6000"/>
-            </a:avLst>
+            <a:avLst/>
           </a:prstGeom>
           <a:solidFill>
-            <a:srgbClr val="F1F5FA"/>
+            <a:srgbClr val="F4F7FB"/>
           </a:solidFill>
           <a:ln>
             <a:noFill/>
@@ -11599,444 +9517,8 @@
         </p:nvSpPr>
         <p:spPr>
           <a:xfrm>
-            <a:off x="521208" y="2258568"/>
-            <a:ext cx="365760" cy="365760"/>
-          </a:xfrm>
-          <a:prstGeom prst="ellipse">
-            <a:avLst/>
-          </a:prstGeom>
-          <a:solidFill>
-            <a:srgbClr val="2E8B57"/>
-          </a:solidFill>
-          <a:ln>
-            <a:noFill/>
-          </a:ln>
-          <a:effectLst/>
-        </p:spPr>
-        <p:style>
-          <a:lnRef idx="1">
-            <a:schemeClr val="accent1"/>
-          </a:lnRef>
-          <a:fillRef idx="3">
-            <a:schemeClr val="accent1"/>
-          </a:fillRef>
-          <a:effectRef idx="2">
-            <a:schemeClr val="accent1"/>
-          </a:effectRef>
-          <a:fontRef idx="minor">
-            <a:schemeClr val="lt1"/>
-          </a:fontRef>
-        </p:style>
-        <p:txBody>
-          <a:bodyPr lIns="0" tIns="0" rIns="0" bIns="0" rtlCol="0" anchor="ctr"/>
-          <a:lstStyle/>
-          <a:p>
-            <a:pPr algn="ctr"/>
-            <a:r>
-              <a:rPr sz="1300" b="1">
-                <a:solidFill>
-                  <a:srgbClr val="FFFFFF"/>
-                </a:solidFill>
-              </a:rPr>
-              <a:t>F</a:t>
-            </a:r>
-          </a:p>
-        </p:txBody>
-      </p:sp>
-      <p:sp>
-        <p:nvSpPr>
-          <p:cNvPr id="17413" name="TextBox 17412"/>
-          <p:cNvSpPr txBox="1"/>
-          <p:nvPr/>
-        </p:nvSpPr>
-        <p:spPr>
-          <a:xfrm>
-            <a:off x="960120" y="2276856"/>
-            <a:ext cx="2807207" cy="365760"/>
-          </a:xfrm>
-          <a:prstGeom prst="rect">
-            <a:avLst/>
-          </a:prstGeom>
-          <a:noFill/>
-        </p:spPr>
-        <p:txBody>
-          <a:bodyPr wrap="square" lIns="0" tIns="0" rIns="0" bIns="0" anchor="t">
-            <a:spAutoFit/>
-          </a:bodyPr>
-          <a:lstStyle/>
-          <a:p>
-            <a:pPr algn="l">
-              <a:lnSpc>
-                <a:spcPct val="100000"/>
-              </a:lnSpc>
-            </a:pPr>
-            <a:r>
-              <a:rPr sz="1200" b="1" i="0">
-                <a:solidFill>
-                  <a:srgbClr val="1F3864"/>
-                </a:solidFill>
-                <a:latin typeface="Calibri"/>
-              </a:rPr>
-              <a:t>Technical</a:t>
-            </a:r>
-          </a:p>
-        </p:txBody>
-      </p:sp>
-      <p:sp>
-        <p:nvSpPr>
-          <p:cNvPr id="17414" name="TextBox 17413"/>
-          <p:cNvSpPr txBox="1"/>
-          <p:nvPr/>
-        </p:nvSpPr>
-        <p:spPr>
-          <a:xfrm>
-            <a:off x="612648" y="2715768"/>
-            <a:ext cx="3154679" cy="1005840"/>
-          </a:xfrm>
-          <a:prstGeom prst="rect">
-            <a:avLst/>
-          </a:prstGeom>
-          <a:noFill/>
-        </p:spPr>
-        <p:txBody>
-          <a:bodyPr wrap="square" lIns="0" tIns="0" rIns="0" bIns="0">
-            <a:spAutoFit/>
-          </a:bodyPr>
-          <a:lstStyle/>
-          <a:p>
-            <a:pPr>
-              <a:lnSpc>
-                <a:spcPct val="105000"/>
-              </a:lnSpc>
-              <a:spcAft>
-                <a:spcPts val="200"/>
-              </a:spcAft>
-            </a:pPr>
-            <a:r>
-              <a:rPr sz="900">
-                <a:solidFill>
-                  <a:srgbClr val="222A33"/>
-                </a:solidFill>
-                <a:latin typeface="Calibri"/>
-              </a:rPr>
-              <a:t>•  Mature open-source stack (React, Node, Python) with strong community support</a:t>
-            </a:r>
-          </a:p>
-          <a:p>
-            <a:pPr>
-              <a:lnSpc>
-                <a:spcPct val="105000"/>
-              </a:lnSpc>
-              <a:spcAft>
-                <a:spcPts val="200"/>
-              </a:spcAft>
-            </a:pPr>
-            <a:r>
-              <a:rPr sz="900">
-                <a:solidFill>
-                  <a:srgbClr val="222A33"/>
-                </a:solidFill>
-                <a:latin typeface="Calibri"/>
-              </a:rPr>
-              <a:t>•  Modular microservices allow independent scaling of the AI matching engine</a:t>
-            </a:r>
-          </a:p>
-          <a:p>
-            <a:pPr>
-              <a:lnSpc>
-                <a:spcPct val="105000"/>
-              </a:lnSpc>
-              <a:spcAft>
-                <a:spcPts val="200"/>
-              </a:spcAft>
-            </a:pPr>
-            <a:r>
-              <a:rPr sz="900">
-                <a:solidFill>
-                  <a:srgbClr val="222A33"/>
-                </a:solidFill>
-                <a:latin typeface="Calibri"/>
-              </a:rPr>
-              <a:t>•  Phased rollout: pilot at AIIA before extending to all Ayush institutions</a:t>
-            </a:r>
-          </a:p>
-        </p:txBody>
-      </p:sp>
-      <p:sp>
-        <p:nvSpPr>
-          <p:cNvPr id="17415" name="Rounded Rectangle 17414"/>
-          <p:cNvSpPr/>
-          <p:nvPr/>
-        </p:nvSpPr>
-        <p:spPr>
-          <a:xfrm>
-            <a:off x="4087368" y="2148840"/>
-            <a:ext cx="3538727" cy="1691640"/>
-          </a:xfrm>
-          <a:prstGeom prst="roundRect">
-            <a:avLst>
-              <a:gd name="adj" fmla="val 6000"/>
-            </a:avLst>
-          </a:prstGeom>
-          <a:solidFill>
-            <a:srgbClr val="F1F5FA"/>
-          </a:solidFill>
-          <a:ln>
-            <a:noFill/>
-          </a:ln>
-          <a:effectLst/>
-        </p:spPr>
-        <p:style>
-          <a:lnRef idx="1">
-            <a:schemeClr val="accent1"/>
-          </a:lnRef>
-          <a:fillRef idx="3">
-            <a:schemeClr val="accent1"/>
-          </a:fillRef>
-          <a:effectRef idx="2">
-            <a:schemeClr val="accent1"/>
-          </a:effectRef>
-          <a:fontRef idx="minor">
-            <a:schemeClr val="lt1"/>
-          </a:fontRef>
-        </p:style>
-        <p:txBody>
-          <a:bodyPr rtlCol="0" anchor="ctr"/>
-          <a:lstStyle/>
-          <a:p>
-            <a:pPr algn="ctr"/>
-            <a:endParaRPr/>
-          </a:p>
-        </p:txBody>
-      </p:sp>
-      <p:sp>
-        <p:nvSpPr>
-          <p:cNvPr id="17416" name="Oval 17415"/>
-          <p:cNvSpPr/>
-          <p:nvPr/>
-        </p:nvSpPr>
-        <p:spPr>
-          <a:xfrm>
-            <a:off x="4197096" y="2258568"/>
-            <a:ext cx="365760" cy="365760"/>
-          </a:xfrm>
-          <a:prstGeom prst="ellipse">
-            <a:avLst/>
-          </a:prstGeom>
-          <a:solidFill>
-            <a:srgbClr val="F28C28"/>
-          </a:solidFill>
-          <a:ln>
-            <a:noFill/>
-          </a:ln>
-          <a:effectLst/>
-        </p:spPr>
-        <p:style>
-          <a:lnRef idx="1">
-            <a:schemeClr val="accent1"/>
-          </a:lnRef>
-          <a:fillRef idx="3">
-            <a:schemeClr val="accent1"/>
-          </a:fillRef>
-          <a:effectRef idx="2">
-            <a:schemeClr val="accent1"/>
-          </a:effectRef>
-          <a:fontRef idx="minor">
-            <a:schemeClr val="lt1"/>
-          </a:fontRef>
-        </p:style>
-        <p:txBody>
-          <a:bodyPr lIns="0" tIns="0" rIns="0" bIns="0" rtlCol="0" anchor="ctr"/>
-          <a:lstStyle/>
-          <a:p>
-            <a:pPr algn="ctr"/>
-            <a:r>
-              <a:rPr sz="1300" b="1">
-                <a:solidFill>
-                  <a:srgbClr val="FFFFFF"/>
-                </a:solidFill>
-              </a:rPr>
-              <a:t>R</a:t>
-            </a:r>
-          </a:p>
-        </p:txBody>
-      </p:sp>
-      <p:sp>
-        <p:nvSpPr>
-          <p:cNvPr id="17417" name="TextBox 17416"/>
-          <p:cNvSpPr txBox="1"/>
-          <p:nvPr/>
-        </p:nvSpPr>
-        <p:spPr>
-          <a:xfrm>
-            <a:off x="4636007" y="2276856"/>
-            <a:ext cx="2807207" cy="365760"/>
-          </a:xfrm>
-          <a:prstGeom prst="rect">
-            <a:avLst/>
-          </a:prstGeom>
-          <a:noFill/>
-        </p:spPr>
-        <p:txBody>
-          <a:bodyPr wrap="square" lIns="0" tIns="0" rIns="0" bIns="0" anchor="t">
-            <a:spAutoFit/>
-          </a:bodyPr>
-          <a:lstStyle/>
-          <a:p>
-            <a:pPr algn="l">
-              <a:lnSpc>
-                <a:spcPct val="100000"/>
-              </a:lnSpc>
-            </a:pPr>
-            <a:r>
-              <a:rPr sz="1200" b="1" i="0">
-                <a:solidFill>
-                  <a:srgbClr val="1F3864"/>
-                </a:solidFill>
-                <a:latin typeface="Calibri"/>
-              </a:rPr>
-              <a:t>Regulatory</a:t>
-            </a:r>
-          </a:p>
-        </p:txBody>
-      </p:sp>
-      <p:sp>
-        <p:nvSpPr>
-          <p:cNvPr id="17418" name="TextBox 17417"/>
-          <p:cNvSpPr txBox="1"/>
-          <p:nvPr/>
-        </p:nvSpPr>
-        <p:spPr>
-          <a:xfrm>
-            <a:off x="4288536" y="2715768"/>
-            <a:ext cx="3154679" cy="1005840"/>
-          </a:xfrm>
-          <a:prstGeom prst="rect">
-            <a:avLst/>
-          </a:prstGeom>
-          <a:noFill/>
-        </p:spPr>
-        <p:txBody>
-          <a:bodyPr wrap="square" lIns="0" tIns="0" rIns="0" bIns="0">
-            <a:spAutoFit/>
-          </a:bodyPr>
-          <a:lstStyle/>
-          <a:p>
-            <a:pPr>
-              <a:lnSpc>
-                <a:spcPct val="105000"/>
-              </a:lnSpc>
-              <a:spcAft>
-                <a:spcPts val="200"/>
-              </a:spcAft>
-            </a:pPr>
-            <a:r>
-              <a:rPr sz="900">
-                <a:solidFill>
-                  <a:srgbClr val="222A33"/>
-                </a:solidFill>
-                <a:latin typeface="Calibri"/>
-              </a:rPr>
-              <a:t>•  Aligned with UGC internship guidelines &amp; AICTE internship framework</a:t>
-            </a:r>
-          </a:p>
-          <a:p>
-            <a:pPr>
-              <a:lnSpc>
-                <a:spcPct val="105000"/>
-              </a:lnSpc>
-              <a:spcAft>
-                <a:spcPts val="200"/>
-              </a:spcAft>
-            </a:pPr>
-            <a:r>
-              <a:rPr sz="900">
-                <a:solidFill>
-                  <a:srgbClr val="222A33"/>
-                </a:solidFill>
-                <a:latin typeface="Calibri"/>
-              </a:rPr>
-              <a:t>•  DPDP Act, 2023-compliant consent-based data collection &amp; sharing</a:t>
-            </a:r>
-          </a:p>
-          <a:p>
-            <a:pPr>
-              <a:lnSpc>
-                <a:spcPct val="105000"/>
-              </a:lnSpc>
-              <a:spcAft>
-                <a:spcPts val="200"/>
-              </a:spcAft>
-            </a:pPr>
-            <a:r>
-              <a:rPr sz="900">
-                <a:solidFill>
-                  <a:srgbClr val="222A33"/>
-                </a:solidFill>
-                <a:latin typeface="Calibri"/>
-              </a:rPr>
-              <a:t>•  Role-based access ensures data minimisation for each stakeholder type</a:t>
-            </a:r>
-          </a:p>
-        </p:txBody>
-      </p:sp>
-      <p:sp>
-        <p:nvSpPr>
-          <p:cNvPr id="17419" name="Rounded Rectangle 17418"/>
-          <p:cNvSpPr/>
-          <p:nvPr/>
-        </p:nvSpPr>
-        <p:spPr>
-          <a:xfrm>
-            <a:off x="7763255" y="2148840"/>
-            <a:ext cx="3538727" cy="1691640"/>
-          </a:xfrm>
-          <a:prstGeom prst="roundRect">
-            <a:avLst>
-              <a:gd name="adj" fmla="val 6000"/>
-            </a:avLst>
-          </a:prstGeom>
-          <a:solidFill>
-            <a:srgbClr val="F1F5FA"/>
-          </a:solidFill>
-          <a:ln>
-            <a:noFill/>
-          </a:ln>
-          <a:effectLst/>
-        </p:spPr>
-        <p:style>
-          <a:lnRef idx="1">
-            <a:schemeClr val="accent1"/>
-          </a:lnRef>
-          <a:fillRef idx="3">
-            <a:schemeClr val="accent1"/>
-          </a:fillRef>
-          <a:effectRef idx="2">
-            <a:schemeClr val="accent1"/>
-          </a:effectRef>
-          <a:fontRef idx="minor">
-            <a:schemeClr val="lt1"/>
-          </a:fontRef>
-        </p:style>
-        <p:txBody>
-          <a:bodyPr rtlCol="0" anchor="ctr"/>
-          <a:lstStyle/>
-          <a:p>
-            <a:pPr algn="ctr"/>
-            <a:endParaRPr/>
-          </a:p>
-        </p:txBody>
-      </p:sp>
-      <p:sp>
-        <p:nvSpPr>
-          <p:cNvPr id="17420" name="Oval 17419"/>
-          <p:cNvSpPr/>
-          <p:nvPr/>
-        </p:nvSpPr>
-        <p:spPr>
-          <a:xfrm>
-            <a:off x="7872983" y="2258568"/>
-            <a:ext cx="365760" cy="365760"/>
+            <a:off x="2209800" y="3886200"/>
+            <a:ext cx="640080" cy="640080"/>
           </a:xfrm>
           <a:prstGeom prst="ellipse">
             <a:avLst/>
@@ -12064,31 +9546,24 @@
           </a:fontRef>
         </p:style>
         <p:txBody>
-          <a:bodyPr lIns="0" tIns="0" rIns="0" bIns="0" rtlCol="0" anchor="ctr"/>
+          <a:bodyPr wrap="square" lIns="25400" rIns="25400" rtlCol="0" anchor="ctr"/>
           <a:lstStyle/>
           <a:p>
             <a:pPr algn="ctr"/>
-            <a:r>
-              <a:rPr sz="1300" b="1">
-                <a:solidFill>
-                  <a:srgbClr val="FFFFFF"/>
-                </a:solidFill>
-              </a:rPr>
-              <a:t>E</a:t>
-            </a:r>
-          </a:p>
-        </p:txBody>
-      </p:sp>
-      <p:sp>
-        <p:nvSpPr>
-          <p:cNvPr id="17421" name="TextBox 17420"/>
+            <a:endParaRPr/>
+          </a:p>
+        </p:txBody>
+      </p:sp>
+      <p:sp>
+        <p:nvSpPr>
+          <p:cNvPr id="17413" name="TextBox 17412"/>
           <p:cNvSpPr txBox="1"/>
           <p:nvPr/>
         </p:nvSpPr>
         <p:spPr>
           <a:xfrm>
-            <a:off x="8311895" y="2276856"/>
-            <a:ext cx="2807207" cy="365760"/>
+            <a:off x="906780" y="4617720"/>
+            <a:ext cx="3246120" cy="274320"/>
           </a:xfrm>
           <a:prstGeom prst="rect">
             <a:avLst/>
@@ -12096,38 +9571,34 @@
           <a:noFill/>
         </p:spPr>
         <p:txBody>
-          <a:bodyPr wrap="square" lIns="0" tIns="0" rIns="0" bIns="0" anchor="t">
+          <a:bodyPr wrap="square" lIns="0" tIns="0" rIns="0" bIns="0" anchor="ctr">
             <a:spAutoFit/>
           </a:bodyPr>
           <a:lstStyle/>
           <a:p>
-            <a:pPr algn="l">
-              <a:lnSpc>
-                <a:spcPct val="100000"/>
-              </a:lnSpc>
-            </a:pPr>
-            <a:r>
-              <a:rPr sz="1200" b="1" i="0">
+            <a:pPr algn="ctr"/>
+            <a:r>
+              <a:rPr sz="1000" b="1">
                 <a:solidFill>
-                  <a:srgbClr val="1F3864"/>
+                  <a:srgbClr val="1E2A4A"/>
                 </a:solidFill>
                 <a:latin typeface="Calibri"/>
               </a:rPr>
-              <a:t>Economic</a:t>
-            </a:r>
-          </a:p>
-        </p:txBody>
-      </p:sp>
-      <p:sp>
-        <p:nvSpPr>
-          <p:cNvPr id="17422" name="TextBox 17421"/>
+              <a:t>Security Analysts</a:t>
+            </a:r>
+          </a:p>
+        </p:txBody>
+      </p:sp>
+      <p:sp>
+        <p:nvSpPr>
+          <p:cNvPr id="17414" name="TextBox 17413"/>
           <p:cNvSpPr txBox="1"/>
           <p:nvPr/>
         </p:nvSpPr>
         <p:spPr>
           <a:xfrm>
-            <a:off x="7964423" y="2715768"/>
-            <a:ext cx="3154679" cy="1005840"/>
+            <a:off x="1043940" y="4937760"/>
+            <a:ext cx="2971800" cy="594360"/>
           </a:xfrm>
           <a:prstGeom prst="rect">
             <a:avLst/>
@@ -12135,79 +9606,124 @@
           <a:noFill/>
         </p:spPr>
         <p:txBody>
-          <a:bodyPr wrap="square" lIns="0" tIns="0" rIns="0" bIns="0">
+          <a:bodyPr wrap="square" lIns="0" tIns="0" rIns="0" bIns="0" anchor="ctr">
             <a:spAutoFit/>
           </a:bodyPr>
           <a:lstStyle/>
           <a:p>
-            <a:pPr>
-              <a:lnSpc>
-                <a:spcPct val="105000"/>
-              </a:lnSpc>
-              <a:spcAft>
-                <a:spcPts val="200"/>
-              </a:spcAft>
-            </a:pPr>
-            <a:r>
-              <a:rPr sz="900">
+            <a:pPr algn="ctr"/>
+            <a:r>
+              <a:rPr sz="1050" b="0">
                 <a:solidFill>
-                  <a:srgbClr val="222A33"/>
+                  <a:srgbClr val="555555"/>
                 </a:solidFill>
                 <a:latin typeface="Calibri"/>
               </a:rPr>
-              <a:t>•  Low opex via pay-as-you-go cloud infra (~₹0.8–1.2L/month at pilot scale)</a:t>
-            </a:r>
-          </a:p>
-          <a:p>
-            <a:pPr>
-              <a:lnSpc>
-                <a:spcPct val="105000"/>
-              </a:lnSpc>
-              <a:spcAft>
-                <a:spcPts val="200"/>
-              </a:spcAft>
-            </a:pPr>
-            <a:r>
-              <a:rPr sz="900">
-                <a:solidFill>
-                  <a:srgbClr val="222A33"/>
-                </a:solidFill>
-                <a:latin typeface="Calibri"/>
-              </a:rPr>
-              <a:t>•  Freemium model for institutions; nominal subscription for large recruiters</a:t>
-            </a:r>
-          </a:p>
-          <a:p>
-            <a:pPr>
-              <a:lnSpc>
-                <a:spcPct val="105000"/>
-              </a:lnSpc>
-              <a:spcAft>
-                <a:spcPts val="200"/>
-              </a:spcAft>
-            </a:pPr>
-            <a:r>
-              <a:rPr sz="900">
-                <a:solidFill>
-                  <a:srgbClr val="222A33"/>
-                </a:solidFill>
-                <a:latin typeface="Calibri"/>
-              </a:rPr>
-              <a:t>•  Central govt. Ayush-sector grant + CSR partnerships to fund scale-up</a:t>
-            </a:r>
-          </a:p>
-        </p:txBody>
-      </p:sp>
-      <p:sp>
-        <p:nvSpPr>
-          <p:cNvPr id="17423" name="TextBox 17422"/>
+              <a:t>One-click generation of every required format from a single source</a:t>
+            </a:r>
+          </a:p>
+        </p:txBody>
+      </p:sp>
+      <p:sp>
+        <p:nvSpPr>
+          <p:cNvPr id="17415" name="Rounded Rectangle 17414"/>
+          <p:cNvSpPr/>
+          <p:nvPr/>
+        </p:nvSpPr>
+        <p:spPr>
+          <a:xfrm>
+            <a:off x="4472940" y="4206240"/>
+            <a:ext cx="3246120" cy="1417320"/>
+          </a:xfrm>
+          <a:prstGeom prst="roundRect">
+            <a:avLst/>
+          </a:prstGeom>
+          <a:solidFill>
+            <a:srgbClr val="F4F7FB"/>
+          </a:solidFill>
+          <a:ln>
+            <a:noFill/>
+          </a:ln>
+          <a:effectLst/>
+        </p:spPr>
+        <p:style>
+          <a:lnRef idx="1">
+            <a:schemeClr val="accent1"/>
+          </a:lnRef>
+          <a:fillRef idx="3">
+            <a:schemeClr val="accent1"/>
+          </a:fillRef>
+          <a:effectRef idx="2">
+            <a:schemeClr val="accent1"/>
+          </a:effectRef>
+          <a:fontRef idx="minor">
+            <a:schemeClr val="lt1"/>
+          </a:fontRef>
+        </p:style>
+        <p:txBody>
+          <a:bodyPr rtlCol="0" anchor="ctr"/>
+          <a:lstStyle/>
+          <a:p>
+            <a:pPr algn="ctr"/>
+            <a:endParaRPr/>
+          </a:p>
+        </p:txBody>
+      </p:sp>
+      <p:sp>
+        <p:nvSpPr>
+          <p:cNvPr id="17416" name="Oval 17415"/>
+          <p:cNvSpPr/>
+          <p:nvPr/>
+        </p:nvSpPr>
+        <p:spPr>
+          <a:xfrm>
+            <a:off x="5775960" y="3886200"/>
+            <a:ext cx="640080" cy="640080"/>
+          </a:xfrm>
+          <a:prstGeom prst="ellipse">
+            <a:avLst/>
+          </a:prstGeom>
+          <a:solidFill>
+            <a:srgbClr val="E88A2E"/>
+          </a:solidFill>
+          <a:ln>
+            <a:noFill/>
+          </a:ln>
+          <a:effectLst/>
+        </p:spPr>
+        <p:style>
+          <a:lnRef idx="1">
+            <a:schemeClr val="accent1"/>
+          </a:lnRef>
+          <a:fillRef idx="3">
+            <a:schemeClr val="accent1"/>
+          </a:fillRef>
+          <a:effectRef idx="2">
+            <a:schemeClr val="accent1"/>
+          </a:effectRef>
+          <a:fontRef idx="minor">
+            <a:schemeClr val="lt1"/>
+          </a:fontRef>
+        </p:style>
+        <p:txBody>
+          <a:bodyPr wrap="square" lIns="25400" rIns="25400" rtlCol="0" anchor="ctr"/>
+          <a:lstStyle/>
+          <a:p>
+            <a:pPr algn="ctr"/>
+            <a:endParaRPr/>
+          </a:p>
+        </p:txBody>
+      </p:sp>
+      <p:sp>
+        <p:nvSpPr>
+          <p:cNvPr id="17417" name="TextBox 17416"/>
           <p:cNvSpPr txBox="1"/>
           <p:nvPr/>
         </p:nvSpPr>
         <p:spPr>
           <a:xfrm>
-            <a:off x="411480" y="3977639"/>
-            <a:ext cx="7315200" cy="274320"/>
+            <a:off x="4472940" y="4617720"/>
+            <a:ext cx="3246120" cy="274320"/>
           </a:xfrm>
           <a:prstGeom prst="rect">
             <a:avLst/>
@@ -12215,734 +9731,258 @@
           <a:noFill/>
         </p:spPr>
         <p:txBody>
-          <a:bodyPr wrap="square" lIns="0" tIns="0" rIns="0" bIns="0" anchor="t">
+          <a:bodyPr wrap="square" lIns="0" tIns="0" rIns="0" bIns="0" anchor="ctr">
             <a:spAutoFit/>
           </a:bodyPr>
           <a:lstStyle/>
           <a:p>
-            <a:pPr algn="l">
-              <a:lnSpc>
-                <a:spcPct val="100000"/>
-              </a:lnSpc>
-            </a:pPr>
-            <a:r>
-              <a:rPr sz="1300" b="1" i="0">
+            <a:pPr algn="ctr"/>
+            <a:r>
+              <a:rPr sz="1000" b="1">
                 <a:solidFill>
-                  <a:srgbClr val="1F3864"/>
+                  <a:srgbClr val="1E2A4A"/>
                 </a:solidFill>
                 <a:latin typeface="Calibri"/>
               </a:rPr>
-              <a:t>Risk Matrix &amp; Mitigation</a:t>
-            </a:r>
-          </a:p>
-        </p:txBody>
-      </p:sp>
-      <p:graphicFrame>
-        <p:nvGraphicFramePr>
-          <p:cNvPr id="17424" name="Table 17423"/>
-          <p:cNvGraphicFramePr>
-            <a:graphicFrameLocks noGrp="1"/>
-          </p:cNvGraphicFramePr>
+              <a:t>Comms &amp; PR Teams</a:t>
+            </a:r>
+          </a:p>
+        </p:txBody>
+      </p:sp>
+      <p:sp>
+        <p:nvSpPr>
+          <p:cNvPr id="17418" name="TextBox 17417"/>
+          <p:cNvSpPr txBox="1"/>
           <p:nvPr/>
-        </p:nvGraphicFramePr>
-        <p:xfrm>
-          <a:off x="411480" y="4297680"/>
-          <a:ext cx="11338560" cy="1874519"/>
-        </p:xfrm>
-        <a:graphic>
-          <a:graphicData uri="http://schemas.openxmlformats.org/drawingml/2006/table">
-            <a:tbl>
-              <a:tblPr firstRow="1" bandRow="1">
-                <a:tableStyleId>{5C22544A-7EE6-4342-B048-85BDC9FD1C3A}</a:tableStyleId>
-              </a:tblPr>
-              <a:tblGrid>
-                <a:gridCol w="3017520">
-                  <a:extLst>
-                    <a:ext uri="{9D8B030D-6E8A-4147-A177-3AD203B41FA5}">
-                      <a16:colId xmlns:a16="http://schemas.microsoft.com/office/drawing/2014/main" val="20000"/>
-                    </a:ext>
-                  </a:extLst>
-                </a:gridCol>
-                <a:gridCol w="1280160">
-                  <a:extLst>
-                    <a:ext uri="{9D8B030D-6E8A-4147-A177-3AD203B41FA5}">
-                      <a16:colId xmlns:a16="http://schemas.microsoft.com/office/drawing/2014/main" val="20001"/>
-                    </a:ext>
-                  </a:extLst>
-                </a:gridCol>
-                <a:gridCol w="1097280">
-                  <a:extLst>
-                    <a:ext uri="{9D8B030D-6E8A-4147-A177-3AD203B41FA5}">
-                      <a16:colId xmlns:a16="http://schemas.microsoft.com/office/drawing/2014/main" val="20002"/>
-                    </a:ext>
-                  </a:extLst>
-                </a:gridCol>
-                <a:gridCol w="5943600">
-                  <a:extLst>
-                    <a:ext uri="{9D8B030D-6E8A-4147-A177-3AD203B41FA5}">
-                      <a16:colId xmlns:a16="http://schemas.microsoft.com/office/drawing/2014/main" val="20003"/>
-                    </a:ext>
-                  </a:extLst>
-                </a:gridCol>
-              </a:tblGrid>
-              <a:tr h="312419">
-                <a:tc>
-                  <a:txBody>
-                    <a:bodyPr/>
-                    <a:lstStyle/>
-                    <a:p>
-                      <a:pPr algn="l"/>
-                      <a:r>
-                        <a:rPr sz="950" b="1">
-                          <a:solidFill>
-                            <a:srgbClr val="FFFFFF"/>
-                          </a:solidFill>
-                        </a:rPr>
-                        <a:t>Risk</a:t>
-                      </a:r>
-                    </a:p>
-                  </a:txBody>
-                  <a:tcPr marL="76200" marR="50800" marT="38100" marB="38100">
-                    <a:solidFill>
-                      <a:srgbClr val="1F3864"/>
-                    </a:solidFill>
-                  </a:tcPr>
-                </a:tc>
-                <a:tc>
-                  <a:txBody>
-                    <a:bodyPr/>
-                    <a:lstStyle/>
-                    <a:p>
-                      <a:pPr algn="l"/>
-                      <a:r>
-                        <a:rPr sz="950" b="1">
-                          <a:solidFill>
-                            <a:srgbClr val="FFFFFF"/>
-                          </a:solidFill>
-                        </a:rPr>
-                        <a:t>Likelihood</a:t>
-                      </a:r>
-                    </a:p>
-                  </a:txBody>
-                  <a:tcPr marL="76200" marR="50800" marT="38100" marB="38100">
-                    <a:solidFill>
-                      <a:srgbClr val="1F3864"/>
-                    </a:solidFill>
-                  </a:tcPr>
-                </a:tc>
-                <a:tc>
-                  <a:txBody>
-                    <a:bodyPr/>
-                    <a:lstStyle/>
-                    <a:p>
-                      <a:pPr algn="l"/>
-                      <a:r>
-                        <a:rPr sz="950" b="1">
-                          <a:solidFill>
-                            <a:srgbClr val="FFFFFF"/>
-                          </a:solidFill>
-                        </a:rPr>
-                        <a:t>Impact</a:t>
-                      </a:r>
-                    </a:p>
-                  </a:txBody>
-                  <a:tcPr marL="76200" marR="50800" marT="38100" marB="38100">
-                    <a:solidFill>
-                      <a:srgbClr val="1F3864"/>
-                    </a:solidFill>
-                  </a:tcPr>
-                </a:tc>
-                <a:tc>
-                  <a:txBody>
-                    <a:bodyPr/>
-                    <a:lstStyle/>
-                    <a:p>
-                      <a:pPr algn="l"/>
-                      <a:r>
-                        <a:rPr sz="950" b="1">
-                          <a:solidFill>
-                            <a:srgbClr val="FFFFFF"/>
-                          </a:solidFill>
-                        </a:rPr>
-                        <a:t>Mitigation Strategy</a:t>
-                      </a:r>
-                    </a:p>
-                  </a:txBody>
-                  <a:tcPr marL="76200" marR="50800" marT="38100" marB="38100">
-                    <a:solidFill>
-                      <a:srgbClr val="1F3864"/>
-                    </a:solidFill>
-                  </a:tcPr>
-                </a:tc>
-                <a:extLst>
-                  <a:ext uri="{0D108BD9-81ED-4DB2-BD59-A6C34878D82A}">
-                    <a16:rowId xmlns:a16="http://schemas.microsoft.com/office/drawing/2014/main" val="10000"/>
-                  </a:ext>
-                </a:extLst>
-              </a:tr>
-              <a:tr h="312419">
-                <a:tc>
-                  <a:txBody>
-                    <a:bodyPr/>
-                    <a:lstStyle/>
-                    <a:p>
-                      <a:pPr>
-                        <a:lnSpc>
-                          <a:spcPct val="100000"/>
-                        </a:lnSpc>
-                      </a:pPr>
-                      <a:r>
-                        <a:rPr sz="850">
-                          <a:solidFill>
-                            <a:srgbClr val="222A33"/>
-                          </a:solidFill>
-                        </a:rPr>
-                        <a:t>Low initial institutional adoption</a:t>
-                      </a:r>
-                    </a:p>
-                  </a:txBody>
-                  <a:tcPr marL="76200" marR="50800" marT="38100" marB="38100">
-                    <a:solidFill>
-                      <a:srgbClr val="FFFFFF"/>
-                    </a:solidFill>
-                  </a:tcPr>
-                </a:tc>
-                <a:tc>
-                  <a:txBody>
-                    <a:bodyPr/>
-                    <a:lstStyle/>
-                    <a:p>
-                      <a:pPr>
-                        <a:lnSpc>
-                          <a:spcPct val="100000"/>
-                        </a:lnSpc>
-                      </a:pPr>
-                      <a:r>
-                        <a:rPr sz="850">
-                          <a:solidFill>
-                            <a:srgbClr val="222A33"/>
-                          </a:solidFill>
-                        </a:rPr>
-                        <a:t>Medium</a:t>
-                      </a:r>
-                    </a:p>
-                  </a:txBody>
-                  <a:tcPr marL="76200" marR="50800" marT="38100" marB="38100">
-                    <a:solidFill>
-                      <a:srgbClr val="FFFFFF"/>
-                    </a:solidFill>
-                  </a:tcPr>
-                </a:tc>
-                <a:tc>
-                  <a:txBody>
-                    <a:bodyPr/>
-                    <a:lstStyle/>
-                    <a:p>
-                      <a:pPr>
-                        <a:lnSpc>
-                          <a:spcPct val="100000"/>
-                        </a:lnSpc>
-                      </a:pPr>
-                      <a:r>
-                        <a:rPr sz="850">
-                          <a:solidFill>
-                            <a:srgbClr val="222A33"/>
-                          </a:solidFill>
-                        </a:rPr>
-                        <a:t>High</a:t>
-                      </a:r>
-                    </a:p>
-                  </a:txBody>
-                  <a:tcPr marL="76200" marR="50800" marT="38100" marB="38100">
-                    <a:solidFill>
-                      <a:srgbClr val="FFFFFF"/>
-                    </a:solidFill>
-                  </a:tcPr>
-                </a:tc>
-                <a:tc>
-                  <a:txBody>
-                    <a:bodyPr/>
-                    <a:lstStyle/>
-                    <a:p>
-                      <a:pPr>
-                        <a:lnSpc>
-                          <a:spcPct val="100000"/>
-                        </a:lnSpc>
-                      </a:pPr>
-                      <a:r>
-                        <a:rPr sz="850">
-                          <a:solidFill>
-                            <a:srgbClr val="222A33"/>
-                          </a:solidFill>
-                        </a:rPr>
-                        <a:t>Pilot at AIIA + 2–3 partner colleges with onboarding support</a:t>
-                      </a:r>
-                    </a:p>
-                  </a:txBody>
-                  <a:tcPr marL="76200" marR="50800" marT="38100" marB="38100">
-                    <a:solidFill>
-                      <a:srgbClr val="FFFFFF"/>
-                    </a:solidFill>
-                  </a:tcPr>
-                </a:tc>
-                <a:extLst>
-                  <a:ext uri="{0D108BD9-81ED-4DB2-BD59-A6C34878D82A}">
-                    <a16:rowId xmlns:a16="http://schemas.microsoft.com/office/drawing/2014/main" val="10001"/>
-                  </a:ext>
-                </a:extLst>
-              </a:tr>
-              <a:tr h="312419">
-                <a:tc>
-                  <a:txBody>
-                    <a:bodyPr/>
-                    <a:lstStyle/>
-                    <a:p>
-                      <a:pPr>
-                        <a:lnSpc>
-                          <a:spcPct val="100000"/>
-                        </a:lnSpc>
-                      </a:pPr>
-                      <a:r>
-                        <a:rPr sz="850">
-                          <a:solidFill>
-                            <a:srgbClr val="222A33"/>
-                          </a:solidFill>
-                        </a:rPr>
-                        <a:t>Inaccurate self-reported skill data</a:t>
-                      </a:r>
-                    </a:p>
-                  </a:txBody>
-                  <a:tcPr marL="76200" marR="50800" marT="38100" marB="38100">
-                    <a:solidFill>
-                      <a:srgbClr val="F4F7FA"/>
-                    </a:solidFill>
-                  </a:tcPr>
-                </a:tc>
-                <a:tc>
-                  <a:txBody>
-                    <a:bodyPr/>
-                    <a:lstStyle/>
-                    <a:p>
-                      <a:pPr>
-                        <a:lnSpc>
-                          <a:spcPct val="100000"/>
-                        </a:lnSpc>
-                      </a:pPr>
-                      <a:r>
-                        <a:rPr sz="850">
-                          <a:solidFill>
-                            <a:srgbClr val="222A33"/>
-                          </a:solidFill>
-                        </a:rPr>
-                        <a:t>High</a:t>
-                      </a:r>
-                    </a:p>
-                  </a:txBody>
-                  <a:tcPr marL="76200" marR="50800" marT="38100" marB="38100">
-                    <a:solidFill>
-                      <a:srgbClr val="F4F7FA"/>
-                    </a:solidFill>
-                  </a:tcPr>
-                </a:tc>
-                <a:tc>
-                  <a:txBody>
-                    <a:bodyPr/>
-                    <a:lstStyle/>
-                    <a:p>
-                      <a:pPr>
-                        <a:lnSpc>
-                          <a:spcPct val="100000"/>
-                        </a:lnSpc>
-                      </a:pPr>
-                      <a:r>
-                        <a:rPr sz="850">
-                          <a:solidFill>
-                            <a:srgbClr val="222A33"/>
-                          </a:solidFill>
-                        </a:rPr>
-                        <a:t>Medium</a:t>
-                      </a:r>
-                    </a:p>
-                  </a:txBody>
-                  <a:tcPr marL="76200" marR="50800" marT="38100" marB="38100">
-                    <a:solidFill>
-                      <a:srgbClr val="F4F7FA"/>
-                    </a:solidFill>
-                  </a:tcPr>
-                </a:tc>
-                <a:tc>
-                  <a:txBody>
-                    <a:bodyPr/>
-                    <a:lstStyle/>
-                    <a:p>
-                      <a:pPr>
-                        <a:lnSpc>
-                          <a:spcPct val="100000"/>
-                        </a:lnSpc>
-                      </a:pPr>
-                      <a:r>
-                        <a:rPr sz="850">
-                          <a:solidFill>
-                            <a:srgbClr val="222A33"/>
-                          </a:solidFill>
-                        </a:rPr>
-                        <a:t>Verified assessments &amp; third-party certification checks</a:t>
-                      </a:r>
-                    </a:p>
-                  </a:txBody>
-                  <a:tcPr marL="76200" marR="50800" marT="38100" marB="38100">
-                    <a:solidFill>
-                      <a:srgbClr val="F4F7FA"/>
-                    </a:solidFill>
-                  </a:tcPr>
-                </a:tc>
-                <a:extLst>
-                  <a:ext uri="{0D108BD9-81ED-4DB2-BD59-A6C34878D82A}">
-                    <a16:rowId xmlns:a16="http://schemas.microsoft.com/office/drawing/2014/main" val="10002"/>
-                  </a:ext>
-                </a:extLst>
-              </a:tr>
-              <a:tr h="312419">
-                <a:tc>
-                  <a:txBody>
-                    <a:bodyPr/>
-                    <a:lstStyle/>
-                    <a:p>
-                      <a:pPr>
-                        <a:lnSpc>
-                          <a:spcPct val="100000"/>
-                        </a:lnSpc>
-                      </a:pPr>
-                      <a:r>
-                        <a:rPr sz="850">
-                          <a:solidFill>
-                            <a:srgbClr val="222A33"/>
-                          </a:solidFill>
-                        </a:rPr>
-                        <a:t>Evolving industry skill taxonomy</a:t>
-                      </a:r>
-                    </a:p>
-                  </a:txBody>
-                  <a:tcPr marL="76200" marR="50800" marT="38100" marB="38100">
-                    <a:solidFill>
-                      <a:srgbClr val="FFFFFF"/>
-                    </a:solidFill>
-                  </a:tcPr>
-                </a:tc>
-                <a:tc>
-                  <a:txBody>
-                    <a:bodyPr/>
-                    <a:lstStyle/>
-                    <a:p>
-                      <a:pPr>
-                        <a:lnSpc>
-                          <a:spcPct val="100000"/>
-                        </a:lnSpc>
-                      </a:pPr>
-                      <a:r>
-                        <a:rPr sz="850">
-                          <a:solidFill>
-                            <a:srgbClr val="222A33"/>
-                          </a:solidFill>
-                        </a:rPr>
-                        <a:t>Medium</a:t>
-                      </a:r>
-                    </a:p>
-                  </a:txBody>
-                  <a:tcPr marL="76200" marR="50800" marT="38100" marB="38100">
-                    <a:solidFill>
-                      <a:srgbClr val="FFFFFF"/>
-                    </a:solidFill>
-                  </a:tcPr>
-                </a:tc>
-                <a:tc>
-                  <a:txBody>
-                    <a:bodyPr/>
-                    <a:lstStyle/>
-                    <a:p>
-                      <a:pPr>
-                        <a:lnSpc>
-                          <a:spcPct val="100000"/>
-                        </a:lnSpc>
-                      </a:pPr>
-                      <a:r>
-                        <a:rPr sz="850">
-                          <a:solidFill>
-                            <a:srgbClr val="222A33"/>
-                          </a:solidFill>
-                        </a:rPr>
-                        <a:t>Medium</a:t>
-                      </a:r>
-                    </a:p>
-                  </a:txBody>
-                  <a:tcPr marL="76200" marR="50800" marT="38100" marB="38100">
-                    <a:solidFill>
-                      <a:srgbClr val="FFFFFF"/>
-                    </a:solidFill>
-                  </a:tcPr>
-                </a:tc>
-                <a:tc>
-                  <a:txBody>
-                    <a:bodyPr/>
-                    <a:lstStyle/>
-                    <a:p>
-                      <a:pPr>
-                        <a:lnSpc>
-                          <a:spcPct val="100000"/>
-                        </a:lnSpc>
-                      </a:pPr>
-                      <a:r>
-                        <a:rPr sz="850">
-                          <a:solidFill>
-                            <a:srgbClr val="222A33"/>
-                          </a:solidFill>
-                        </a:rPr>
-                        <a:t>Quarterly industry-advisory review + model retraining</a:t>
-                      </a:r>
-                    </a:p>
-                  </a:txBody>
-                  <a:tcPr marL="76200" marR="50800" marT="38100" marB="38100">
-                    <a:solidFill>
-                      <a:srgbClr val="FFFFFF"/>
-                    </a:solidFill>
-                  </a:tcPr>
-                </a:tc>
-                <a:extLst>
-                  <a:ext uri="{0D108BD9-81ED-4DB2-BD59-A6C34878D82A}">
-                    <a16:rowId xmlns:a16="http://schemas.microsoft.com/office/drawing/2014/main" val="10003"/>
-                  </a:ext>
-                </a:extLst>
-              </a:tr>
-              <a:tr h="312419">
-                <a:tc>
-                  <a:txBody>
-                    <a:bodyPr/>
-                    <a:lstStyle/>
-                    <a:p>
-                      <a:pPr>
-                        <a:lnSpc>
-                          <a:spcPct val="100000"/>
-                        </a:lnSpc>
-                      </a:pPr>
-                      <a:r>
-                        <a:rPr sz="850">
-                          <a:solidFill>
-                            <a:srgbClr val="222A33"/>
-                          </a:solidFill>
-                        </a:rPr>
-                        <a:t>Data privacy / DPDP non-compliance</a:t>
-                      </a:r>
-                    </a:p>
-                  </a:txBody>
-                  <a:tcPr marL="76200" marR="50800" marT="38100" marB="38100">
-                    <a:solidFill>
-                      <a:srgbClr val="F4F7FA"/>
-                    </a:solidFill>
-                  </a:tcPr>
-                </a:tc>
-                <a:tc>
-                  <a:txBody>
-                    <a:bodyPr/>
-                    <a:lstStyle/>
-                    <a:p>
-                      <a:pPr>
-                        <a:lnSpc>
-                          <a:spcPct val="100000"/>
-                        </a:lnSpc>
-                      </a:pPr>
-                      <a:r>
-                        <a:rPr sz="850">
-                          <a:solidFill>
-                            <a:srgbClr val="222A33"/>
-                          </a:solidFill>
-                        </a:rPr>
-                        <a:t>Low</a:t>
-                      </a:r>
-                    </a:p>
-                  </a:txBody>
-                  <a:tcPr marL="76200" marR="50800" marT="38100" marB="38100">
-                    <a:solidFill>
-                      <a:srgbClr val="F4F7FA"/>
-                    </a:solidFill>
-                  </a:tcPr>
-                </a:tc>
-                <a:tc>
-                  <a:txBody>
-                    <a:bodyPr/>
-                    <a:lstStyle/>
-                    <a:p>
-                      <a:pPr>
-                        <a:lnSpc>
-                          <a:spcPct val="100000"/>
-                        </a:lnSpc>
-                      </a:pPr>
-                      <a:r>
-                        <a:rPr sz="850">
-                          <a:solidFill>
-                            <a:srgbClr val="222A33"/>
-                          </a:solidFill>
-                        </a:rPr>
-                        <a:t>High</a:t>
-                      </a:r>
-                    </a:p>
-                  </a:txBody>
-                  <a:tcPr marL="76200" marR="50800" marT="38100" marB="38100">
-                    <a:solidFill>
-                      <a:srgbClr val="F4F7FA"/>
-                    </a:solidFill>
-                  </a:tcPr>
-                </a:tc>
-                <a:tc>
-                  <a:txBody>
-                    <a:bodyPr/>
-                    <a:lstStyle/>
-                    <a:p>
-                      <a:pPr>
-                        <a:lnSpc>
-                          <a:spcPct val="100000"/>
-                        </a:lnSpc>
-                      </a:pPr>
-                      <a:r>
-                        <a:rPr sz="850">
-                          <a:solidFill>
-                            <a:srgbClr val="222A33"/>
-                          </a:solidFill>
-                        </a:rPr>
-                        <a:t>Consent-based sharing, encryption, regular audits</a:t>
-                      </a:r>
-                    </a:p>
-                  </a:txBody>
-                  <a:tcPr marL="76200" marR="50800" marT="38100" marB="38100">
-                    <a:solidFill>
-                      <a:srgbClr val="F4F7FA"/>
-                    </a:solidFill>
-                  </a:tcPr>
-                </a:tc>
-                <a:extLst>
-                  <a:ext uri="{0D108BD9-81ED-4DB2-BD59-A6C34878D82A}">
-                    <a16:rowId xmlns:a16="http://schemas.microsoft.com/office/drawing/2014/main" val="10004"/>
-                  </a:ext>
-                </a:extLst>
-              </a:tr>
-              <a:tr h="312424">
-                <a:tc>
-                  <a:txBody>
-                    <a:bodyPr/>
-                    <a:lstStyle/>
-                    <a:p>
-                      <a:pPr>
-                        <a:lnSpc>
-                          <a:spcPct val="100000"/>
-                        </a:lnSpc>
-                      </a:pPr>
-                      <a:r>
-                        <a:rPr sz="850">
-                          <a:solidFill>
-                            <a:srgbClr val="222A33"/>
-                          </a:solidFill>
-                        </a:rPr>
-                        <a:t>AI cold-start for new users</a:t>
-                      </a:r>
-                    </a:p>
-                  </a:txBody>
-                  <a:tcPr marL="76200" marR="50800" marT="38100" marB="38100">
-                    <a:solidFill>
-                      <a:srgbClr val="FFFFFF"/>
-                    </a:solidFill>
-                  </a:tcPr>
-                </a:tc>
-                <a:tc>
-                  <a:txBody>
-                    <a:bodyPr/>
-                    <a:lstStyle/>
-                    <a:p>
-                      <a:pPr>
-                        <a:lnSpc>
-                          <a:spcPct val="100000"/>
-                        </a:lnSpc>
-                      </a:pPr>
-                      <a:r>
-                        <a:rPr sz="850">
-                          <a:solidFill>
-                            <a:srgbClr val="222A33"/>
-                          </a:solidFill>
-                        </a:rPr>
-                        <a:t>High</a:t>
-                      </a:r>
-                    </a:p>
-                  </a:txBody>
-                  <a:tcPr marL="76200" marR="50800" marT="38100" marB="38100">
-                    <a:solidFill>
-                      <a:srgbClr val="FFFFFF"/>
-                    </a:solidFill>
-                  </a:tcPr>
-                </a:tc>
-                <a:tc>
-                  <a:txBody>
-                    <a:bodyPr/>
-                    <a:lstStyle/>
-                    <a:p>
-                      <a:pPr>
-                        <a:lnSpc>
-                          <a:spcPct val="100000"/>
-                        </a:lnSpc>
-                      </a:pPr>
-                      <a:r>
-                        <a:rPr sz="850">
-                          <a:solidFill>
-                            <a:srgbClr val="222A33"/>
-                          </a:solidFill>
-                        </a:rPr>
-                        <a:t>Low</a:t>
-                      </a:r>
-                    </a:p>
-                  </a:txBody>
-                  <a:tcPr marL="76200" marR="50800" marT="38100" marB="38100">
-                    <a:solidFill>
-                      <a:srgbClr val="FFFFFF"/>
-                    </a:solidFill>
-                  </a:tcPr>
-                </a:tc>
-                <a:tc>
-                  <a:txBody>
-                    <a:bodyPr/>
-                    <a:lstStyle/>
-                    <a:p>
-                      <a:pPr>
-                        <a:lnSpc>
-                          <a:spcPct val="100000"/>
-                        </a:lnSpc>
-                      </a:pPr>
-                      <a:r>
-                        <a:rPr sz="850">
-                          <a:solidFill>
-                            <a:srgbClr val="222A33"/>
-                          </a:solidFill>
-                        </a:rPr>
-                        <a:t>Rule-based fallback recommendations until data accrues</a:t>
-                      </a:r>
-                    </a:p>
-                  </a:txBody>
-                  <a:tcPr marL="76200" marR="50800" marT="38100" marB="38100">
-                    <a:solidFill>
-                      <a:srgbClr val="FFFFFF"/>
-                    </a:solidFill>
-                  </a:tcPr>
-                </a:tc>
-                <a:extLst>
-                  <a:ext uri="{0D108BD9-81ED-4DB2-BD59-A6C34878D82A}">
-                    <a16:rowId xmlns:a16="http://schemas.microsoft.com/office/drawing/2014/main" val="10005"/>
-                  </a:ext>
-                </a:extLst>
-              </a:tr>
-            </a:tbl>
-          </a:graphicData>
-        </a:graphic>
-      </p:graphicFrame>
+        </p:nvSpPr>
+        <p:spPr>
+          <a:xfrm>
+            <a:off x="4610100" y="4937760"/>
+            <a:ext cx="2971800" cy="594360"/>
+          </a:xfrm>
+          <a:prstGeom prst="rect">
+            <a:avLst/>
+          </a:prstGeom>
+          <a:noFill/>
+        </p:spPr>
+        <p:txBody>
+          <a:bodyPr wrap="square" lIns="0" tIns="0" rIns="0" bIns="0" anchor="ctr">
+            <a:spAutoFit/>
+          </a:bodyPr>
+          <a:lstStyle/>
+          <a:p>
+            <a:pPr algn="ctr"/>
+            <a:r>
+              <a:rPr sz="1050" b="0">
+                <a:solidFill>
+                  <a:srgbClr val="555555"/>
+                </a:solidFill>
+                <a:latin typeface="Calibri"/>
+              </a:rPr>
+              <a:t>Brand-consistent, ready-to-publish content across formats</a:t>
+            </a:r>
+          </a:p>
+        </p:txBody>
+      </p:sp>
+      <p:sp>
+        <p:nvSpPr>
+          <p:cNvPr id="17419" name="Rounded Rectangle 17418"/>
+          <p:cNvSpPr/>
+          <p:nvPr/>
+        </p:nvSpPr>
+        <p:spPr>
+          <a:xfrm>
+            <a:off x="8039100" y="4206240"/>
+            <a:ext cx="3246120" cy="1417320"/>
+          </a:xfrm>
+          <a:prstGeom prst="roundRect">
+            <a:avLst/>
+          </a:prstGeom>
+          <a:solidFill>
+            <a:srgbClr val="F4F7FB"/>
+          </a:solidFill>
+          <a:ln>
+            <a:noFill/>
+          </a:ln>
+          <a:effectLst/>
+        </p:spPr>
+        <p:style>
+          <a:lnRef idx="1">
+            <a:schemeClr val="accent1"/>
+          </a:lnRef>
+          <a:fillRef idx="3">
+            <a:schemeClr val="accent1"/>
+          </a:fillRef>
+          <a:effectRef idx="2">
+            <a:schemeClr val="accent1"/>
+          </a:effectRef>
+          <a:fontRef idx="minor">
+            <a:schemeClr val="lt1"/>
+          </a:fontRef>
+        </p:style>
+        <p:txBody>
+          <a:bodyPr rtlCol="0" anchor="ctr"/>
+          <a:lstStyle/>
+          <a:p>
+            <a:pPr algn="ctr"/>
+            <a:endParaRPr/>
+          </a:p>
+        </p:txBody>
+      </p:sp>
+      <p:sp>
+        <p:nvSpPr>
+          <p:cNvPr id="17420" name="Oval 17419"/>
+          <p:cNvSpPr/>
+          <p:nvPr/>
+        </p:nvSpPr>
+        <p:spPr>
+          <a:xfrm>
+            <a:off x="9342120" y="3886200"/>
+            <a:ext cx="640080" cy="640080"/>
+          </a:xfrm>
+          <a:prstGeom prst="ellipse">
+            <a:avLst/>
+          </a:prstGeom>
+          <a:solidFill>
+            <a:srgbClr val="0070C0"/>
+          </a:solidFill>
+          <a:ln>
+            <a:noFill/>
+          </a:ln>
+          <a:effectLst/>
+        </p:spPr>
+        <p:style>
+          <a:lnRef idx="1">
+            <a:schemeClr val="accent1"/>
+          </a:lnRef>
+          <a:fillRef idx="3">
+            <a:schemeClr val="accent1"/>
+          </a:fillRef>
+          <a:effectRef idx="2">
+            <a:schemeClr val="accent1"/>
+          </a:effectRef>
+          <a:fontRef idx="minor">
+            <a:schemeClr val="lt1"/>
+          </a:fontRef>
+        </p:style>
+        <p:txBody>
+          <a:bodyPr wrap="square" lIns="25400" rIns="25400" rtlCol="0" anchor="ctr"/>
+          <a:lstStyle/>
+          <a:p>
+            <a:pPr algn="ctr"/>
+            <a:endParaRPr/>
+          </a:p>
+        </p:txBody>
+      </p:sp>
+      <p:sp>
+        <p:nvSpPr>
+          <p:cNvPr id="17421" name="TextBox 17420"/>
+          <p:cNvSpPr txBox="1"/>
+          <p:nvPr/>
+        </p:nvSpPr>
+        <p:spPr>
+          <a:xfrm>
+            <a:off x="8039100" y="4617720"/>
+            <a:ext cx="3246120" cy="274320"/>
+          </a:xfrm>
+          <a:prstGeom prst="rect">
+            <a:avLst/>
+          </a:prstGeom>
+          <a:noFill/>
+        </p:spPr>
+        <p:txBody>
+          <a:bodyPr wrap="square" lIns="0" tIns="0" rIns="0" bIns="0" anchor="ctr">
+            <a:spAutoFit/>
+          </a:bodyPr>
+          <a:lstStyle/>
+          <a:p>
+            <a:pPr algn="ctr"/>
+            <a:r>
+              <a:rPr sz="1000" b="1">
+                <a:solidFill>
+                  <a:srgbClr val="1E2A4A"/>
+                </a:solidFill>
+                <a:latin typeface="Calibri"/>
+              </a:rPr>
+              <a:t>Leadership</a:t>
+            </a:r>
+          </a:p>
+        </p:txBody>
+      </p:sp>
+      <p:sp>
+        <p:nvSpPr>
+          <p:cNvPr id="17422" name="TextBox 17421"/>
+          <p:cNvSpPr txBox="1"/>
+          <p:nvPr/>
+        </p:nvSpPr>
+        <p:spPr>
+          <a:xfrm>
+            <a:off x="8176260" y="4937760"/>
+            <a:ext cx="2971800" cy="594360"/>
+          </a:xfrm>
+          <a:prstGeom prst="rect">
+            <a:avLst/>
+          </a:prstGeom>
+          <a:noFill/>
+        </p:spPr>
+        <p:txBody>
+          <a:bodyPr wrap="square" lIns="0" tIns="0" rIns="0" bIns="0" anchor="ctr">
+            <a:spAutoFit/>
+          </a:bodyPr>
+          <a:lstStyle/>
+          <a:p>
+            <a:pPr algn="ctr"/>
+            <a:r>
+              <a:rPr sz="1050" b="0">
+                <a:solidFill>
+                  <a:srgbClr val="555555"/>
+                </a:solidFill>
+                <a:latin typeface="Calibri"/>
+              </a:rPr>
+              <a:t>Auto-generated executive summaries &amp; slide decks in minutes</a:t>
+            </a:r>
+          </a:p>
+        </p:txBody>
+      </p:sp>
+      <p:sp>
+        <p:nvSpPr>
+          <p:cNvPr id="17423" name="TextBox 17422"/>
+          <p:cNvSpPr txBox="1"/>
+          <p:nvPr/>
+        </p:nvSpPr>
+        <p:spPr>
+          <a:xfrm>
+            <a:off x="612648" y="5806440"/>
+            <a:ext cx="10972800" cy="457200"/>
+          </a:xfrm>
+          <a:prstGeom prst="rect">
+            <a:avLst/>
+          </a:prstGeom>
+          <a:noFill/>
+        </p:spPr>
+        <p:txBody>
+          <a:bodyPr wrap="square">
+            <a:spAutoFit/>
+          </a:bodyPr>
+          <a:lstStyle/>
+          <a:p>
+            <a:pPr algn="l"/>
+            <a:r>
+              <a:rPr sz="1200" b="1" i="1">
+                <a:solidFill>
+                  <a:srgbClr val="1F4E79"/>
+                </a:solidFill>
+                <a:latin typeface="Calibri"/>
+              </a:rPr>
+              <a:t>Key outcomes:  70%+ faster content turnaround   •   8+ output formats from one source   •   100% provenance-verified content   •   SDG 9 &amp; 16 — Industry Innovation &amp; Strong Institutions</a:t>
+            </a:r>
+          </a:p>
+        </p:txBody>
+      </p:sp>
     </p:spTree>
     <p:extLst>
       <p:ext uri="{BB962C8B-B14F-4D97-AF65-F5344CB8AC3E}">
-        <p14:creationId xmlns:p14="http://schemas.microsoft.com/office/powerpoint/2010/main" val="3753387913"/>
+        <p14:creationId xmlns:p14="http://schemas.microsoft.com/office/powerpoint/2010/main" val="2997144140"/>
       </p:ext>
     </p:extLst>
   </p:cSld>
@@ -13071,6 +10111,196 @@
                 <a:cs typeface="Times New Roman" panose="02020603050405020304" pitchFamily="18" charset="0"/>
               </a:rPr>
               <a:t>RESEARCH  AND REFERENCES</a:t>
+            </a:r>
+          </a:p>
+        </p:txBody>
+      </p:sp>
+      <p:sp>
+        <p:nvSpPr>
+          <p:cNvPr id="17410" name="TextBox 8"/>
+          <p:cNvSpPr txBox="1">
+            <a:spLocks noChangeArrowheads="1"/>
+          </p:cNvSpPr>
+          <p:nvPr/>
+        </p:nvSpPr>
+        <p:spPr bwMode="auto">
+          <a:xfrm>
+            <a:off x="612648" y="2514600"/>
+            <a:ext cx="5532120" cy="2893100"/>
+          </a:xfrm>
+          <a:prstGeom prst="rect">
+            <a:avLst/>
+          </a:prstGeom>
+          <a:noFill/>
+          <a:ln w="9525">
+            <a:noFill/>
+            <a:miter lim="800000"/>
+            <a:headEnd/>
+            <a:tailEnd/>
+          </a:ln>
+        </p:spPr>
+        <p:txBody>
+          <a:bodyPr wrap="square">
+            <a:spAutoFit/>
+          </a:bodyPr>
+          <a:lstStyle/>
+          <a:p>
+            <a:pPr marL="342900" marR="0" lvl="0" indent="-342900" algn="just" defTabSz="457200" rtl="0" eaLnBrk="1" fontAlgn="base" latinLnBrk="0" hangingPunct="1">
+              <a:lnSpc>
+                <a:spcPct val="100000"/>
+              </a:lnSpc>
+              <a:spcBef>
+                <a:spcPct val="0"/>
+              </a:spcBef>
+              <a:spcAft>
+                <a:spcPct val="0"/>
+              </a:spcAft>
+              <a:buClrTx/>
+              <a:buSzTx/>
+              <a:buFont typeface="Arial" panose="020B0604020202020204" pitchFamily="34" charset="0"/>
+              <a:buChar char="•"/>
+              <a:tabLst/>
+              <a:defRPr/>
+            </a:pPr>
+            <a:r>
+              <a:rPr lang="en-US" sz="1400" noProof="0" dirty="0">
+                <a:solidFill>
+                  <a:prstClr val="black"/>
+                </a:solidFill>
+                <a:latin typeface="+mj-lt"/>
+                <a:cs typeface="Arial" pitchFamily="34" charset="0"/>
+              </a:rPr>
+              <a:t>[1]  Smart India Hackathon 2026 Problem Statement Portal, Problem Statement ID 26154. [Online]. Available: https://sih.gov.in</a:t>
+            </a:r>
+            <a:endParaRPr kumimoji="0" lang="en-US" sz="1400" b="0" i="0" u="none" strike="noStrike" kern="1200" cap="none" spc="0" normalizeH="0" baseline="0" noProof="0" dirty="0">
+              <a:ln>
+                <a:noFill/>
+              </a:ln>
+              <a:solidFill>
+                <a:prstClr val="black"/>
+              </a:solidFill>
+              <a:effectLst/>
+              <a:uLnTx/>
+              <a:uFillTx/>
+              <a:latin typeface="+mj-lt"/>
+              <a:ea typeface="ＭＳ Ｐゴシック" pitchFamily="1" charset="-128"/>
+              <a:cs typeface="Arial" pitchFamily="34" charset="0"/>
+            </a:endParaRPr>
+          </a:p>
+          <a:p>
+            <a:pPr marL="342900" marR="0" lvl="0" indent="-342900" algn="just" defTabSz="457200" rtl="0" eaLnBrk="1" fontAlgn="base" latinLnBrk="0" hangingPunct="1">
+              <a:lnSpc>
+                <a:spcPct val="100000"/>
+              </a:lnSpc>
+              <a:spcBef>
+                <a:spcPct val="0"/>
+              </a:spcBef>
+              <a:spcAft>
+                <a:spcPct val="0"/>
+              </a:spcAft>
+              <a:buClrTx/>
+              <a:buSzTx/>
+              <a:buFont typeface="Arial" panose="020B0604020202020204" pitchFamily="34" charset="0"/>
+              <a:buChar char="•"/>
+              <a:tabLst/>
+              <a:defRPr/>
+            </a:pPr>
+            <a:r>
+              <a:rPr lang="en-US" sz="1400" noProof="0" dirty="0">
+                <a:solidFill>
+                  <a:prstClr val="black"/>
+                </a:solidFill>
+                <a:latin typeface="+mj-lt"/>
+                <a:cs typeface="Arial" pitchFamily="34" charset="0"/>
+              </a:rPr>
+              <a:t>[2]  T. Brown et al., "Language Models are Few-Shot Learners," in Proc. Advances in Neural Information Processing Systems (NeurIPS), 2020, pp. 1877–1901.</a:t>
+            </a:r>
+          </a:p>
+          <a:p>
+            <a:pPr marL="342900" marR="0" lvl="0" indent="-342900" algn="just" defTabSz="457200" rtl="0" eaLnBrk="1" fontAlgn="base" latinLnBrk="0" hangingPunct="1">
+              <a:lnSpc>
+                <a:spcPct val="100000"/>
+              </a:lnSpc>
+              <a:spcBef>
+                <a:spcPct val="0"/>
+              </a:spcBef>
+              <a:spcAft>
+                <a:spcPct val="0"/>
+              </a:spcAft>
+              <a:buClrTx/>
+              <a:buSzTx/>
+              <a:buFont typeface="Arial" panose="020B0604020202020204" pitchFamily="34" charset="0"/>
+              <a:buChar char="•"/>
+              <a:tabLst/>
+              <a:defRPr/>
+            </a:pPr>
+            <a:r>
+              <a:rPr lang="en-US" sz="1400" noProof="0" dirty="0">
+                <a:solidFill>
+                  <a:prstClr val="black"/>
+                </a:solidFill>
+                <a:latin typeface="+mj-lt"/>
+                <a:cs typeface="Arial" pitchFamily="34" charset="0"/>
+              </a:rPr>
+              <a:t>[3]  A. Radford, J. W. Kim, T. Xu, G. Brockman, C. McLeavey, and I. Sutskever, "Robust Speech Recognition via Large-Scale Weak Supervision," arXiv:2212.04356, 2022.</a:t>
+            </a:r>
+          </a:p>
+          <a:p>
+            <a:pPr marL="342900" marR="0" lvl="0" indent="-342900" algn="just" defTabSz="457200" rtl="0" eaLnBrk="1" fontAlgn="base" latinLnBrk="0" hangingPunct="1">
+              <a:lnSpc>
+                <a:spcPct val="100000"/>
+              </a:lnSpc>
+              <a:spcBef>
+                <a:spcPct val="0"/>
+              </a:spcBef>
+              <a:spcAft>
+                <a:spcPct val="0"/>
+              </a:spcAft>
+              <a:buClrTx/>
+              <a:buSzTx/>
+              <a:buFont typeface="Arial" panose="020B0604020202020204" pitchFamily="34" charset="0"/>
+              <a:buChar char="•"/>
+              <a:tabLst/>
+              <a:defRPr/>
+            </a:pPr>
+            <a:r>
+              <a:rPr lang="en-US" sz="1400" noProof="0" dirty="0">
+                <a:solidFill>
+                  <a:prstClr val="black"/>
+                </a:solidFill>
+                <a:latin typeface="+mj-lt"/>
+                <a:cs typeface="Arial" pitchFamily="34" charset="0"/>
+              </a:rPr>
+              <a:t>[4]  National Critical Information Infrastructure Protection Centre (NCIIPC). [Online]. Available: https://nciipc.gov.in</a:t>
+            </a:r>
+          </a:p>
+          <a:p>
+            <a:pPr marL="342900" marR="0" lvl="0" indent="-342900" algn="just" defTabSz="457200" rtl="0" eaLnBrk="1" fontAlgn="base" latinLnBrk="0" hangingPunct="1">
+              <a:lnSpc>
+                <a:spcPct val="100000"/>
+              </a:lnSpc>
+              <a:spcBef>
+                <a:spcPct val="0"/>
+              </a:spcBef>
+              <a:spcAft>
+                <a:spcPct val="0"/>
+              </a:spcAft>
+              <a:buClrTx/>
+              <a:buSzTx/>
+              <a:buFont typeface="Arial" panose="020B0604020202020204" pitchFamily="34" charset="0"/>
+              <a:buChar char="•"/>
+              <a:tabLst/>
+              <a:defRPr/>
+            </a:pPr>
+            <a:r>
+              <a:rPr lang="en-US" sz="1400" noProof="0" dirty="0">
+                <a:solidFill>
+                  <a:prstClr val="black"/>
+                </a:solidFill>
+                <a:latin typeface="+mj-lt"/>
+                <a:cs typeface="Arial" pitchFamily="34" charset="0"/>
+              </a:rPr>
+              <a:t>[5]  Ministry of Electronics and Information Technology (MeitY), "Digital Personal Data Protection Act, 2023." [Online]. Available: https://www.meity.gov.in</a:t>
             </a:r>
           </a:p>
         </p:txBody>
@@ -13247,7 +10477,7 @@
         <p:spPr>
           <a:xfrm>
             <a:off x="329773" y="252246"/>
-            <a:ext cx="1787785" cy="807334"/>
+            <a:ext cx="1251857" cy="807334"/>
           </a:xfrm>
           <a:prstGeom prst="ellipse">
             <a:avLst/>
@@ -13272,31 +10502,10 @@
           <a:lstStyle/>
           <a:p>
             <a:pPr algn="ctr"/>
-            <a:endParaRPr lang="en-US" b="1">
-              <a:latin typeface="Arial" panose="020B0604020202020204" pitchFamily="34" charset="0"/>
-              <a:cs typeface="Arial" panose="020B0604020202020204" pitchFamily="34" charset="0"/>
-            </a:endParaRPr>
-          </a:p>
-          <a:p>
-            <a:pPr algn="ctr"/>
-            <a:r>
-              <a:rPr lang="en-US" b="1">
-                <a:latin typeface="Arial" panose="020B0604020202020204" pitchFamily="34" charset="0"/>
-                <a:cs typeface="Arial" panose="020B0604020202020204" pitchFamily="34" charset="0"/>
-              </a:rPr>
-              <a:t>Team </a:t>
-            </a:r>
-            <a:r>
-              <a:rPr lang="en-US" b="1" dirty="0">
-                <a:latin typeface="Arial" panose="020B0604020202020204" pitchFamily="34" charset="0"/>
-                <a:cs typeface="Arial" panose="020B0604020202020204" pitchFamily="34" charset="0"/>
-              </a:rPr>
-              <a:t>Invictus</a:t>
-            </a:r>
-            <a:endParaRPr lang="en-IN" dirty="0"/>
-          </a:p>
-          <a:p>
-            <a:pPr algn="ctr"/>
+            <a:r>
+              <a:rPr lang="en-US" sz="1000" dirty="0"/>
+              <a:t>Team Invictus</a:t>
+            </a:r>
             <a:endParaRPr lang="en-IN" dirty="0"/>
           </a:p>
         </p:txBody>
@@ -13333,14 +10542,14 @@
       </p:pic>
       <p:sp>
         <p:nvSpPr>
-          <p:cNvPr id="17410" name="TextBox 17409"/>
+          <p:cNvPr id="17411" name="TextBox 17410"/>
           <p:cNvSpPr txBox="1"/>
           <p:nvPr/>
         </p:nvSpPr>
         <p:spPr>
           <a:xfrm>
-            <a:off x="411480" y="1847088"/>
-            <a:ext cx="7315200" cy="274320"/>
+            <a:off x="6309360" y="2514600"/>
+            <a:ext cx="5486400" cy="2200602"/>
           </a:xfrm>
           <a:prstGeom prst="rect">
             <a:avLst/>
@@ -13348,716 +10557,175 @@
           <a:noFill/>
         </p:spPr>
         <p:txBody>
-          <a:bodyPr wrap="square" lIns="0" tIns="0" rIns="0" bIns="0" anchor="t">
+          <a:bodyPr wrap="square">
             <a:spAutoFit/>
           </a:bodyPr>
           <a:lstStyle/>
           <a:p>
-            <a:pPr algn="l">
-              <a:lnSpc>
-                <a:spcPct val="100000"/>
-              </a:lnSpc>
+            <a:pPr>
+              <a:spcAft>
+                <a:spcPts val="1000"/>
+              </a:spcAft>
             </a:pPr>
             <a:r>
-              <a:rPr sz="1300" b="1" i="0">
+              <a:rPr sz="1400" dirty="0">
                 <a:solidFill>
-                  <a:srgbClr val="1F3864"/>
+                  <a:srgbClr val="333333"/>
+                </a:solidFill>
+                <a:latin typeface="Calibri"/>
+              </a:rPr>
+              <a:t>[6]  OWASP Foundation, "OWASP Top 10 for Large Language Model Applications," 2024.</a:t>
+            </a:r>
+          </a:p>
+          <a:p>
+            <a:pPr>
+              <a:spcAft>
+                <a:spcPts val="1000"/>
+              </a:spcAft>
+            </a:pPr>
+            <a:r>
+              <a:rPr sz="1400" dirty="0">
+                <a:solidFill>
+                  <a:srgbClr val="333333"/>
+                </a:solidFill>
+                <a:latin typeface="Calibri"/>
+              </a:rPr>
+              <a:t>[7]  P. Lewis et al., "Retrieval-Augmented Generation for Knowledge-Intensive NLP Tasks," in Proc. </a:t>
+            </a:r>
+            <a:r>
+              <a:rPr sz="1400" dirty="0" err="1">
+                <a:solidFill>
+                  <a:srgbClr val="333333"/>
+                </a:solidFill>
+                <a:latin typeface="Calibri"/>
+              </a:rPr>
+              <a:t>NeurIPS</a:t>
+            </a:r>
+            <a:r>
+              <a:rPr sz="1400" dirty="0">
+                <a:solidFill>
+                  <a:srgbClr val="333333"/>
+                </a:solidFill>
+                <a:latin typeface="Calibri"/>
+              </a:rPr>
+              <a:t>, 2020, pp. 9459–9474.</a:t>
+            </a:r>
+          </a:p>
+          <a:p>
+            <a:pPr>
+              <a:spcAft>
+                <a:spcPts val="1000"/>
+              </a:spcAft>
+            </a:pPr>
+            <a:r>
+              <a:rPr sz="1400" dirty="0">
+                <a:solidFill>
+                  <a:srgbClr val="333333"/>
+                </a:solidFill>
+                <a:latin typeface="Calibri"/>
+              </a:rPr>
+              <a:t>[8]  National Institute of Standards and Technology (NIST), "AI Risk Management Framework," NIST AI 100-1, 2023.</a:t>
+            </a:r>
+          </a:p>
+          <a:p>
+            <a:pPr>
+              <a:spcAft>
+                <a:spcPts val="1000"/>
+              </a:spcAft>
+            </a:pPr>
+            <a:r>
+              <a:rPr sz="1400" dirty="0">
+                <a:solidFill>
+                  <a:srgbClr val="333333"/>
+                </a:solidFill>
+                <a:latin typeface="Calibri"/>
+              </a:rPr>
+              <a:t>[9]  </a:t>
+            </a:r>
+            <a:r>
+              <a:rPr sz="1400" dirty="0" err="1">
+                <a:solidFill>
+                  <a:srgbClr val="333333"/>
+                </a:solidFill>
+                <a:latin typeface="Calibri"/>
+              </a:rPr>
+              <a:t>LangChain</a:t>
+            </a:r>
+            <a:r>
+              <a:rPr sz="1400" dirty="0">
+                <a:solidFill>
+                  <a:srgbClr val="333333"/>
+                </a:solidFill>
+                <a:latin typeface="Calibri"/>
+              </a:rPr>
+              <a:t> Documentation. [Online]. Available: https://python.langchain.com</a:t>
+            </a:r>
+          </a:p>
+        </p:txBody>
+      </p:sp>
+      <p:sp>
+        <p:nvSpPr>
+          <p:cNvPr id="17412" name="TextBox 17411"/>
+          <p:cNvSpPr txBox="1"/>
+          <p:nvPr/>
+        </p:nvSpPr>
+        <p:spPr>
+          <a:xfrm>
+            <a:off x="612648" y="1234440"/>
+            <a:ext cx="10972800" cy="969496"/>
+          </a:xfrm>
+          <a:prstGeom prst="rect">
+            <a:avLst/>
+          </a:prstGeom>
+          <a:noFill/>
+        </p:spPr>
+        <p:txBody>
+          <a:bodyPr wrap="square">
+            <a:spAutoFit/>
+          </a:bodyPr>
+          <a:lstStyle/>
+          <a:p>
+            <a:r>
+              <a:rPr sz="1500" b="1" dirty="0">
+                <a:solidFill>
+                  <a:srgbClr val="1F4E79"/>
                 </a:solidFill>
                 <a:latin typeface="Calibri"/>
               </a:rPr>
               <a:t>Competitive Landscape</a:t>
             </a:r>
           </a:p>
-        </p:txBody>
-      </p:sp>
-      <p:graphicFrame>
-        <p:nvGraphicFramePr>
-          <p:cNvPr id="17411" name="Table 17410"/>
-          <p:cNvGraphicFramePr>
-            <a:graphicFrameLocks noGrp="1"/>
-          </p:cNvGraphicFramePr>
-          <p:nvPr/>
-        </p:nvGraphicFramePr>
-        <p:xfrm>
-          <a:off x="411480" y="2176272"/>
-          <a:ext cx="11338560" cy="1234440"/>
-        </p:xfrm>
-        <a:graphic>
-          <a:graphicData uri="http://schemas.openxmlformats.org/drawingml/2006/table">
-            <a:tbl>
-              <a:tblPr firstRow="1" bandRow="1">
-                <a:tableStyleId>{5C22544A-7EE6-4342-B048-85BDC9FD1C3A}</a:tableStyleId>
-              </a:tblPr>
-              <a:tblGrid>
-                <a:gridCol w="2377440">
-                  <a:extLst>
-                    <a:ext uri="{9D8B030D-6E8A-4147-A177-3AD203B41FA5}">
-                      <a16:colId xmlns:a16="http://schemas.microsoft.com/office/drawing/2014/main" val="20000"/>
-                    </a:ext>
-                  </a:extLst>
-                </a:gridCol>
-                <a:gridCol w="3291840">
-                  <a:extLst>
-                    <a:ext uri="{9D8B030D-6E8A-4147-A177-3AD203B41FA5}">
-                      <a16:colId xmlns:a16="http://schemas.microsoft.com/office/drawing/2014/main" val="20001"/>
-                    </a:ext>
-                  </a:extLst>
-                </a:gridCol>
-                <a:gridCol w="5669280">
-                  <a:extLst>
-                    <a:ext uri="{9D8B030D-6E8A-4147-A177-3AD203B41FA5}">
-                      <a16:colId xmlns:a16="http://schemas.microsoft.com/office/drawing/2014/main" val="20002"/>
-                    </a:ext>
-                  </a:extLst>
-                </a:gridCol>
-              </a:tblGrid>
-              <a:tr h="308610">
-                <a:tc>
-                  <a:txBody>
-                    <a:bodyPr/>
-                    <a:lstStyle/>
-                    <a:p>
-                      <a:pPr algn="l"/>
-                      <a:r>
-                        <a:rPr sz="950" b="1">
-                          <a:solidFill>
-                            <a:srgbClr val="FFFFFF"/>
-                          </a:solidFill>
-                        </a:rPr>
-                        <a:t>Existing Platform</a:t>
-                      </a:r>
-                    </a:p>
-                  </a:txBody>
-                  <a:tcPr marL="76200" marR="50800" marT="38100" marB="38100">
-                    <a:solidFill>
-                      <a:srgbClr val="1F3864"/>
-                    </a:solidFill>
-                  </a:tcPr>
-                </a:tc>
-                <a:tc>
-                  <a:txBody>
-                    <a:bodyPr/>
-                    <a:lstStyle/>
-                    <a:p>
-                      <a:pPr algn="l"/>
-                      <a:r>
-                        <a:rPr sz="950" b="1">
-                          <a:solidFill>
-                            <a:srgbClr val="FFFFFF"/>
-                          </a:solidFill>
-                        </a:rPr>
-                        <a:t>Focus Area</a:t>
-                      </a:r>
-                    </a:p>
-                  </a:txBody>
-                  <a:tcPr marL="76200" marR="50800" marT="38100" marB="38100">
-                    <a:solidFill>
-                      <a:srgbClr val="1F3864"/>
-                    </a:solidFill>
-                  </a:tcPr>
-                </a:tc>
-                <a:tc>
-                  <a:txBody>
-                    <a:bodyPr/>
-                    <a:lstStyle/>
-                    <a:p>
-                      <a:pPr algn="l"/>
-                      <a:r>
-                        <a:rPr sz="950" b="1">
-                          <a:solidFill>
-                            <a:srgbClr val="FFFFFF"/>
-                          </a:solidFill>
-                        </a:rPr>
-                        <a:t>Gap SKILL-SETU Addresses</a:t>
-                      </a:r>
-                    </a:p>
-                  </a:txBody>
-                  <a:tcPr marL="76200" marR="50800" marT="38100" marB="38100">
-                    <a:solidFill>
-                      <a:srgbClr val="1F3864"/>
-                    </a:solidFill>
-                  </a:tcPr>
-                </a:tc>
-                <a:extLst>
-                  <a:ext uri="{0D108BD9-81ED-4DB2-BD59-A6C34878D82A}">
-                    <a16:rowId xmlns:a16="http://schemas.microsoft.com/office/drawing/2014/main" val="10000"/>
-                  </a:ext>
-                </a:extLst>
-              </a:tr>
-              <a:tr h="308610">
-                <a:tc>
-                  <a:txBody>
-                    <a:bodyPr/>
-                    <a:lstStyle/>
-                    <a:p>
-                      <a:pPr>
-                        <a:lnSpc>
-                          <a:spcPct val="100000"/>
-                        </a:lnSpc>
-                      </a:pPr>
-                      <a:r>
-                        <a:rPr sz="850">
-                          <a:solidFill>
-                            <a:srgbClr val="222A33"/>
-                          </a:solidFill>
-                        </a:rPr>
-                        <a:t>LinkedIn / Naukri</a:t>
-                      </a:r>
-                    </a:p>
-                  </a:txBody>
-                  <a:tcPr marL="76200" marR="50800" marT="38100" marB="38100">
-                    <a:solidFill>
-                      <a:srgbClr val="FFFFFF"/>
-                    </a:solidFill>
-                  </a:tcPr>
-                </a:tc>
-                <a:tc>
-                  <a:txBody>
-                    <a:bodyPr/>
-                    <a:lstStyle/>
-                    <a:p>
-                      <a:pPr>
-                        <a:lnSpc>
-                          <a:spcPct val="100000"/>
-                        </a:lnSpc>
-                      </a:pPr>
-                      <a:r>
-                        <a:rPr sz="850">
-                          <a:solidFill>
-                            <a:srgbClr val="222A33"/>
-                          </a:solidFill>
-                        </a:rPr>
-                        <a:t>General job &amp; networking matching</a:t>
-                      </a:r>
-                    </a:p>
-                  </a:txBody>
-                  <a:tcPr marL="76200" marR="50800" marT="38100" marB="38100">
-                    <a:solidFill>
-                      <a:srgbClr val="FFFFFF"/>
-                    </a:solidFill>
-                  </a:tcPr>
-                </a:tc>
-                <a:tc>
-                  <a:txBody>
-                    <a:bodyPr/>
-                    <a:lstStyle/>
-                    <a:p>
-                      <a:pPr>
-                        <a:lnSpc>
-                          <a:spcPct val="100000"/>
-                        </a:lnSpc>
-                      </a:pPr>
-                      <a:r>
-                        <a:rPr sz="850">
-                          <a:solidFill>
-                            <a:srgbClr val="222A33"/>
-                          </a:solidFill>
-                        </a:rPr>
-                        <a:t>No institution/curriculum linkage or skill-gap analytics</a:t>
-                      </a:r>
-                    </a:p>
-                  </a:txBody>
-                  <a:tcPr marL="76200" marR="50800" marT="38100" marB="38100">
-                    <a:solidFill>
-                      <a:srgbClr val="FFFFFF"/>
-                    </a:solidFill>
-                  </a:tcPr>
-                </a:tc>
-                <a:extLst>
-                  <a:ext uri="{0D108BD9-81ED-4DB2-BD59-A6C34878D82A}">
-                    <a16:rowId xmlns:a16="http://schemas.microsoft.com/office/drawing/2014/main" val="10001"/>
-                  </a:ext>
-                </a:extLst>
-              </a:tr>
-              <a:tr h="308610">
-                <a:tc>
-                  <a:txBody>
-                    <a:bodyPr/>
-                    <a:lstStyle/>
-                    <a:p>
-                      <a:pPr>
-                        <a:lnSpc>
-                          <a:spcPct val="100000"/>
-                        </a:lnSpc>
-                      </a:pPr>
-                      <a:r>
-                        <a:rPr sz="850">
-                          <a:solidFill>
-                            <a:srgbClr val="222A33"/>
-                          </a:solidFill>
-                        </a:rPr>
-                        <a:t>Internshala</a:t>
-                      </a:r>
-                    </a:p>
-                  </a:txBody>
-                  <a:tcPr marL="76200" marR="50800" marT="38100" marB="38100">
-                    <a:solidFill>
-                      <a:srgbClr val="F4F7FA"/>
-                    </a:solidFill>
-                  </a:tcPr>
-                </a:tc>
-                <a:tc>
-                  <a:txBody>
-                    <a:bodyPr/>
-                    <a:lstStyle/>
-                    <a:p>
-                      <a:pPr>
-                        <a:lnSpc>
-                          <a:spcPct val="100000"/>
-                        </a:lnSpc>
-                      </a:pPr>
-                      <a:r>
-                        <a:rPr sz="850">
-                          <a:solidFill>
-                            <a:srgbClr val="222A33"/>
-                          </a:solidFill>
-                        </a:rPr>
-                        <a:t>Internship listings marketplace</a:t>
-                      </a:r>
-                    </a:p>
-                  </a:txBody>
-                  <a:tcPr marL="76200" marR="50800" marT="38100" marB="38100">
-                    <a:solidFill>
-                      <a:srgbClr val="F4F7FA"/>
-                    </a:solidFill>
-                  </a:tcPr>
-                </a:tc>
-                <a:tc>
-                  <a:txBody>
-                    <a:bodyPr/>
-                    <a:lstStyle/>
-                    <a:p>
-                      <a:pPr>
-                        <a:lnSpc>
-                          <a:spcPct val="100000"/>
-                        </a:lnSpc>
-                      </a:pPr>
-                      <a:r>
-                        <a:rPr sz="850">
-                          <a:solidFill>
-                            <a:srgbClr val="222A33"/>
-                          </a:solidFill>
-                        </a:rPr>
-                        <a:t>No AI-based skill-gap mapping or verified competency scoring</a:t>
-                      </a:r>
-                    </a:p>
-                  </a:txBody>
-                  <a:tcPr marL="76200" marR="50800" marT="38100" marB="38100">
-                    <a:solidFill>
-                      <a:srgbClr val="F4F7FA"/>
-                    </a:solidFill>
-                  </a:tcPr>
-                </a:tc>
-                <a:extLst>
-                  <a:ext uri="{0D108BD9-81ED-4DB2-BD59-A6C34878D82A}">
-                    <a16:rowId xmlns:a16="http://schemas.microsoft.com/office/drawing/2014/main" val="10002"/>
-                  </a:ext>
-                </a:extLst>
-              </a:tr>
-              <a:tr h="308610">
-                <a:tc>
-                  <a:txBody>
-                    <a:bodyPr/>
-                    <a:lstStyle/>
-                    <a:p>
-                      <a:pPr>
-                        <a:lnSpc>
-                          <a:spcPct val="100000"/>
-                        </a:lnSpc>
-                      </a:pPr>
-                      <a:r>
-                        <a:rPr sz="850">
-                          <a:solidFill>
-                            <a:srgbClr val="222A33"/>
-                          </a:solidFill>
-                        </a:rPr>
-                        <a:t>AICTE Internship Portal</a:t>
-                      </a:r>
-                    </a:p>
-                  </a:txBody>
-                  <a:tcPr marL="76200" marR="50800" marT="38100" marB="38100">
-                    <a:solidFill>
-                      <a:srgbClr val="FFFFFF"/>
-                    </a:solidFill>
-                  </a:tcPr>
-                </a:tc>
-                <a:tc>
-                  <a:txBody>
-                    <a:bodyPr/>
-                    <a:lstStyle/>
-                    <a:p>
-                      <a:pPr>
-                        <a:lnSpc>
-                          <a:spcPct val="100000"/>
-                        </a:lnSpc>
-                      </a:pPr>
-                      <a:r>
-                        <a:rPr sz="850">
-                          <a:solidFill>
-                            <a:srgbClr val="222A33"/>
-                          </a:solidFill>
-                        </a:rPr>
-                        <a:t>Manual internship registry</a:t>
-                      </a:r>
-                    </a:p>
-                  </a:txBody>
-                  <a:tcPr marL="76200" marR="50800" marT="38100" marB="38100">
-                    <a:solidFill>
-                      <a:srgbClr val="FFFFFF"/>
-                    </a:solidFill>
-                  </a:tcPr>
-                </a:tc>
-                <a:tc>
-                  <a:txBody>
-                    <a:bodyPr/>
-                    <a:lstStyle/>
-                    <a:p>
-                      <a:pPr>
-                        <a:lnSpc>
-                          <a:spcPct val="100000"/>
-                        </a:lnSpc>
-                      </a:pPr>
-                      <a:r>
-                        <a:rPr sz="850">
-                          <a:solidFill>
-                            <a:srgbClr val="222A33"/>
-                          </a:solidFill>
-                        </a:rPr>
-                        <a:t>No real-time analytics, ML matching, or Ayush-sector focus</a:t>
-                      </a:r>
-                    </a:p>
-                  </a:txBody>
-                  <a:tcPr marL="76200" marR="50800" marT="38100" marB="38100">
-                    <a:solidFill>
-                      <a:srgbClr val="FFFFFF"/>
-                    </a:solidFill>
-                  </a:tcPr>
-                </a:tc>
-                <a:extLst>
-                  <a:ext uri="{0D108BD9-81ED-4DB2-BD59-A6C34878D82A}">
-                    <a16:rowId xmlns:a16="http://schemas.microsoft.com/office/drawing/2014/main" val="10003"/>
-                  </a:ext>
-                </a:extLst>
-              </a:tr>
-            </a:tbl>
-          </a:graphicData>
-        </a:graphic>
-      </p:graphicFrame>
-      <p:sp>
-        <p:nvSpPr>
-          <p:cNvPr id="17412" name="TextBox 17411"/>
-          <p:cNvSpPr txBox="1"/>
-          <p:nvPr/>
-        </p:nvSpPr>
-        <p:spPr>
-          <a:xfrm>
-            <a:off x="411480" y="3611880"/>
-            <a:ext cx="7315200" cy="274320"/>
-          </a:xfrm>
-          <a:prstGeom prst="rect">
-            <a:avLst/>
-          </a:prstGeom>
-          <a:noFill/>
-        </p:spPr>
-        <p:txBody>
-          <a:bodyPr wrap="square" lIns="0" tIns="0" rIns="0" bIns="0" anchor="t">
-            <a:spAutoFit/>
-          </a:bodyPr>
-          <a:lstStyle/>
-          <a:p>
-            <a:pPr algn="l">
-              <a:lnSpc>
-                <a:spcPct val="100000"/>
-              </a:lnSpc>
-            </a:pPr>
-            <a:r>
-              <a:rPr sz="1300" b="1" i="0">
+          <a:p>
+            <a:r>
+              <a:rPr sz="1400" dirty="0">
                 <a:solidFill>
-                  <a:srgbClr val="1F3864"/>
+                  <a:srgbClr val="404040"/>
                 </a:solidFill>
                 <a:latin typeface="Calibri"/>
               </a:rPr>
-              <a:t>Research &amp; References (IEEE Format)</a:t>
-            </a:r>
-          </a:p>
-        </p:txBody>
-      </p:sp>
-      <p:sp>
-        <p:nvSpPr>
-          <p:cNvPr id="17413" name="TextBox 17412"/>
-          <p:cNvSpPr txBox="1"/>
-          <p:nvPr/>
-        </p:nvSpPr>
-        <p:spPr>
-          <a:xfrm>
-            <a:off x="411480" y="3950208"/>
-            <a:ext cx="5486400" cy="91440"/>
-          </a:xfrm>
-          <a:prstGeom prst="rect">
-            <a:avLst/>
-          </a:prstGeom>
-          <a:noFill/>
-        </p:spPr>
-        <p:txBody>
-          <a:bodyPr wrap="square" lIns="0" tIns="0" rIns="0" bIns="0">
-            <a:spAutoFit/>
-          </a:bodyPr>
-          <a:lstStyle/>
-          <a:p>
-            <a:pPr>
-              <a:lnSpc>
-                <a:spcPct val="115000"/>
-              </a:lnSpc>
-              <a:spcAft>
-                <a:spcPts val="576"/>
-              </a:spcAft>
-            </a:pPr>
-            <a:r>
-              <a:rPr sz="950" b="1">
+              <a:t>•  Jasper AI / Copy.ai — general-purpose marketing copy generation; no single-source, multi-format orchestration or provenance tracking</a:t>
+            </a:r>
+          </a:p>
+          <a:p>
+            <a:r>
+              <a:rPr sz="1400" dirty="0">
                 <a:solidFill>
-                  <a:srgbClr val="1F3864"/>
+                  <a:srgbClr val="404040"/>
                 </a:solidFill>
+                <a:latin typeface="Calibri"/>
               </a:rPr>
-              <a:t>[1]  </a:t>
-            </a:r>
-            <a:r>
-              <a:rPr sz="950">
+              <a:t>•  Canva Magic Design — visual/design templates only; no video script, advisory or executive-summary generation</a:t>
+            </a:r>
+          </a:p>
+          <a:p>
+            <a:r>
+              <a:rPr sz="1400" dirty="0">
                 <a:solidFill>
-                  <a:srgbClr val="222A33"/>
+                  <a:srgbClr val="404040"/>
                 </a:solidFill>
+                <a:latin typeface="Calibri"/>
               </a:rPr>
-              <a:t>All India Council for Technical Education (AICTE), “Internship Policy Framework.” [Online]. Available: https://www.aicte-india.org</a:t>
-            </a:r>
-          </a:p>
-          <a:p>
-            <a:pPr>
-              <a:lnSpc>
-                <a:spcPct val="115000"/>
-              </a:lnSpc>
-              <a:spcAft>
-                <a:spcPts val="576"/>
-              </a:spcAft>
-            </a:pPr>
-            <a:r>
-              <a:rPr sz="950" b="1">
-                <a:solidFill>
-                  <a:srgbClr val="1F3864"/>
-                </a:solidFill>
-              </a:rPr>
-              <a:t>[2]  </a:t>
-            </a:r>
-            <a:r>
-              <a:rPr sz="950">
-                <a:solidFill>
-                  <a:srgbClr val="222A33"/>
-                </a:solidFill>
-              </a:rPr>
-              <a:t>Ministry of Ayush, Government of India, “Annual Report and AIIA Institutional Data.” [Online]. Available: https://www.ayush.gov.in</a:t>
-            </a:r>
-          </a:p>
-          <a:p>
-            <a:pPr>
-              <a:lnSpc>
-                <a:spcPct val="115000"/>
-              </a:lnSpc>
-              <a:spcAft>
-                <a:spcPts val="576"/>
-              </a:spcAft>
-            </a:pPr>
-            <a:r>
-              <a:rPr sz="950" b="1">
-                <a:solidFill>
-                  <a:srgbClr val="1F3864"/>
-                </a:solidFill>
-              </a:rPr>
-              <a:t>[3]  </a:t>
-            </a:r>
-            <a:r>
-              <a:rPr sz="950">
-                <a:solidFill>
-                  <a:srgbClr val="222A33"/>
-                </a:solidFill>
-              </a:rPr>
-              <a:t>Ministry of Education, Government of India, “National Education Policy 2020.” [Online]. Available: https://www.education.gov.in</a:t>
-            </a:r>
-          </a:p>
-          <a:p>
-            <a:pPr>
-              <a:lnSpc>
-                <a:spcPct val="115000"/>
-              </a:lnSpc>
-              <a:spcAft>
-                <a:spcPts val="576"/>
-              </a:spcAft>
-            </a:pPr>
-            <a:r>
-              <a:rPr sz="950" b="1">
-                <a:solidFill>
-                  <a:srgbClr val="1F3864"/>
-                </a:solidFill>
-              </a:rPr>
-              <a:t>[4]  </a:t>
-            </a:r>
-            <a:r>
-              <a:rPr sz="950">
-                <a:solidFill>
-                  <a:srgbClr val="222A33"/>
-                </a:solidFill>
-              </a:rPr>
-              <a:t>Ministry of Education, Government of India, “All India Survey on Higher Education (AISHE) Report.” [Online]. Available: https://www.education.gov.in/aishe</a:t>
-            </a:r>
-          </a:p>
-          <a:p>
-            <a:pPr>
-              <a:lnSpc>
-                <a:spcPct val="115000"/>
-              </a:lnSpc>
-              <a:spcAft>
-                <a:spcPts val="576"/>
-              </a:spcAft>
-            </a:pPr>
-            <a:r>
-              <a:rPr sz="950" b="1">
-                <a:solidFill>
-                  <a:srgbClr val="1F3864"/>
-                </a:solidFill>
-              </a:rPr>
-              <a:t>[5]  </a:t>
-            </a:r>
-            <a:r>
-              <a:rPr sz="950">
-                <a:solidFill>
-                  <a:srgbClr val="222A33"/>
-                </a:solidFill>
-              </a:rPr>
-              <a:t>Ministry of Statistics and Programme Implementation (MoSPI), “Periodic Labour Force Survey (PLFS).” [Online]. Available: https://www.mospi.gov.in</a:t>
-            </a:r>
-          </a:p>
-        </p:txBody>
-      </p:sp>
-      <p:sp>
-        <p:nvSpPr>
-          <p:cNvPr id="17414" name="TextBox 17413"/>
-          <p:cNvSpPr txBox="1"/>
-          <p:nvPr/>
-        </p:nvSpPr>
-        <p:spPr>
-          <a:xfrm>
-            <a:off x="6172200" y="3950208"/>
-            <a:ext cx="5577840" cy="91440"/>
-          </a:xfrm>
-          <a:prstGeom prst="rect">
-            <a:avLst/>
-          </a:prstGeom>
-          <a:noFill/>
-        </p:spPr>
-        <p:txBody>
-          <a:bodyPr wrap="square" lIns="0" tIns="0" rIns="0" bIns="0">
-            <a:spAutoFit/>
-          </a:bodyPr>
-          <a:lstStyle/>
-          <a:p>
-            <a:pPr>
-              <a:lnSpc>
-                <a:spcPct val="115000"/>
-              </a:lnSpc>
-              <a:spcAft>
-                <a:spcPts val="576"/>
-              </a:spcAft>
-            </a:pPr>
-            <a:r>
-              <a:rPr sz="950" b="1">
-                <a:solidFill>
-                  <a:srgbClr val="1F3864"/>
-                </a:solidFill>
-              </a:rPr>
-              <a:t>[6]  </a:t>
-            </a:r>
-            <a:r>
-              <a:rPr sz="950">
-                <a:solidFill>
-                  <a:srgbClr val="222A33"/>
-                </a:solidFill>
-              </a:rPr>
-              <a:t>N. Reimers and I. Gurevych, “Sentence-BERT: Sentence Embeddings using Siamese BERT-Networks,” in Proc. EMNLP-IJCNLP, 2019, pp. 3982–3992.</a:t>
-            </a:r>
-          </a:p>
-          <a:p>
-            <a:pPr>
-              <a:lnSpc>
-                <a:spcPct val="115000"/>
-              </a:lnSpc>
-              <a:spcAft>
-                <a:spcPts val="576"/>
-              </a:spcAft>
-            </a:pPr>
-            <a:r>
-              <a:rPr sz="950" b="1">
-                <a:solidFill>
-                  <a:srgbClr val="1F3864"/>
-                </a:solidFill>
-              </a:rPr>
-              <a:t>[7]  </a:t>
-            </a:r>
-            <a:r>
-              <a:rPr sz="950">
-                <a:solidFill>
-                  <a:srgbClr val="222A33"/>
-                </a:solidFill>
-              </a:rPr>
-              <a:t>Ministry of Electronics and Information Technology (MeitY), “Digital Personal Data Protection Act, 2023.” [Online]. Available: https://www.meity.gov.in</a:t>
-            </a:r>
-          </a:p>
-          <a:p>
-            <a:pPr>
-              <a:lnSpc>
-                <a:spcPct val="115000"/>
-              </a:lnSpc>
-              <a:spcAft>
-                <a:spcPts val="576"/>
-              </a:spcAft>
-            </a:pPr>
-            <a:r>
-              <a:rPr sz="950" b="1">
-                <a:solidFill>
-                  <a:srgbClr val="1F3864"/>
-                </a:solidFill>
-              </a:rPr>
-              <a:t>[8]  </a:t>
-            </a:r>
-            <a:r>
-              <a:rPr sz="950">
-                <a:solidFill>
-                  <a:srgbClr val="222A33"/>
-                </a:solidFill>
-              </a:rPr>
-              <a:t>University Grants Commission (UGC), “UGC Internship Guidelines, 2023.” [Online]. Available: https://www.ugc.gov.in</a:t>
-            </a:r>
-          </a:p>
-          <a:p>
-            <a:pPr>
-              <a:lnSpc>
-                <a:spcPct val="115000"/>
-              </a:lnSpc>
-              <a:spcAft>
-                <a:spcPts val="576"/>
-              </a:spcAft>
-            </a:pPr>
-            <a:r>
-              <a:rPr sz="950" b="1">
-                <a:solidFill>
-                  <a:srgbClr val="1F3864"/>
-                </a:solidFill>
-              </a:rPr>
-              <a:t>[9]  </a:t>
-            </a:r>
-            <a:r>
-              <a:rPr sz="950">
-                <a:solidFill>
-                  <a:srgbClr val="222A33"/>
-                </a:solidFill>
-              </a:rPr>
-              <a:t>IEEE/ACM Digital Library, “AI-Based Recommendation Systems in Educational Technology: A Survey,” 2022.</a:t>
+              <a:t>•  Lately.ai — social-media repurposing only; no cross-format orchestration, security focus or on-prem option</a:t>
             </a:r>
           </a:p>
         </p:txBody>
@@ -14065,7 +10733,7 @@
     </p:spTree>
     <p:extLst>
       <p:ext uri="{BB962C8B-B14F-4D97-AF65-F5344CB8AC3E}">
-        <p14:creationId xmlns:p14="http://schemas.microsoft.com/office/powerpoint/2010/main" val="3779924293"/>
+        <p14:creationId xmlns:p14="http://schemas.microsoft.com/office/powerpoint/2010/main" val="3916788613"/>
       </p:ext>
     </p:extLst>
   </p:cSld>

--- a/share/SIH26-A0H-T364_Presentation.pptx
+++ b/share/SIH26-A0H-T364_Presentation.pptx
@@ -11,9 +11,9 @@
     <p:sldId id="291" r:id="rId2"/>
     <p:sldId id="281" r:id="rId3"/>
     <p:sldId id="290" r:id="rId4"/>
-    <p:sldId id="293" r:id="rId5"/>
-    <p:sldId id="294" r:id="rId6"/>
-    <p:sldId id="296" r:id="rId7"/>
+    <p:sldId id="294" r:id="rId5"/>
+    <p:sldId id="293" r:id="rId6"/>
+    <p:sldId id="297" r:id="rId7"/>
   </p:sldIdLst>
   <p:sldSz cx="12192000" cy="6858000"/>
   <p:notesSz cx="6858000" cy="9144000"/>
@@ -261,7 +261,7 @@
             <a:fld id="{C4D5ADD5-2BBC-4A94-8F86-D9013941F742}" type="datetimeFigureOut">
               <a:rPr lang="en-US"/>
               <a:pPr/>
-              <a:t>9/14/2026</a:t>
+              <a:t>9/6/2026</a:t>
             </a:fld>
             <a:endParaRPr lang="en-US"/>
           </a:p>
@@ -985,7 +985,7 @@
     </p:spTree>
     <p:extLst>
       <p:ext uri="{BB962C8B-B14F-4D97-AF65-F5344CB8AC3E}">
-        <p14:creationId xmlns:p14="http://schemas.microsoft.com/office/powerpoint/2010/main" val="3773505461"/>
+        <p14:creationId xmlns:p14="http://schemas.microsoft.com/office/powerpoint/2010/main" val="2641722845"/>
       </p:ext>
     </p:extLst>
   </p:cSld>
@@ -1163,7 +1163,7 @@
     </p:spTree>
     <p:extLst>
       <p:ext uri="{BB962C8B-B14F-4D97-AF65-F5344CB8AC3E}">
-        <p14:creationId xmlns:p14="http://schemas.microsoft.com/office/powerpoint/2010/main" val="2641722845"/>
+        <p14:creationId xmlns:p14="http://schemas.microsoft.com/office/powerpoint/2010/main" val="3773505461"/>
       </p:ext>
     </p:extLst>
   </p:cSld>
@@ -1534,7 +1534,7 @@
           <a:p>
             <a:fld id="{E60792E3-D524-454C-8AFD-A91972900BCB}" type="datetime1">
               <a:rPr lang="en-US" smtClean="0"/>
-              <a:t>9/14/2026</a:t>
+              <a:t>9/6/2026</a:t>
             </a:fld>
             <a:endParaRPr lang="en-US"/>
           </a:p>
@@ -1716,7 +1716,7 @@
           <a:p>
             <a:fld id="{053C3A68-6922-42D3-8905-ECC2D82A3469}" type="datetime1">
               <a:rPr lang="en-US" smtClean="0"/>
-              <a:t>9/14/2026</a:t>
+              <a:t>9/6/2026</a:t>
             </a:fld>
             <a:endParaRPr lang="en-US"/>
           </a:p>
@@ -1908,7 +1908,7 @@
           <a:p>
             <a:fld id="{CB69E9F4-7604-4950-A8B2-8ACDEDB1506E}" type="datetime1">
               <a:rPr lang="en-US" smtClean="0"/>
-              <a:t>9/14/2026</a:t>
+              <a:t>9/6/2026</a:t>
             </a:fld>
             <a:endParaRPr lang="en-US"/>
           </a:p>
@@ -2090,7 +2090,7 @@
           <a:p>
             <a:fld id="{708B7524-32A2-4C20-A58C-BC3BAA1042FC}" type="datetime1">
               <a:rPr lang="en-US" smtClean="0"/>
-              <a:t>9/14/2026</a:t>
+              <a:t>9/6/2026</a:t>
             </a:fld>
             <a:endParaRPr lang="en-US"/>
           </a:p>
@@ -2349,7 +2349,7 @@
           <a:p>
             <a:fld id="{1E994447-D6B2-43BB-A877-57F1A267B999}" type="datetime1">
               <a:rPr lang="en-US" smtClean="0"/>
-              <a:t>9/14/2026</a:t>
+              <a:t>9/6/2026</a:t>
             </a:fld>
             <a:endParaRPr lang="en-US"/>
           </a:p>
@@ -2648,7 +2648,7 @@
           <a:p>
             <a:fld id="{68920E16-BD35-483C-AA6B-346FC7E46DEA}" type="datetime1">
               <a:rPr lang="en-US" smtClean="0"/>
-              <a:t>9/14/2026</a:t>
+              <a:t>9/6/2026</a:t>
             </a:fld>
             <a:endParaRPr lang="en-US"/>
           </a:p>
@@ -3081,7 +3081,7 @@
           <a:p>
             <a:fld id="{2FEAC6F8-5103-4FC0-A69E-5C6AE6469DA8}" type="datetime1">
               <a:rPr lang="en-US" smtClean="0"/>
-              <a:t>9/14/2026</a:t>
+              <a:t>9/6/2026</a:t>
             </a:fld>
             <a:endParaRPr lang="en-US"/>
           </a:p>
@@ -3212,7 +3212,7 @@
           <a:p>
             <a:fld id="{C60C6921-0627-4C8F-83D5-0CF936D2FFDD}" type="datetime1">
               <a:rPr lang="en-US" smtClean="0"/>
-              <a:t>9/14/2026</a:t>
+              <a:t>9/6/2026</a:t>
             </a:fld>
             <a:endParaRPr lang="en-US"/>
           </a:p>
@@ -3321,7 +3321,7 @@
           <a:p>
             <a:fld id="{2FF08AD7-8103-40F8-983C-E2BA6BB9CBE0}" type="datetime1">
               <a:rPr lang="en-US" smtClean="0"/>
-              <a:t>9/14/2026</a:t>
+              <a:t>9/6/2026</a:t>
             </a:fld>
             <a:endParaRPr lang="en-US"/>
           </a:p>
@@ -3610,7 +3610,7 @@
           <a:p>
             <a:fld id="{DF8C06B4-9380-4A4D-AF49-A3596E17DAF5}" type="datetime1">
               <a:rPr lang="en-US" smtClean="0"/>
-              <a:t>9/14/2026</a:t>
+              <a:t>9/6/2026</a:t>
             </a:fld>
             <a:endParaRPr lang="en-US"/>
           </a:p>
@@ -3879,7 +3879,7 @@
           <a:p>
             <a:fld id="{EF7FDEF1-C582-4E22-9E77-D68326471F28}" type="datetime1">
               <a:rPr lang="en-US" smtClean="0"/>
-              <a:t>9/14/2026</a:t>
+              <a:t>9/6/2026</a:t>
             </a:fld>
             <a:endParaRPr lang="en-US"/>
           </a:p>
@@ -4122,7 +4122,7 @@
           <a:p>
             <a:fld id="{780A9602-A9A9-453F-AEF1-37B5837E02CD}" type="datetime1">
               <a:rPr lang="en-US" smtClean="0"/>
-              <a:t>9/14/2026</a:t>
+              <a:t>9/6/2026</a:t>
             </a:fld>
             <a:endParaRPr lang="en-US"/>
           </a:p>
@@ -5540,8 +5540,8 @@
         </p:nvSpPr>
         <p:spPr>
           <a:xfrm>
-            <a:off x="1245686" y="648614"/>
-            <a:ext cx="8534400" cy="1752600"/>
+            <a:off x="162064" y="324764"/>
+            <a:ext cx="8744192" cy="2076450"/>
           </a:xfrm>
         </p:spPr>
         <p:txBody>
@@ -5557,6 +5557,25 @@
             </a:endParaRPr>
           </a:p>
           <a:p>
+            <a:r>
+              <a:rPr lang="en-US" b="1" dirty="0">
+                <a:solidFill>
+                  <a:schemeClr val="tx1"/>
+                </a:solidFill>
+                <a:latin typeface="Arial" pitchFamily="34" charset="0"/>
+                <a:cs typeface="Arial" pitchFamily="34" charset="0"/>
+              </a:rPr>
+              <a:t>SKILL-SETU – AI-Powered Academia–Industry Collaboration Portal</a:t>
+            </a:r>
+            <a:endParaRPr lang="en-US" sz="4000" dirty="0">
+              <a:solidFill>
+                <a:schemeClr val="tx1"/>
+              </a:solidFill>
+              <a:latin typeface="Arial" pitchFamily="34" charset="0"/>
+              <a:cs typeface="Arial" pitchFamily="34" charset="0"/>
+            </a:endParaRPr>
+          </a:p>
+          <a:p>
             <a:endParaRPr lang="en-IN" b="1" dirty="0">
               <a:solidFill>
                 <a:schemeClr val="tx1"/>
@@ -5579,8 +5598,8 @@
         </p:nvSpPr>
         <p:spPr>
           <a:xfrm>
-            <a:off x="331286" y="-526757"/>
-            <a:ext cx="10363200" cy="2076450"/>
+            <a:off x="-923544" y="-526757"/>
+            <a:ext cx="11618030" cy="2076450"/>
           </a:xfrm>
         </p:spPr>
         <p:txBody>
@@ -5588,7 +5607,7 @@
           <a:lstStyle/>
           <a:p>
             <a:r>
-              <a:rPr lang="en-US" sz="3600" b="1" dirty="0">
+              <a:rPr lang="en-US" sz="4000" b="1" dirty="0">
                 <a:solidFill>
                   <a:schemeClr val="tx2"/>
                 </a:solidFill>
@@ -5596,7 +5615,7 @@
               </a:rPr>
               <a:t>SMART INDIA HACKATHON 2026</a:t>
             </a:r>
-            <a:endParaRPr lang="en-IN" sz="3600" b="1" dirty="0">
+            <a:endParaRPr lang="en-IN" sz="4000" b="1" dirty="0">
               <a:solidFill>
                 <a:schemeClr val="tx2"/>
               </a:solidFill>
@@ -5614,7 +5633,7 @@
         <p:spPr>
           <a:xfrm>
             <a:off x="331286" y="2076450"/>
-            <a:ext cx="5924550" cy="2296526"/>
+            <a:ext cx="5924550" cy="3201582"/>
           </a:xfrm>
           <a:prstGeom prst="rect">
             <a:avLst/>
@@ -5627,7 +5646,7 @@
           </a:bodyPr>
           <a:lstStyle/>
           <a:p>
-            <a:endParaRPr lang="en-US" sz="1600" dirty="0"/>
+            <a:endParaRPr lang="en-US" sz="2000" dirty="0"/>
           </a:p>
           <a:p>
             <a:pPr marL="285750" indent="-285750" algn="just">
@@ -5638,11 +5657,11 @@
               <a:buChar char="•"/>
             </a:pPr>
             <a:r>
-              <a:rPr lang="en-US" sz="1600" b="1" dirty="0">
+              <a:rPr lang="en-US" sz="2000" b="1" dirty="0">
                 <a:latin typeface="Arial" panose="020B0604020202020204" pitchFamily="34" charset="0"/>
                 <a:cs typeface="Arial" panose="020B0604020202020204" pitchFamily="34" charset="0"/>
               </a:rPr>
-              <a:t>Problem Statement ID – 26154</a:t>
+              <a:t>Problem Statement ID – 26044</a:t>
             </a:r>
           </a:p>
           <a:p>
@@ -5654,11 +5673,11 @@
               <a:buChar char="•"/>
             </a:pPr>
             <a:r>
-              <a:rPr lang="en-US" sz="1600" b="1" dirty="0">
+              <a:rPr lang="en-US" sz="2000" b="1" dirty="0">
                 <a:latin typeface="Arial" panose="020B0604020202020204" pitchFamily="34" charset="0"/>
                 <a:cs typeface="Arial" panose="020B0604020202020204" pitchFamily="34" charset="0"/>
               </a:rPr>
-              <a:t>Problem Statement Title- Gen AI Platform for Automated Content Transformation</a:t>
+              <a:t>Problem Statement Title – Portal for Academia-Industry Collaboration for Skill Mapping, Internships and Placement</a:t>
             </a:r>
           </a:p>
           <a:p>
@@ -5670,11 +5689,11 @@
               <a:buChar char="•"/>
             </a:pPr>
             <a:r>
-              <a:rPr lang="en-US" sz="1600" b="1" dirty="0">
+              <a:rPr lang="en-US" sz="2000" b="1" dirty="0">
                 <a:latin typeface="Arial" panose="020B0604020202020204" pitchFamily="34" charset="0"/>
                 <a:cs typeface="Arial" panose="020B0604020202020204" pitchFamily="34" charset="0"/>
               </a:rPr>
-              <a:t>Theme- Blockchain &amp; Cybersecurity</a:t>
+              <a:t>Theme– Miscellaneous</a:t>
             </a:r>
           </a:p>
           <a:p>
@@ -5686,11 +5705,11 @@
               <a:buChar char="•"/>
             </a:pPr>
             <a:r>
-              <a:rPr lang="en-US" sz="1600" b="1" dirty="0">
+              <a:rPr lang="en-US" sz="2000" b="1" dirty="0">
                 <a:latin typeface="Arial" panose="020B0604020202020204" pitchFamily="34" charset="0"/>
                 <a:cs typeface="Arial" panose="020B0604020202020204" pitchFamily="34" charset="0"/>
               </a:rPr>
-              <a:t>PS Category- Software</a:t>
+              <a:t>PS Category– Software</a:t>
             </a:r>
           </a:p>
           <a:p>
@@ -5702,11 +5721,11 @@
               <a:buChar char="•"/>
             </a:pPr>
             <a:r>
-              <a:rPr lang="en-US" sz="1600" b="1" dirty="0">
+              <a:rPr lang="en-US" sz="2000" b="1" dirty="0">
                 <a:latin typeface="Arial" panose="020B0604020202020204" pitchFamily="34" charset="0"/>
                 <a:cs typeface="Arial" panose="020B0604020202020204" pitchFamily="34" charset="0"/>
               </a:rPr>
-              <a:t>Team ID- SIH26-A0H-T364</a:t>
+              <a:t>Team ID–SIH26-A0H-T364</a:t>
             </a:r>
           </a:p>
           <a:p>
@@ -5718,13 +5737,13 @@
               <a:buChar char="•"/>
             </a:pPr>
             <a:r>
-              <a:rPr lang="en-US" sz="1600" b="1" dirty="0">
+              <a:rPr lang="en-US" sz="2000" b="1" dirty="0">
                 <a:latin typeface="Arial" panose="020B0604020202020204" pitchFamily="34" charset="0"/>
                 <a:cs typeface="Arial" panose="020B0604020202020204" pitchFamily="34" charset="0"/>
               </a:rPr>
-              <a:t>Team Name (Registered on portal)- Team Invictus</a:t>
-            </a:r>
-            <a:endParaRPr lang="en-IN" sz="1600" b="1" dirty="0">
+              <a:t>Team Name– Team Invictus</a:t>
+            </a:r>
+            <a:endParaRPr lang="en-IN" sz="2000" b="1" dirty="0">
               <a:latin typeface="Arial" panose="020B0604020202020204" pitchFamily="34" charset="0"/>
               <a:cs typeface="Arial" panose="020B0604020202020204" pitchFamily="34" charset="0"/>
             </a:endParaRPr>
@@ -5846,45 +5865,6 @@
       </p:sp>
       <p:sp>
         <p:nvSpPr>
-          <p:cNvPr id="15361" name="Title 1"/>
-          <p:cNvSpPr>
-            <a:spLocks noGrp="1"/>
-          </p:cNvSpPr>
-          <p:nvPr>
-            <p:ph type="title"/>
-          </p:nvPr>
-        </p:nvSpPr>
-        <p:spPr>
-          <a:xfrm>
-            <a:off x="1700000" y="0"/>
-            <a:ext cx="7950000" cy="1143000"/>
-          </a:xfrm>
-        </p:spPr>
-        <p:txBody>
-          <a:bodyPr/>
-          <a:lstStyle/>
-          <a:p>
-            <a:pPr eaLnBrk="1" hangingPunct="1"/>
-            <a:br>
-              <a:rPr lang="en-US" sz="2600" b="1" dirty="0">
-                <a:latin typeface="Times New Roman" panose="02020603050405020304" pitchFamily="18" charset="0"/>
-                <a:ea typeface="ＭＳ Ｐゴシック" pitchFamily="1" charset="-128"/>
-                <a:cs typeface="Times New Roman" panose="02020603050405020304" pitchFamily="18" charset="0"/>
-              </a:rPr>
-            </a:br>
-            <a:r>
-              <a:rPr lang="en-US" sz="2600" b="1" dirty="0">
-                <a:latin typeface="Times New Roman" panose="02020603050405020304" pitchFamily="18" charset="0"/>
-                <a:ea typeface="ＭＳ Ｐゴシック" pitchFamily="1" charset="-128"/>
-                <a:cs typeface="Times New Roman" panose="02020603050405020304" pitchFamily="18" charset="0"/>
-              </a:rPr>
-              <a:t>CONTENTFORGE AI – Unified Gen AI Platform for Automated Content Transformation</a:t>
-            </a:r>
-          </a:p>
-        </p:txBody>
-      </p:sp>
-      <p:sp>
-        <p:nvSpPr>
           <p:cNvPr id="15362" name="TextBox 8"/>
           <p:cNvSpPr txBox="1">
             <a:spLocks noChangeArrowheads="1"/>
@@ -5893,8 +5873,8 @@
         </p:nvSpPr>
         <p:spPr bwMode="auto">
           <a:xfrm>
-            <a:off x="-1" y="1417320"/>
-            <a:ext cx="12191999" cy="3246120"/>
+            <a:off x="329773" y="1187596"/>
+            <a:ext cx="10762488" cy="1077218"/>
           </a:xfrm>
           <a:prstGeom prst="rect">
             <a:avLst/>
@@ -5925,93 +5905,15 @@
                 <a:latin typeface="Arial" pitchFamily="34" charset="0"/>
                 <a:cs typeface="Arial" pitchFamily="34" charset="0"/>
               </a:rPr>
-              <a:t>Proposed Solution </a:t>
-            </a:r>
-            <a:endParaRPr lang="en-US" sz="3200" u="sng" dirty="0">
+              <a:t>SKILL-SETU – AI-Powered Academia–Industry Collaboration Portal</a:t>
+            </a:r>
+            <a:endParaRPr lang="en-US" sz="4400" u="sng" dirty="0">
               <a:solidFill>
                 <a:schemeClr val="tx2"/>
               </a:solidFill>
               <a:latin typeface="Arial" pitchFamily="34" charset="0"/>
               <a:cs typeface="Arial" pitchFamily="34" charset="0"/>
             </a:endParaRPr>
-          </a:p>
-          <a:p>
-            <a:pPr marL="342900" indent="-342900">
-              <a:buFont typeface="Arial" panose="020B0604020202020204" pitchFamily="34" charset="0"/>
-              <a:buChar char="•"/>
-            </a:pPr>
-            <a:endParaRPr lang="en-US" sz="1700" u="sng" dirty="0">
-              <a:solidFill>
-                <a:schemeClr val="tx2"/>
-              </a:solidFill>
-              <a:latin typeface="Arial" pitchFamily="34" charset="0"/>
-              <a:cs typeface="Arial" pitchFamily="34" charset="0"/>
-            </a:endParaRPr>
-          </a:p>
-          <a:p>
-            <a:pPr marL="342900" indent="-342900">
-              <a:buFont typeface="Arial" panose="020B0604020202020204" pitchFamily="34" charset="0"/>
-              <a:buChar char="•"/>
-            </a:pPr>
-            <a:endParaRPr lang="en-US" sz="1700" u="sng" dirty="0">
-              <a:solidFill>
-                <a:schemeClr val="tx2"/>
-              </a:solidFill>
-              <a:latin typeface="Arial" pitchFamily="34" charset="0"/>
-              <a:cs typeface="Arial" pitchFamily="34" charset="0"/>
-            </a:endParaRPr>
-          </a:p>
-          <a:p>
-            <a:pPr marL="342900" indent="-342900" algn="just">
-              <a:buFont typeface="Arial" panose="020B0604020202020204" pitchFamily="34" charset="0"/>
-              <a:buChar char="•"/>
-            </a:pPr>
-            <a:r>
-              <a:rPr lang="en-US" sz="1700" dirty="0">
-                <a:latin typeface="Arial" pitchFamily="34" charset="0"/>
-                <a:cs typeface="Arial" pitchFamily="34" charset="0"/>
-              </a:rPr>
-              <a:t>Single dashboard converts one source — text, documents, images, video or prompts — into every deliverable an operator selects, generated together</a:t>
-            </a:r>
-          </a:p>
-          <a:p>
-            <a:pPr marL="342900" indent="-342900" algn="just">
-              <a:buFont typeface="Arial" panose="020B0604020202020204" pitchFamily="34" charset="0"/>
-              <a:buChar char="•"/>
-            </a:pPr>
-            <a:r>
-              <a:rPr lang="en-US" sz="1700" dirty="0">
-                <a:latin typeface="Arial" pitchFamily="34" charset="0"/>
-                <a:cs typeface="Arial" pitchFamily="34" charset="0"/>
-              </a:rPr>
-              <a:t>Multimodal GenAI parses source content for context, entities &amp; intent, then routes it through format-specific generation modules in parallel</a:t>
-            </a:r>
-          </a:p>
-          <a:p>
-            <a:pPr marL="342900" indent="-342900" algn="just">
-              <a:buFont typeface="Arial" panose="020B0604020202020204" pitchFamily="34" charset="0"/>
-              <a:buChar char="•"/>
-            </a:pPr>
-            <a:r>
-              <a:rPr lang="en-US" sz="1700" dirty="0">
-                <a:latin typeface="Arial" pitchFamily="34" charset="0"/>
-                <a:cs typeface="Arial" pitchFamily="34" charset="0"/>
-              </a:rPr>
-              <a:t>Blockchain-anchored provenance ledger, on-prem deployment option &amp; configurable tone/audience controls make outputs auditable, secure &amp; tailored</a:t>
-            </a:r>
-          </a:p>
-          <a:p>
-            <a:pPr marL="342900" indent="-342900" algn="just">
-              <a:buFont typeface="Arial" panose="020B0604020202020204" pitchFamily="34" charset="0"/>
-              <a:buChar char="•"/>
-            </a:pPr>
-            <a:r>
-              <a:rPr lang="en-US" sz="1700" dirty="0">
-                <a:latin typeface="Arial" pitchFamily="34" charset="0"/>
-                <a:cs typeface="Arial" pitchFamily="34" charset="0"/>
-              </a:rPr>
-              <a:t>Core platform modules: Content Ingestion Engine  •  Intent &amp; Parameter Engine  •  Format Generation Modules  •  Review &amp; Export Studio  •  Provenance &amp; Audit Ledger  •  Admin &amp; Access Console</a:t>
-            </a:r>
           </a:p>
         </p:txBody>
       </p:sp>
@@ -6071,18 +5973,13 @@
               <a:defRPr/>
             </a:pPr>
             <a:r>
-              <a:rPr lang="en-US">
+              <a:rPr lang="en-US" dirty="0">
                 <a:solidFill>
                   <a:schemeClr val="bg1"/>
                 </a:solidFill>
               </a:rPr>
-              <a:t>@SIH Idea submission- Template</a:t>
-            </a:r>
-            <a:endParaRPr lang="en-US" dirty="0">
-              <a:solidFill>
-                <a:schemeClr val="bg1"/>
-              </a:solidFill>
-            </a:endParaRPr>
+              <a:t>@SIH Idea submission</a:t>
+            </a:r>
           </a:p>
         </p:txBody>
       </p:sp>
@@ -6104,7 +6001,7 @@
         <p:spPr>
           <a:xfrm>
             <a:off x="329773" y="252246"/>
-            <a:ext cx="1251857" cy="807334"/>
+            <a:ext cx="1676008" cy="807334"/>
           </a:xfrm>
           <a:prstGeom prst="ellipse">
             <a:avLst/>
@@ -6130,7 +6027,10 @@
           <a:p>
             <a:pPr algn="ctr"/>
             <a:r>
-              <a:rPr lang="en-US" sz="1000" dirty="0"/>
+              <a:rPr lang="en-US" b="1" dirty="0">
+                <a:latin typeface="Arial" panose="020B0604020202020204" pitchFamily="34" charset="0"/>
+                <a:cs typeface="Arial" panose="020B0604020202020204" pitchFamily="34" charset="0"/>
+              </a:rPr>
               <a:t>Team Invictus</a:t>
             </a:r>
             <a:endParaRPr lang="en-IN" dirty="0"/>
@@ -6169,20 +6069,22 @@
       </p:pic>
       <p:sp>
         <p:nvSpPr>
-          <p:cNvPr id="15363" name="Oval 15362"/>
+          <p:cNvPr id="15363" name="Rounded Rectangle 15362"/>
           <p:cNvSpPr/>
           <p:nvPr/>
         </p:nvSpPr>
         <p:spPr>
           <a:xfrm>
-            <a:off x="3878580" y="5166360"/>
-            <a:ext cx="731520" cy="731520"/>
-          </a:xfrm>
-          <a:prstGeom prst="ellipse">
-            <a:avLst/>
+            <a:off x="411480" y="2724912"/>
+            <a:ext cx="3538727" cy="1536192"/>
+          </a:xfrm>
+          <a:prstGeom prst="roundRect">
+            <a:avLst>
+              <a:gd name="adj" fmla="val 6000"/>
+            </a:avLst>
           </a:prstGeom>
           <a:solidFill>
-            <a:srgbClr val="0070C0"/>
+            <a:srgbClr val="F1F5FA"/>
           </a:solidFill>
           <a:ln>
             <a:noFill/>
@@ -6204,42 +6106,7 @@
           </a:fontRef>
         </p:style>
         <p:txBody>
-          <a:bodyPr wrap="square" lIns="25400" rIns="25400" rtlCol="0" anchor="ctr"/>
-          <a:lstStyle/>
-          <a:p>
-            <a:pPr algn="ctr"/>
-            <a:r>
-              <a:rPr sz="1000" b="1">
-                <a:solidFill>
-                  <a:srgbClr val="FFFFFF"/>
-                </a:solidFill>
-                <a:latin typeface="Calibri"/>
-              </a:rPr>
-              <a:t>Analysts</a:t>
-            </a:r>
-          </a:p>
-        </p:txBody>
-      </p:sp>
-      <p:sp>
-        <p:nvSpPr>
-          <p:cNvPr id="15364" name="TextBox 15363"/>
-          <p:cNvSpPr txBox="1"/>
-          <p:nvPr/>
-        </p:nvSpPr>
-        <p:spPr>
-          <a:xfrm>
-            <a:off x="3649980" y="5923280"/>
-            <a:ext cx="1188720" cy="274320"/>
-          </a:xfrm>
-          <a:prstGeom prst="rect">
-            <a:avLst/>
-          </a:prstGeom>
-          <a:noFill/>
-        </p:spPr>
-        <p:txBody>
-          <a:bodyPr wrap="square" lIns="0" tIns="0" rIns="0" bIns="0" anchor="ctr">
-            <a:spAutoFit/>
-          </a:bodyPr>
+          <a:bodyPr rtlCol="0" anchor="ctr"/>
           <a:lstStyle/>
           <a:p>
             <a:pPr algn="ctr"/>
@@ -6249,20 +6116,20 @@
       </p:sp>
       <p:sp>
         <p:nvSpPr>
-          <p:cNvPr id="15365" name="Oval 15364"/>
+          <p:cNvPr id="15364" name="Oval 15363"/>
           <p:cNvSpPr/>
           <p:nvPr/>
         </p:nvSpPr>
         <p:spPr>
           <a:xfrm>
-            <a:off x="5113020" y="5166360"/>
-            <a:ext cx="731520" cy="731520"/>
+            <a:off x="521208" y="2834639"/>
+            <a:ext cx="365760" cy="365760"/>
           </a:xfrm>
           <a:prstGeom prst="ellipse">
             <a:avLst/>
           </a:prstGeom>
           <a:solidFill>
-            <a:srgbClr val="0070C0"/>
+            <a:srgbClr val="F28C28"/>
           </a:solidFill>
           <a:ln>
             <a:noFill/>
@@ -6284,32 +6151,31 @@
           </a:fontRef>
         </p:style>
         <p:txBody>
-          <a:bodyPr wrap="square" lIns="25400" rIns="25400" rtlCol="0" anchor="ctr"/>
+          <a:bodyPr lIns="0" tIns="0" rIns="0" bIns="0" rtlCol="0" anchor="ctr"/>
           <a:lstStyle/>
           <a:p>
             <a:pPr algn="ctr"/>
             <a:r>
-              <a:rPr sz="1000" b="1">
+              <a:rPr sz="1300" b="1">
                 <a:solidFill>
                   <a:srgbClr val="FFFFFF"/>
                 </a:solidFill>
-                <a:latin typeface="Calibri"/>
-              </a:rPr>
-              <a:t>Comms Team</a:t>
-            </a:r>
-          </a:p>
-        </p:txBody>
-      </p:sp>
-      <p:sp>
-        <p:nvSpPr>
-          <p:cNvPr id="15366" name="TextBox 15365"/>
+              </a:rPr>
+              <a:t>W</a:t>
+            </a:r>
+          </a:p>
+        </p:txBody>
+      </p:sp>
+      <p:sp>
+        <p:nvSpPr>
+          <p:cNvPr id="15365" name="TextBox 15364"/>
           <p:cNvSpPr txBox="1"/>
           <p:nvPr/>
         </p:nvSpPr>
         <p:spPr>
           <a:xfrm>
-            <a:off x="4884420" y="5923280"/>
-            <a:ext cx="1188720" cy="274320"/>
+            <a:off x="960120" y="2852928"/>
+            <a:ext cx="2807207" cy="365760"/>
           </a:xfrm>
           <a:prstGeom prst="rect">
             <a:avLst/>
@@ -6317,32 +6183,107 @@
           <a:noFill/>
         </p:spPr>
         <p:txBody>
-          <a:bodyPr wrap="square" lIns="0" tIns="0" rIns="0" bIns="0" anchor="ctr">
+          <a:bodyPr wrap="square" lIns="0" tIns="0" rIns="0" bIns="0" anchor="t">
             <a:spAutoFit/>
           </a:bodyPr>
           <a:lstStyle/>
           <a:p>
-            <a:pPr algn="ctr"/>
-            <a:endParaRPr/>
-          </a:p>
-        </p:txBody>
-      </p:sp>
-      <p:sp>
-        <p:nvSpPr>
-          <p:cNvPr id="15367" name="Oval 15366"/>
+            <a:pPr algn="l">
+              <a:lnSpc>
+                <a:spcPct val="100000"/>
+              </a:lnSpc>
+            </a:pPr>
+            <a:r>
+              <a:rPr sz="1250" b="1" i="0" dirty="0">
+                <a:solidFill>
+                  <a:srgbClr val="1F3864"/>
+                </a:solidFill>
+                <a:latin typeface="Calibri"/>
+              </a:rPr>
+              <a:t>What It Is</a:t>
+            </a:r>
+          </a:p>
+        </p:txBody>
+      </p:sp>
+      <p:sp>
+        <p:nvSpPr>
+          <p:cNvPr id="15366" name="TextBox 15365"/>
+          <p:cNvSpPr txBox="1"/>
+          <p:nvPr/>
+        </p:nvSpPr>
+        <p:spPr>
+          <a:xfrm>
+            <a:off x="612648" y="3291840"/>
+            <a:ext cx="3154679" cy="793422"/>
+          </a:xfrm>
+          <a:prstGeom prst="rect">
+            <a:avLst/>
+          </a:prstGeom>
+          <a:noFill/>
+        </p:spPr>
+        <p:txBody>
+          <a:bodyPr wrap="square" lIns="0" tIns="0" rIns="0" bIns="0">
+            <a:spAutoFit/>
+          </a:bodyPr>
+          <a:lstStyle/>
+          <a:p>
+            <a:pPr>
+              <a:lnSpc>
+                <a:spcPct val="105000"/>
+              </a:lnSpc>
+              <a:spcAft>
+                <a:spcPts val="200"/>
+              </a:spcAft>
+            </a:pPr>
+            <a:r>
+              <a:rPr sz="1200" dirty="0">
+                <a:solidFill>
+                  <a:srgbClr val="222A33"/>
+                </a:solidFill>
+                <a:latin typeface="Calibri"/>
+              </a:rPr>
+              <a:t>•  Unified web portal mapping student skills to industry-defined competency taxonomy</a:t>
+            </a:r>
+          </a:p>
+          <a:p>
+            <a:pPr>
+              <a:lnSpc>
+                <a:spcPct val="105000"/>
+              </a:lnSpc>
+              <a:spcAft>
+                <a:spcPts val="200"/>
+              </a:spcAft>
+            </a:pPr>
+            <a:r>
+              <a:rPr sz="1200" dirty="0">
+                <a:solidFill>
+                  <a:srgbClr val="222A33"/>
+                </a:solidFill>
+                <a:latin typeface="Calibri"/>
+              </a:rPr>
+              <a:t>•  Connects students, recruiters &amp; faculty on a single authenticated platform</a:t>
+            </a:r>
+          </a:p>
+        </p:txBody>
+      </p:sp>
+      <p:sp>
+        <p:nvSpPr>
+          <p:cNvPr id="15367" name="Rounded Rectangle 15366"/>
           <p:cNvSpPr/>
           <p:nvPr/>
         </p:nvSpPr>
         <p:spPr>
           <a:xfrm>
-            <a:off x="6347460" y="5166360"/>
-            <a:ext cx="731520" cy="731520"/>
-          </a:xfrm>
-          <a:prstGeom prst="ellipse">
-            <a:avLst/>
+            <a:off x="4087368" y="2724912"/>
+            <a:ext cx="3538727" cy="1536192"/>
+          </a:xfrm>
+          <a:prstGeom prst="roundRect">
+            <a:avLst>
+              <a:gd name="adj" fmla="val 6000"/>
+            </a:avLst>
           </a:prstGeom>
           <a:solidFill>
-            <a:srgbClr val="E88A2E"/>
+            <a:srgbClr val="F1F5FA"/>
           </a:solidFill>
           <a:ln>
             <a:noFill/>
@@ -6364,43 +6305,7 @@
           </a:fontRef>
         </p:style>
         <p:txBody>
-          <a:bodyPr wrap="square" lIns="25400" rIns="25400" rtlCol="0" anchor="ctr"/>
-          <a:lstStyle/>
-          <a:p>
-            <a:pPr algn="ctr"/>
-            <a:r>
-              <a:rPr sz="1000" b="1">
-                <a:solidFill>
-                  <a:srgbClr val="FFFFFF"/>
-                </a:solidFill>
-                <a:latin typeface="Calibri"/>
-              </a:rPr>
-              <a:t>ContentForge
-AI</a:t>
-            </a:r>
-          </a:p>
-        </p:txBody>
-      </p:sp>
-      <p:sp>
-        <p:nvSpPr>
-          <p:cNvPr id="15368" name="TextBox 15367"/>
-          <p:cNvSpPr txBox="1"/>
-          <p:nvPr/>
-        </p:nvSpPr>
-        <p:spPr>
-          <a:xfrm>
-            <a:off x="6118860" y="5923280"/>
-            <a:ext cx="1188720" cy="274320"/>
-          </a:xfrm>
-          <a:prstGeom prst="rect">
-            <a:avLst/>
-          </a:prstGeom>
-          <a:noFill/>
-        </p:spPr>
-        <p:txBody>
-          <a:bodyPr wrap="square" lIns="0" tIns="0" rIns="0" bIns="0" anchor="ctr">
-            <a:spAutoFit/>
-          </a:bodyPr>
+          <a:bodyPr rtlCol="0" anchor="ctr"/>
           <a:lstStyle/>
           <a:p>
             <a:pPr algn="ctr"/>
@@ -6410,14 +6315,14 @@
       </p:sp>
       <p:sp>
         <p:nvSpPr>
-          <p:cNvPr id="15369" name="Oval 15368"/>
+          <p:cNvPr id="15368" name="Oval 15367"/>
           <p:cNvSpPr/>
           <p:nvPr/>
         </p:nvSpPr>
         <p:spPr>
           <a:xfrm>
-            <a:off x="7581900" y="5166360"/>
-            <a:ext cx="731520" cy="731520"/>
+            <a:off x="4197096" y="2834639"/>
+            <a:ext cx="365760" cy="365760"/>
           </a:xfrm>
           <a:prstGeom prst="ellipse">
             <a:avLst/>
@@ -6445,32 +6350,31 @@
           </a:fontRef>
         </p:style>
         <p:txBody>
-          <a:bodyPr wrap="square" lIns="25400" rIns="25400" rtlCol="0" anchor="ctr"/>
+          <a:bodyPr lIns="0" tIns="0" rIns="0" bIns="0" rtlCol="0" anchor="ctr"/>
           <a:lstStyle/>
           <a:p>
             <a:pPr algn="ctr"/>
             <a:r>
-              <a:rPr sz="1000" b="1">
+              <a:rPr sz="1300" b="1">
                 <a:solidFill>
                   <a:srgbClr val="FFFFFF"/>
                 </a:solidFill>
-                <a:latin typeface="Calibri"/>
-              </a:rPr>
-              <a:t>Leaders</a:t>
-            </a:r>
-          </a:p>
-        </p:txBody>
-      </p:sp>
-      <p:sp>
-        <p:nvSpPr>
-          <p:cNvPr id="15370" name="TextBox 15369"/>
+              </a:rPr>
+              <a:t>H</a:t>
+            </a:r>
+          </a:p>
+        </p:txBody>
+      </p:sp>
+      <p:sp>
+        <p:nvSpPr>
+          <p:cNvPr id="15369" name="TextBox 15368"/>
           <p:cNvSpPr txBox="1"/>
           <p:nvPr/>
         </p:nvSpPr>
         <p:spPr>
           <a:xfrm>
-            <a:off x="7353300" y="5923280"/>
-            <a:ext cx="1188720" cy="274320"/>
+            <a:off x="4636007" y="2852928"/>
+            <a:ext cx="2807207" cy="365760"/>
           </a:xfrm>
           <a:prstGeom prst="rect">
             <a:avLst/>
@@ -6478,32 +6382,107 @@
           <a:noFill/>
         </p:spPr>
         <p:txBody>
-          <a:bodyPr wrap="square" lIns="0" tIns="0" rIns="0" bIns="0" anchor="ctr">
+          <a:bodyPr wrap="square" lIns="0" tIns="0" rIns="0" bIns="0" anchor="t">
             <a:spAutoFit/>
           </a:bodyPr>
           <a:lstStyle/>
           <a:p>
-            <a:pPr algn="ctr"/>
-            <a:endParaRPr/>
-          </a:p>
-        </p:txBody>
-      </p:sp>
-      <p:sp>
-        <p:nvSpPr>
-          <p:cNvPr id="15371" name="Right Arrow 15370"/>
+            <a:pPr algn="l">
+              <a:lnSpc>
+                <a:spcPct val="100000"/>
+              </a:lnSpc>
+            </a:pPr>
+            <a:r>
+              <a:rPr sz="1250" b="1" i="0">
+                <a:solidFill>
+                  <a:srgbClr val="1F3864"/>
+                </a:solidFill>
+                <a:latin typeface="Calibri"/>
+              </a:rPr>
+              <a:t>How It Works</a:t>
+            </a:r>
+          </a:p>
+        </p:txBody>
+      </p:sp>
+      <p:sp>
+        <p:nvSpPr>
+          <p:cNvPr id="15370" name="TextBox 15369"/>
+          <p:cNvSpPr txBox="1"/>
+          <p:nvPr/>
+        </p:nvSpPr>
+        <p:spPr>
+          <a:xfrm>
+            <a:off x="4288536" y="3291840"/>
+            <a:ext cx="3154679" cy="793422"/>
+          </a:xfrm>
+          <a:prstGeom prst="rect">
+            <a:avLst/>
+          </a:prstGeom>
+          <a:noFill/>
+        </p:spPr>
+        <p:txBody>
+          <a:bodyPr wrap="square" lIns="0" tIns="0" rIns="0" bIns="0">
+            <a:spAutoFit/>
+          </a:bodyPr>
+          <a:lstStyle/>
+          <a:p>
+            <a:pPr>
+              <a:lnSpc>
+                <a:spcPct val="105000"/>
+              </a:lnSpc>
+              <a:spcAft>
+                <a:spcPts val="200"/>
+              </a:spcAft>
+            </a:pPr>
+            <a:r>
+              <a:rPr sz="1200" dirty="0">
+                <a:solidFill>
+                  <a:srgbClr val="222A33"/>
+                </a:solidFill>
+                <a:latin typeface="Calibri"/>
+              </a:rPr>
+              <a:t>•  NLP resume/JD parser extracts skills → embedding-based matching engine</a:t>
+            </a:r>
+          </a:p>
+          <a:p>
+            <a:pPr>
+              <a:lnSpc>
+                <a:spcPct val="105000"/>
+              </a:lnSpc>
+              <a:spcAft>
+                <a:spcPts val="200"/>
+              </a:spcAft>
+            </a:pPr>
+            <a:r>
+              <a:rPr sz="1200" dirty="0">
+                <a:solidFill>
+                  <a:srgbClr val="222A33"/>
+                </a:solidFill>
+                <a:latin typeface="Calibri"/>
+              </a:rPr>
+              <a:t>•  Recommends verified internships ranked by weighted skill-fit score</a:t>
+            </a:r>
+          </a:p>
+        </p:txBody>
+      </p:sp>
+      <p:sp>
+        <p:nvSpPr>
+          <p:cNvPr id="15371" name="Rounded Rectangle 15370"/>
           <p:cNvSpPr/>
           <p:nvPr/>
         </p:nvSpPr>
         <p:spPr>
           <a:xfrm>
-            <a:off x="4590100" y="5449824"/>
-            <a:ext cx="542920" cy="164592"/>
-          </a:xfrm>
-          <a:prstGeom prst="rightArrow">
-            <a:avLst/>
+            <a:off x="7763255" y="2724912"/>
+            <a:ext cx="3538727" cy="1536192"/>
+          </a:xfrm>
+          <a:prstGeom prst="roundRect">
+            <a:avLst>
+              <a:gd name="adj" fmla="val 6000"/>
+            </a:avLst>
           </a:prstGeom>
           <a:solidFill>
-            <a:srgbClr val="B8C4D6"/>
+            <a:srgbClr val="F1F5FA"/>
           </a:solidFill>
           <a:ln>
             <a:noFill/>
@@ -6535,20 +6514,20 @@
       </p:sp>
       <p:sp>
         <p:nvSpPr>
-          <p:cNvPr id="15372" name="Right Arrow 15371"/>
+          <p:cNvPr id="15372" name="Oval 15371"/>
           <p:cNvSpPr/>
           <p:nvPr/>
         </p:nvSpPr>
         <p:spPr>
           <a:xfrm>
-            <a:off x="5824540" y="5449824"/>
-            <a:ext cx="542920" cy="164592"/>
-          </a:xfrm>
-          <a:prstGeom prst="rightArrow">
+            <a:off x="7872983" y="2834639"/>
+            <a:ext cx="365760" cy="365760"/>
+          </a:xfrm>
+          <a:prstGeom prst="ellipse">
             <a:avLst/>
           </a:prstGeom>
           <a:solidFill>
-            <a:srgbClr val="B8C4D6"/>
+            <a:srgbClr val="2E8B57"/>
           </a:solidFill>
           <a:ln>
             <a:noFill/>
@@ -6570,30 +6549,178 @@
           </a:fontRef>
         </p:style>
         <p:txBody>
-          <a:bodyPr rtlCol="0" anchor="ctr"/>
+          <a:bodyPr lIns="0" tIns="0" rIns="0" bIns="0" rtlCol="0" anchor="ctr"/>
           <a:lstStyle/>
           <a:p>
             <a:pPr algn="ctr"/>
-            <a:endParaRPr/>
-          </a:p>
-        </p:txBody>
-      </p:sp>
-      <p:sp>
-        <p:nvSpPr>
-          <p:cNvPr id="15373" name="Right Arrow 15372"/>
+            <a:r>
+              <a:rPr sz="1300" b="1">
+                <a:solidFill>
+                  <a:srgbClr val="FFFFFF"/>
+                </a:solidFill>
+              </a:rPr>
+              <a:t>U</a:t>
+            </a:r>
+          </a:p>
+        </p:txBody>
+      </p:sp>
+      <p:sp>
+        <p:nvSpPr>
+          <p:cNvPr id="15373" name="TextBox 15372"/>
+          <p:cNvSpPr txBox="1"/>
+          <p:nvPr/>
+        </p:nvSpPr>
+        <p:spPr>
+          <a:xfrm>
+            <a:off x="8311895" y="2852928"/>
+            <a:ext cx="2807207" cy="365760"/>
+          </a:xfrm>
+          <a:prstGeom prst="rect">
+            <a:avLst/>
+          </a:prstGeom>
+          <a:noFill/>
+        </p:spPr>
+        <p:txBody>
+          <a:bodyPr wrap="square" lIns="0" tIns="0" rIns="0" bIns="0" anchor="t">
+            <a:spAutoFit/>
+          </a:bodyPr>
+          <a:lstStyle/>
+          <a:p>
+            <a:pPr algn="l">
+              <a:lnSpc>
+                <a:spcPct val="100000"/>
+              </a:lnSpc>
+            </a:pPr>
+            <a:r>
+              <a:rPr sz="1250" b="1" i="0">
+                <a:solidFill>
+                  <a:srgbClr val="1F3864"/>
+                </a:solidFill>
+                <a:latin typeface="Calibri"/>
+              </a:rPr>
+              <a:t>What's Unique</a:t>
+            </a:r>
+          </a:p>
+        </p:txBody>
+      </p:sp>
+      <p:sp>
+        <p:nvSpPr>
+          <p:cNvPr id="15374" name="TextBox 15373"/>
+          <p:cNvSpPr txBox="1"/>
+          <p:nvPr/>
+        </p:nvSpPr>
+        <p:spPr>
+          <a:xfrm>
+            <a:off x="7964423" y="3291840"/>
+            <a:ext cx="3154679" cy="793422"/>
+          </a:xfrm>
+          <a:prstGeom prst="rect">
+            <a:avLst/>
+          </a:prstGeom>
+          <a:noFill/>
+        </p:spPr>
+        <p:txBody>
+          <a:bodyPr wrap="square" lIns="0" tIns="0" rIns="0" bIns="0">
+            <a:spAutoFit/>
+          </a:bodyPr>
+          <a:lstStyle/>
+          <a:p>
+            <a:pPr>
+              <a:lnSpc>
+                <a:spcPct val="105000"/>
+              </a:lnSpc>
+              <a:spcAft>
+                <a:spcPts val="200"/>
+              </a:spcAft>
+            </a:pPr>
+            <a:r>
+              <a:rPr sz="1200" dirty="0">
+                <a:solidFill>
+                  <a:srgbClr val="222A33"/>
+                </a:solidFill>
+                <a:latin typeface="Calibri"/>
+              </a:rPr>
+              <a:t>•  AI skill-gap engine + verified marketplace + curriculum feedback loop</a:t>
+            </a:r>
+          </a:p>
+          <a:p>
+            <a:pPr>
+              <a:lnSpc>
+                <a:spcPct val="105000"/>
+              </a:lnSpc>
+              <a:spcAft>
+                <a:spcPts val="200"/>
+              </a:spcAft>
+            </a:pPr>
+            <a:r>
+              <a:rPr sz="1200" dirty="0">
+                <a:solidFill>
+                  <a:srgbClr val="222A33"/>
+                </a:solidFill>
+                <a:latin typeface="Calibri"/>
+              </a:rPr>
+              <a:t>•  Purpose-built for the Ayush sector; first unified system of its kind</a:t>
+            </a:r>
+          </a:p>
+        </p:txBody>
+      </p:sp>
+      <p:sp>
+        <p:nvSpPr>
+          <p:cNvPr id="15375" name="TextBox 15374"/>
+          <p:cNvSpPr txBox="1"/>
+          <p:nvPr/>
+        </p:nvSpPr>
+        <p:spPr>
+          <a:xfrm>
+            <a:off x="411480" y="4407408"/>
+            <a:ext cx="5486400" cy="274320"/>
+          </a:xfrm>
+          <a:prstGeom prst="rect">
+            <a:avLst/>
+          </a:prstGeom>
+          <a:noFill/>
+        </p:spPr>
+        <p:txBody>
+          <a:bodyPr wrap="square" lIns="0" tIns="0" rIns="0" bIns="0" anchor="t">
+            <a:spAutoFit/>
+          </a:bodyPr>
+          <a:lstStyle/>
+          <a:p>
+            <a:pPr algn="l">
+              <a:lnSpc>
+                <a:spcPct val="100000"/>
+              </a:lnSpc>
+            </a:pPr>
+            <a:r>
+              <a:rPr sz="1300" b="1" i="0">
+                <a:solidFill>
+                  <a:srgbClr val="1F3864"/>
+                </a:solidFill>
+                <a:latin typeface="Calibri"/>
+              </a:rPr>
+              <a:t>Core Platform Modules</a:t>
+            </a:r>
+          </a:p>
+        </p:txBody>
+      </p:sp>
+      <p:sp>
+        <p:nvSpPr>
+          <p:cNvPr id="15376" name="Rounded Rectangle 15375"/>
           <p:cNvSpPr/>
           <p:nvPr/>
         </p:nvSpPr>
         <p:spPr>
           <a:xfrm>
-            <a:off x="7058980" y="5449824"/>
-            <a:ext cx="542920" cy="164592"/>
-          </a:xfrm>
-          <a:prstGeom prst="rightArrow">
-            <a:avLst/>
+            <a:off x="411480" y="4709160"/>
+            <a:ext cx="3703320" cy="749808"/>
+          </a:xfrm>
+          <a:prstGeom prst="roundRect">
+            <a:avLst>
+              <a:gd name="adj" fmla="val 6000"/>
+            </a:avLst>
           </a:prstGeom>
           <a:solidFill>
-            <a:srgbClr val="B8C4D6"/>
+            <a:srgbClr val="F1F5FA"/>
           </a:solidFill>
           <a:ln>
             <a:noFill/>
@@ -6625,14 +6752,59 @@
       </p:sp>
       <p:sp>
         <p:nvSpPr>
-          <p:cNvPr id="15374" name="TextBox 15373"/>
+          <p:cNvPr id="15377" name="Rectangle 15376"/>
+          <p:cNvSpPr/>
+          <p:nvPr/>
+        </p:nvSpPr>
+        <p:spPr>
+          <a:xfrm>
+            <a:off x="539496" y="4837176"/>
+            <a:ext cx="91440" cy="493775"/>
+          </a:xfrm>
+          <a:prstGeom prst="rect">
+            <a:avLst/>
+          </a:prstGeom>
+          <a:solidFill>
+            <a:srgbClr val="F28C28"/>
+          </a:solidFill>
+          <a:ln>
+            <a:noFill/>
+          </a:ln>
+          <a:effectLst/>
+        </p:spPr>
+        <p:style>
+          <a:lnRef idx="1">
+            <a:schemeClr val="accent1"/>
+          </a:lnRef>
+          <a:fillRef idx="3">
+            <a:schemeClr val="accent1"/>
+          </a:fillRef>
+          <a:effectRef idx="2">
+            <a:schemeClr val="accent1"/>
+          </a:effectRef>
+          <a:fontRef idx="minor">
+            <a:schemeClr val="lt1"/>
+          </a:fontRef>
+        </p:style>
+        <p:txBody>
+          <a:bodyPr rtlCol="0" anchor="ctr"/>
+          <a:lstStyle/>
+          <a:p>
+            <a:pPr algn="ctr"/>
+            <a:endParaRPr/>
+          </a:p>
+        </p:txBody>
+      </p:sp>
+      <p:sp>
+        <p:nvSpPr>
+          <p:cNvPr id="15378" name="TextBox 15377"/>
           <p:cNvSpPr txBox="1"/>
           <p:nvPr/>
         </p:nvSpPr>
         <p:spPr>
           <a:xfrm>
-            <a:off x="3878580" y="4800600"/>
-            <a:ext cx="4434840" cy="320040"/>
+            <a:off x="731520" y="4782312"/>
+            <a:ext cx="3246120" cy="153888"/>
           </a:xfrm>
           <a:prstGeom prst="rect">
             <a:avLst/>
@@ -6640,20 +6812,931 @@
           <a:noFill/>
         </p:spPr>
         <p:txBody>
-          <a:bodyPr wrap="square" lIns="0" tIns="0" rIns="0" bIns="0" anchor="ctr">
+          <a:bodyPr wrap="square" lIns="0" tIns="0" rIns="0" bIns="0" anchor="t">
             <a:spAutoFit/>
           </a:bodyPr>
           <a:lstStyle/>
           <a:p>
+            <a:pPr algn="l">
+              <a:lnSpc>
+                <a:spcPct val="100000"/>
+              </a:lnSpc>
+            </a:pPr>
+            <a:r>
+              <a:rPr sz="1000" b="1" i="0" dirty="0">
+                <a:solidFill>
+                  <a:srgbClr val="1F3864"/>
+                </a:solidFill>
+                <a:latin typeface="Calibri"/>
+              </a:rPr>
+              <a:t>Student Skill Profiler</a:t>
+            </a:r>
+          </a:p>
+        </p:txBody>
+      </p:sp>
+      <p:sp>
+        <p:nvSpPr>
+          <p:cNvPr id="15379" name="TextBox 15378"/>
+          <p:cNvSpPr txBox="1"/>
+          <p:nvPr/>
+        </p:nvSpPr>
+        <p:spPr>
+          <a:xfrm>
+            <a:off x="731520" y="5038344"/>
+            <a:ext cx="3246120" cy="307777"/>
+          </a:xfrm>
+          <a:prstGeom prst="rect">
+            <a:avLst/>
+          </a:prstGeom>
+          <a:noFill/>
+        </p:spPr>
+        <p:txBody>
+          <a:bodyPr wrap="square" lIns="0" tIns="0" rIns="0" bIns="0" anchor="t">
+            <a:spAutoFit/>
+          </a:bodyPr>
+          <a:lstStyle/>
+          <a:p>
+            <a:pPr algn="l">
+              <a:lnSpc>
+                <a:spcPct val="100000"/>
+              </a:lnSpc>
+            </a:pPr>
+            <a:r>
+              <a:rPr sz="1000" b="0" i="0" dirty="0">
+                <a:solidFill>
+                  <a:srgbClr val="222A33"/>
+                </a:solidFill>
+                <a:latin typeface="Calibri"/>
+              </a:rPr>
+              <a:t>Captures certifications, projects &amp; self-assessed skills into a structured graph</a:t>
+            </a:r>
+          </a:p>
+        </p:txBody>
+      </p:sp>
+      <p:sp>
+        <p:nvSpPr>
+          <p:cNvPr id="15380" name="Rounded Rectangle 15379"/>
+          <p:cNvSpPr/>
+          <p:nvPr/>
+        </p:nvSpPr>
+        <p:spPr>
+          <a:xfrm>
+            <a:off x="4206240" y="4709160"/>
+            <a:ext cx="3703320" cy="749808"/>
+          </a:xfrm>
+          <a:prstGeom prst="roundRect">
+            <a:avLst>
+              <a:gd name="adj" fmla="val 6000"/>
+            </a:avLst>
+          </a:prstGeom>
+          <a:solidFill>
+            <a:srgbClr val="F1F5FA"/>
+          </a:solidFill>
+          <a:ln>
+            <a:noFill/>
+          </a:ln>
+          <a:effectLst/>
+        </p:spPr>
+        <p:style>
+          <a:lnRef idx="1">
+            <a:schemeClr val="accent1"/>
+          </a:lnRef>
+          <a:fillRef idx="3">
+            <a:schemeClr val="accent1"/>
+          </a:fillRef>
+          <a:effectRef idx="2">
+            <a:schemeClr val="accent1"/>
+          </a:effectRef>
+          <a:fontRef idx="minor">
+            <a:schemeClr val="lt1"/>
+          </a:fontRef>
+        </p:style>
+        <p:txBody>
+          <a:bodyPr rtlCol="0" anchor="ctr"/>
+          <a:lstStyle/>
+          <a:p>
             <a:pPr algn="ctr"/>
-            <a:r>
-              <a:rPr sz="1300" b="1">
-                <a:solidFill>
-                  <a:srgbClr val="1E2A4A"/>
+            <a:endParaRPr/>
+          </a:p>
+        </p:txBody>
+      </p:sp>
+      <p:sp>
+        <p:nvSpPr>
+          <p:cNvPr id="15381" name="Rectangle 15380"/>
+          <p:cNvSpPr/>
+          <p:nvPr/>
+        </p:nvSpPr>
+        <p:spPr>
+          <a:xfrm>
+            <a:off x="4334255" y="4837176"/>
+            <a:ext cx="91440" cy="493775"/>
+          </a:xfrm>
+          <a:prstGeom prst="rect">
+            <a:avLst/>
+          </a:prstGeom>
+          <a:solidFill>
+            <a:srgbClr val="0070C0"/>
+          </a:solidFill>
+          <a:ln>
+            <a:noFill/>
+          </a:ln>
+          <a:effectLst/>
+        </p:spPr>
+        <p:style>
+          <a:lnRef idx="1">
+            <a:schemeClr val="accent1"/>
+          </a:lnRef>
+          <a:fillRef idx="3">
+            <a:schemeClr val="accent1"/>
+          </a:fillRef>
+          <a:effectRef idx="2">
+            <a:schemeClr val="accent1"/>
+          </a:effectRef>
+          <a:fontRef idx="minor">
+            <a:schemeClr val="lt1"/>
+          </a:fontRef>
+        </p:style>
+        <p:txBody>
+          <a:bodyPr rtlCol="0" anchor="ctr"/>
+          <a:lstStyle/>
+          <a:p>
+            <a:pPr algn="ctr"/>
+            <a:endParaRPr/>
+          </a:p>
+        </p:txBody>
+      </p:sp>
+      <p:sp>
+        <p:nvSpPr>
+          <p:cNvPr id="15382" name="TextBox 15381"/>
+          <p:cNvSpPr txBox="1"/>
+          <p:nvPr/>
+        </p:nvSpPr>
+        <p:spPr>
+          <a:xfrm>
+            <a:off x="4526279" y="4782312"/>
+            <a:ext cx="3246120" cy="153888"/>
+          </a:xfrm>
+          <a:prstGeom prst="rect">
+            <a:avLst/>
+          </a:prstGeom>
+          <a:noFill/>
+        </p:spPr>
+        <p:txBody>
+          <a:bodyPr wrap="square" lIns="0" tIns="0" rIns="0" bIns="0" anchor="t">
+            <a:spAutoFit/>
+          </a:bodyPr>
+          <a:lstStyle/>
+          <a:p>
+            <a:pPr algn="l">
+              <a:lnSpc>
+                <a:spcPct val="100000"/>
+              </a:lnSpc>
+            </a:pPr>
+            <a:r>
+              <a:rPr sz="1000" b="1" i="0" dirty="0">
+                <a:solidFill>
+                  <a:srgbClr val="1F3864"/>
                 </a:solidFill>
                 <a:latin typeface="Calibri"/>
               </a:rPr>
-              <a:t>One engine, every content format — instantly</a:t>
+              <a:t>AI Skill-Gap Engine</a:t>
+            </a:r>
+          </a:p>
+        </p:txBody>
+      </p:sp>
+      <p:sp>
+        <p:nvSpPr>
+          <p:cNvPr id="15383" name="TextBox 15382"/>
+          <p:cNvSpPr txBox="1"/>
+          <p:nvPr/>
+        </p:nvSpPr>
+        <p:spPr>
+          <a:xfrm>
+            <a:off x="4526279" y="5038344"/>
+            <a:ext cx="3246120" cy="307777"/>
+          </a:xfrm>
+          <a:prstGeom prst="rect">
+            <a:avLst/>
+          </a:prstGeom>
+          <a:noFill/>
+        </p:spPr>
+        <p:txBody>
+          <a:bodyPr wrap="square" lIns="0" tIns="0" rIns="0" bIns="0" anchor="t">
+            <a:spAutoFit/>
+          </a:bodyPr>
+          <a:lstStyle/>
+          <a:p>
+            <a:pPr algn="l">
+              <a:lnSpc>
+                <a:spcPct val="100000"/>
+              </a:lnSpc>
+            </a:pPr>
+            <a:r>
+              <a:rPr sz="1000" b="0" i="0" dirty="0">
+                <a:solidFill>
+                  <a:srgbClr val="222A33"/>
+                </a:solidFill>
+                <a:latin typeface="Calibri"/>
+              </a:rPr>
+              <a:t>NLP resume/JD parsing with Sentence-BERT embedding similarity</a:t>
+            </a:r>
+          </a:p>
+        </p:txBody>
+      </p:sp>
+      <p:sp>
+        <p:nvSpPr>
+          <p:cNvPr id="15384" name="Rounded Rectangle 15383"/>
+          <p:cNvSpPr/>
+          <p:nvPr/>
+        </p:nvSpPr>
+        <p:spPr>
+          <a:xfrm>
+            <a:off x="8000999" y="4709160"/>
+            <a:ext cx="3703320" cy="749808"/>
+          </a:xfrm>
+          <a:prstGeom prst="roundRect">
+            <a:avLst>
+              <a:gd name="adj" fmla="val 6000"/>
+            </a:avLst>
+          </a:prstGeom>
+          <a:solidFill>
+            <a:srgbClr val="F1F5FA"/>
+          </a:solidFill>
+          <a:ln>
+            <a:noFill/>
+          </a:ln>
+          <a:effectLst/>
+        </p:spPr>
+        <p:style>
+          <a:lnRef idx="1">
+            <a:schemeClr val="accent1"/>
+          </a:lnRef>
+          <a:fillRef idx="3">
+            <a:schemeClr val="accent1"/>
+          </a:fillRef>
+          <a:effectRef idx="2">
+            <a:schemeClr val="accent1"/>
+          </a:effectRef>
+          <a:fontRef idx="minor">
+            <a:schemeClr val="lt1"/>
+          </a:fontRef>
+        </p:style>
+        <p:txBody>
+          <a:bodyPr rtlCol="0" anchor="ctr"/>
+          <a:lstStyle/>
+          <a:p>
+            <a:pPr algn="ctr"/>
+            <a:endParaRPr/>
+          </a:p>
+        </p:txBody>
+      </p:sp>
+      <p:sp>
+        <p:nvSpPr>
+          <p:cNvPr id="15385" name="Rectangle 15384"/>
+          <p:cNvSpPr/>
+          <p:nvPr/>
+        </p:nvSpPr>
+        <p:spPr>
+          <a:xfrm>
+            <a:off x="8129015" y="4837176"/>
+            <a:ext cx="91440" cy="493775"/>
+          </a:xfrm>
+          <a:prstGeom prst="rect">
+            <a:avLst/>
+          </a:prstGeom>
+          <a:solidFill>
+            <a:srgbClr val="2E8B57"/>
+          </a:solidFill>
+          <a:ln>
+            <a:noFill/>
+          </a:ln>
+          <a:effectLst/>
+        </p:spPr>
+        <p:style>
+          <a:lnRef idx="1">
+            <a:schemeClr val="accent1"/>
+          </a:lnRef>
+          <a:fillRef idx="3">
+            <a:schemeClr val="accent1"/>
+          </a:fillRef>
+          <a:effectRef idx="2">
+            <a:schemeClr val="accent1"/>
+          </a:effectRef>
+          <a:fontRef idx="minor">
+            <a:schemeClr val="lt1"/>
+          </a:fontRef>
+        </p:style>
+        <p:txBody>
+          <a:bodyPr rtlCol="0" anchor="ctr"/>
+          <a:lstStyle/>
+          <a:p>
+            <a:pPr algn="ctr"/>
+            <a:endParaRPr/>
+          </a:p>
+        </p:txBody>
+      </p:sp>
+      <p:sp>
+        <p:nvSpPr>
+          <p:cNvPr id="15386" name="TextBox 15385"/>
+          <p:cNvSpPr txBox="1"/>
+          <p:nvPr/>
+        </p:nvSpPr>
+        <p:spPr>
+          <a:xfrm>
+            <a:off x="8321039" y="4782312"/>
+            <a:ext cx="3246120" cy="153888"/>
+          </a:xfrm>
+          <a:prstGeom prst="rect">
+            <a:avLst/>
+          </a:prstGeom>
+          <a:noFill/>
+        </p:spPr>
+        <p:txBody>
+          <a:bodyPr wrap="square" lIns="0" tIns="0" rIns="0" bIns="0" anchor="t">
+            <a:spAutoFit/>
+          </a:bodyPr>
+          <a:lstStyle/>
+          <a:p>
+            <a:pPr algn="l">
+              <a:lnSpc>
+                <a:spcPct val="100000"/>
+              </a:lnSpc>
+            </a:pPr>
+            <a:r>
+              <a:rPr sz="1000" b="1" i="0" dirty="0">
+                <a:solidFill>
+                  <a:srgbClr val="1F3864"/>
+                </a:solidFill>
+                <a:latin typeface="Calibri"/>
+              </a:rPr>
+              <a:t>Internship Marketplace</a:t>
+            </a:r>
+          </a:p>
+        </p:txBody>
+      </p:sp>
+      <p:sp>
+        <p:nvSpPr>
+          <p:cNvPr id="15387" name="TextBox 15386"/>
+          <p:cNvSpPr txBox="1"/>
+          <p:nvPr/>
+        </p:nvSpPr>
+        <p:spPr>
+          <a:xfrm>
+            <a:off x="8321039" y="5038344"/>
+            <a:ext cx="3246120" cy="307777"/>
+          </a:xfrm>
+          <a:prstGeom prst="rect">
+            <a:avLst/>
+          </a:prstGeom>
+          <a:noFill/>
+        </p:spPr>
+        <p:txBody>
+          <a:bodyPr wrap="square" lIns="0" tIns="0" rIns="0" bIns="0" anchor="t">
+            <a:spAutoFit/>
+          </a:bodyPr>
+          <a:lstStyle/>
+          <a:p>
+            <a:pPr algn="l">
+              <a:lnSpc>
+                <a:spcPct val="100000"/>
+              </a:lnSpc>
+            </a:pPr>
+            <a:r>
+              <a:rPr sz="1000" b="0" i="0" dirty="0">
+                <a:solidFill>
+                  <a:srgbClr val="222A33"/>
+                </a:solidFill>
+                <a:latin typeface="Calibri"/>
+              </a:rPr>
+              <a:t>Verified postings from Ayush hospitals, wellness </a:t>
+            </a:r>
+            <a:r>
+              <a:rPr sz="1000" b="0" i="0" dirty="0" err="1">
+                <a:solidFill>
+                  <a:srgbClr val="222A33"/>
+                </a:solidFill>
+                <a:latin typeface="Calibri"/>
+              </a:rPr>
+              <a:t>centres</a:t>
+            </a:r>
+            <a:r>
+              <a:rPr sz="1000" b="0" i="0" dirty="0">
+                <a:solidFill>
+                  <a:srgbClr val="222A33"/>
+                </a:solidFill>
+                <a:latin typeface="Calibri"/>
+              </a:rPr>
+              <a:t> &amp; pharma</a:t>
+            </a:r>
+          </a:p>
+        </p:txBody>
+      </p:sp>
+      <p:sp>
+        <p:nvSpPr>
+          <p:cNvPr id="15388" name="Rounded Rectangle 15387"/>
+          <p:cNvSpPr/>
+          <p:nvPr/>
+        </p:nvSpPr>
+        <p:spPr>
+          <a:xfrm>
+            <a:off x="411480" y="5568696"/>
+            <a:ext cx="3703320" cy="749808"/>
+          </a:xfrm>
+          <a:prstGeom prst="roundRect">
+            <a:avLst>
+              <a:gd name="adj" fmla="val 6000"/>
+            </a:avLst>
+          </a:prstGeom>
+          <a:solidFill>
+            <a:srgbClr val="F1F5FA"/>
+          </a:solidFill>
+          <a:ln>
+            <a:noFill/>
+          </a:ln>
+          <a:effectLst/>
+        </p:spPr>
+        <p:style>
+          <a:lnRef idx="1">
+            <a:schemeClr val="accent1"/>
+          </a:lnRef>
+          <a:fillRef idx="3">
+            <a:schemeClr val="accent1"/>
+          </a:fillRef>
+          <a:effectRef idx="2">
+            <a:schemeClr val="accent1"/>
+          </a:effectRef>
+          <a:fontRef idx="minor">
+            <a:schemeClr val="lt1"/>
+          </a:fontRef>
+        </p:style>
+        <p:txBody>
+          <a:bodyPr rtlCol="0" anchor="ctr"/>
+          <a:lstStyle/>
+          <a:p>
+            <a:pPr algn="ctr"/>
+            <a:endParaRPr/>
+          </a:p>
+        </p:txBody>
+      </p:sp>
+      <p:sp>
+        <p:nvSpPr>
+          <p:cNvPr id="15389" name="Rectangle 15388"/>
+          <p:cNvSpPr/>
+          <p:nvPr/>
+        </p:nvSpPr>
+        <p:spPr>
+          <a:xfrm>
+            <a:off x="539496" y="5696712"/>
+            <a:ext cx="91440" cy="493775"/>
+          </a:xfrm>
+          <a:prstGeom prst="rect">
+            <a:avLst/>
+          </a:prstGeom>
+          <a:solidFill>
+            <a:srgbClr val="F28C28"/>
+          </a:solidFill>
+          <a:ln>
+            <a:noFill/>
+          </a:ln>
+          <a:effectLst/>
+        </p:spPr>
+        <p:style>
+          <a:lnRef idx="1">
+            <a:schemeClr val="accent1"/>
+          </a:lnRef>
+          <a:fillRef idx="3">
+            <a:schemeClr val="accent1"/>
+          </a:fillRef>
+          <a:effectRef idx="2">
+            <a:schemeClr val="accent1"/>
+          </a:effectRef>
+          <a:fontRef idx="minor">
+            <a:schemeClr val="lt1"/>
+          </a:fontRef>
+        </p:style>
+        <p:txBody>
+          <a:bodyPr rtlCol="0" anchor="ctr"/>
+          <a:lstStyle/>
+          <a:p>
+            <a:pPr algn="ctr"/>
+            <a:endParaRPr/>
+          </a:p>
+        </p:txBody>
+      </p:sp>
+      <p:sp>
+        <p:nvSpPr>
+          <p:cNvPr id="15390" name="TextBox 15389"/>
+          <p:cNvSpPr txBox="1"/>
+          <p:nvPr/>
+        </p:nvSpPr>
+        <p:spPr>
+          <a:xfrm>
+            <a:off x="731520" y="5641848"/>
+            <a:ext cx="3246120" cy="153888"/>
+          </a:xfrm>
+          <a:prstGeom prst="rect">
+            <a:avLst/>
+          </a:prstGeom>
+          <a:noFill/>
+        </p:spPr>
+        <p:txBody>
+          <a:bodyPr wrap="square" lIns="0" tIns="0" rIns="0" bIns="0" anchor="t">
+            <a:spAutoFit/>
+          </a:bodyPr>
+          <a:lstStyle/>
+          <a:p>
+            <a:pPr algn="l">
+              <a:lnSpc>
+                <a:spcPct val="100000"/>
+              </a:lnSpc>
+            </a:pPr>
+            <a:r>
+              <a:rPr sz="1000" b="1" i="0" dirty="0">
+                <a:solidFill>
+                  <a:srgbClr val="1F3864"/>
+                </a:solidFill>
+                <a:latin typeface="Calibri"/>
+              </a:rPr>
+              <a:t>Employer Dashboard</a:t>
+            </a:r>
+          </a:p>
+        </p:txBody>
+      </p:sp>
+      <p:sp>
+        <p:nvSpPr>
+          <p:cNvPr id="15391" name="TextBox 15390"/>
+          <p:cNvSpPr txBox="1"/>
+          <p:nvPr/>
+        </p:nvSpPr>
+        <p:spPr>
+          <a:xfrm>
+            <a:off x="731520" y="5897880"/>
+            <a:ext cx="3246120" cy="153888"/>
+          </a:xfrm>
+          <a:prstGeom prst="rect">
+            <a:avLst/>
+          </a:prstGeom>
+          <a:noFill/>
+        </p:spPr>
+        <p:txBody>
+          <a:bodyPr wrap="square" lIns="0" tIns="0" rIns="0" bIns="0" anchor="t">
+            <a:spAutoFit/>
+          </a:bodyPr>
+          <a:lstStyle/>
+          <a:p>
+            <a:pPr algn="l">
+              <a:lnSpc>
+                <a:spcPct val="100000"/>
+              </a:lnSpc>
+            </a:pPr>
+            <a:r>
+              <a:rPr sz="1000" b="0" i="0" dirty="0">
+                <a:solidFill>
+                  <a:srgbClr val="222A33"/>
+                </a:solidFill>
+                <a:latin typeface="Calibri"/>
+              </a:rPr>
+              <a:t>Shortlists candidates ranked by matched-competency score</a:t>
+            </a:r>
+          </a:p>
+        </p:txBody>
+      </p:sp>
+      <p:sp>
+        <p:nvSpPr>
+          <p:cNvPr id="15392" name="Rounded Rectangle 15391"/>
+          <p:cNvSpPr/>
+          <p:nvPr/>
+        </p:nvSpPr>
+        <p:spPr>
+          <a:xfrm>
+            <a:off x="4206240" y="5568696"/>
+            <a:ext cx="3703320" cy="749808"/>
+          </a:xfrm>
+          <a:prstGeom prst="roundRect">
+            <a:avLst>
+              <a:gd name="adj" fmla="val 6000"/>
+            </a:avLst>
+          </a:prstGeom>
+          <a:solidFill>
+            <a:srgbClr val="F1F5FA"/>
+          </a:solidFill>
+          <a:ln>
+            <a:noFill/>
+          </a:ln>
+          <a:effectLst/>
+        </p:spPr>
+        <p:style>
+          <a:lnRef idx="1">
+            <a:schemeClr val="accent1"/>
+          </a:lnRef>
+          <a:fillRef idx="3">
+            <a:schemeClr val="accent1"/>
+          </a:fillRef>
+          <a:effectRef idx="2">
+            <a:schemeClr val="accent1"/>
+          </a:effectRef>
+          <a:fontRef idx="minor">
+            <a:schemeClr val="lt1"/>
+          </a:fontRef>
+        </p:style>
+        <p:txBody>
+          <a:bodyPr rtlCol="0" anchor="ctr"/>
+          <a:lstStyle/>
+          <a:p>
+            <a:pPr algn="ctr"/>
+            <a:endParaRPr/>
+          </a:p>
+        </p:txBody>
+      </p:sp>
+      <p:sp>
+        <p:nvSpPr>
+          <p:cNvPr id="15393" name="Rectangle 15392"/>
+          <p:cNvSpPr/>
+          <p:nvPr/>
+        </p:nvSpPr>
+        <p:spPr>
+          <a:xfrm>
+            <a:off x="4334255" y="5696712"/>
+            <a:ext cx="91440" cy="493775"/>
+          </a:xfrm>
+          <a:prstGeom prst="rect">
+            <a:avLst/>
+          </a:prstGeom>
+          <a:solidFill>
+            <a:srgbClr val="0070C0"/>
+          </a:solidFill>
+          <a:ln>
+            <a:noFill/>
+          </a:ln>
+          <a:effectLst/>
+        </p:spPr>
+        <p:style>
+          <a:lnRef idx="1">
+            <a:schemeClr val="accent1"/>
+          </a:lnRef>
+          <a:fillRef idx="3">
+            <a:schemeClr val="accent1"/>
+          </a:fillRef>
+          <a:effectRef idx="2">
+            <a:schemeClr val="accent1"/>
+          </a:effectRef>
+          <a:fontRef idx="minor">
+            <a:schemeClr val="lt1"/>
+          </a:fontRef>
+        </p:style>
+        <p:txBody>
+          <a:bodyPr rtlCol="0" anchor="ctr"/>
+          <a:lstStyle/>
+          <a:p>
+            <a:pPr algn="ctr"/>
+            <a:endParaRPr/>
+          </a:p>
+        </p:txBody>
+      </p:sp>
+      <p:sp>
+        <p:nvSpPr>
+          <p:cNvPr id="15394" name="TextBox 15393"/>
+          <p:cNvSpPr txBox="1"/>
+          <p:nvPr/>
+        </p:nvSpPr>
+        <p:spPr>
+          <a:xfrm>
+            <a:off x="4526279" y="5641848"/>
+            <a:ext cx="3246120" cy="153888"/>
+          </a:xfrm>
+          <a:prstGeom prst="rect">
+            <a:avLst/>
+          </a:prstGeom>
+          <a:noFill/>
+        </p:spPr>
+        <p:txBody>
+          <a:bodyPr wrap="square" lIns="0" tIns="0" rIns="0" bIns="0" anchor="t">
+            <a:spAutoFit/>
+          </a:bodyPr>
+          <a:lstStyle/>
+          <a:p>
+            <a:pPr algn="l">
+              <a:lnSpc>
+                <a:spcPct val="100000"/>
+              </a:lnSpc>
+            </a:pPr>
+            <a:r>
+              <a:rPr sz="1000" b="1" i="0" dirty="0">
+                <a:solidFill>
+                  <a:srgbClr val="1F3864"/>
+                </a:solidFill>
+                <a:latin typeface="Calibri"/>
+              </a:rPr>
+              <a:t>Institution Analytics</a:t>
+            </a:r>
+          </a:p>
+        </p:txBody>
+      </p:sp>
+      <p:sp>
+        <p:nvSpPr>
+          <p:cNvPr id="15395" name="TextBox 15394"/>
+          <p:cNvSpPr txBox="1"/>
+          <p:nvPr/>
+        </p:nvSpPr>
+        <p:spPr>
+          <a:xfrm>
+            <a:off x="4526279" y="5897880"/>
+            <a:ext cx="3246120" cy="153888"/>
+          </a:xfrm>
+          <a:prstGeom prst="rect">
+            <a:avLst/>
+          </a:prstGeom>
+          <a:noFill/>
+        </p:spPr>
+        <p:txBody>
+          <a:bodyPr wrap="square" lIns="0" tIns="0" rIns="0" bIns="0" anchor="t">
+            <a:spAutoFit/>
+          </a:bodyPr>
+          <a:lstStyle/>
+          <a:p>
+            <a:pPr algn="l">
+              <a:lnSpc>
+                <a:spcPct val="100000"/>
+              </a:lnSpc>
+            </a:pPr>
+            <a:r>
+              <a:rPr sz="1000" b="0" i="0" dirty="0">
+                <a:solidFill>
+                  <a:srgbClr val="222A33"/>
+                </a:solidFill>
+                <a:latin typeface="Calibri"/>
+              </a:rPr>
+              <a:t>Curriculum-gap heatmaps &amp; real-time placement tracking</a:t>
+            </a:r>
+          </a:p>
+        </p:txBody>
+      </p:sp>
+      <p:sp>
+        <p:nvSpPr>
+          <p:cNvPr id="15396" name="Rounded Rectangle 15395"/>
+          <p:cNvSpPr/>
+          <p:nvPr/>
+        </p:nvSpPr>
+        <p:spPr>
+          <a:xfrm>
+            <a:off x="8000999" y="5568696"/>
+            <a:ext cx="3703320" cy="749808"/>
+          </a:xfrm>
+          <a:prstGeom prst="roundRect">
+            <a:avLst>
+              <a:gd name="adj" fmla="val 6000"/>
+            </a:avLst>
+          </a:prstGeom>
+          <a:solidFill>
+            <a:srgbClr val="F1F5FA"/>
+          </a:solidFill>
+          <a:ln>
+            <a:noFill/>
+          </a:ln>
+          <a:effectLst/>
+        </p:spPr>
+        <p:style>
+          <a:lnRef idx="1">
+            <a:schemeClr val="accent1"/>
+          </a:lnRef>
+          <a:fillRef idx="3">
+            <a:schemeClr val="accent1"/>
+          </a:fillRef>
+          <a:effectRef idx="2">
+            <a:schemeClr val="accent1"/>
+          </a:effectRef>
+          <a:fontRef idx="minor">
+            <a:schemeClr val="lt1"/>
+          </a:fontRef>
+        </p:style>
+        <p:txBody>
+          <a:bodyPr rtlCol="0" anchor="ctr"/>
+          <a:lstStyle/>
+          <a:p>
+            <a:pPr algn="ctr"/>
+            <a:endParaRPr/>
+          </a:p>
+        </p:txBody>
+      </p:sp>
+      <p:sp>
+        <p:nvSpPr>
+          <p:cNvPr id="15397" name="Rectangle 15396"/>
+          <p:cNvSpPr/>
+          <p:nvPr/>
+        </p:nvSpPr>
+        <p:spPr>
+          <a:xfrm>
+            <a:off x="8129015" y="5696712"/>
+            <a:ext cx="91440" cy="493775"/>
+          </a:xfrm>
+          <a:prstGeom prst="rect">
+            <a:avLst/>
+          </a:prstGeom>
+          <a:solidFill>
+            <a:srgbClr val="2E8B57"/>
+          </a:solidFill>
+          <a:ln>
+            <a:noFill/>
+          </a:ln>
+          <a:effectLst/>
+        </p:spPr>
+        <p:style>
+          <a:lnRef idx="1">
+            <a:schemeClr val="accent1"/>
+          </a:lnRef>
+          <a:fillRef idx="3">
+            <a:schemeClr val="accent1"/>
+          </a:fillRef>
+          <a:effectRef idx="2">
+            <a:schemeClr val="accent1"/>
+          </a:effectRef>
+          <a:fontRef idx="minor">
+            <a:schemeClr val="lt1"/>
+          </a:fontRef>
+        </p:style>
+        <p:txBody>
+          <a:bodyPr rtlCol="0" anchor="ctr"/>
+          <a:lstStyle/>
+          <a:p>
+            <a:pPr algn="ctr"/>
+            <a:endParaRPr/>
+          </a:p>
+        </p:txBody>
+      </p:sp>
+      <p:sp>
+        <p:nvSpPr>
+          <p:cNvPr id="15398" name="TextBox 15397"/>
+          <p:cNvSpPr txBox="1"/>
+          <p:nvPr/>
+        </p:nvSpPr>
+        <p:spPr>
+          <a:xfrm>
+            <a:off x="8321039" y="5641848"/>
+            <a:ext cx="3246120" cy="153888"/>
+          </a:xfrm>
+          <a:prstGeom prst="rect">
+            <a:avLst/>
+          </a:prstGeom>
+          <a:noFill/>
+        </p:spPr>
+        <p:txBody>
+          <a:bodyPr wrap="square" lIns="0" tIns="0" rIns="0" bIns="0" anchor="t">
+            <a:spAutoFit/>
+          </a:bodyPr>
+          <a:lstStyle/>
+          <a:p>
+            <a:pPr algn="l">
+              <a:lnSpc>
+                <a:spcPct val="100000"/>
+              </a:lnSpc>
+            </a:pPr>
+            <a:r>
+              <a:rPr sz="1000" b="1" i="0" dirty="0">
+                <a:solidFill>
+                  <a:srgbClr val="1F3864"/>
+                </a:solidFill>
+                <a:latin typeface="Calibri"/>
+              </a:rPr>
+              <a:t>Admin / Ministry Console</a:t>
+            </a:r>
+          </a:p>
+        </p:txBody>
+      </p:sp>
+      <p:sp>
+        <p:nvSpPr>
+          <p:cNvPr id="15399" name="TextBox 15398"/>
+          <p:cNvSpPr txBox="1"/>
+          <p:nvPr/>
+        </p:nvSpPr>
+        <p:spPr>
+          <a:xfrm>
+            <a:off x="8321039" y="5897880"/>
+            <a:ext cx="3246120" cy="153888"/>
+          </a:xfrm>
+          <a:prstGeom prst="rect">
+            <a:avLst/>
+          </a:prstGeom>
+          <a:noFill/>
+        </p:spPr>
+        <p:txBody>
+          <a:bodyPr wrap="square" lIns="0" tIns="0" rIns="0" bIns="0" anchor="t">
+            <a:spAutoFit/>
+          </a:bodyPr>
+          <a:lstStyle/>
+          <a:p>
+            <a:pPr algn="l">
+              <a:lnSpc>
+                <a:spcPct val="100000"/>
+              </a:lnSpc>
+            </a:pPr>
+            <a:r>
+              <a:rPr sz="1000" b="0" i="0" dirty="0">
+                <a:solidFill>
+                  <a:srgbClr val="222A33"/>
+                </a:solidFill>
+                <a:latin typeface="Calibri"/>
+              </a:rPr>
+              <a:t>National skill-mapping dataset, reports &amp; policy insights</a:t>
             </a:r>
           </a:p>
         </p:txBody>
@@ -6757,12 +7840,7 @@
             <p:ph type="title"/>
           </p:nvPr>
         </p:nvSpPr>
-        <p:spPr>
-          <a:xfrm>
-            <a:off x="-67789" y="418338"/>
-            <a:ext cx="10972800" cy="1143000"/>
-          </a:xfrm>
-        </p:spPr>
+        <p:spPr/>
         <p:txBody>
           <a:bodyPr/>
           <a:lstStyle/>
@@ -6775,89 +7853,6 @@
                 <a:cs typeface="Times New Roman" panose="02020603050405020304" pitchFamily="18" charset="0"/>
               </a:rPr>
               <a:t>TECHNICAL APPROACH</a:t>
-            </a:r>
-          </a:p>
-        </p:txBody>
-      </p:sp>
-      <p:sp>
-        <p:nvSpPr>
-          <p:cNvPr id="17410" name="TextBox 8"/>
-          <p:cNvSpPr txBox="1">
-            <a:spLocks noChangeArrowheads="1"/>
-          </p:cNvSpPr>
-          <p:nvPr/>
-        </p:nvSpPr>
-        <p:spPr bwMode="auto">
-          <a:xfrm>
-            <a:off x="609600" y="1728216"/>
-            <a:ext cx="9385300" cy="3200400"/>
-          </a:xfrm>
-          <a:prstGeom prst="rect">
-            <a:avLst/>
-          </a:prstGeom>
-          <a:noFill/>
-          <a:ln w="9525">
-            <a:noFill/>
-            <a:miter lim="800000"/>
-            <a:headEnd/>
-            <a:tailEnd/>
-          </a:ln>
-        </p:spPr>
-        <p:txBody>
-          <a:bodyPr wrap="square">
-            <a:spAutoFit/>
-          </a:bodyPr>
-          <a:lstStyle/>
-          <a:p>
-            <a:pPr marL="342900" indent="-342900" algn="just">
-              <a:buFont typeface="Arial" panose="020B0604020202020204" pitchFamily="34" charset="0"/>
-              <a:buChar char="•"/>
-            </a:pPr>
-            <a:r>
-              <a:rPr lang="en-US" sz="1400" dirty="0">
-                <a:latin typeface="Arial" pitchFamily="34" charset="0"/>
-                <a:cs typeface="Arial" pitchFamily="34" charset="0"/>
-              </a:rPr>
-              <a:t>Frontend: React.js  |  Backend: Node.js / FastAPI  |  Database: PostgreSQL + pgvector &amp; MongoDB  |  AI/ML: Multimodal LLM, LangChain, Whisper ASR, Tesseract OCR  |  Security: Blockchain provenance ledger + on-prem deployment</a:t>
-            </a:r>
-          </a:p>
-          <a:p>
-            <a:pPr marL="342900" indent="-342900" algn="just">
-              <a:buFont typeface="Arial" panose="020B0604020202020204" pitchFamily="34" charset="0"/>
-              <a:buChar char="•"/>
-            </a:pPr>
-            <a:r>
-              <a:rPr lang="en-US" sz="1400" dirty="0">
-                <a:latin typeface="Arial" pitchFamily="34" charset="0"/>
-                <a:cs typeface="Arial" pitchFamily="34" charset="0"/>
-              </a:rPr>
-              <a:t>Source ingestion → context extraction → format-specific generation → review &amp; export, running as parallel jobs (see flow below)</a:t>
-            </a:r>
-          </a:p>
-          <a:p>
-            <a:pPr marL="342900" indent="-342900" algn="just">
-              <a:buFont typeface="Arial" panose="020B0604020202020204" pitchFamily="34" charset="0"/>
-              <a:buChar char="•"/>
-            </a:pPr>
-            <a:r>
-              <a:rPr lang="en-US" sz="1400" dirty="0">
-                <a:latin typeface="Arial" pitchFamily="34" charset="0"/>
-                <a:cs typeface="Arial" pitchFamily="34" charset="0"/>
-              </a:rPr>
-              <a:t>Security &amp; Compliance: on-prem/air-gapped deployment for classified content  |  blockchain-anchored provenance &amp; audit trail  |  RBAC with OAuth 2.0, TLS 1.3 &amp; AES-256  |  DPDP Act 2023-compliant  |  periodic red-team review</a:t>
-            </a:r>
-          </a:p>
-          <a:p>
-            <a:pPr marL="342900" indent="-342900" algn="just">
-              <a:buFont typeface="Arial" panose="020B0604020202020204" pitchFamily="34" charset="0"/>
-              <a:buChar char="•"/>
-            </a:pPr>
-            <a:r>
-              <a:rPr lang="en-US" sz="1400" dirty="0">
-                <a:latin typeface="Arial" pitchFamily="34" charset="0"/>
-                <a:cs typeface="Arial" pitchFamily="34" charset="0"/>
-              </a:rPr>
-              <a:t>DevOps &amp; Scale: Docker + Kubernetes  |  CI/CD via GitHub Actions with blue-green deploys  |  GPU-backed auto-scaling inference cluster  |  Prometheus + Grafana monitoring  |  500+ concurrent transformation requests</a:t>
             </a:r>
           </a:p>
         </p:txBody>
@@ -6918,18 +7913,13 @@
               <a:defRPr/>
             </a:pPr>
             <a:r>
-              <a:rPr lang="en-US">
+              <a:rPr lang="en-US" dirty="0">
                 <a:solidFill>
                   <a:schemeClr val="bg1"/>
                 </a:solidFill>
               </a:rPr>
-              <a:t>@SIH Idea submission- Template</a:t>
-            </a:r>
-            <a:endParaRPr lang="en-US" dirty="0">
-              <a:solidFill>
-                <a:schemeClr val="bg1"/>
-              </a:solidFill>
-            </a:endParaRPr>
+              <a:t>@SIH Idea submission</a:t>
+            </a:r>
           </a:p>
         </p:txBody>
       </p:sp>
@@ -6951,7 +7941,7 @@
         <p:spPr>
           <a:xfrm>
             <a:off x="329773" y="252246"/>
-            <a:ext cx="1251857" cy="807334"/>
+            <a:ext cx="1646511" cy="807334"/>
           </a:xfrm>
           <a:prstGeom prst="ellipse">
             <a:avLst/>
@@ -6977,7 +7967,10 @@
           <a:p>
             <a:pPr algn="ctr"/>
             <a:r>
-              <a:rPr lang="en-US" sz="1000" dirty="0"/>
+              <a:rPr lang="en-US" b="1" dirty="0">
+                <a:latin typeface="Arial" panose="020B0604020202020204" pitchFamily="34" charset="0"/>
+                <a:cs typeface="Arial" panose="020B0604020202020204" pitchFamily="34" charset="0"/>
+              </a:rPr>
               <a:t>Team Invictus</a:t>
             </a:r>
             <a:endParaRPr lang="en-IN" dirty="0"/>
@@ -7016,20 +8009,61 @@
       </p:pic>
       <p:sp>
         <p:nvSpPr>
+          <p:cNvPr id="17410" name="TextBox 17409"/>
+          <p:cNvSpPr txBox="1"/>
+          <p:nvPr/>
+        </p:nvSpPr>
+        <p:spPr>
+          <a:xfrm>
+            <a:off x="411480" y="1847088"/>
+            <a:ext cx="7315200" cy="276999"/>
+          </a:xfrm>
+          <a:prstGeom prst="rect">
+            <a:avLst/>
+          </a:prstGeom>
+          <a:noFill/>
+        </p:spPr>
+        <p:txBody>
+          <a:bodyPr wrap="square" lIns="0" tIns="0" rIns="0" bIns="0" anchor="t">
+            <a:spAutoFit/>
+          </a:bodyPr>
+          <a:lstStyle/>
+          <a:p>
+            <a:pPr algn="l">
+              <a:lnSpc>
+                <a:spcPct val="100000"/>
+              </a:lnSpc>
+            </a:pPr>
+            <a:r>
+              <a:rPr b="1" i="0" dirty="0">
+                <a:solidFill>
+                  <a:srgbClr val="1F3864"/>
+                </a:solidFill>
+                <a:latin typeface="Calibri"/>
+              </a:rPr>
+              <a:t>System Architecture</a:t>
+            </a:r>
+          </a:p>
+        </p:txBody>
+      </p:sp>
+      <p:sp>
+        <p:nvSpPr>
           <p:cNvPr id="17411" name="Rounded Rectangle 17410"/>
           <p:cNvSpPr/>
           <p:nvPr/>
         </p:nvSpPr>
         <p:spPr>
           <a:xfrm>
-            <a:off x="815340" y="4526280"/>
-            <a:ext cx="1783080" cy="868680"/>
+            <a:off x="411480" y="2148840"/>
+            <a:ext cx="2084831" cy="1051560"/>
           </a:xfrm>
           <a:prstGeom prst="roundRect">
-            <a:avLst/>
+            <a:avLst>
+              <a:gd name="adj" fmla="val 6000"/>
+            </a:avLst>
           </a:prstGeom>
           <a:solidFill>
-            <a:srgbClr val="0070C0"/>
+            <a:srgbClr val="F1F5FA"/>
           </a:solidFill>
           <a:ln>
             <a:noFill/>
@@ -7051,526 +8085,62 @@
           </a:fontRef>
         </p:style>
         <p:txBody>
-          <a:bodyPr wrap="square" lIns="50800" tIns="25400" rIns="50800" bIns="25400" rtlCol="0" anchor="ctr"/>
+          <a:bodyPr wrap="square" tIns="25400" bIns="25400" rtlCol="0" anchor="ctr"/>
           <a:lstStyle/>
           <a:p>
             <a:pPr algn="ctr"/>
             <a:r>
-              <a:rPr sz="1150" b="1">
-                <a:solidFill>
-                  <a:srgbClr val="FFFFFF"/>
-                </a:solidFill>
-                <a:latin typeface="Calibri"/>
-              </a:rPr>
-              <a:t>Content
-Ingestion</a:t>
-            </a:r>
-          </a:p>
-        </p:txBody>
-      </p:sp>
-      <p:sp>
-        <p:nvSpPr>
-          <p:cNvPr id="17412" name="Right Arrow 17411"/>
-          <p:cNvSpPr/>
-          <p:nvPr/>
-        </p:nvSpPr>
-        <p:spPr>
-          <a:xfrm>
-            <a:off x="2598420" y="4860036"/>
-            <a:ext cx="411480" cy="201168"/>
-          </a:xfrm>
-          <a:prstGeom prst="rightArrow">
-            <a:avLst/>
-          </a:prstGeom>
-          <a:solidFill>
-            <a:srgbClr val="1E2A4A"/>
-          </a:solidFill>
-          <a:ln>
-            <a:noFill/>
-          </a:ln>
-          <a:effectLst/>
-        </p:spPr>
-        <p:style>
-          <a:lnRef idx="1">
-            <a:schemeClr val="accent1"/>
-          </a:lnRef>
-          <a:fillRef idx="3">
-            <a:schemeClr val="accent1"/>
-          </a:fillRef>
-          <a:effectRef idx="2">
-            <a:schemeClr val="accent1"/>
-          </a:effectRef>
-          <a:fontRef idx="minor">
-            <a:schemeClr val="lt1"/>
-          </a:fontRef>
-        </p:style>
-        <p:txBody>
-          <a:bodyPr rtlCol="0" anchor="ctr"/>
-          <a:lstStyle/>
+              <a:rPr sz="1600" b="1" dirty="0">
+                <a:solidFill>
+                  <a:srgbClr val="1F3864"/>
+                </a:solidFill>
+              </a:rPr>
+              <a:t>Client Layer</a:t>
+            </a:r>
+          </a:p>
           <a:p>
             <a:pPr algn="ctr"/>
-            <a:endParaRPr/>
-          </a:p>
-        </p:txBody>
-      </p:sp>
-      <p:sp>
-        <p:nvSpPr>
-          <p:cNvPr id="17413" name="Rounded Rectangle 17412"/>
-          <p:cNvSpPr/>
-          <p:nvPr/>
-        </p:nvSpPr>
-        <p:spPr>
-          <a:xfrm>
-            <a:off x="3009900" y="4526280"/>
-            <a:ext cx="1783080" cy="868680"/>
-          </a:xfrm>
-          <a:prstGeom prst="roundRect">
-            <a:avLst/>
-          </a:prstGeom>
-          <a:solidFill>
-            <a:srgbClr val="E88A2E"/>
-          </a:solidFill>
-          <a:ln>
-            <a:noFill/>
-          </a:ln>
-          <a:effectLst/>
-        </p:spPr>
-        <p:style>
-          <a:lnRef idx="1">
-            <a:schemeClr val="accent1"/>
-          </a:lnRef>
-          <a:fillRef idx="3">
-            <a:schemeClr val="accent1"/>
-          </a:fillRef>
-          <a:effectRef idx="2">
-            <a:schemeClr val="accent1"/>
-          </a:effectRef>
-          <a:fontRef idx="minor">
-            <a:schemeClr val="lt1"/>
-          </a:fontRef>
-        </p:style>
-        <p:txBody>
-          <a:bodyPr wrap="square" lIns="50800" tIns="25400" rIns="50800" bIns="25400" rtlCol="0" anchor="ctr"/>
-          <a:lstStyle/>
-          <a:p>
-            <a:pPr algn="ctr"/>
-            <a:r>
-              <a:rPr sz="1150" b="1">
-                <a:solidFill>
-                  <a:srgbClr val="FFFFFF"/>
-                </a:solidFill>
-                <a:latin typeface="Calibri"/>
-              </a:rPr>
-              <a:t>Context &amp;
-Intent Extraction</a:t>
-            </a:r>
-          </a:p>
-        </p:txBody>
-      </p:sp>
-      <p:sp>
-        <p:nvSpPr>
-          <p:cNvPr id="17414" name="Right Arrow 17413"/>
-          <p:cNvSpPr/>
-          <p:nvPr/>
-        </p:nvSpPr>
-        <p:spPr>
-          <a:xfrm>
-            <a:off x="4792980" y="4860036"/>
-            <a:ext cx="411480" cy="201168"/>
-          </a:xfrm>
-          <a:prstGeom prst="rightArrow">
-            <a:avLst/>
-          </a:prstGeom>
-          <a:solidFill>
-            <a:srgbClr val="1E2A4A"/>
-          </a:solidFill>
-          <a:ln>
-            <a:noFill/>
-          </a:ln>
-          <a:effectLst/>
-        </p:spPr>
-        <p:style>
-          <a:lnRef idx="1">
-            <a:schemeClr val="accent1"/>
-          </a:lnRef>
-          <a:fillRef idx="3">
-            <a:schemeClr val="accent1"/>
-          </a:fillRef>
-          <a:effectRef idx="2">
-            <a:schemeClr val="accent1"/>
-          </a:effectRef>
-          <a:fontRef idx="minor">
-            <a:schemeClr val="lt1"/>
-          </a:fontRef>
-        </p:style>
-        <p:txBody>
-          <a:bodyPr rtlCol="0" anchor="ctr"/>
-          <a:lstStyle/>
-          <a:p>
-            <a:pPr algn="ctr"/>
-            <a:endParaRPr/>
-          </a:p>
-        </p:txBody>
-      </p:sp>
-      <p:sp>
-        <p:nvSpPr>
-          <p:cNvPr id="17415" name="Rounded Rectangle 17414"/>
-          <p:cNvSpPr/>
-          <p:nvPr/>
-        </p:nvSpPr>
-        <p:spPr>
-          <a:xfrm>
-            <a:off x="5204460" y="4526280"/>
-            <a:ext cx="1783080" cy="868680"/>
-          </a:xfrm>
-          <a:prstGeom prst="roundRect">
-            <a:avLst/>
-          </a:prstGeom>
-          <a:solidFill>
-            <a:srgbClr val="0070C0"/>
-          </a:solidFill>
-          <a:ln>
-            <a:noFill/>
-          </a:ln>
-          <a:effectLst/>
-        </p:spPr>
-        <p:style>
-          <a:lnRef idx="1">
-            <a:schemeClr val="accent1"/>
-          </a:lnRef>
-          <a:fillRef idx="3">
-            <a:schemeClr val="accent1"/>
-          </a:fillRef>
-          <a:effectRef idx="2">
-            <a:schemeClr val="accent1"/>
-          </a:effectRef>
-          <a:fontRef idx="minor">
-            <a:schemeClr val="lt1"/>
-          </a:fontRef>
-        </p:style>
-        <p:txBody>
-          <a:bodyPr wrap="square" lIns="50800" tIns="25400" rIns="50800" bIns="25400" rtlCol="0" anchor="ctr"/>
-          <a:lstStyle/>
-          <a:p>
-            <a:pPr algn="ctr"/>
-            <a:r>
-              <a:rPr sz="1150" b="1">
-                <a:solidFill>
-                  <a:srgbClr val="FFFFFF"/>
-                </a:solidFill>
-                <a:latin typeface="Calibri"/>
-              </a:rPr>
-              <a:t>Format
-Generation</a:t>
-            </a:r>
-          </a:p>
-        </p:txBody>
-      </p:sp>
-      <p:sp>
-        <p:nvSpPr>
-          <p:cNvPr id="17416" name="Right Arrow 17415"/>
-          <p:cNvSpPr/>
-          <p:nvPr/>
-        </p:nvSpPr>
-        <p:spPr>
-          <a:xfrm>
-            <a:off x="6987540" y="4860036"/>
-            <a:ext cx="411480" cy="201168"/>
-          </a:xfrm>
-          <a:prstGeom prst="rightArrow">
-            <a:avLst/>
-          </a:prstGeom>
-          <a:solidFill>
-            <a:srgbClr val="1E2A4A"/>
-          </a:solidFill>
-          <a:ln>
-            <a:noFill/>
-          </a:ln>
-          <a:effectLst/>
-        </p:spPr>
-        <p:style>
-          <a:lnRef idx="1">
-            <a:schemeClr val="accent1"/>
-          </a:lnRef>
-          <a:fillRef idx="3">
-            <a:schemeClr val="accent1"/>
-          </a:fillRef>
-          <a:effectRef idx="2">
-            <a:schemeClr val="accent1"/>
-          </a:effectRef>
-          <a:fontRef idx="minor">
-            <a:schemeClr val="lt1"/>
-          </a:fontRef>
-        </p:style>
-        <p:txBody>
-          <a:bodyPr rtlCol="0" anchor="ctr"/>
-          <a:lstStyle/>
-          <a:p>
-            <a:pPr algn="ctr"/>
-            <a:endParaRPr/>
-          </a:p>
-        </p:txBody>
-      </p:sp>
-      <p:sp>
-        <p:nvSpPr>
-          <p:cNvPr id="17417" name="Rounded Rectangle 17416"/>
-          <p:cNvSpPr/>
-          <p:nvPr/>
-        </p:nvSpPr>
-        <p:spPr>
-          <a:xfrm>
-            <a:off x="7399020" y="4526280"/>
-            <a:ext cx="1783080" cy="868680"/>
-          </a:xfrm>
-          <a:prstGeom prst="roundRect">
-            <a:avLst/>
-          </a:prstGeom>
-          <a:solidFill>
-            <a:srgbClr val="0070C0"/>
-          </a:solidFill>
-          <a:ln>
-            <a:noFill/>
-          </a:ln>
-          <a:effectLst/>
-        </p:spPr>
-        <p:style>
-          <a:lnRef idx="1">
-            <a:schemeClr val="accent1"/>
-          </a:lnRef>
-          <a:fillRef idx="3">
-            <a:schemeClr val="accent1"/>
-          </a:fillRef>
-          <a:effectRef idx="2">
-            <a:schemeClr val="accent1"/>
-          </a:effectRef>
-          <a:fontRef idx="minor">
-            <a:schemeClr val="lt1"/>
-          </a:fontRef>
-        </p:style>
-        <p:txBody>
-          <a:bodyPr wrap="square" lIns="50800" tIns="25400" rIns="50800" bIns="25400" rtlCol="0" anchor="ctr"/>
-          <a:lstStyle/>
-          <a:p>
-            <a:pPr algn="ctr"/>
-            <a:r>
-              <a:rPr sz="1150" b="1">
-                <a:solidFill>
-                  <a:srgbClr val="FFFFFF"/>
-                </a:solidFill>
-                <a:latin typeface="Calibri"/>
-              </a:rPr>
-              <a:t>Generated
-Deliverables</a:t>
-            </a:r>
-          </a:p>
-        </p:txBody>
-      </p:sp>
-      <p:sp>
-        <p:nvSpPr>
-          <p:cNvPr id="17418" name="Right Arrow 17417"/>
-          <p:cNvSpPr/>
-          <p:nvPr/>
-        </p:nvSpPr>
-        <p:spPr>
-          <a:xfrm>
-            <a:off x="9182100" y="4860036"/>
-            <a:ext cx="411480" cy="201168"/>
-          </a:xfrm>
-          <a:prstGeom prst="rightArrow">
-            <a:avLst/>
-          </a:prstGeom>
-          <a:solidFill>
-            <a:srgbClr val="1E2A4A"/>
-          </a:solidFill>
-          <a:ln>
-            <a:noFill/>
-          </a:ln>
-          <a:effectLst/>
-        </p:spPr>
-        <p:style>
-          <a:lnRef idx="1">
-            <a:schemeClr val="accent1"/>
-          </a:lnRef>
-          <a:fillRef idx="3">
-            <a:schemeClr val="accent1"/>
-          </a:fillRef>
-          <a:effectRef idx="2">
-            <a:schemeClr val="accent1"/>
-          </a:effectRef>
-          <a:fontRef idx="minor">
-            <a:schemeClr val="lt1"/>
-          </a:fontRef>
-        </p:style>
-        <p:txBody>
-          <a:bodyPr rtlCol="0" anchor="ctr"/>
-          <a:lstStyle/>
-          <a:p>
-            <a:pPr algn="ctr"/>
-            <a:endParaRPr/>
-          </a:p>
-        </p:txBody>
-      </p:sp>
-      <p:sp>
-        <p:nvSpPr>
-          <p:cNvPr id="17419" name="Rounded Rectangle 17418"/>
-          <p:cNvSpPr/>
-          <p:nvPr/>
-        </p:nvSpPr>
-        <p:spPr>
-          <a:xfrm>
-            <a:off x="9593580" y="4526280"/>
-            <a:ext cx="1783080" cy="868680"/>
-          </a:xfrm>
-          <a:prstGeom prst="roundRect">
-            <a:avLst/>
-          </a:prstGeom>
-          <a:solidFill>
-            <a:srgbClr val="0070C0"/>
-          </a:solidFill>
-          <a:ln>
-            <a:noFill/>
-          </a:ln>
-          <a:effectLst/>
-        </p:spPr>
-        <p:style>
-          <a:lnRef idx="1">
-            <a:schemeClr val="accent1"/>
-          </a:lnRef>
-          <a:fillRef idx="3">
-            <a:schemeClr val="accent1"/>
-          </a:fillRef>
-          <a:effectRef idx="2">
-            <a:schemeClr val="accent1"/>
-          </a:effectRef>
-          <a:fontRef idx="minor">
-            <a:schemeClr val="lt1"/>
-          </a:fontRef>
-        </p:style>
-        <p:txBody>
-          <a:bodyPr wrap="square" lIns="50800" tIns="25400" rIns="50800" bIns="25400" rtlCol="0" anchor="ctr"/>
-          <a:lstStyle/>
-          <a:p>
-            <a:pPr algn="ctr"/>
-            <a:r>
-              <a:rPr sz="1150" b="1">
-                <a:solidFill>
-                  <a:srgbClr val="FFFFFF"/>
-                </a:solidFill>
-                <a:latin typeface="Calibri"/>
-              </a:rPr>
-              <a:t>Review &amp;
-Export</a:t>
-            </a:r>
-          </a:p>
-        </p:txBody>
-      </p:sp>
-      <p:sp>
-        <p:nvSpPr>
-          <p:cNvPr id="17420" name="TextBox 17419"/>
-          <p:cNvSpPr txBox="1"/>
-          <p:nvPr/>
-        </p:nvSpPr>
-        <p:spPr>
-          <a:xfrm>
-            <a:off x="815340" y="4142232"/>
-            <a:ext cx="10561320" cy="320040"/>
-          </a:xfrm>
-          <a:prstGeom prst="rect">
-            <a:avLst/>
-          </a:prstGeom>
-          <a:noFill/>
-        </p:spPr>
-        <p:txBody>
-          <a:bodyPr wrap="square" lIns="0" tIns="0" rIns="0" bIns="0" anchor="ctr">
-            <a:spAutoFit/>
-          </a:bodyPr>
-          <a:lstStyle/>
-          <a:p>
-            <a:pPr algn="ctr"/>
-            <a:r>
-              <a:rPr sz="1300" b="1">
-                <a:solidFill>
-                  <a:srgbClr val="1E2A4A"/>
-                </a:solidFill>
-                <a:latin typeface="Calibri"/>
-              </a:rPr>
-              <a:t>End-to-end system flow</a:t>
-            </a:r>
-          </a:p>
-        </p:txBody>
-      </p:sp>
-      <p:sp>
-        <p:nvSpPr>
-          <p:cNvPr id="17421" name="Rounded Rectangle 17420"/>
-          <p:cNvSpPr/>
-          <p:nvPr/>
-        </p:nvSpPr>
-        <p:spPr>
-          <a:xfrm>
-            <a:off x="5204460" y="5715000"/>
-            <a:ext cx="1783080" cy="502920"/>
-          </a:xfrm>
-          <a:prstGeom prst="roundRect">
-            <a:avLst/>
-          </a:prstGeom>
-          <a:solidFill>
-            <a:srgbClr val="EEF2F7"/>
-          </a:solidFill>
-          <a:ln>
-            <a:noFill/>
-          </a:ln>
-          <a:effectLst/>
-        </p:spPr>
-        <p:style>
-          <a:lnRef idx="1">
-            <a:schemeClr val="accent1"/>
-          </a:lnRef>
-          <a:fillRef idx="3">
-            <a:schemeClr val="accent1"/>
-          </a:fillRef>
-          <a:effectRef idx="2">
-            <a:schemeClr val="accent1"/>
-          </a:effectRef>
-          <a:fontRef idx="minor">
-            <a:schemeClr val="lt1"/>
-          </a:fontRef>
-        </p:style>
-        <p:txBody>
-          <a:bodyPr wrap="square" lIns="50800" tIns="25400" rIns="50800" bIns="25400" rtlCol="0" anchor="ctr"/>
-          <a:lstStyle/>
-          <a:p>
-            <a:pPr algn="ctr"/>
-            <a:r>
-              <a:rPr sz="950" b="0">
-                <a:solidFill>
-                  <a:srgbClr val="1E2A4A"/>
-                </a:solidFill>
-                <a:latin typeface="Calibri"/>
-              </a:rPr>
-              <a:t>Operator selects
-source &amp; output types</a:t>
+            <a:r>
+              <a:rPr sz="1100" dirty="0">
+                <a:solidFill>
+                  <a:srgbClr val="1F3864"/>
+                </a:solidFill>
+              </a:rPr>
+              <a:t>React PWA</a:t>
+            </a:r>
+            <a:br>
+              <a:rPr sz="3200" dirty="0"/>
+            </a:br>
+            <a:r>
+              <a:rPr sz="1100" dirty="0">
+                <a:solidFill>
+                  <a:srgbClr val="1F3864"/>
+                </a:solidFill>
+              </a:rPr>
+              <a:t>(Web + Mobile)</a:t>
             </a:r>
           </a:p>
         </p:txBody>
       </p:sp>
       <p:cxnSp>
         <p:nvCxnSpPr>
-          <p:cNvPr id="17422" name="Connector 17421"/>
+          <p:cNvPr id="17412" name="Connector 17411"/>
           <p:cNvCxnSpPr/>
           <p:nvPr/>
         </p:nvCxnSpPr>
         <p:spPr>
-          <a:xfrm flipV="1">
-            <a:off x="6096000" y="5394960"/>
-            <a:ext cx="0" cy="320040"/>
+          <a:xfrm>
+            <a:off x="2514600" y="2674620"/>
+            <a:ext cx="132588" cy="0"/>
           </a:xfrm>
           <a:prstGeom prst="line">
             <a:avLst/>
           </a:prstGeom>
-          <a:ln w="15875">
+          <a:ln w="19050">
             <a:solidFill>
-              <a:srgbClr val="555555"/>
+              <a:srgbClr val="5B6B78"/>
             </a:solidFill>
+            <a:tailEnd type="triangle" w="med" len="med"/>
           </a:ln>
         </p:spPr>
         <p:style>
@@ -7588,6 +8158,1323 @@
           </a:fontRef>
         </p:style>
       </p:cxnSp>
+      <p:sp>
+        <p:nvSpPr>
+          <p:cNvPr id="17413" name="Rounded Rectangle 17412"/>
+          <p:cNvSpPr/>
+          <p:nvPr/>
+        </p:nvSpPr>
+        <p:spPr>
+          <a:xfrm>
+            <a:off x="2665476" y="2148840"/>
+            <a:ext cx="2084831" cy="1051560"/>
+          </a:xfrm>
+          <a:prstGeom prst="roundRect">
+            <a:avLst>
+              <a:gd name="adj" fmla="val 6000"/>
+            </a:avLst>
+          </a:prstGeom>
+          <a:solidFill>
+            <a:srgbClr val="F1F5FA"/>
+          </a:solidFill>
+          <a:ln>
+            <a:noFill/>
+          </a:ln>
+          <a:effectLst/>
+        </p:spPr>
+        <p:style>
+          <a:lnRef idx="1">
+            <a:schemeClr val="accent1"/>
+          </a:lnRef>
+          <a:fillRef idx="3">
+            <a:schemeClr val="accent1"/>
+          </a:fillRef>
+          <a:effectRef idx="2">
+            <a:schemeClr val="accent1"/>
+          </a:effectRef>
+          <a:fontRef idx="minor">
+            <a:schemeClr val="lt1"/>
+          </a:fontRef>
+        </p:style>
+        <p:txBody>
+          <a:bodyPr wrap="square" tIns="25400" bIns="25400" rtlCol="0" anchor="ctr"/>
+          <a:lstStyle/>
+          <a:p>
+            <a:pPr algn="ctr"/>
+            <a:r>
+              <a:rPr sz="1600" b="1" dirty="0">
+                <a:solidFill>
+                  <a:srgbClr val="1F3864"/>
+                </a:solidFill>
+              </a:rPr>
+              <a:t>API Gateway</a:t>
+            </a:r>
+          </a:p>
+          <a:p>
+            <a:pPr algn="ctr"/>
+            <a:r>
+              <a:rPr sz="1100" dirty="0">
+                <a:solidFill>
+                  <a:srgbClr val="1F3864"/>
+                </a:solidFill>
+              </a:rPr>
+              <a:t>Node.js / Express</a:t>
+            </a:r>
+            <a:br>
+              <a:rPr sz="3200" dirty="0"/>
+            </a:br>
+            <a:r>
+              <a:rPr sz="1100" dirty="0">
+                <a:solidFill>
+                  <a:srgbClr val="1F3864"/>
+                </a:solidFill>
+              </a:rPr>
+              <a:t>JWT Auth, Rate-Limit</a:t>
+            </a:r>
+          </a:p>
+        </p:txBody>
+      </p:sp>
+      <p:cxnSp>
+        <p:nvCxnSpPr>
+          <p:cNvPr id="17414" name="Connector 17413"/>
+          <p:cNvCxnSpPr/>
+          <p:nvPr/>
+        </p:nvCxnSpPr>
+        <p:spPr>
+          <a:xfrm>
+            <a:off x="4768596" y="2674620"/>
+            <a:ext cx="132588" cy="0"/>
+          </a:xfrm>
+          <a:prstGeom prst="line">
+            <a:avLst/>
+          </a:prstGeom>
+          <a:ln w="19050">
+            <a:solidFill>
+              <a:srgbClr val="5B6B78"/>
+            </a:solidFill>
+            <a:tailEnd type="triangle" w="med" len="med"/>
+          </a:ln>
+        </p:spPr>
+        <p:style>
+          <a:lnRef idx="2">
+            <a:schemeClr val="accent1"/>
+          </a:lnRef>
+          <a:fillRef idx="0">
+            <a:schemeClr val="accent1"/>
+          </a:fillRef>
+          <a:effectRef idx="1">
+            <a:schemeClr val="accent1"/>
+          </a:effectRef>
+          <a:fontRef idx="minor">
+            <a:schemeClr val="tx1"/>
+          </a:fontRef>
+        </p:style>
+      </p:cxnSp>
+      <p:sp>
+        <p:nvSpPr>
+          <p:cNvPr id="17415" name="Rounded Rectangle 17414"/>
+          <p:cNvSpPr/>
+          <p:nvPr/>
+        </p:nvSpPr>
+        <p:spPr>
+          <a:xfrm>
+            <a:off x="4919472" y="2148840"/>
+            <a:ext cx="2084831" cy="1051560"/>
+          </a:xfrm>
+          <a:prstGeom prst="roundRect">
+            <a:avLst>
+              <a:gd name="adj" fmla="val 6000"/>
+            </a:avLst>
+          </a:prstGeom>
+          <a:solidFill>
+            <a:srgbClr val="1F3864"/>
+          </a:solidFill>
+          <a:ln>
+            <a:noFill/>
+          </a:ln>
+          <a:effectLst/>
+        </p:spPr>
+        <p:style>
+          <a:lnRef idx="1">
+            <a:schemeClr val="accent1"/>
+          </a:lnRef>
+          <a:fillRef idx="3">
+            <a:schemeClr val="accent1"/>
+          </a:fillRef>
+          <a:effectRef idx="2">
+            <a:schemeClr val="accent1"/>
+          </a:effectRef>
+          <a:fontRef idx="minor">
+            <a:schemeClr val="lt1"/>
+          </a:fontRef>
+        </p:style>
+        <p:txBody>
+          <a:bodyPr wrap="square" tIns="25400" bIns="25400" rtlCol="0" anchor="ctr"/>
+          <a:lstStyle/>
+          <a:p>
+            <a:pPr algn="ctr"/>
+            <a:r>
+              <a:rPr sz="1600" b="1" dirty="0">
+                <a:solidFill>
+                  <a:srgbClr val="FFFFFF"/>
+                </a:solidFill>
+              </a:rPr>
+              <a:t>Microservices</a:t>
+            </a:r>
+          </a:p>
+          <a:p>
+            <a:pPr algn="ctr"/>
+            <a:r>
+              <a:rPr sz="1100" dirty="0">
+                <a:solidFill>
+                  <a:srgbClr val="FFFFFF"/>
+                </a:solidFill>
+              </a:rPr>
+              <a:t>Profile · Matching ·</a:t>
+            </a:r>
+            <a:br>
+              <a:rPr sz="3200" dirty="0"/>
+            </a:br>
+            <a:r>
+              <a:rPr sz="1100" dirty="0">
+                <a:solidFill>
+                  <a:srgbClr val="FFFFFF"/>
+                </a:solidFill>
+              </a:rPr>
+              <a:t>Internship · Notify</a:t>
+            </a:r>
+          </a:p>
+        </p:txBody>
+      </p:sp>
+      <p:cxnSp>
+        <p:nvCxnSpPr>
+          <p:cNvPr id="17416" name="Connector 17415"/>
+          <p:cNvCxnSpPr/>
+          <p:nvPr/>
+        </p:nvCxnSpPr>
+        <p:spPr>
+          <a:xfrm>
+            <a:off x="7022592" y="2674620"/>
+            <a:ext cx="132588" cy="0"/>
+          </a:xfrm>
+          <a:prstGeom prst="line">
+            <a:avLst/>
+          </a:prstGeom>
+          <a:ln w="19050">
+            <a:solidFill>
+              <a:srgbClr val="5B6B78"/>
+            </a:solidFill>
+            <a:tailEnd type="triangle" w="med" len="med"/>
+          </a:ln>
+        </p:spPr>
+        <p:style>
+          <a:lnRef idx="2">
+            <a:schemeClr val="accent1"/>
+          </a:lnRef>
+          <a:fillRef idx="0">
+            <a:schemeClr val="accent1"/>
+          </a:fillRef>
+          <a:effectRef idx="1">
+            <a:schemeClr val="accent1"/>
+          </a:effectRef>
+          <a:fontRef idx="minor">
+            <a:schemeClr val="tx1"/>
+          </a:fontRef>
+        </p:style>
+      </p:cxnSp>
+      <p:sp>
+        <p:nvSpPr>
+          <p:cNvPr id="17417" name="Rounded Rectangle 17416"/>
+          <p:cNvSpPr/>
+          <p:nvPr/>
+        </p:nvSpPr>
+        <p:spPr>
+          <a:xfrm>
+            <a:off x="7173468" y="2148840"/>
+            <a:ext cx="2084831" cy="1051560"/>
+          </a:xfrm>
+          <a:prstGeom prst="roundRect">
+            <a:avLst>
+              <a:gd name="adj" fmla="val 6000"/>
+            </a:avLst>
+          </a:prstGeom>
+          <a:solidFill>
+            <a:srgbClr val="F1F5FA"/>
+          </a:solidFill>
+          <a:ln>
+            <a:noFill/>
+          </a:ln>
+          <a:effectLst/>
+        </p:spPr>
+        <p:style>
+          <a:lnRef idx="1">
+            <a:schemeClr val="accent1"/>
+          </a:lnRef>
+          <a:fillRef idx="3">
+            <a:schemeClr val="accent1"/>
+          </a:fillRef>
+          <a:effectRef idx="2">
+            <a:schemeClr val="accent1"/>
+          </a:effectRef>
+          <a:fontRef idx="minor">
+            <a:schemeClr val="lt1"/>
+          </a:fontRef>
+        </p:style>
+        <p:txBody>
+          <a:bodyPr wrap="square" tIns="25400" bIns="25400" rtlCol="0" anchor="ctr"/>
+          <a:lstStyle/>
+          <a:p>
+            <a:pPr algn="ctr"/>
+            <a:r>
+              <a:rPr sz="1600" b="1" dirty="0">
+                <a:solidFill>
+                  <a:srgbClr val="1F3864"/>
+                </a:solidFill>
+              </a:rPr>
+              <a:t>AI / ML Layer</a:t>
+            </a:r>
+          </a:p>
+          <a:p>
+            <a:pPr algn="ctr"/>
+            <a:r>
+              <a:rPr sz="1100" dirty="0">
+                <a:solidFill>
+                  <a:srgbClr val="1F3864"/>
+                </a:solidFill>
+              </a:rPr>
+              <a:t>NLP Parser +</a:t>
+            </a:r>
+            <a:br>
+              <a:rPr sz="3200" dirty="0"/>
+            </a:br>
+            <a:r>
+              <a:rPr sz="1100" dirty="0">
+                <a:solidFill>
+                  <a:srgbClr val="1F3864"/>
+                </a:solidFill>
+              </a:rPr>
+              <a:t>Embedding Model</a:t>
+            </a:r>
+          </a:p>
+        </p:txBody>
+      </p:sp>
+      <p:cxnSp>
+        <p:nvCxnSpPr>
+          <p:cNvPr id="17418" name="Connector 17417"/>
+          <p:cNvCxnSpPr/>
+          <p:nvPr/>
+        </p:nvCxnSpPr>
+        <p:spPr>
+          <a:xfrm>
+            <a:off x="9276588" y="2674620"/>
+            <a:ext cx="132588" cy="0"/>
+          </a:xfrm>
+          <a:prstGeom prst="line">
+            <a:avLst/>
+          </a:prstGeom>
+          <a:ln w="19050">
+            <a:solidFill>
+              <a:srgbClr val="5B6B78"/>
+            </a:solidFill>
+            <a:tailEnd type="triangle" w="med" len="med"/>
+          </a:ln>
+        </p:spPr>
+        <p:style>
+          <a:lnRef idx="2">
+            <a:schemeClr val="accent1"/>
+          </a:lnRef>
+          <a:fillRef idx="0">
+            <a:schemeClr val="accent1"/>
+          </a:fillRef>
+          <a:effectRef idx="1">
+            <a:schemeClr val="accent1"/>
+          </a:effectRef>
+          <a:fontRef idx="minor">
+            <a:schemeClr val="tx1"/>
+          </a:fontRef>
+        </p:style>
+      </p:cxnSp>
+      <p:sp>
+        <p:nvSpPr>
+          <p:cNvPr id="17419" name="Rounded Rectangle 17418"/>
+          <p:cNvSpPr/>
+          <p:nvPr/>
+        </p:nvSpPr>
+        <p:spPr>
+          <a:xfrm>
+            <a:off x="9427463" y="2148840"/>
+            <a:ext cx="2084831" cy="1051560"/>
+          </a:xfrm>
+          <a:prstGeom prst="roundRect">
+            <a:avLst>
+              <a:gd name="adj" fmla="val 6000"/>
+            </a:avLst>
+          </a:prstGeom>
+          <a:solidFill>
+            <a:srgbClr val="F1F5FA"/>
+          </a:solidFill>
+          <a:ln>
+            <a:noFill/>
+          </a:ln>
+          <a:effectLst/>
+        </p:spPr>
+        <p:style>
+          <a:lnRef idx="1">
+            <a:schemeClr val="accent1"/>
+          </a:lnRef>
+          <a:fillRef idx="3">
+            <a:schemeClr val="accent1"/>
+          </a:fillRef>
+          <a:effectRef idx="2">
+            <a:schemeClr val="accent1"/>
+          </a:effectRef>
+          <a:fontRef idx="minor">
+            <a:schemeClr val="lt1"/>
+          </a:fontRef>
+        </p:style>
+        <p:txBody>
+          <a:bodyPr wrap="square" tIns="25400" bIns="25400" rtlCol="0" anchor="ctr"/>
+          <a:lstStyle/>
+          <a:p>
+            <a:pPr algn="ctr"/>
+            <a:r>
+              <a:rPr sz="1600" b="1" dirty="0">
+                <a:solidFill>
+                  <a:srgbClr val="1F3864"/>
+                </a:solidFill>
+              </a:rPr>
+              <a:t>Data Layer</a:t>
+            </a:r>
+          </a:p>
+          <a:p>
+            <a:pPr algn="ctr"/>
+            <a:r>
+              <a:rPr sz="1100" dirty="0">
+                <a:solidFill>
+                  <a:srgbClr val="1F3864"/>
+                </a:solidFill>
+              </a:rPr>
+              <a:t>PostgreSQL · MongoDB</a:t>
+            </a:r>
+            <a:br>
+              <a:rPr sz="3200" dirty="0"/>
+            </a:br>
+            <a:r>
+              <a:rPr sz="1100" dirty="0">
+                <a:solidFill>
+                  <a:srgbClr val="1F3864"/>
+                </a:solidFill>
+              </a:rPr>
+              <a:t>Redis · S3</a:t>
+            </a:r>
+          </a:p>
+        </p:txBody>
+      </p:sp>
+      <p:sp>
+        <p:nvSpPr>
+          <p:cNvPr id="17420" name="TextBox 17419"/>
+          <p:cNvSpPr txBox="1"/>
+          <p:nvPr/>
+        </p:nvSpPr>
+        <p:spPr>
+          <a:xfrm>
+            <a:off x="411480" y="3337560"/>
+            <a:ext cx="11338560" cy="246221"/>
+          </a:xfrm>
+          <a:prstGeom prst="rect">
+            <a:avLst/>
+          </a:prstGeom>
+          <a:noFill/>
+        </p:spPr>
+        <p:txBody>
+          <a:bodyPr wrap="square" lIns="0" tIns="0" rIns="0" bIns="0" anchor="t">
+            <a:spAutoFit/>
+          </a:bodyPr>
+          <a:lstStyle/>
+          <a:p>
+            <a:pPr algn="l">
+              <a:lnSpc>
+                <a:spcPct val="100000"/>
+              </a:lnSpc>
+            </a:pPr>
+            <a:r>
+              <a:rPr sz="1600" b="1" i="0" dirty="0">
+                <a:solidFill>
+                  <a:srgbClr val="1F3864"/>
+                </a:solidFill>
+                <a:latin typeface="Calibri"/>
+              </a:rPr>
+              <a:t>Skill-Matching Algorithm</a:t>
+            </a:r>
+          </a:p>
+        </p:txBody>
+      </p:sp>
+      <p:sp>
+        <p:nvSpPr>
+          <p:cNvPr id="17421" name="Rounded Rectangle 17420"/>
+          <p:cNvSpPr/>
+          <p:nvPr/>
+        </p:nvSpPr>
+        <p:spPr>
+          <a:xfrm>
+            <a:off x="411480" y="3611880"/>
+            <a:ext cx="11338560" cy="777240"/>
+          </a:xfrm>
+          <a:prstGeom prst="roundRect">
+            <a:avLst>
+              <a:gd name="adj" fmla="val 6000"/>
+            </a:avLst>
+          </a:prstGeom>
+          <a:solidFill>
+            <a:srgbClr val="EAF0F8"/>
+          </a:solidFill>
+          <a:ln>
+            <a:noFill/>
+          </a:ln>
+          <a:effectLst/>
+        </p:spPr>
+        <p:style>
+          <a:lnRef idx="1">
+            <a:schemeClr val="accent1"/>
+          </a:lnRef>
+          <a:fillRef idx="3">
+            <a:schemeClr val="accent1"/>
+          </a:fillRef>
+          <a:effectRef idx="2">
+            <a:schemeClr val="accent1"/>
+          </a:effectRef>
+          <a:fontRef idx="minor">
+            <a:schemeClr val="lt1"/>
+          </a:fontRef>
+        </p:style>
+        <p:txBody>
+          <a:bodyPr rtlCol="0" anchor="ctr"/>
+          <a:lstStyle/>
+          <a:p>
+            <a:pPr algn="ctr"/>
+            <a:endParaRPr/>
+          </a:p>
+        </p:txBody>
+      </p:sp>
+      <p:sp>
+        <p:nvSpPr>
+          <p:cNvPr id="17422" name="TextBox 17421"/>
+          <p:cNvSpPr txBox="1"/>
+          <p:nvPr/>
+        </p:nvSpPr>
+        <p:spPr>
+          <a:xfrm>
+            <a:off x="594360" y="3685032"/>
+            <a:ext cx="10972800" cy="409279"/>
+          </a:xfrm>
+          <a:prstGeom prst="rect">
+            <a:avLst/>
+          </a:prstGeom>
+          <a:noFill/>
+        </p:spPr>
+        <p:txBody>
+          <a:bodyPr wrap="square" lIns="0" tIns="0" rIns="0" bIns="0" anchor="t">
+            <a:spAutoFit/>
+          </a:bodyPr>
+          <a:lstStyle/>
+          <a:p>
+            <a:pPr algn="l">
+              <a:lnSpc>
+                <a:spcPct val="115000"/>
+              </a:lnSpc>
+            </a:pPr>
+            <a:r>
+              <a:rPr sz="1200" b="0" i="0" dirty="0">
+                <a:solidFill>
+                  <a:srgbClr val="222A33"/>
+                </a:solidFill>
+                <a:latin typeface="Calibri"/>
+              </a:rPr>
+              <a:t>Resume / JD text → tokenization &amp; Sentence-BERT embeddings → cosine similarity vs. skill-taxonomy graph → weighted score = 0.60 × skill-match + 0.25 × experience relevance + 0.15 × location/availability → top-N ranked recommendations, refreshed nightly via an Airflow batch job; cold-start users get rule-based fallback matches.</a:t>
+            </a:r>
+          </a:p>
+        </p:txBody>
+      </p:sp>
+      <p:sp>
+        <p:nvSpPr>
+          <p:cNvPr id="17423" name="Rounded Rectangle 17422"/>
+          <p:cNvSpPr/>
+          <p:nvPr/>
+        </p:nvSpPr>
+        <p:spPr>
+          <a:xfrm>
+            <a:off x="411480" y="4572000"/>
+            <a:ext cx="3602735" cy="1691640"/>
+          </a:xfrm>
+          <a:prstGeom prst="roundRect">
+            <a:avLst>
+              <a:gd name="adj" fmla="val 6000"/>
+            </a:avLst>
+          </a:prstGeom>
+          <a:solidFill>
+            <a:srgbClr val="F1F5FA"/>
+          </a:solidFill>
+          <a:ln>
+            <a:noFill/>
+          </a:ln>
+          <a:effectLst/>
+        </p:spPr>
+        <p:style>
+          <a:lnRef idx="1">
+            <a:schemeClr val="accent1"/>
+          </a:lnRef>
+          <a:fillRef idx="3">
+            <a:schemeClr val="accent1"/>
+          </a:fillRef>
+          <a:effectRef idx="2">
+            <a:schemeClr val="accent1"/>
+          </a:effectRef>
+          <a:fontRef idx="minor">
+            <a:schemeClr val="lt1"/>
+          </a:fontRef>
+        </p:style>
+        <p:txBody>
+          <a:bodyPr rtlCol="0" anchor="ctr"/>
+          <a:lstStyle/>
+          <a:p>
+            <a:pPr algn="ctr"/>
+            <a:endParaRPr/>
+          </a:p>
+        </p:txBody>
+      </p:sp>
+      <p:sp>
+        <p:nvSpPr>
+          <p:cNvPr id="17424" name="Rectangle 17423"/>
+          <p:cNvSpPr/>
+          <p:nvPr/>
+        </p:nvSpPr>
+        <p:spPr>
+          <a:xfrm>
+            <a:off x="557784" y="4700016"/>
+            <a:ext cx="109728" cy="109728"/>
+          </a:xfrm>
+          <a:prstGeom prst="rect">
+            <a:avLst/>
+          </a:prstGeom>
+          <a:solidFill>
+            <a:srgbClr val="1F3864"/>
+          </a:solidFill>
+          <a:ln>
+            <a:noFill/>
+          </a:ln>
+          <a:effectLst/>
+        </p:spPr>
+        <p:style>
+          <a:lnRef idx="1">
+            <a:schemeClr val="accent1"/>
+          </a:lnRef>
+          <a:fillRef idx="3">
+            <a:schemeClr val="accent1"/>
+          </a:fillRef>
+          <a:effectRef idx="2">
+            <a:schemeClr val="accent1"/>
+          </a:effectRef>
+          <a:fontRef idx="minor">
+            <a:schemeClr val="lt1"/>
+          </a:fontRef>
+        </p:style>
+        <p:txBody>
+          <a:bodyPr rtlCol="0" anchor="ctr"/>
+          <a:lstStyle/>
+          <a:p>
+            <a:pPr algn="ctr"/>
+            <a:endParaRPr/>
+          </a:p>
+        </p:txBody>
+      </p:sp>
+      <p:sp>
+        <p:nvSpPr>
+          <p:cNvPr id="17425" name="TextBox 17424"/>
+          <p:cNvSpPr txBox="1"/>
+          <p:nvPr/>
+        </p:nvSpPr>
+        <p:spPr>
+          <a:xfrm>
+            <a:off x="777240" y="4645152"/>
+            <a:ext cx="3163823" cy="184666"/>
+          </a:xfrm>
+          <a:prstGeom prst="rect">
+            <a:avLst/>
+          </a:prstGeom>
+          <a:noFill/>
+        </p:spPr>
+        <p:txBody>
+          <a:bodyPr wrap="square" lIns="0" tIns="0" rIns="0" bIns="0" anchor="t">
+            <a:spAutoFit/>
+          </a:bodyPr>
+          <a:lstStyle/>
+          <a:p>
+            <a:pPr algn="l">
+              <a:lnSpc>
+                <a:spcPct val="100000"/>
+              </a:lnSpc>
+            </a:pPr>
+            <a:r>
+              <a:rPr sz="1200" b="1" i="0" dirty="0">
+                <a:solidFill>
+                  <a:srgbClr val="1F3864"/>
+                </a:solidFill>
+                <a:latin typeface="Calibri"/>
+              </a:rPr>
+              <a:t>Tech Stack</a:t>
+            </a:r>
+          </a:p>
+        </p:txBody>
+      </p:sp>
+      <p:sp>
+        <p:nvSpPr>
+          <p:cNvPr id="17426" name="TextBox 17425"/>
+          <p:cNvSpPr txBox="1"/>
+          <p:nvPr/>
+        </p:nvSpPr>
+        <p:spPr>
+          <a:xfrm>
+            <a:off x="576072" y="4956048"/>
+            <a:ext cx="3383279" cy="984116"/>
+          </a:xfrm>
+          <a:prstGeom prst="rect">
+            <a:avLst/>
+          </a:prstGeom>
+          <a:noFill/>
+        </p:spPr>
+        <p:txBody>
+          <a:bodyPr wrap="square" lIns="0" tIns="0" rIns="0" bIns="0">
+            <a:spAutoFit/>
+          </a:bodyPr>
+          <a:lstStyle/>
+          <a:p>
+            <a:pPr>
+              <a:lnSpc>
+                <a:spcPct val="105000"/>
+              </a:lnSpc>
+              <a:spcAft>
+                <a:spcPts val="200"/>
+              </a:spcAft>
+            </a:pPr>
+            <a:r>
+              <a:rPr sz="1100" dirty="0">
+                <a:solidFill>
+                  <a:srgbClr val="222A33"/>
+                </a:solidFill>
+                <a:latin typeface="Calibri"/>
+              </a:rPr>
+              <a:t>•  Frontend: React.js, Redux, Tailwind CSS</a:t>
+            </a:r>
+          </a:p>
+          <a:p>
+            <a:pPr>
+              <a:lnSpc>
+                <a:spcPct val="105000"/>
+              </a:lnSpc>
+              <a:spcAft>
+                <a:spcPts val="200"/>
+              </a:spcAft>
+            </a:pPr>
+            <a:r>
+              <a:rPr sz="1100" dirty="0">
+                <a:solidFill>
+                  <a:srgbClr val="222A33"/>
+                </a:solidFill>
+                <a:latin typeface="Calibri"/>
+              </a:rPr>
+              <a:t>•  Backend: Node.js, Express, REST + </a:t>
+            </a:r>
+            <a:r>
+              <a:rPr sz="1100" dirty="0" err="1">
+                <a:solidFill>
+                  <a:srgbClr val="222A33"/>
+                </a:solidFill>
+                <a:latin typeface="Calibri"/>
+              </a:rPr>
+              <a:t>GraphQL</a:t>
+            </a:r>
+            <a:endParaRPr sz="1100" dirty="0">
+              <a:solidFill>
+                <a:srgbClr val="222A33"/>
+              </a:solidFill>
+              <a:latin typeface="Calibri"/>
+            </a:endParaRPr>
+          </a:p>
+          <a:p>
+            <a:pPr>
+              <a:lnSpc>
+                <a:spcPct val="105000"/>
+              </a:lnSpc>
+              <a:spcAft>
+                <a:spcPts val="200"/>
+              </a:spcAft>
+            </a:pPr>
+            <a:r>
+              <a:rPr sz="1100" dirty="0">
+                <a:solidFill>
+                  <a:srgbClr val="222A33"/>
+                </a:solidFill>
+                <a:latin typeface="Calibri"/>
+              </a:rPr>
+              <a:t>•  Database: PostgreSQL (relational), MongoDB (profiles)</a:t>
+            </a:r>
+          </a:p>
+          <a:p>
+            <a:pPr>
+              <a:lnSpc>
+                <a:spcPct val="105000"/>
+              </a:lnSpc>
+              <a:spcAft>
+                <a:spcPts val="200"/>
+              </a:spcAft>
+            </a:pPr>
+            <a:r>
+              <a:rPr sz="1100" dirty="0">
+                <a:solidFill>
+                  <a:srgbClr val="222A33"/>
+                </a:solidFill>
+                <a:latin typeface="Calibri"/>
+              </a:rPr>
+              <a:t>•  AI/ML: Python, </a:t>
+            </a:r>
+            <a:r>
+              <a:rPr sz="1100" dirty="0" err="1">
+                <a:solidFill>
+                  <a:srgbClr val="222A33"/>
+                </a:solidFill>
+                <a:latin typeface="Calibri"/>
+              </a:rPr>
+              <a:t>spaCy</a:t>
+            </a:r>
+            <a:r>
+              <a:rPr sz="1100" dirty="0">
+                <a:solidFill>
+                  <a:srgbClr val="222A33"/>
+                </a:solidFill>
+                <a:latin typeface="Calibri"/>
+              </a:rPr>
+              <a:t>, Sentence-BERT, scikit-learn</a:t>
+            </a:r>
+          </a:p>
+          <a:p>
+            <a:pPr>
+              <a:lnSpc>
+                <a:spcPct val="105000"/>
+              </a:lnSpc>
+              <a:spcAft>
+                <a:spcPts val="200"/>
+              </a:spcAft>
+            </a:pPr>
+            <a:r>
+              <a:rPr sz="1100" dirty="0">
+                <a:solidFill>
+                  <a:srgbClr val="222A33"/>
+                </a:solidFill>
+                <a:latin typeface="Calibri"/>
+              </a:rPr>
+              <a:t>•  Cache/Queue: Redis, RabbitMQ for async jobs</a:t>
+            </a:r>
+          </a:p>
+        </p:txBody>
+      </p:sp>
+      <p:sp>
+        <p:nvSpPr>
+          <p:cNvPr id="17427" name="Rounded Rectangle 17426"/>
+          <p:cNvSpPr/>
+          <p:nvPr/>
+        </p:nvSpPr>
+        <p:spPr>
+          <a:xfrm>
+            <a:off x="4123944" y="4572000"/>
+            <a:ext cx="3602735" cy="1691640"/>
+          </a:xfrm>
+          <a:prstGeom prst="roundRect">
+            <a:avLst>
+              <a:gd name="adj" fmla="val 6000"/>
+            </a:avLst>
+          </a:prstGeom>
+          <a:solidFill>
+            <a:srgbClr val="F1F5FA"/>
+          </a:solidFill>
+          <a:ln>
+            <a:noFill/>
+          </a:ln>
+          <a:effectLst/>
+        </p:spPr>
+        <p:style>
+          <a:lnRef idx="1">
+            <a:schemeClr val="accent1"/>
+          </a:lnRef>
+          <a:fillRef idx="3">
+            <a:schemeClr val="accent1"/>
+          </a:fillRef>
+          <a:effectRef idx="2">
+            <a:schemeClr val="accent1"/>
+          </a:effectRef>
+          <a:fontRef idx="minor">
+            <a:schemeClr val="lt1"/>
+          </a:fontRef>
+        </p:style>
+        <p:txBody>
+          <a:bodyPr rtlCol="0" anchor="ctr"/>
+          <a:lstStyle/>
+          <a:p>
+            <a:pPr algn="ctr"/>
+            <a:endParaRPr/>
+          </a:p>
+        </p:txBody>
+      </p:sp>
+      <p:sp>
+        <p:nvSpPr>
+          <p:cNvPr id="17428" name="Rectangle 17427"/>
+          <p:cNvSpPr/>
+          <p:nvPr/>
+        </p:nvSpPr>
+        <p:spPr>
+          <a:xfrm>
+            <a:off x="4270248" y="4700016"/>
+            <a:ext cx="109728" cy="109728"/>
+          </a:xfrm>
+          <a:prstGeom prst="rect">
+            <a:avLst/>
+          </a:prstGeom>
+          <a:solidFill>
+            <a:srgbClr val="C0504D"/>
+          </a:solidFill>
+          <a:ln>
+            <a:noFill/>
+          </a:ln>
+          <a:effectLst/>
+        </p:spPr>
+        <p:style>
+          <a:lnRef idx="1">
+            <a:schemeClr val="accent1"/>
+          </a:lnRef>
+          <a:fillRef idx="3">
+            <a:schemeClr val="accent1"/>
+          </a:fillRef>
+          <a:effectRef idx="2">
+            <a:schemeClr val="accent1"/>
+          </a:effectRef>
+          <a:fontRef idx="minor">
+            <a:schemeClr val="lt1"/>
+          </a:fontRef>
+        </p:style>
+        <p:txBody>
+          <a:bodyPr rtlCol="0" anchor="ctr"/>
+          <a:lstStyle/>
+          <a:p>
+            <a:pPr algn="ctr"/>
+            <a:endParaRPr/>
+          </a:p>
+        </p:txBody>
+      </p:sp>
+      <p:sp>
+        <p:nvSpPr>
+          <p:cNvPr id="17429" name="TextBox 17428"/>
+          <p:cNvSpPr txBox="1"/>
+          <p:nvPr/>
+        </p:nvSpPr>
+        <p:spPr>
+          <a:xfrm>
+            <a:off x="4489704" y="4645152"/>
+            <a:ext cx="3163823" cy="184666"/>
+          </a:xfrm>
+          <a:prstGeom prst="rect">
+            <a:avLst/>
+          </a:prstGeom>
+          <a:noFill/>
+        </p:spPr>
+        <p:txBody>
+          <a:bodyPr wrap="square" lIns="0" tIns="0" rIns="0" bIns="0" anchor="t">
+            <a:spAutoFit/>
+          </a:bodyPr>
+          <a:lstStyle/>
+          <a:p>
+            <a:pPr algn="l">
+              <a:lnSpc>
+                <a:spcPct val="100000"/>
+              </a:lnSpc>
+            </a:pPr>
+            <a:r>
+              <a:rPr sz="1200" b="1" i="0" dirty="0">
+                <a:solidFill>
+                  <a:srgbClr val="1F3864"/>
+                </a:solidFill>
+                <a:latin typeface="Calibri"/>
+              </a:rPr>
+              <a:t>Security &amp; Compliance</a:t>
+            </a:r>
+          </a:p>
+        </p:txBody>
+      </p:sp>
+      <p:sp>
+        <p:nvSpPr>
+          <p:cNvPr id="17430" name="TextBox 17429"/>
+          <p:cNvSpPr txBox="1"/>
+          <p:nvPr/>
+        </p:nvSpPr>
+        <p:spPr>
+          <a:xfrm>
+            <a:off x="4288536" y="4956048"/>
+            <a:ext cx="3383279" cy="984116"/>
+          </a:xfrm>
+          <a:prstGeom prst="rect">
+            <a:avLst/>
+          </a:prstGeom>
+          <a:noFill/>
+        </p:spPr>
+        <p:txBody>
+          <a:bodyPr wrap="square" lIns="0" tIns="0" rIns="0" bIns="0">
+            <a:spAutoFit/>
+          </a:bodyPr>
+          <a:lstStyle/>
+          <a:p>
+            <a:pPr>
+              <a:lnSpc>
+                <a:spcPct val="105000"/>
+              </a:lnSpc>
+              <a:spcAft>
+                <a:spcPts val="200"/>
+              </a:spcAft>
+            </a:pPr>
+            <a:r>
+              <a:rPr sz="1100" dirty="0">
+                <a:solidFill>
+                  <a:srgbClr val="222A33"/>
+                </a:solidFill>
+                <a:latin typeface="Calibri"/>
+              </a:rPr>
+              <a:t>•  OAuth 2.0 + JWT with role-based access control</a:t>
+            </a:r>
+          </a:p>
+          <a:p>
+            <a:pPr>
+              <a:lnSpc>
+                <a:spcPct val="105000"/>
+              </a:lnSpc>
+              <a:spcAft>
+                <a:spcPts val="200"/>
+              </a:spcAft>
+            </a:pPr>
+            <a:r>
+              <a:rPr sz="1100" dirty="0">
+                <a:solidFill>
+                  <a:srgbClr val="222A33"/>
+                </a:solidFill>
+                <a:latin typeface="Calibri"/>
+              </a:rPr>
+              <a:t>•  TLS 1.3 in transit, AES-256 encryption at rest</a:t>
+            </a:r>
+          </a:p>
+          <a:p>
+            <a:pPr>
+              <a:lnSpc>
+                <a:spcPct val="105000"/>
+              </a:lnSpc>
+              <a:spcAft>
+                <a:spcPts val="200"/>
+              </a:spcAft>
+            </a:pPr>
+            <a:r>
+              <a:rPr sz="1100" dirty="0">
+                <a:solidFill>
+                  <a:srgbClr val="222A33"/>
+                </a:solidFill>
+                <a:latin typeface="Calibri"/>
+              </a:rPr>
+              <a:t>•  DPDP Act 2023-compliant consent management</a:t>
+            </a:r>
+          </a:p>
+          <a:p>
+            <a:pPr>
+              <a:lnSpc>
+                <a:spcPct val="105000"/>
+              </a:lnSpc>
+              <a:spcAft>
+                <a:spcPts val="200"/>
+              </a:spcAft>
+            </a:pPr>
+            <a:r>
+              <a:rPr sz="1100" dirty="0">
+                <a:solidFill>
+                  <a:srgbClr val="222A33"/>
+                </a:solidFill>
+                <a:latin typeface="Calibri"/>
+              </a:rPr>
+              <a:t>•  Audit logging &amp; anomaly detection on admin actions</a:t>
+            </a:r>
+          </a:p>
+          <a:p>
+            <a:pPr>
+              <a:lnSpc>
+                <a:spcPct val="105000"/>
+              </a:lnSpc>
+              <a:spcAft>
+                <a:spcPts val="200"/>
+              </a:spcAft>
+            </a:pPr>
+            <a:r>
+              <a:rPr sz="1100" dirty="0">
+                <a:solidFill>
+                  <a:srgbClr val="222A33"/>
+                </a:solidFill>
+                <a:latin typeface="Calibri"/>
+              </a:rPr>
+              <a:t>•  Periodic third-party penetration testing</a:t>
+            </a:r>
+          </a:p>
+        </p:txBody>
+      </p:sp>
+      <p:sp>
+        <p:nvSpPr>
+          <p:cNvPr id="17431" name="Rounded Rectangle 17430"/>
+          <p:cNvSpPr/>
+          <p:nvPr/>
+        </p:nvSpPr>
+        <p:spPr>
+          <a:xfrm>
+            <a:off x="7836408" y="4572000"/>
+            <a:ext cx="3602735" cy="1691640"/>
+          </a:xfrm>
+          <a:prstGeom prst="roundRect">
+            <a:avLst>
+              <a:gd name="adj" fmla="val 6000"/>
+            </a:avLst>
+          </a:prstGeom>
+          <a:solidFill>
+            <a:srgbClr val="F1F5FA"/>
+          </a:solidFill>
+          <a:ln>
+            <a:noFill/>
+          </a:ln>
+          <a:effectLst/>
+        </p:spPr>
+        <p:style>
+          <a:lnRef idx="1">
+            <a:schemeClr val="accent1"/>
+          </a:lnRef>
+          <a:fillRef idx="3">
+            <a:schemeClr val="accent1"/>
+          </a:fillRef>
+          <a:effectRef idx="2">
+            <a:schemeClr val="accent1"/>
+          </a:effectRef>
+          <a:fontRef idx="minor">
+            <a:schemeClr val="lt1"/>
+          </a:fontRef>
+        </p:style>
+        <p:txBody>
+          <a:bodyPr rtlCol="0" anchor="ctr"/>
+          <a:lstStyle/>
+          <a:p>
+            <a:pPr algn="ctr"/>
+            <a:endParaRPr/>
+          </a:p>
+        </p:txBody>
+      </p:sp>
+      <p:sp>
+        <p:nvSpPr>
+          <p:cNvPr id="17432" name="Rectangle 17431"/>
+          <p:cNvSpPr/>
+          <p:nvPr/>
+        </p:nvSpPr>
+        <p:spPr>
+          <a:xfrm>
+            <a:off x="7982712" y="4700016"/>
+            <a:ext cx="109728" cy="109728"/>
+          </a:xfrm>
+          <a:prstGeom prst="rect">
+            <a:avLst/>
+          </a:prstGeom>
+          <a:solidFill>
+            <a:srgbClr val="2E8B57"/>
+          </a:solidFill>
+          <a:ln>
+            <a:noFill/>
+          </a:ln>
+          <a:effectLst/>
+        </p:spPr>
+        <p:style>
+          <a:lnRef idx="1">
+            <a:schemeClr val="accent1"/>
+          </a:lnRef>
+          <a:fillRef idx="3">
+            <a:schemeClr val="accent1"/>
+          </a:fillRef>
+          <a:effectRef idx="2">
+            <a:schemeClr val="accent1"/>
+          </a:effectRef>
+          <a:fontRef idx="minor">
+            <a:schemeClr val="lt1"/>
+          </a:fontRef>
+        </p:style>
+        <p:txBody>
+          <a:bodyPr rtlCol="0" anchor="ctr"/>
+          <a:lstStyle/>
+          <a:p>
+            <a:pPr algn="ctr"/>
+            <a:endParaRPr/>
+          </a:p>
+        </p:txBody>
+      </p:sp>
+      <p:sp>
+        <p:nvSpPr>
+          <p:cNvPr id="17433" name="TextBox 17432"/>
+          <p:cNvSpPr txBox="1"/>
+          <p:nvPr/>
+        </p:nvSpPr>
+        <p:spPr>
+          <a:xfrm>
+            <a:off x="8202168" y="4645152"/>
+            <a:ext cx="3163823" cy="184666"/>
+          </a:xfrm>
+          <a:prstGeom prst="rect">
+            <a:avLst/>
+          </a:prstGeom>
+          <a:noFill/>
+        </p:spPr>
+        <p:txBody>
+          <a:bodyPr wrap="square" lIns="0" tIns="0" rIns="0" bIns="0" anchor="t">
+            <a:spAutoFit/>
+          </a:bodyPr>
+          <a:lstStyle/>
+          <a:p>
+            <a:pPr algn="l">
+              <a:lnSpc>
+                <a:spcPct val="100000"/>
+              </a:lnSpc>
+            </a:pPr>
+            <a:r>
+              <a:rPr sz="1200" b="1" i="0" dirty="0">
+                <a:solidFill>
+                  <a:srgbClr val="1F3864"/>
+                </a:solidFill>
+                <a:latin typeface="Calibri"/>
+              </a:rPr>
+              <a:t>DevOps &amp; Scalability</a:t>
+            </a:r>
+          </a:p>
+        </p:txBody>
+      </p:sp>
+      <p:sp>
+        <p:nvSpPr>
+          <p:cNvPr id="17434" name="TextBox 17433"/>
+          <p:cNvSpPr txBox="1"/>
+          <p:nvPr/>
+        </p:nvSpPr>
+        <p:spPr>
+          <a:xfrm>
+            <a:off x="8001000" y="4956048"/>
+            <a:ext cx="3383279" cy="984116"/>
+          </a:xfrm>
+          <a:prstGeom prst="rect">
+            <a:avLst/>
+          </a:prstGeom>
+          <a:noFill/>
+        </p:spPr>
+        <p:txBody>
+          <a:bodyPr wrap="square" lIns="0" tIns="0" rIns="0" bIns="0">
+            <a:spAutoFit/>
+          </a:bodyPr>
+          <a:lstStyle/>
+          <a:p>
+            <a:pPr>
+              <a:lnSpc>
+                <a:spcPct val="105000"/>
+              </a:lnSpc>
+              <a:spcAft>
+                <a:spcPts val="200"/>
+              </a:spcAft>
+            </a:pPr>
+            <a:r>
+              <a:rPr sz="1100" dirty="0">
+                <a:solidFill>
+                  <a:srgbClr val="222A33"/>
+                </a:solidFill>
+                <a:latin typeface="Calibri"/>
+              </a:rPr>
+              <a:t>•  Docker containers orchestrated with Kubernetes</a:t>
+            </a:r>
+          </a:p>
+          <a:p>
+            <a:pPr>
+              <a:lnSpc>
+                <a:spcPct val="105000"/>
+              </a:lnSpc>
+              <a:spcAft>
+                <a:spcPts val="200"/>
+              </a:spcAft>
+            </a:pPr>
+            <a:r>
+              <a:rPr sz="1100" dirty="0">
+                <a:solidFill>
+                  <a:srgbClr val="222A33"/>
+                </a:solidFill>
+                <a:latin typeface="Calibri"/>
+              </a:rPr>
+              <a:t>•  CI/CD via GitHub Actions; blue-green deployments</a:t>
+            </a:r>
+          </a:p>
+          <a:p>
+            <a:pPr>
+              <a:lnSpc>
+                <a:spcPct val="105000"/>
+              </a:lnSpc>
+              <a:spcAft>
+                <a:spcPts val="200"/>
+              </a:spcAft>
+            </a:pPr>
+            <a:r>
+              <a:rPr sz="1100" dirty="0">
+                <a:solidFill>
+                  <a:srgbClr val="222A33"/>
+                </a:solidFill>
+                <a:latin typeface="Calibri"/>
+              </a:rPr>
+              <a:t>•  Hosted on AWS / NIC Cloud with auto-scaling groups</a:t>
+            </a:r>
+          </a:p>
+          <a:p>
+            <a:pPr>
+              <a:lnSpc>
+                <a:spcPct val="105000"/>
+              </a:lnSpc>
+              <a:spcAft>
+                <a:spcPts val="200"/>
+              </a:spcAft>
+            </a:pPr>
+            <a:r>
+              <a:rPr sz="1100" dirty="0">
+                <a:solidFill>
+                  <a:srgbClr val="222A33"/>
+                </a:solidFill>
+                <a:latin typeface="Calibri"/>
+              </a:rPr>
+              <a:t>•  Prometheus + Grafana for monitoring &amp; alerting</a:t>
+            </a:r>
+          </a:p>
+          <a:p>
+            <a:pPr>
+              <a:lnSpc>
+                <a:spcPct val="105000"/>
+              </a:lnSpc>
+              <a:spcAft>
+                <a:spcPts val="200"/>
+              </a:spcAft>
+            </a:pPr>
+            <a:r>
+              <a:rPr sz="1100" dirty="0">
+                <a:solidFill>
+                  <a:srgbClr val="222A33"/>
+                </a:solidFill>
+                <a:latin typeface="Calibri"/>
+              </a:rPr>
+              <a:t>•  Load-tested for 50,000+ concurrent users</a:t>
+            </a:r>
+          </a:p>
+        </p:txBody>
+      </p:sp>
     </p:spTree>
   </p:cSld>
   <p:clrMapOvr>
@@ -7714,196 +9601,7 @@
                 <a:ea typeface="ＭＳ Ｐゴシック" pitchFamily="1" charset="-128"/>
                 <a:cs typeface="Times New Roman" panose="02020603050405020304" pitchFamily="18" charset="0"/>
               </a:rPr>
-              <a:t>FEASIBILITY AND VIABILITY</a:t>
-            </a:r>
-          </a:p>
-        </p:txBody>
-      </p:sp>
-      <p:sp>
-        <p:nvSpPr>
-          <p:cNvPr id="17410" name="TextBox 8"/>
-          <p:cNvSpPr txBox="1">
-            <a:spLocks noChangeArrowheads="1"/>
-          </p:cNvSpPr>
-          <p:nvPr/>
-        </p:nvSpPr>
-        <p:spPr bwMode="auto">
-          <a:xfrm>
-            <a:off x="609600" y="1188720"/>
-            <a:ext cx="9385300" cy="1828800"/>
-          </a:xfrm>
-          <a:prstGeom prst="rect">
-            <a:avLst/>
-          </a:prstGeom>
-          <a:noFill/>
-          <a:ln w="9525">
-            <a:noFill/>
-            <a:miter lim="800000"/>
-            <a:headEnd/>
-            <a:tailEnd/>
-          </a:ln>
-        </p:spPr>
-        <p:txBody>
-          <a:bodyPr wrap="square">
-            <a:spAutoFit/>
-          </a:bodyPr>
-          <a:lstStyle/>
-          <a:p>
-            <a:pPr marL="342900" marR="0" lvl="0" indent="-342900" algn="just" defTabSz="457200" rtl="0" eaLnBrk="1" fontAlgn="base" latinLnBrk="0" hangingPunct="1">
-              <a:lnSpc>
-                <a:spcPct val="100000"/>
-              </a:lnSpc>
-              <a:spcBef>
-                <a:spcPct val="0"/>
-              </a:spcBef>
-              <a:spcAft>
-                <a:spcPct val="0"/>
-              </a:spcAft>
-              <a:buClrTx/>
-              <a:buSzTx/>
-              <a:buFont typeface="Arial" panose="020B0604020202020204" pitchFamily="34" charset="0"/>
-              <a:buChar char="•"/>
-              <a:tabLst/>
-              <a:defRPr/>
-            </a:pPr>
-            <a:r>
-              <a:rPr lang="en-US" sz="1300" dirty="0">
-                <a:solidFill>
-                  <a:prstClr val="black"/>
-                </a:solidFill>
-                <a:latin typeface="Arial" pitchFamily="34" charset="0"/>
-                <a:cs typeface="Arial" pitchFamily="34" charset="0"/>
-              </a:rPr>
-              <a:t>Built entirely on proven, freely available technology (React, FastAPI, PostgreSQL, open-weight LLMs); modular pipeline lets us ship text-format generation first and layer on video/infographic next</a:t>
-            </a:r>
-            <a:endParaRPr kumimoji="0" lang="en-US" sz="1800" b="0" i="0" u="none" strike="noStrike" kern="1200" cap="none" spc="0" normalizeH="0" baseline="0" noProof="0" dirty="0">
-              <a:ln>
-                <a:noFill/>
-              </a:ln>
-              <a:solidFill>
-                <a:prstClr val="black"/>
-              </a:solidFill>
-              <a:effectLst/>
-              <a:uLnTx/>
-              <a:uFillTx/>
-              <a:latin typeface="Arial" pitchFamily="34" charset="0"/>
-              <a:ea typeface="ＭＳ Ｐゴシック" pitchFamily="1" charset="-128"/>
-              <a:cs typeface="Arial" pitchFamily="34" charset="0"/>
-            </a:endParaRPr>
-          </a:p>
-          <a:p>
-            <a:pPr marL="342900" marR="0" lvl="0" indent="-342900" algn="just" defTabSz="457200" rtl="0" eaLnBrk="1" fontAlgn="base" latinLnBrk="0" hangingPunct="1">
-              <a:lnSpc>
-                <a:spcPct val="100000"/>
-              </a:lnSpc>
-              <a:spcBef>
-                <a:spcPct val="0"/>
-              </a:spcBef>
-              <a:spcAft>
-                <a:spcPct val="0"/>
-              </a:spcAft>
-              <a:buClrTx/>
-              <a:buSzTx/>
-              <a:buFont typeface="Arial" panose="020B0604020202020204" pitchFamily="34" charset="0"/>
-              <a:buChar char="•"/>
-              <a:tabLst/>
-              <a:defRPr/>
-            </a:pPr>
-            <a:r>
-              <a:rPr lang="en-US" sz="1300" dirty="0">
-                <a:solidFill>
-                  <a:prstClr val="black"/>
-                </a:solidFill>
-                <a:latin typeface="Arial" pitchFamily="34" charset="0"/>
-                <a:cs typeface="Arial" pitchFamily="34" charset="0"/>
-              </a:rPr>
-              <a:t>Regulatory: aligned with govt. data-classification &amp; on-prem hosting norms  |  DPDP Act 2023-compliant handling of personal data  |  role-based access enforces least-privilege exposure</a:t>
-            </a:r>
-            <a:endParaRPr kumimoji="0" lang="en-US" sz="1800" b="0" i="0" u="none" strike="noStrike" kern="1200" cap="none" spc="0" normalizeH="0" baseline="0" noProof="0" dirty="0">
-              <a:ln>
-                <a:noFill/>
-              </a:ln>
-              <a:solidFill>
-                <a:prstClr val="black"/>
-              </a:solidFill>
-              <a:effectLst/>
-              <a:uLnTx/>
-              <a:uFillTx/>
-              <a:latin typeface="Arial" pitchFamily="34" charset="0"/>
-              <a:ea typeface="ＭＳ Ｐゴシック" pitchFamily="1" charset="-128"/>
-              <a:cs typeface="Arial" pitchFamily="34" charset="0"/>
-            </a:endParaRPr>
-          </a:p>
-          <a:p>
-            <a:pPr marL="342900" marR="0" lvl="0" indent="-342900" algn="just" defTabSz="457200" rtl="0" eaLnBrk="1" fontAlgn="base" latinLnBrk="0" hangingPunct="1">
-              <a:lnSpc>
-                <a:spcPct val="100000"/>
-              </a:lnSpc>
-              <a:spcBef>
-                <a:spcPct val="0"/>
-              </a:spcBef>
-              <a:spcAft>
-                <a:spcPct val="0"/>
-              </a:spcAft>
-              <a:buClrTx/>
-              <a:buSzTx/>
-              <a:buFont typeface="Arial" panose="020B0604020202020204" pitchFamily="34" charset="0"/>
-              <a:buChar char="•"/>
-              <a:tabLst/>
-              <a:defRPr/>
-            </a:pPr>
-            <a:r>
-              <a:rPr lang="en-US" sz="1300" dirty="0">
-                <a:solidFill>
-                  <a:prstClr val="black"/>
-                </a:solidFill>
-                <a:latin typeface="Arial" pitchFamily="34" charset="0"/>
-                <a:cs typeface="Arial" pitchFamily="34" charset="0"/>
-              </a:rPr>
-              <a:t>Economic: low opex via self-hosted open-weight models vs. paid APIs  |  tiered licensing (departmental self-host or managed SaaS)  |  central govt. cybersecurity/communication grant potential</a:t>
-            </a:r>
-            <a:endParaRPr kumimoji="0" lang="en-US" sz="1800" b="0" i="0" u="none" strike="noStrike" kern="1200" cap="none" spc="0" normalizeH="0" baseline="0" noProof="0" dirty="0">
-              <a:ln>
-                <a:noFill/>
-              </a:ln>
-              <a:solidFill>
-                <a:prstClr val="black"/>
-              </a:solidFill>
-              <a:effectLst/>
-              <a:uLnTx/>
-              <a:uFillTx/>
-              <a:latin typeface="Arial" pitchFamily="34" charset="0"/>
-              <a:ea typeface="ＭＳ Ｐゴシック" pitchFamily="1" charset="-128"/>
-              <a:cs typeface="Arial" pitchFamily="34" charset="0"/>
-            </a:endParaRPr>
-          </a:p>
-          <a:p>
-            <a:pPr marL="342900" marR="0" lvl="0" indent="-342900" algn="just" defTabSz="457200" rtl="0" eaLnBrk="1" fontAlgn="base" latinLnBrk="0" hangingPunct="1">
-              <a:lnSpc>
-                <a:spcPct val="100000"/>
-              </a:lnSpc>
-              <a:spcBef>
-                <a:spcPct val="0"/>
-              </a:spcBef>
-              <a:spcAft>
-                <a:spcPct val="0"/>
-              </a:spcAft>
-              <a:buClrTx/>
-              <a:buSzTx/>
-              <a:buFont typeface="Arial" panose="020B0604020202020204" pitchFamily="34" charset="0"/>
-              <a:buChar char="•"/>
-              <a:tabLst/>
-              <a:defRPr/>
-            </a:pPr>
-            <a:r>
-              <a:rPr lang="en-US" sz="1300" dirty="0">
-                <a:solidFill>
-                  <a:prstClr val="black"/>
-                </a:solidFill>
-                <a:latin typeface="Arial" pitchFamily="34" charset="0"/>
-                <a:cs typeface="Arial" pitchFamily="34" charset="0"/>
-              </a:rPr>
-              <a:t>Key risks identified, with a mitigation strategy for each:</a:t>
+              <a:t>IMPACT AND BENEFITS</a:t>
             </a:r>
           </a:p>
         </p:txBody>
@@ -8029,7 +9727,7 @@
               <a:defRPr/>
             </a:pPr>
             <a:r>
-              <a:rPr kumimoji="0" lang="en-US" sz="1200" b="0" i="0" u="none" strike="noStrike" kern="1200" cap="none" spc="0" normalizeH="0" baseline="0" noProof="0">
+              <a:rPr kumimoji="0" lang="en-US" sz="1200" b="0" i="0" u="none" strike="noStrike" kern="1200" cap="none" spc="0" normalizeH="0" baseline="0" noProof="0" dirty="0">
                 <a:ln>
                   <a:noFill/>
                 </a:ln>
@@ -8043,22 +9741,8 @@
                 <a:ea typeface="+mn-ea"/>
                 <a:cs typeface="+mn-cs"/>
               </a:rPr>
-              <a:t>@SIH Idea submission- Template</a:t>
-            </a:r>
-            <a:endParaRPr kumimoji="0" lang="en-US" sz="1200" b="0" i="0" u="none" strike="noStrike" kern="1200" cap="none" spc="0" normalizeH="0" baseline="0" noProof="0" dirty="0">
-              <a:ln>
-                <a:noFill/>
-              </a:ln>
-              <a:solidFill>
-                <a:prstClr val="white"/>
-              </a:solidFill>
-              <a:effectLst/>
-              <a:uLnTx/>
-              <a:uFillTx/>
-              <a:latin typeface="TradeGothic"/>
-              <a:ea typeface="+mn-ea"/>
-              <a:cs typeface="+mn-cs"/>
-            </a:endParaRPr>
+              <a:t>@SIH Idea submission</a:t>
+            </a:r>
           </a:p>
         </p:txBody>
       </p:sp>
@@ -8080,7 +9764,7 @@
         <p:spPr>
           <a:xfrm>
             <a:off x="329773" y="252246"/>
-            <a:ext cx="1251857" cy="807334"/>
+            <a:ext cx="1607182" cy="807334"/>
           </a:xfrm>
           <a:prstGeom prst="ellipse">
             <a:avLst/>
@@ -8106,7 +9790,10 @@
           <a:p>
             <a:pPr algn="ctr"/>
             <a:r>
-              <a:rPr lang="en-US" sz="1000" dirty="0"/>
+              <a:rPr lang="en-US" b="1" dirty="0">
+                <a:latin typeface="Arial" panose="020B0604020202020204" pitchFamily="34" charset="0"/>
+                <a:cs typeface="Arial" panose="020B0604020202020204" pitchFamily="34" charset="0"/>
+              </a:rPr>
               <a:t>Team Invictus</a:t>
             </a:r>
             <a:endParaRPr lang="en-IN" dirty="0"/>
@@ -8145,14 +9832,14 @@
       </p:pic>
       <p:sp>
         <p:nvSpPr>
-          <p:cNvPr id="17411" name="TextBox 17410"/>
+          <p:cNvPr id="17410" name="TextBox 17409"/>
           <p:cNvSpPr txBox="1"/>
           <p:nvPr/>
         </p:nvSpPr>
         <p:spPr>
           <a:xfrm>
-            <a:off x="822960" y="3063240"/>
-            <a:ext cx="4160520" cy="274320"/>
+            <a:off x="411480" y="1847088"/>
+            <a:ext cx="7315200" cy="276999"/>
           </a:xfrm>
           <a:prstGeom prst="rect">
             <a:avLst/>
@@ -8160,24 +9847,645 @@
           <a:noFill/>
         </p:spPr>
         <p:txBody>
-          <a:bodyPr wrap="square" lIns="0" tIns="0" rIns="0" bIns="0" anchor="ctr">
+          <a:bodyPr wrap="square" lIns="0" tIns="0" rIns="0" bIns="0" anchor="t">
             <a:spAutoFit/>
           </a:bodyPr>
           <a:lstStyle/>
           <a:p>
-            <a:pPr algn="ctr"/>
-            <a:r>
-              <a:rPr sz="1200" b="1">
-                <a:solidFill>
-                  <a:srgbClr val="B03A2E"/>
+            <a:pPr algn="l">
+              <a:lnSpc>
+                <a:spcPct val="100000"/>
+              </a:lnSpc>
+            </a:pPr>
+            <a:r>
+              <a:rPr b="1" i="0" dirty="0">
+                <a:solidFill>
+                  <a:srgbClr val="1F3864"/>
                 </a:solidFill>
                 <a:latin typeface="Calibri"/>
               </a:rPr>
-              <a:t>Risk</a:t>
-            </a:r>
-          </a:p>
-        </p:txBody>
-      </p:sp>
+              <a:t>Stakeholder Impact</a:t>
+            </a:r>
+          </a:p>
+        </p:txBody>
+      </p:sp>
+      <p:graphicFrame>
+        <p:nvGraphicFramePr>
+          <p:cNvPr id="17411" name="Table 17410"/>
+          <p:cNvGraphicFramePr>
+            <a:graphicFrameLocks noGrp="1"/>
+          </p:cNvGraphicFramePr>
+          <p:nvPr>
+            <p:extLst>
+              <p:ext uri="{D42A27DB-BD31-4B8C-83A1-F6EECF244321}">
+                <p14:modId xmlns:p14="http://schemas.microsoft.com/office/powerpoint/2010/main" val="642635646"/>
+              </p:ext>
+            </p:extLst>
+          </p:nvPr>
+        </p:nvGraphicFramePr>
+        <p:xfrm>
+          <a:off x="411480" y="2176272"/>
+          <a:ext cx="11338560" cy="1905000"/>
+        </p:xfrm>
+        <a:graphic>
+          <a:graphicData uri="http://schemas.openxmlformats.org/drawingml/2006/table">
+            <a:tbl>
+              <a:tblPr firstRow="1" bandRow="1">
+                <a:tableStyleId>{5C22544A-7EE6-4342-B048-85BDC9FD1C3A}</a:tableStyleId>
+              </a:tblPr>
+              <a:tblGrid>
+                <a:gridCol w="2011680">
+                  <a:extLst>
+                    <a:ext uri="{9D8B030D-6E8A-4147-A177-3AD203B41FA5}">
+                      <a16:colId xmlns:a16="http://schemas.microsoft.com/office/drawing/2014/main" val="20000"/>
+                    </a:ext>
+                  </a:extLst>
+                </a:gridCol>
+                <a:gridCol w="3291840">
+                  <a:extLst>
+                    <a:ext uri="{9D8B030D-6E8A-4147-A177-3AD203B41FA5}">
+                      <a16:colId xmlns:a16="http://schemas.microsoft.com/office/drawing/2014/main" val="20001"/>
+                    </a:ext>
+                  </a:extLst>
+                </a:gridCol>
+                <a:gridCol w="3931920">
+                  <a:extLst>
+                    <a:ext uri="{9D8B030D-6E8A-4147-A177-3AD203B41FA5}">
+                      <a16:colId xmlns:a16="http://schemas.microsoft.com/office/drawing/2014/main" val="20002"/>
+                    </a:ext>
+                  </a:extLst>
+                </a:gridCol>
+                <a:gridCol w="2103120">
+                  <a:extLst>
+                    <a:ext uri="{9D8B030D-6E8A-4147-A177-3AD203B41FA5}">
+                      <a16:colId xmlns:a16="http://schemas.microsoft.com/office/drawing/2014/main" val="20003"/>
+                    </a:ext>
+                  </a:extLst>
+                </a:gridCol>
+              </a:tblGrid>
+              <a:tr h="365760">
+                <a:tc>
+                  <a:txBody>
+                    <a:bodyPr/>
+                    <a:lstStyle/>
+                    <a:p>
+                      <a:pPr algn="l"/>
+                      <a:r>
+                        <a:rPr sz="1200" b="1">
+                          <a:solidFill>
+                            <a:srgbClr val="FFFFFF"/>
+                          </a:solidFill>
+                        </a:rPr>
+                        <a:t>Stakeholder</a:t>
+                      </a:r>
+                    </a:p>
+                  </a:txBody>
+                  <a:tcPr marL="76200" marR="50800" marT="38100" marB="38100">
+                    <a:solidFill>
+                      <a:srgbClr val="1F3864"/>
+                    </a:solidFill>
+                  </a:tcPr>
+                </a:tc>
+                <a:tc>
+                  <a:txBody>
+                    <a:bodyPr/>
+                    <a:lstStyle/>
+                    <a:p>
+                      <a:pPr algn="l"/>
+                      <a:r>
+                        <a:rPr sz="1200" b="1">
+                          <a:solidFill>
+                            <a:srgbClr val="FFFFFF"/>
+                          </a:solidFill>
+                        </a:rPr>
+                        <a:t>Pain Point Today</a:t>
+                      </a:r>
+                    </a:p>
+                  </a:txBody>
+                  <a:tcPr marL="76200" marR="50800" marT="38100" marB="38100">
+                    <a:solidFill>
+                      <a:srgbClr val="1F3864"/>
+                    </a:solidFill>
+                  </a:tcPr>
+                </a:tc>
+                <a:tc>
+                  <a:txBody>
+                    <a:bodyPr/>
+                    <a:lstStyle/>
+                    <a:p>
+                      <a:pPr algn="l"/>
+                      <a:r>
+                        <a:rPr sz="1200" b="1">
+                          <a:solidFill>
+                            <a:srgbClr val="FFFFFF"/>
+                          </a:solidFill>
+                        </a:rPr>
+                        <a:t>Impact with SKILL-SETU</a:t>
+                      </a:r>
+                    </a:p>
+                  </a:txBody>
+                  <a:tcPr marL="76200" marR="50800" marT="38100" marB="38100">
+                    <a:solidFill>
+                      <a:srgbClr val="1F3864"/>
+                    </a:solidFill>
+                  </a:tcPr>
+                </a:tc>
+                <a:tc>
+                  <a:txBody>
+                    <a:bodyPr/>
+                    <a:lstStyle/>
+                    <a:p>
+                      <a:pPr algn="l"/>
+                      <a:r>
+                        <a:rPr sz="1200" b="1">
+                          <a:solidFill>
+                            <a:srgbClr val="FFFFFF"/>
+                          </a:solidFill>
+                        </a:rPr>
+                        <a:t>Est. KPI</a:t>
+                      </a:r>
+                    </a:p>
+                  </a:txBody>
+                  <a:tcPr marL="76200" marR="50800" marT="38100" marB="38100">
+                    <a:solidFill>
+                      <a:srgbClr val="1F3864"/>
+                    </a:solidFill>
+                  </a:tcPr>
+                </a:tc>
+                <a:extLst>
+                  <a:ext uri="{0D108BD9-81ED-4DB2-BD59-A6C34878D82A}">
+                    <a16:rowId xmlns:a16="http://schemas.microsoft.com/office/drawing/2014/main" val="10000"/>
+                  </a:ext>
+                </a:extLst>
+              </a:tr>
+              <a:tr h="365760">
+                <a:tc>
+                  <a:txBody>
+                    <a:bodyPr/>
+                    <a:lstStyle/>
+                    <a:p>
+                      <a:pPr>
+                        <a:lnSpc>
+                          <a:spcPct val="100000"/>
+                        </a:lnSpc>
+                      </a:pPr>
+                      <a:r>
+                        <a:rPr sz="1200">
+                          <a:solidFill>
+                            <a:srgbClr val="222A33"/>
+                          </a:solidFill>
+                        </a:rPr>
+                        <a:t>Students</a:t>
+                      </a:r>
+                    </a:p>
+                  </a:txBody>
+                  <a:tcPr marL="76200" marR="50800" marT="38100" marB="38100">
+                    <a:solidFill>
+                      <a:srgbClr val="FFFFFF"/>
+                    </a:solidFill>
+                  </a:tcPr>
+                </a:tc>
+                <a:tc>
+                  <a:txBody>
+                    <a:bodyPr/>
+                    <a:lstStyle/>
+                    <a:p>
+                      <a:pPr>
+                        <a:lnSpc>
+                          <a:spcPct val="100000"/>
+                        </a:lnSpc>
+                      </a:pPr>
+                      <a:r>
+                        <a:rPr sz="1200">
+                          <a:solidFill>
+                            <a:srgbClr val="222A33"/>
+                          </a:solidFill>
+                        </a:rPr>
+                        <a:t>No clarity on industry-required skills</a:t>
+                      </a:r>
+                    </a:p>
+                  </a:txBody>
+                  <a:tcPr marL="76200" marR="50800" marT="38100" marB="38100">
+                    <a:solidFill>
+                      <a:srgbClr val="FFFFFF"/>
+                    </a:solidFill>
+                  </a:tcPr>
+                </a:tc>
+                <a:tc>
+                  <a:txBody>
+                    <a:bodyPr/>
+                    <a:lstStyle/>
+                    <a:p>
+                      <a:pPr>
+                        <a:lnSpc>
+                          <a:spcPct val="100000"/>
+                        </a:lnSpc>
+                      </a:pPr>
+                      <a:r>
+                        <a:rPr sz="1200">
+                          <a:solidFill>
+                            <a:srgbClr val="222A33"/>
+                          </a:solidFill>
+                        </a:rPr>
+                        <a:t>Personalised skill-gap report + internship matches</a:t>
+                      </a:r>
+                    </a:p>
+                  </a:txBody>
+                  <a:tcPr marL="76200" marR="50800" marT="38100" marB="38100">
+                    <a:solidFill>
+                      <a:srgbClr val="FFFFFF"/>
+                    </a:solidFill>
+                  </a:tcPr>
+                </a:tc>
+                <a:tc>
+                  <a:txBody>
+                    <a:bodyPr/>
+                    <a:lstStyle/>
+                    <a:p>
+                      <a:pPr marL="0" marR="0" lvl="0" indent="0" algn="l" defTabSz="457200" rtl="0" eaLnBrk="1" fontAlgn="auto" latinLnBrk="0" hangingPunct="1">
+                        <a:lnSpc>
+                          <a:spcPct val="100000"/>
+                        </a:lnSpc>
+                        <a:spcBef>
+                          <a:spcPts val="0"/>
+                        </a:spcBef>
+                        <a:spcAft>
+                          <a:spcPts val="0"/>
+                        </a:spcAft>
+                        <a:buClrTx/>
+                        <a:buSzTx/>
+                        <a:buFontTx/>
+                        <a:buNone/>
+                        <a:tabLst/>
+                        <a:defRPr/>
+                      </a:pPr>
+                      <a:r>
+                        <a:rPr lang="en-IN" sz="1200" dirty="0">
+                          <a:solidFill>
+                            <a:schemeClr val="tx1"/>
+                          </a:solidFill>
+                        </a:rPr>
+                        <a:t>Personalized skill-based internship matching</a:t>
+                      </a:r>
+                    </a:p>
+                  </a:txBody>
+                  <a:tcPr marL="76200" marR="50800" marT="38100" marB="38100">
+                    <a:solidFill>
+                      <a:srgbClr val="FFFFFF"/>
+                    </a:solidFill>
+                  </a:tcPr>
+                </a:tc>
+                <a:extLst>
+                  <a:ext uri="{0D108BD9-81ED-4DB2-BD59-A6C34878D82A}">
+                    <a16:rowId xmlns:a16="http://schemas.microsoft.com/office/drawing/2014/main" val="10001"/>
+                  </a:ext>
+                </a:extLst>
+              </a:tr>
+              <a:tr h="365760">
+                <a:tc>
+                  <a:txBody>
+                    <a:bodyPr/>
+                    <a:lstStyle/>
+                    <a:p>
+                      <a:pPr>
+                        <a:lnSpc>
+                          <a:spcPct val="100000"/>
+                        </a:lnSpc>
+                      </a:pPr>
+                      <a:r>
+                        <a:rPr sz="1200">
+                          <a:solidFill>
+                            <a:srgbClr val="222A33"/>
+                          </a:solidFill>
+                        </a:rPr>
+                        <a:t>Industry / Recruiters</a:t>
+                      </a:r>
+                    </a:p>
+                  </a:txBody>
+                  <a:tcPr marL="76200" marR="50800" marT="38100" marB="38100">
+                    <a:solidFill>
+                      <a:srgbClr val="F4F7FA"/>
+                    </a:solidFill>
+                  </a:tcPr>
+                </a:tc>
+                <a:tc>
+                  <a:txBody>
+                    <a:bodyPr/>
+                    <a:lstStyle/>
+                    <a:p>
+                      <a:pPr>
+                        <a:lnSpc>
+                          <a:spcPct val="100000"/>
+                        </a:lnSpc>
+                      </a:pPr>
+                      <a:r>
+                        <a:rPr sz="1200">
+                          <a:solidFill>
+                            <a:srgbClr val="222A33"/>
+                          </a:solidFill>
+                        </a:rPr>
+                        <a:t>Hard to find verified, job-ready talent</a:t>
+                      </a:r>
+                    </a:p>
+                  </a:txBody>
+                  <a:tcPr marL="76200" marR="50800" marT="38100" marB="38100">
+                    <a:solidFill>
+                      <a:srgbClr val="F4F7FA"/>
+                    </a:solidFill>
+                  </a:tcPr>
+                </a:tc>
+                <a:tc>
+                  <a:txBody>
+                    <a:bodyPr/>
+                    <a:lstStyle/>
+                    <a:p>
+                      <a:pPr>
+                        <a:lnSpc>
+                          <a:spcPct val="100000"/>
+                        </a:lnSpc>
+                      </a:pPr>
+                      <a:r>
+                        <a:rPr sz="1200">
+                          <a:solidFill>
+                            <a:srgbClr val="222A33"/>
+                          </a:solidFill>
+                        </a:rPr>
+                        <a:t>Ranked candidate shortlist by competency score</a:t>
+                      </a:r>
+                    </a:p>
+                  </a:txBody>
+                  <a:tcPr marL="76200" marR="50800" marT="38100" marB="38100">
+                    <a:solidFill>
+                      <a:srgbClr val="F4F7FA"/>
+                    </a:solidFill>
+                  </a:tcPr>
+                </a:tc>
+                <a:tc>
+                  <a:txBody>
+                    <a:bodyPr/>
+                    <a:lstStyle/>
+                    <a:p>
+                      <a:pPr>
+                        <a:lnSpc>
+                          <a:spcPct val="100000"/>
+                        </a:lnSpc>
+                      </a:pPr>
+                      <a:r>
+                        <a:rPr sz="1200">
+                          <a:solidFill>
+                            <a:srgbClr val="222A33"/>
+                          </a:solidFill>
+                        </a:rPr>
+                        <a:t>30% lower screening time</a:t>
+                      </a:r>
+                    </a:p>
+                  </a:txBody>
+                  <a:tcPr marL="76200" marR="50800" marT="38100" marB="38100">
+                    <a:solidFill>
+                      <a:srgbClr val="F4F7FA"/>
+                    </a:solidFill>
+                  </a:tcPr>
+                </a:tc>
+                <a:extLst>
+                  <a:ext uri="{0D108BD9-81ED-4DB2-BD59-A6C34878D82A}">
+                    <a16:rowId xmlns:a16="http://schemas.microsoft.com/office/drawing/2014/main" val="10002"/>
+                  </a:ext>
+                </a:extLst>
+              </a:tr>
+              <a:tr h="365760">
+                <a:tc>
+                  <a:txBody>
+                    <a:bodyPr/>
+                    <a:lstStyle/>
+                    <a:p>
+                      <a:pPr>
+                        <a:lnSpc>
+                          <a:spcPct val="100000"/>
+                        </a:lnSpc>
+                      </a:pPr>
+                      <a:r>
+                        <a:rPr sz="1200">
+                          <a:solidFill>
+                            <a:srgbClr val="222A33"/>
+                          </a:solidFill>
+                        </a:rPr>
+                        <a:t>Academia / Faculty</a:t>
+                      </a:r>
+                    </a:p>
+                  </a:txBody>
+                  <a:tcPr marL="76200" marR="50800" marT="38100" marB="38100">
+                    <a:solidFill>
+                      <a:srgbClr val="FFFFFF"/>
+                    </a:solidFill>
+                  </a:tcPr>
+                </a:tc>
+                <a:tc>
+                  <a:txBody>
+                    <a:bodyPr/>
+                    <a:lstStyle/>
+                    <a:p>
+                      <a:pPr>
+                        <a:lnSpc>
+                          <a:spcPct val="100000"/>
+                        </a:lnSpc>
+                      </a:pPr>
+                      <a:r>
+                        <a:rPr lang="en-IN" sz="1200" dirty="0">
+                          <a:solidFill>
+                            <a:srgbClr val="222A33"/>
+                          </a:solidFill>
+                        </a:rPr>
+                        <a:t>Limited</a:t>
+                      </a:r>
+                      <a:r>
+                        <a:rPr sz="1200" dirty="0">
+                          <a:solidFill>
+                            <a:srgbClr val="222A33"/>
+                          </a:solidFill>
+                        </a:rPr>
+                        <a:t> visibility into placement or curriculum gaps</a:t>
+                      </a:r>
+                    </a:p>
+                  </a:txBody>
+                  <a:tcPr marL="76200" marR="50800" marT="38100" marB="38100">
+                    <a:solidFill>
+                      <a:srgbClr val="FFFFFF"/>
+                    </a:solidFill>
+                  </a:tcPr>
+                </a:tc>
+                <a:tc>
+                  <a:txBody>
+                    <a:bodyPr/>
+                    <a:lstStyle/>
+                    <a:p>
+                      <a:pPr>
+                        <a:lnSpc>
+                          <a:spcPct val="100000"/>
+                        </a:lnSpc>
+                      </a:pPr>
+                      <a:r>
+                        <a:rPr sz="1200">
+                          <a:solidFill>
+                            <a:srgbClr val="222A33"/>
+                          </a:solidFill>
+                        </a:rPr>
+                        <a:t>Live curriculum-gap heatmaps &amp; placement dashboard</a:t>
+                      </a:r>
+                    </a:p>
+                  </a:txBody>
+                  <a:tcPr marL="76200" marR="50800" marT="38100" marB="38100">
+                    <a:solidFill>
+                      <a:srgbClr val="FFFFFF"/>
+                    </a:solidFill>
+                  </a:tcPr>
+                </a:tc>
+                <a:tc>
+                  <a:txBody>
+                    <a:bodyPr/>
+                    <a:lstStyle/>
+                    <a:p>
+                      <a:pPr>
+                        <a:lnSpc>
+                          <a:spcPct val="100000"/>
+                        </a:lnSpc>
+                      </a:pPr>
+                      <a:r>
+                        <a:rPr sz="1200">
+                          <a:solidFill>
+                            <a:srgbClr val="222A33"/>
+                          </a:solidFill>
+                        </a:rPr>
+                        <a:t>360° institutional visibility</a:t>
+                      </a:r>
+                    </a:p>
+                  </a:txBody>
+                  <a:tcPr marL="76200" marR="50800" marT="38100" marB="38100">
+                    <a:solidFill>
+                      <a:srgbClr val="FFFFFF"/>
+                    </a:solidFill>
+                  </a:tcPr>
+                </a:tc>
+                <a:extLst>
+                  <a:ext uri="{0D108BD9-81ED-4DB2-BD59-A6C34878D82A}">
+                    <a16:rowId xmlns:a16="http://schemas.microsoft.com/office/drawing/2014/main" val="10003"/>
+                  </a:ext>
+                </a:extLst>
+              </a:tr>
+              <a:tr h="365760">
+                <a:tc>
+                  <a:txBody>
+                    <a:bodyPr/>
+                    <a:lstStyle/>
+                    <a:p>
+                      <a:pPr>
+                        <a:lnSpc>
+                          <a:spcPct val="100000"/>
+                        </a:lnSpc>
+                      </a:pPr>
+                      <a:r>
+                        <a:rPr sz="1200" dirty="0">
+                          <a:solidFill>
+                            <a:srgbClr val="222A33"/>
+                          </a:solidFill>
+                        </a:rPr>
+                        <a:t>Ministry of Ayush</a:t>
+                      </a:r>
+                    </a:p>
+                  </a:txBody>
+                  <a:tcPr marL="76200" marR="50800" marT="38100" marB="38100">
+                    <a:solidFill>
+                      <a:srgbClr val="F4F7FA"/>
+                    </a:solidFill>
+                  </a:tcPr>
+                </a:tc>
+                <a:tc>
+                  <a:txBody>
+                    <a:bodyPr/>
+                    <a:lstStyle/>
+                    <a:p>
+                      <a:pPr>
+                        <a:lnSpc>
+                          <a:spcPct val="100000"/>
+                        </a:lnSpc>
+                      </a:pPr>
+                      <a:r>
+                        <a:rPr sz="1200">
+                          <a:solidFill>
+                            <a:srgbClr val="222A33"/>
+                          </a:solidFill>
+                        </a:rPr>
+                        <a:t>Fragmented, manual skill &amp; placement data</a:t>
+                      </a:r>
+                    </a:p>
+                  </a:txBody>
+                  <a:tcPr marL="76200" marR="50800" marT="38100" marB="38100">
+                    <a:solidFill>
+                      <a:srgbClr val="F4F7FA"/>
+                    </a:solidFill>
+                  </a:tcPr>
+                </a:tc>
+                <a:tc>
+                  <a:txBody>
+                    <a:bodyPr/>
+                    <a:lstStyle/>
+                    <a:p>
+                      <a:pPr>
+                        <a:lnSpc>
+                          <a:spcPct val="100000"/>
+                        </a:lnSpc>
+                      </a:pPr>
+                      <a:r>
+                        <a:rPr sz="1200" dirty="0">
+                          <a:solidFill>
+                            <a:srgbClr val="222A33"/>
+                          </a:solidFill>
+                        </a:rPr>
+                        <a:t>Unified national skill-mapping dataset</a:t>
+                      </a:r>
+                    </a:p>
+                  </a:txBody>
+                  <a:tcPr marL="76200" marR="50800" marT="38100" marB="38100">
+                    <a:solidFill>
+                      <a:srgbClr val="F4F7FA"/>
+                    </a:solidFill>
+                  </a:tcPr>
+                </a:tc>
+                <a:tc>
+                  <a:txBody>
+                    <a:bodyPr/>
+                    <a:lstStyle/>
+                    <a:p>
+                      <a:pPr>
+                        <a:lnSpc>
+                          <a:spcPct val="100000"/>
+                        </a:lnSpc>
+                      </a:pPr>
+                      <a:r>
+                        <a:rPr sz="1200" dirty="0">
+                          <a:solidFill>
+                            <a:srgbClr val="222A33"/>
+                          </a:solidFill>
+                        </a:rPr>
+                        <a:t>1 national data source</a:t>
+                      </a:r>
+                    </a:p>
+                  </a:txBody>
+                  <a:tcPr marL="76200" marR="50800" marT="38100" marB="38100">
+                    <a:solidFill>
+                      <a:srgbClr val="F4F7FA"/>
+                    </a:solidFill>
+                  </a:tcPr>
+                </a:tc>
+                <a:extLst>
+                  <a:ext uri="{0D108BD9-81ED-4DB2-BD59-A6C34878D82A}">
+                    <a16:rowId xmlns:a16="http://schemas.microsoft.com/office/drawing/2014/main" val="10004"/>
+                  </a:ext>
+                </a:extLst>
+              </a:tr>
+            </a:tbl>
+          </a:graphicData>
+        </a:graphic>
+      </p:graphicFrame>
       <p:sp>
         <p:nvSpPr>
           <p:cNvPr id="17412" name="TextBox 17411"/>
@@ -8186,8 +10494,8 @@
         </p:nvSpPr>
         <p:spPr>
           <a:xfrm>
-            <a:off x="5486400" y="3063240"/>
-            <a:ext cx="4160520" cy="274320"/>
+            <a:off x="411480" y="4251960"/>
+            <a:ext cx="5486400" cy="276999"/>
           </a:xfrm>
           <a:prstGeom prst="rect">
             <a:avLst/>
@@ -8195,20 +10503,24 @@
           <a:noFill/>
         </p:spPr>
         <p:txBody>
-          <a:bodyPr wrap="square" lIns="0" tIns="0" rIns="0" bIns="0" anchor="ctr">
+          <a:bodyPr wrap="square" lIns="0" tIns="0" rIns="0" bIns="0" anchor="t">
             <a:spAutoFit/>
           </a:bodyPr>
           <a:lstStyle/>
           <a:p>
-            <a:pPr algn="ctr"/>
-            <a:r>
-              <a:rPr sz="1200" b="1">
-                <a:solidFill>
-                  <a:srgbClr val="0070C0"/>
+            <a:pPr algn="l">
+              <a:lnSpc>
+                <a:spcPct val="100000"/>
+              </a:lnSpc>
+            </a:pPr>
+            <a:r>
+              <a:rPr b="1" i="0" dirty="0">
+                <a:solidFill>
+                  <a:srgbClr val="1F3864"/>
                 </a:solidFill>
                 <a:latin typeface="Calibri"/>
               </a:rPr>
-              <a:t>Mitigation</a:t>
+              <a:t>Key Outcomes</a:t>
             </a:r>
           </a:p>
         </p:txBody>
@@ -8221,14 +10533,16 @@
         </p:nvSpPr>
         <p:spPr>
           <a:xfrm>
-            <a:off x="822960" y="3383280"/>
-            <a:ext cx="4160520" cy="420624"/>
+            <a:off x="411480" y="4572000"/>
+            <a:ext cx="2633472" cy="1234440"/>
           </a:xfrm>
           <a:prstGeom prst="roundRect">
-            <a:avLst/>
+            <a:avLst>
+              <a:gd name="adj" fmla="val 6000"/>
+            </a:avLst>
           </a:prstGeom>
           <a:solidFill>
-            <a:srgbClr val="F6E1DD"/>
+            <a:srgbClr val="1F3864"/>
           </a:solidFill>
           <a:ln>
             <a:noFill/>
@@ -8250,38 +10564,115 @@
           </a:fontRef>
         </p:style>
         <p:txBody>
-          <a:bodyPr wrap="square" lIns="50800" tIns="25400" rIns="50800" bIns="25400" rtlCol="0" anchor="ctr"/>
+          <a:bodyPr rtlCol="0" anchor="ctr"/>
           <a:lstStyle/>
           <a:p>
             <a:pPr algn="ctr"/>
-            <a:r>
-              <a:rPr sz="1100" b="0">
-                <a:solidFill>
-                  <a:srgbClr val="B03A2E"/>
+            <a:endParaRPr/>
+          </a:p>
+        </p:txBody>
+      </p:sp>
+      <p:sp>
+        <p:nvSpPr>
+          <p:cNvPr id="17414" name="TextBox 17413"/>
+          <p:cNvSpPr txBox="1"/>
+          <p:nvPr/>
+        </p:nvSpPr>
+        <p:spPr>
+          <a:xfrm>
+            <a:off x="548640" y="4645152"/>
+            <a:ext cx="2359152" cy="369332"/>
+          </a:xfrm>
+          <a:prstGeom prst="rect">
+            <a:avLst/>
+          </a:prstGeom>
+          <a:noFill/>
+        </p:spPr>
+        <p:txBody>
+          <a:bodyPr wrap="square" lIns="0" tIns="0" rIns="0" bIns="0" anchor="t">
+            <a:spAutoFit/>
+          </a:bodyPr>
+          <a:lstStyle/>
+          <a:p>
+            <a:pPr algn="ctr">
+              <a:lnSpc>
+                <a:spcPct val="100000"/>
+              </a:lnSpc>
+            </a:pPr>
+            <a:r>
+              <a:rPr lang="en-IN" sz="2400" b="1" i="0" dirty="0">
+                <a:solidFill>
+                  <a:srgbClr val="F28C28"/>
                 </a:solidFill>
                 <a:latin typeface="Calibri"/>
               </a:rPr>
-              <a:t>Hallucinated or inaccurate generated content</a:t>
-            </a:r>
-          </a:p>
-        </p:txBody>
-      </p:sp>
-      <p:sp>
-        <p:nvSpPr>
-          <p:cNvPr id="17414" name="Right Arrow 17413"/>
+              <a:t>Skill Based</a:t>
+            </a:r>
+            <a:endParaRPr sz="2400" b="1" i="0" dirty="0">
+              <a:solidFill>
+                <a:srgbClr val="F28C28"/>
+              </a:solidFill>
+              <a:latin typeface="Calibri"/>
+            </a:endParaRPr>
+          </a:p>
+        </p:txBody>
+      </p:sp>
+      <p:sp>
+        <p:nvSpPr>
+          <p:cNvPr id="17415" name="TextBox 17414"/>
+          <p:cNvSpPr txBox="1"/>
+          <p:nvPr/>
+        </p:nvSpPr>
+        <p:spPr>
+          <a:xfrm>
+            <a:off x="502920" y="5213908"/>
+            <a:ext cx="2450591" cy="400110"/>
+          </a:xfrm>
+          <a:prstGeom prst="rect">
+            <a:avLst/>
+          </a:prstGeom>
+          <a:noFill/>
+        </p:spPr>
+        <p:txBody>
+          <a:bodyPr wrap="square" lIns="0" tIns="0" rIns="0" bIns="0">
+            <a:spAutoFit/>
+          </a:bodyPr>
+          <a:lstStyle/>
+          <a:p>
+            <a:pPr algn="ctr">
+              <a:lnSpc>
+                <a:spcPct val="100000"/>
+              </a:lnSpc>
+            </a:pPr>
+            <a:r>
+              <a:rPr lang="en-IN" sz="1300" dirty="0">
+                <a:solidFill>
+                  <a:srgbClr val="FFFFFF"/>
+                </a:solidFill>
+              </a:rPr>
+              <a:t>Personalized skill-based internship matching</a:t>
+            </a:r>
+          </a:p>
+        </p:txBody>
+      </p:sp>
+      <p:sp>
+        <p:nvSpPr>
+          <p:cNvPr id="17416" name="Rounded Rectangle 17415"/>
           <p:cNvSpPr/>
           <p:nvPr/>
         </p:nvSpPr>
         <p:spPr>
           <a:xfrm>
-            <a:off x="5029200" y="3511296"/>
-            <a:ext cx="384048" cy="164592"/>
-          </a:xfrm>
-          <a:prstGeom prst="rightArrow">
-            <a:avLst/>
+            <a:off x="3172968" y="4572000"/>
+            <a:ext cx="2633472" cy="1234440"/>
+          </a:xfrm>
+          <a:prstGeom prst="roundRect">
+            <a:avLst>
+              <a:gd name="adj" fmla="val 6000"/>
+            </a:avLst>
           </a:prstGeom>
           <a:solidFill>
-            <a:srgbClr val="1E2A4A"/>
+            <a:srgbClr val="1F3864"/>
           </a:solidFill>
           <a:ln>
             <a:noFill/>
@@ -8313,20 +10704,114 @@
       </p:sp>
       <p:sp>
         <p:nvSpPr>
-          <p:cNvPr id="17415" name="Rounded Rectangle 17414"/>
+          <p:cNvPr id="17417" name="TextBox 17416"/>
+          <p:cNvSpPr txBox="1"/>
+          <p:nvPr/>
+        </p:nvSpPr>
+        <p:spPr>
+          <a:xfrm>
+            <a:off x="3310128" y="4645152"/>
+            <a:ext cx="2359152" cy="369332"/>
+          </a:xfrm>
+          <a:prstGeom prst="rect">
+            <a:avLst/>
+          </a:prstGeom>
+          <a:noFill/>
+        </p:spPr>
+        <p:txBody>
+          <a:bodyPr wrap="square" lIns="0" tIns="0" rIns="0" bIns="0" anchor="t">
+            <a:spAutoFit/>
+          </a:bodyPr>
+          <a:lstStyle/>
+          <a:p>
+            <a:pPr algn="ctr">
+              <a:lnSpc>
+                <a:spcPct val="100000"/>
+              </a:lnSpc>
+            </a:pPr>
+            <a:r>
+              <a:rPr sz="2400" b="1" i="0" dirty="0">
+                <a:solidFill>
+                  <a:srgbClr val="F28C28"/>
+                </a:solidFill>
+                <a:latin typeface="Calibri"/>
+              </a:rPr>
+              <a:t>360°</a:t>
+            </a:r>
+          </a:p>
+        </p:txBody>
+      </p:sp>
+      <p:sp>
+        <p:nvSpPr>
+          <p:cNvPr id="17418" name="TextBox 17417"/>
+          <p:cNvSpPr txBox="1"/>
+          <p:nvPr/>
+        </p:nvSpPr>
+        <p:spPr>
+          <a:xfrm>
+            <a:off x="3264408" y="5213908"/>
+            <a:ext cx="2450591" cy="400110"/>
+          </a:xfrm>
+          <a:prstGeom prst="rect">
+            <a:avLst/>
+          </a:prstGeom>
+          <a:noFill/>
+        </p:spPr>
+        <p:txBody>
+          <a:bodyPr wrap="square" lIns="0" tIns="0" rIns="0" bIns="0">
+            <a:spAutoFit/>
+          </a:bodyPr>
+          <a:lstStyle/>
+          <a:p>
+            <a:pPr algn="ctr">
+              <a:lnSpc>
+                <a:spcPct val="100000"/>
+              </a:lnSpc>
+            </a:pPr>
+            <a:r>
+              <a:rPr sz="1300" dirty="0">
+                <a:solidFill>
+                  <a:srgbClr val="FFFFFF"/>
+                </a:solidFill>
+              </a:rPr>
+              <a:t>Visibility across academia,</a:t>
+            </a:r>
+          </a:p>
+          <a:p>
+            <a:pPr algn="ctr">
+              <a:lnSpc>
+                <a:spcPct val="100000"/>
+              </a:lnSpc>
+            </a:pPr>
+            <a:r>
+              <a:rPr sz="1300" dirty="0">
+                <a:solidFill>
+                  <a:srgbClr val="FFFFFF"/>
+                </a:solidFill>
+              </a:rPr>
+              <a:t>industry &amp; government</a:t>
+            </a:r>
+          </a:p>
+        </p:txBody>
+      </p:sp>
+      <p:sp>
+        <p:nvSpPr>
+          <p:cNvPr id="17419" name="Rounded Rectangle 17418"/>
           <p:cNvSpPr/>
           <p:nvPr/>
         </p:nvSpPr>
         <p:spPr>
           <a:xfrm>
-            <a:off x="5486400" y="3383280"/>
-            <a:ext cx="4160520" cy="420624"/>
+            <a:off x="5934456" y="4572000"/>
+            <a:ext cx="2633472" cy="1234440"/>
           </a:xfrm>
           <a:prstGeom prst="roundRect">
-            <a:avLst/>
+            <a:avLst>
+              <a:gd name="adj" fmla="val 6000"/>
+            </a:avLst>
           </a:prstGeom>
           <a:solidFill>
-            <a:srgbClr val="DDECF7"/>
+            <a:srgbClr val="1F3864"/>
           </a:solidFill>
           <a:ln>
             <a:noFill/>
@@ -8348,38 +10833,124 @@
           </a:fontRef>
         </p:style>
         <p:txBody>
-          <a:bodyPr wrap="square" lIns="50800" tIns="25400" rIns="50800" bIns="25400" rtlCol="0" anchor="ctr"/>
+          <a:bodyPr rtlCol="0" anchor="ctr"/>
           <a:lstStyle/>
           <a:p>
             <a:pPr algn="ctr"/>
-            <a:r>
-              <a:rPr sz="1100" b="0">
-                <a:solidFill>
-                  <a:srgbClr val="1E2A4A"/>
+            <a:endParaRPr/>
+          </a:p>
+        </p:txBody>
+      </p:sp>
+      <p:sp>
+        <p:nvSpPr>
+          <p:cNvPr id="17420" name="TextBox 17419"/>
+          <p:cNvSpPr txBox="1"/>
+          <p:nvPr/>
+        </p:nvSpPr>
+        <p:spPr>
+          <a:xfrm>
+            <a:off x="6071616" y="4645152"/>
+            <a:ext cx="2359152" cy="369332"/>
+          </a:xfrm>
+          <a:prstGeom prst="rect">
+            <a:avLst/>
+          </a:prstGeom>
+          <a:noFill/>
+        </p:spPr>
+        <p:txBody>
+          <a:bodyPr wrap="square" lIns="0" tIns="0" rIns="0" bIns="0" anchor="t">
+            <a:spAutoFit/>
+          </a:bodyPr>
+          <a:lstStyle/>
+          <a:p>
+            <a:pPr algn="ctr">
+              <a:lnSpc>
+                <a:spcPct val="100000"/>
+              </a:lnSpc>
+            </a:pPr>
+            <a:r>
+              <a:rPr sz="2400" b="1" i="0" dirty="0">
+                <a:solidFill>
+                  <a:srgbClr val="F28C28"/>
                 </a:solidFill>
                 <a:latin typeface="Calibri"/>
               </a:rPr>
-              <a:t>Human-in-the-loop review + retrieval-grounded generation</a:t>
-            </a:r>
-          </a:p>
-        </p:txBody>
-      </p:sp>
-      <p:sp>
-        <p:nvSpPr>
-          <p:cNvPr id="17416" name="Rounded Rectangle 17415"/>
+              <a:t>50K+</a:t>
+            </a:r>
+          </a:p>
+        </p:txBody>
+      </p:sp>
+      <p:sp>
+        <p:nvSpPr>
+          <p:cNvPr id="17421" name="TextBox 17420"/>
+          <p:cNvSpPr txBox="1"/>
+          <p:nvPr/>
+        </p:nvSpPr>
+        <p:spPr>
+          <a:xfrm>
+            <a:off x="6025896" y="5213908"/>
+            <a:ext cx="2450591" cy="400110"/>
+          </a:xfrm>
+          <a:prstGeom prst="rect">
+            <a:avLst/>
+          </a:prstGeom>
+          <a:noFill/>
+        </p:spPr>
+        <p:txBody>
+          <a:bodyPr wrap="square" lIns="0" tIns="0" rIns="0" bIns="0">
+            <a:spAutoFit/>
+          </a:bodyPr>
+          <a:lstStyle/>
+          <a:p>
+            <a:pPr algn="ctr">
+              <a:lnSpc>
+                <a:spcPct val="100000"/>
+              </a:lnSpc>
+            </a:pPr>
+            <a:r>
+              <a:rPr sz="1300" dirty="0">
+                <a:solidFill>
+                  <a:srgbClr val="FFFFFF"/>
+                </a:solidFill>
+              </a:rPr>
+              <a:t>Concurrent users supported</a:t>
+            </a:r>
+          </a:p>
+          <a:p>
+            <a:pPr algn="ctr">
+              <a:lnSpc>
+                <a:spcPct val="100000"/>
+              </a:lnSpc>
+            </a:pPr>
+            <a:r>
+              <a:rPr sz="1300" dirty="0">
+                <a:solidFill>
+                  <a:srgbClr val="FFFFFF"/>
+                </a:solidFill>
+              </a:rPr>
+              <a:t>at scale</a:t>
+            </a:r>
+          </a:p>
+        </p:txBody>
+      </p:sp>
+      <p:sp>
+        <p:nvSpPr>
+          <p:cNvPr id="17422" name="Rounded Rectangle 17421"/>
           <p:cNvSpPr/>
           <p:nvPr/>
         </p:nvSpPr>
         <p:spPr>
           <a:xfrm>
-            <a:off x="822960" y="3895344"/>
-            <a:ext cx="4160520" cy="420624"/>
+            <a:off x="8695944" y="4553712"/>
+            <a:ext cx="2633472" cy="1234440"/>
           </a:xfrm>
           <a:prstGeom prst="roundRect">
-            <a:avLst/>
+            <a:avLst>
+              <a:gd name="adj" fmla="val 6000"/>
+            </a:avLst>
           </a:prstGeom>
           <a:solidFill>
-            <a:srgbClr val="F6E1DD"/>
+            <a:srgbClr val="1F3864"/>
           </a:solidFill>
           <a:ln>
             <a:noFill/>
@@ -8401,569 +10972,141 @@
           </a:fontRef>
         </p:style>
         <p:txBody>
-          <a:bodyPr wrap="square" lIns="50800" tIns="25400" rIns="50800" bIns="25400" rtlCol="0" anchor="ctr"/>
+          <a:bodyPr rtlCol="0" anchor="ctr"/>
           <a:lstStyle/>
           <a:p>
             <a:pPr algn="ctr"/>
-            <a:r>
-              <a:rPr sz="1100" b="0">
-                <a:solidFill>
-                  <a:srgbClr val="B03A2E"/>
-                </a:solidFill>
-                <a:latin typeface="Calibri"/>
-              </a:rPr>
-              <a:t>High compute cost for video/infographic generation</a:t>
-            </a:r>
-          </a:p>
-        </p:txBody>
-      </p:sp>
-      <p:sp>
-        <p:nvSpPr>
-          <p:cNvPr id="17417" name="Right Arrow 17416"/>
-          <p:cNvSpPr/>
+            <a:endParaRPr/>
+          </a:p>
+        </p:txBody>
+      </p:sp>
+      <p:sp>
+        <p:nvSpPr>
+          <p:cNvPr id="17423" name="TextBox 17422"/>
+          <p:cNvSpPr txBox="1"/>
           <p:nvPr/>
         </p:nvSpPr>
         <p:spPr>
           <a:xfrm>
-            <a:off x="5029200" y="4023360"/>
-            <a:ext cx="384048" cy="164592"/>
-          </a:xfrm>
-          <a:prstGeom prst="rightArrow">
+            <a:off x="8833104" y="4645152"/>
+            <a:ext cx="2359152" cy="369332"/>
+          </a:xfrm>
+          <a:prstGeom prst="rect">
             <a:avLst/>
           </a:prstGeom>
-          <a:solidFill>
-            <a:srgbClr val="1E2A4A"/>
-          </a:solidFill>
-          <a:ln>
-            <a:noFill/>
-          </a:ln>
-          <a:effectLst/>
-        </p:spPr>
-        <p:style>
-          <a:lnRef idx="1">
-            <a:schemeClr val="accent1"/>
-          </a:lnRef>
-          <a:fillRef idx="3">
-            <a:schemeClr val="accent1"/>
-          </a:fillRef>
-          <a:effectRef idx="2">
-            <a:schemeClr val="accent1"/>
-          </a:effectRef>
-          <a:fontRef idx="minor">
-            <a:schemeClr val="lt1"/>
-          </a:fontRef>
-        </p:style>
-        <p:txBody>
-          <a:bodyPr rtlCol="0" anchor="ctr"/>
+          <a:noFill/>
+        </p:spPr>
+        <p:txBody>
+          <a:bodyPr wrap="square" lIns="0" tIns="0" rIns="0" bIns="0" anchor="t">
+            <a:spAutoFit/>
+          </a:bodyPr>
           <a:lstStyle/>
           <a:p>
-            <a:pPr algn="ctr"/>
-            <a:endParaRPr/>
-          </a:p>
-        </p:txBody>
-      </p:sp>
-      <p:sp>
-        <p:nvSpPr>
-          <p:cNvPr id="17418" name="Rounded Rectangle 17417"/>
-          <p:cNvSpPr/>
+            <a:pPr algn="ctr">
+              <a:lnSpc>
+                <a:spcPct val="100000"/>
+              </a:lnSpc>
+            </a:pPr>
+            <a:r>
+              <a:rPr sz="2400" b="1" i="0" dirty="0">
+                <a:solidFill>
+                  <a:srgbClr val="F28C28"/>
+                </a:solidFill>
+                <a:latin typeface="Calibri"/>
+              </a:rPr>
+              <a:t>SDG 4 &amp; 8</a:t>
+            </a:r>
+          </a:p>
+        </p:txBody>
+      </p:sp>
+      <p:sp>
+        <p:nvSpPr>
+          <p:cNvPr id="17424" name="TextBox 17423"/>
+          <p:cNvSpPr txBox="1"/>
           <p:nvPr/>
         </p:nvSpPr>
         <p:spPr>
           <a:xfrm>
-            <a:off x="5486400" y="3895344"/>
-            <a:ext cx="4160520" cy="420624"/>
-          </a:xfrm>
-          <a:prstGeom prst="roundRect">
+            <a:off x="8787384" y="5213908"/>
+            <a:ext cx="2450591" cy="400110"/>
+          </a:xfrm>
+          <a:prstGeom prst="rect">
             <a:avLst/>
           </a:prstGeom>
-          <a:solidFill>
-            <a:srgbClr val="DDECF7"/>
-          </a:solidFill>
-          <a:ln>
-            <a:noFill/>
-          </a:ln>
-          <a:effectLst/>
-        </p:spPr>
-        <p:style>
-          <a:lnRef idx="1">
-            <a:schemeClr val="accent1"/>
-          </a:lnRef>
-          <a:fillRef idx="3">
-            <a:schemeClr val="accent1"/>
-          </a:fillRef>
-          <a:effectRef idx="2">
-            <a:schemeClr val="accent1"/>
-          </a:effectRef>
-          <a:fontRef idx="minor">
-            <a:schemeClr val="lt1"/>
-          </a:fontRef>
-        </p:style>
-        <p:txBody>
-          <a:bodyPr wrap="square" lIns="50800" tIns="25400" rIns="50800" bIns="25400" rtlCol="0" anchor="ctr"/>
+          <a:noFill/>
+        </p:spPr>
+        <p:txBody>
+          <a:bodyPr wrap="square" lIns="0" tIns="0" rIns="0" bIns="0">
+            <a:spAutoFit/>
+          </a:bodyPr>
           <a:lstStyle/>
           <a:p>
-            <a:pPr algn="ctr"/>
-            <a:r>
-              <a:rPr sz="1100" b="0">
-                <a:solidFill>
-                  <a:srgbClr val="1E2A4A"/>
-                </a:solidFill>
-                <a:latin typeface="Calibri"/>
-              </a:rPr>
-              <a:t>Templated storyboard/layout generation instead of full media synthesis</a:t>
-            </a:r>
-          </a:p>
-        </p:txBody>
-      </p:sp>
-      <p:sp>
-        <p:nvSpPr>
-          <p:cNvPr id="17419" name="Rounded Rectangle 17418"/>
-          <p:cNvSpPr/>
+            <a:pPr algn="ctr">
+              <a:lnSpc>
+                <a:spcPct val="100000"/>
+              </a:lnSpc>
+            </a:pPr>
+            <a:r>
+              <a:rPr sz="1300" dirty="0">
+                <a:solidFill>
+                  <a:srgbClr val="FFFFFF"/>
+                </a:solidFill>
+              </a:rPr>
+              <a:t>Quality Education &amp;</a:t>
+            </a:r>
+          </a:p>
+          <a:p>
+            <a:pPr algn="ctr">
+              <a:lnSpc>
+                <a:spcPct val="100000"/>
+              </a:lnSpc>
+            </a:pPr>
+            <a:r>
+              <a:rPr sz="1300" dirty="0">
+                <a:solidFill>
+                  <a:srgbClr val="FFFFFF"/>
+                </a:solidFill>
+              </a:rPr>
+              <a:t>Decent Work alignment</a:t>
+            </a:r>
+          </a:p>
+        </p:txBody>
+      </p:sp>
+      <p:sp>
+        <p:nvSpPr>
+          <p:cNvPr id="17425" name="TextBox 17424"/>
+          <p:cNvSpPr txBox="1"/>
           <p:nvPr/>
         </p:nvSpPr>
         <p:spPr>
           <a:xfrm>
-            <a:off x="822960" y="4407408"/>
-            <a:ext cx="4160520" cy="420624"/>
-          </a:xfrm>
-          <a:prstGeom prst="roundRect">
+            <a:off x="411480" y="5943600"/>
+            <a:ext cx="11338560" cy="184666"/>
+          </a:xfrm>
+          <a:prstGeom prst="rect">
             <a:avLst/>
           </a:prstGeom>
-          <a:solidFill>
-            <a:srgbClr val="F6E1DD"/>
-          </a:solidFill>
-          <a:ln>
-            <a:noFill/>
-          </a:ln>
-          <a:effectLst/>
-        </p:spPr>
-        <p:style>
-          <a:lnRef idx="1">
-            <a:schemeClr val="accent1"/>
-          </a:lnRef>
-          <a:fillRef idx="3">
-            <a:schemeClr val="accent1"/>
-          </a:fillRef>
-          <a:effectRef idx="2">
-            <a:schemeClr val="accent1"/>
-          </a:effectRef>
-          <a:fontRef idx="minor">
-            <a:schemeClr val="lt1"/>
-          </a:fontRef>
-        </p:style>
-        <p:txBody>
-          <a:bodyPr wrap="square" lIns="50800" tIns="25400" rIns="50800" bIns="25400" rtlCol="0" anchor="ctr"/>
+          <a:noFill/>
+        </p:spPr>
+        <p:txBody>
+          <a:bodyPr wrap="square" lIns="0" tIns="0" rIns="0" bIns="0" anchor="t">
+            <a:spAutoFit/>
+          </a:bodyPr>
           <a:lstStyle/>
           <a:p>
-            <a:pPr algn="ctr"/>
-            <a:r>
-              <a:rPr sz="1100" b="0">
-                <a:solidFill>
-                  <a:srgbClr val="B03A2E"/>
+            <a:pPr algn="l">
+              <a:lnSpc>
+                <a:spcPct val="100000"/>
+              </a:lnSpc>
+            </a:pPr>
+            <a:r>
+              <a:rPr sz="1200" b="0" i="1" dirty="0">
+                <a:solidFill>
+                  <a:srgbClr val="5B6B78"/>
                 </a:solidFill>
                 <a:latin typeface="Calibri"/>
               </a:rPr>
-              <a:t>Sensitive source content leakage</a:t>
-            </a:r>
-          </a:p>
-        </p:txBody>
-      </p:sp>
-      <p:sp>
-        <p:nvSpPr>
-          <p:cNvPr id="17420" name="Right Arrow 17419"/>
-          <p:cNvSpPr/>
-          <p:nvPr/>
-        </p:nvSpPr>
-        <p:spPr>
-          <a:xfrm>
-            <a:off x="5029200" y="4535424"/>
-            <a:ext cx="384048" cy="164592"/>
-          </a:xfrm>
-          <a:prstGeom prst="rightArrow">
-            <a:avLst/>
-          </a:prstGeom>
-          <a:solidFill>
-            <a:srgbClr val="1E2A4A"/>
-          </a:solidFill>
-          <a:ln>
-            <a:noFill/>
-          </a:ln>
-          <a:effectLst/>
-        </p:spPr>
-        <p:style>
-          <a:lnRef idx="1">
-            <a:schemeClr val="accent1"/>
-          </a:lnRef>
-          <a:fillRef idx="3">
-            <a:schemeClr val="accent1"/>
-          </a:fillRef>
-          <a:effectRef idx="2">
-            <a:schemeClr val="accent1"/>
-          </a:effectRef>
-          <a:fontRef idx="minor">
-            <a:schemeClr val="lt1"/>
-          </a:fontRef>
-        </p:style>
-        <p:txBody>
-          <a:bodyPr rtlCol="0" anchor="ctr"/>
-          <a:lstStyle/>
-          <a:p>
-            <a:pPr algn="ctr"/>
-            <a:endParaRPr/>
-          </a:p>
-        </p:txBody>
-      </p:sp>
-      <p:sp>
-        <p:nvSpPr>
-          <p:cNvPr id="17421" name="Rounded Rectangle 17420"/>
-          <p:cNvSpPr/>
-          <p:nvPr/>
-        </p:nvSpPr>
-        <p:spPr>
-          <a:xfrm>
-            <a:off x="5486400" y="4407408"/>
-            <a:ext cx="4160520" cy="420624"/>
-          </a:xfrm>
-          <a:prstGeom prst="roundRect">
-            <a:avLst/>
-          </a:prstGeom>
-          <a:solidFill>
-            <a:srgbClr val="DDECF7"/>
-          </a:solidFill>
-          <a:ln>
-            <a:noFill/>
-          </a:ln>
-          <a:effectLst/>
-        </p:spPr>
-        <p:style>
-          <a:lnRef idx="1">
-            <a:schemeClr val="accent1"/>
-          </a:lnRef>
-          <a:fillRef idx="3">
-            <a:schemeClr val="accent1"/>
-          </a:fillRef>
-          <a:effectRef idx="2">
-            <a:schemeClr val="accent1"/>
-          </a:effectRef>
-          <a:fontRef idx="minor">
-            <a:schemeClr val="lt1"/>
-          </a:fontRef>
-        </p:style>
-        <p:txBody>
-          <a:bodyPr wrap="square" lIns="50800" tIns="25400" rIns="50800" bIns="25400" rtlCol="0" anchor="ctr"/>
-          <a:lstStyle/>
-          <a:p>
-            <a:pPr algn="ctr"/>
-            <a:r>
-              <a:rPr sz="1100" b="0">
-                <a:solidFill>
-                  <a:srgbClr val="1E2A4A"/>
-                </a:solidFill>
-                <a:latin typeface="Calibri"/>
-              </a:rPr>
-              <a:t>On-prem/air-gapped deployment, encryption &amp; strict RBAC</a:t>
-            </a:r>
-          </a:p>
-        </p:txBody>
-      </p:sp>
-      <p:sp>
-        <p:nvSpPr>
-          <p:cNvPr id="90001" name="Rounded Rectangle 17412"/>
-          <p:cNvSpPr/>
-          <p:nvPr/>
-        </p:nvSpPr>
-        <p:spPr>
-          <a:xfrm>
-            <a:off x="822960" y="4919472"/>
-            <a:ext cx="4160520" cy="420624"/>
-          </a:xfrm>
-          <a:prstGeom prst="roundRect">
-            <a:avLst/>
-          </a:prstGeom>
-          <a:solidFill>
-            <a:srgbClr val="F6E1DD"/>
-          </a:solidFill>
-          <a:ln>
-            <a:noFill/>
-          </a:ln>
-          <a:effectLst/>
-        </p:spPr>
-        <p:style>
-          <a:lnRef idx="1">
-            <a:schemeClr val="accent1"/>
-          </a:lnRef>
-          <a:fillRef idx="3">
-            <a:schemeClr val="accent1"/>
-          </a:fillRef>
-          <a:effectRef idx="2">
-            <a:schemeClr val="accent1"/>
-          </a:effectRef>
-          <a:fontRef idx="minor">
-            <a:schemeClr val="lt1"/>
-          </a:fontRef>
-        </p:style>
-        <p:txBody>
-          <a:bodyPr wrap="square" lIns="50800" tIns="25400" rIns="50800" bIns="25400" rtlCol="0" anchor="ctr"/>
-          <a:lstStyle/>
-          <a:p>
-            <a:pPr algn="ctr"/>
-            <a:r>
-              <a:rPr sz="1100" b="0">
-                <a:solidFill>
-                  <a:srgbClr val="B03A2E"/>
-                </a:solidFill>
-                <a:latin typeface="Calibri"/>
-              </a:rPr>
-              <a:t>Inconsistent quality across output formats</a:t>
-            </a:r>
-          </a:p>
-        </p:txBody>
-      </p:sp>
-      <p:sp>
-        <p:nvSpPr>
-          <p:cNvPr id="90002" name="Right Arrow 17413"/>
-          <p:cNvSpPr/>
-          <p:nvPr/>
-        </p:nvSpPr>
-        <p:spPr>
-          <a:xfrm>
-            <a:off x="5029200" y="5047488"/>
-            <a:ext cx="384048" cy="164592"/>
-          </a:xfrm>
-          <a:prstGeom prst="rightArrow">
-            <a:avLst/>
-          </a:prstGeom>
-          <a:solidFill>
-            <a:srgbClr val="1E2A4A"/>
-          </a:solidFill>
-          <a:ln>
-            <a:noFill/>
-          </a:ln>
-          <a:effectLst/>
-        </p:spPr>
-        <p:style>
-          <a:lnRef idx="1">
-            <a:schemeClr val="accent1"/>
-          </a:lnRef>
-          <a:fillRef idx="3">
-            <a:schemeClr val="accent1"/>
-          </a:fillRef>
-          <a:effectRef idx="2">
-            <a:schemeClr val="accent1"/>
-          </a:effectRef>
-          <a:fontRef idx="minor">
-            <a:schemeClr val="lt1"/>
-          </a:fontRef>
-        </p:style>
-        <p:txBody>
-          <a:bodyPr rtlCol="0" anchor="ctr"/>
-          <a:lstStyle/>
-          <a:p>
-            <a:pPr algn="ctr"/>
-            <a:endParaRPr/>
-          </a:p>
-        </p:txBody>
-      </p:sp>
-      <p:sp>
-        <p:nvSpPr>
-          <p:cNvPr id="90003" name="Rounded Rectangle 17414"/>
-          <p:cNvSpPr/>
-          <p:nvPr/>
-        </p:nvSpPr>
-        <p:spPr>
-          <a:xfrm>
-            <a:off x="5486400" y="4919472"/>
-            <a:ext cx="4160520" cy="420624"/>
-          </a:xfrm>
-          <a:prstGeom prst="roundRect">
-            <a:avLst/>
-          </a:prstGeom>
-          <a:solidFill>
-            <a:srgbClr val="DDECF7"/>
-          </a:solidFill>
-          <a:ln>
-            <a:noFill/>
-          </a:ln>
-          <a:effectLst/>
-        </p:spPr>
-        <p:style>
-          <a:lnRef idx="1">
-            <a:schemeClr val="accent1"/>
-          </a:lnRef>
-          <a:fillRef idx="3">
-            <a:schemeClr val="accent1"/>
-          </a:fillRef>
-          <a:effectRef idx="2">
-            <a:schemeClr val="accent1"/>
-          </a:effectRef>
-          <a:fontRef idx="minor">
-            <a:schemeClr val="lt1"/>
-          </a:fontRef>
-        </p:style>
-        <p:txBody>
-          <a:bodyPr wrap="square" lIns="50800" tIns="25400" rIns="50800" bIns="25400" rtlCol="0" anchor="ctr"/>
-          <a:lstStyle/>
-          <a:p>
-            <a:pPr algn="ctr"/>
-            <a:r>
-              <a:rPr sz="1100" b="0">
-                <a:solidFill>
-                  <a:srgbClr val="1E2A4A"/>
-                </a:solidFill>
-                <a:latin typeface="Calibri"/>
-              </a:rPr>
-              <a:t>Format-specific fine-tuned templates + automated QA scoring</a:t>
-            </a:r>
-          </a:p>
-        </p:txBody>
-      </p:sp>
-      <p:sp>
-        <p:nvSpPr>
-          <p:cNvPr id="90004" name="Rounded Rectangle 17412"/>
-          <p:cNvSpPr/>
-          <p:nvPr/>
-        </p:nvSpPr>
-        <p:spPr>
-          <a:xfrm>
-            <a:off x="822960" y="5431536"/>
-            <a:ext cx="4160520" cy="420624"/>
-          </a:xfrm>
-          <a:prstGeom prst="roundRect">
-            <a:avLst/>
-          </a:prstGeom>
-          <a:solidFill>
-            <a:srgbClr val="F6E1DD"/>
-          </a:solidFill>
-          <a:ln>
-            <a:noFill/>
-          </a:ln>
-          <a:effectLst/>
-        </p:spPr>
-        <p:style>
-          <a:lnRef idx="1">
-            <a:schemeClr val="accent1"/>
-          </a:lnRef>
-          <a:fillRef idx="3">
-            <a:schemeClr val="accent1"/>
-          </a:fillRef>
-          <a:effectRef idx="2">
-            <a:schemeClr val="accent1"/>
-          </a:effectRef>
-          <a:fontRef idx="minor">
-            <a:schemeClr val="lt1"/>
-          </a:fontRef>
-        </p:style>
-        <p:txBody>
-          <a:bodyPr wrap="square" lIns="50800" tIns="25400" rIns="50800" bIns="25400" rtlCol="0" anchor="ctr"/>
-          <a:lstStyle/>
-          <a:p>
-            <a:pPr algn="ctr"/>
-            <a:r>
-              <a:rPr sz="1100" b="0">
-                <a:solidFill>
-                  <a:srgbClr val="B03A2E"/>
-                </a:solidFill>
-                <a:latin typeface="Calibri"/>
-              </a:rPr>
-              <a:t>Multilingual / tone requirements not met</a:t>
-            </a:r>
-          </a:p>
-        </p:txBody>
-      </p:sp>
-      <p:sp>
-        <p:nvSpPr>
-          <p:cNvPr id="90005" name="Right Arrow 17413"/>
-          <p:cNvSpPr/>
-          <p:nvPr/>
-        </p:nvSpPr>
-        <p:spPr>
-          <a:xfrm>
-            <a:off x="5029200" y="5559552"/>
-            <a:ext cx="384048" cy="164592"/>
-          </a:xfrm>
-          <a:prstGeom prst="rightArrow">
-            <a:avLst/>
-          </a:prstGeom>
-          <a:solidFill>
-            <a:srgbClr val="1E2A4A"/>
-          </a:solidFill>
-          <a:ln>
-            <a:noFill/>
-          </a:ln>
-          <a:effectLst/>
-        </p:spPr>
-        <p:style>
-          <a:lnRef idx="1">
-            <a:schemeClr val="accent1"/>
-          </a:lnRef>
-          <a:fillRef idx="3">
-            <a:schemeClr val="accent1"/>
-          </a:fillRef>
-          <a:effectRef idx="2">
-            <a:schemeClr val="accent1"/>
-          </a:effectRef>
-          <a:fontRef idx="minor">
-            <a:schemeClr val="lt1"/>
-          </a:fontRef>
-        </p:style>
-        <p:txBody>
-          <a:bodyPr rtlCol="0" anchor="ctr"/>
-          <a:lstStyle/>
-          <a:p>
-            <a:pPr algn="ctr"/>
-            <a:endParaRPr/>
-          </a:p>
-        </p:txBody>
-      </p:sp>
-      <p:sp>
-        <p:nvSpPr>
-          <p:cNvPr id="90006" name="Rounded Rectangle 17414"/>
-          <p:cNvSpPr/>
-          <p:nvPr/>
-        </p:nvSpPr>
-        <p:spPr>
-          <a:xfrm>
-            <a:off x="5486400" y="5431536"/>
-            <a:ext cx="4160520" cy="420624"/>
-          </a:xfrm>
-          <a:prstGeom prst="roundRect">
-            <a:avLst/>
-          </a:prstGeom>
-          <a:solidFill>
-            <a:srgbClr val="DDECF7"/>
-          </a:solidFill>
-          <a:ln>
-            <a:noFill/>
-          </a:ln>
-          <a:effectLst/>
-        </p:spPr>
-        <p:style>
-          <a:lnRef idx="1">
-            <a:schemeClr val="accent1"/>
-          </a:lnRef>
-          <a:fillRef idx="3">
-            <a:schemeClr val="accent1"/>
-          </a:fillRef>
-          <a:effectRef idx="2">
-            <a:schemeClr val="accent1"/>
-          </a:effectRef>
-          <a:fontRef idx="minor">
-            <a:schemeClr val="lt1"/>
-          </a:fontRef>
-        </p:style>
-        <p:txBody>
-          <a:bodyPr wrap="square" lIns="50800" tIns="25400" rIns="50800" bIns="25400" rtlCol="0" anchor="ctr"/>
-          <a:lstStyle/>
-          <a:p>
-            <a:pPr algn="ctr"/>
-            <a:r>
-              <a:rPr sz="1100" b="0">
-                <a:solidFill>
-                  <a:srgbClr val="1E2A4A"/>
-                </a:solidFill>
-                <a:latin typeface="Calibri"/>
-              </a:rPr>
-              <a:t>Configurable tone, audience &amp; language parameters with style calibration</a:t>
+              <a:t>Reduces youth unemployment &amp; skill mismatch in India's traditional-medicine sector; strengthens the national Ayush workforce pipeline</a:t>
             </a:r>
           </a:p>
         </p:txBody>
@@ -8971,7 +11114,7 @@
     </p:spTree>
     <p:extLst>
       <p:ext uri="{BB962C8B-B14F-4D97-AF65-F5344CB8AC3E}">
-        <p14:creationId xmlns:p14="http://schemas.microsoft.com/office/powerpoint/2010/main" val="3753387913"/>
+        <p14:creationId xmlns:p14="http://schemas.microsoft.com/office/powerpoint/2010/main" val="2997144140"/>
       </p:ext>
     </p:extLst>
   </p:cSld>
@@ -9087,12 +11230,7 @@
             <p:ph type="title"/>
           </p:nvPr>
         </p:nvSpPr>
-        <p:spPr>
-          <a:xfrm>
-            <a:off x="194458" y="90938"/>
-            <a:ext cx="10972800" cy="1143000"/>
-          </a:xfrm>
-        </p:spPr>
+        <p:spPr/>
         <p:txBody>
           <a:bodyPr/>
           <a:lstStyle/>
@@ -9104,128 +11242,8 @@
                 <a:ea typeface="ＭＳ Ｐゴシック" pitchFamily="1" charset="-128"/>
                 <a:cs typeface="Times New Roman" panose="02020603050405020304" pitchFamily="18" charset="0"/>
               </a:rPr>
-              <a:t>IMPACT AND BENEFITS</a:t>
-            </a:r>
-          </a:p>
-        </p:txBody>
-      </p:sp>
-      <p:sp>
-        <p:nvSpPr>
-          <p:cNvPr id="17410" name="TextBox 8"/>
-          <p:cNvSpPr txBox="1">
-            <a:spLocks noChangeArrowheads="1"/>
-          </p:cNvSpPr>
-          <p:nvPr/>
-        </p:nvSpPr>
-        <p:spPr bwMode="auto">
-          <a:xfrm>
-            <a:off x="499872" y="1370460"/>
-            <a:ext cx="9385300" cy="2308324"/>
-          </a:xfrm>
-          <a:prstGeom prst="rect">
-            <a:avLst/>
-          </a:prstGeom>
-          <a:noFill/>
-          <a:ln w="9525">
-            <a:noFill/>
-            <a:miter lim="800000"/>
-            <a:headEnd/>
-            <a:tailEnd/>
-          </a:ln>
-        </p:spPr>
-        <p:txBody>
-          <a:bodyPr wrap="square">
-            <a:spAutoFit/>
-          </a:bodyPr>
-          <a:lstStyle/>
-          <a:p>
-            <a:pPr marL="342900" marR="0" lvl="0" indent="-342900" algn="just" defTabSz="457200" rtl="0" eaLnBrk="1" fontAlgn="base" latinLnBrk="0" hangingPunct="1">
-              <a:lnSpc>
-                <a:spcPct val="100000"/>
-              </a:lnSpc>
-              <a:spcBef>
-                <a:spcPct val="0"/>
-              </a:spcBef>
-              <a:spcAft>
-                <a:spcPct val="0"/>
-              </a:spcAft>
-              <a:buClrTx/>
-              <a:buSzTx/>
-              <a:buFont typeface="Arial" panose="020B0604020202020204" pitchFamily="34" charset="0"/>
-              <a:buChar char="•"/>
-              <a:tabLst/>
-              <a:defRPr/>
-            </a:pPr>
-            <a:r>
-              <a:rPr kumimoji="0" lang="en-US" sz="1800" b="0" i="0" u="none" strike="noStrike" kern="1200" cap="none" spc="0" normalizeH="0" baseline="0" noProof="0" dirty="0">
-                <a:ln>
-                  <a:noFill/>
-                </a:ln>
-                <a:solidFill>
-                  <a:prstClr val="black"/>
-                </a:solidFill>
-                <a:effectLst/>
-                <a:uLnTx/>
-                <a:uFillTx/>
-                <a:latin typeface="Arial" pitchFamily="34" charset="0"/>
-                <a:ea typeface="ＭＳ Ｐゴシック" pitchFamily="1" charset="-128"/>
-                <a:cs typeface="Arial" pitchFamily="34" charset="0"/>
-              </a:rPr>
-              <a:t>Directly benefits security teams, communicators and leadership across any organisation that must repeatedly repurpose critical content for different audiences</a:t>
-            </a:r>
-          </a:p>
-          <a:p>
-            <a:pPr marL="342900" marR="0" lvl="0" indent="-342900" algn="just" defTabSz="457200" rtl="0" eaLnBrk="1" fontAlgn="base" latinLnBrk="0" hangingPunct="1">
-              <a:lnSpc>
-                <a:spcPct val="100000"/>
-              </a:lnSpc>
-              <a:spcBef>
-                <a:spcPct val="0"/>
-              </a:spcBef>
-              <a:spcAft>
-                <a:spcPct val="0"/>
-              </a:spcAft>
-              <a:buClrTx/>
-              <a:buSzTx/>
-              <a:buFont typeface="Arial" panose="020B0604020202020204" pitchFamily="34" charset="0"/>
-              <a:buChar char="•"/>
-              <a:tabLst/>
-              <a:defRPr/>
-            </a:pPr>
-            <a:r>
-              <a:rPr lang="en-US" sz="1800" dirty="0">
-                <a:solidFill>
-                  <a:prstClr val="black"/>
-                </a:solidFill>
-                <a:latin typeface="Arial" pitchFamily="34" charset="0"/>
-                <a:cs typeface="Arial" pitchFamily="34" charset="0"/>
-              </a:rPr>
-              <a:t>Economic: 70%+ faster content turnaround &amp; lower content-ops cost. Social: consistent, trustworthy dissemination of information. Governance: blockchain-verified provenance curbs misinformation</a:t>
-            </a:r>
-          </a:p>
-          <a:p>
-            <a:pPr marL="342900" lvl="0" indent="-342900" algn="just">
-              <a:buFont typeface="Arial" panose="020B0604020202020204" pitchFamily="34" charset="0"/>
-              <a:buChar char="•"/>
-              <a:defRPr/>
-            </a:pPr>
-            <a:r>
-              <a:rPr lang="en-US" dirty="0">
-                <a:solidFill>
-                  <a:prstClr val="black"/>
-                </a:solidFill>
-                <a:latin typeface="Arial" pitchFamily="34" charset="0"/>
-                <a:cs typeface="Arial" pitchFamily="34" charset="0"/>
-              </a:rPr>
-              <a:t>Operational Efficiency: Reduces repetitive manual content creation and enables teams to repurpose critical information across multiple formats from a single source, saving significant time and resources.</a:t>
-            </a:r>
-            <a:endParaRPr lang="en-US" sz="1800" dirty="0">
-              <a:solidFill>
-                <a:prstClr val="black"/>
-              </a:solidFill>
-              <a:latin typeface="Arial" pitchFamily="34" charset="0"/>
-              <a:cs typeface="Arial" pitchFamily="34" charset="0"/>
-            </a:endParaRPr>
+              <a:t>FEASIBILITY AND VIABILITY</a:t>
+            </a:r>
           </a:p>
         </p:txBody>
       </p:sp>
@@ -9350,7 +11368,7 @@
               <a:defRPr/>
             </a:pPr>
             <a:r>
-              <a:rPr kumimoji="0" lang="en-US" sz="1200" b="0" i="0" u="none" strike="noStrike" kern="1200" cap="none" spc="0" normalizeH="0" baseline="0" noProof="0">
+              <a:rPr kumimoji="0" lang="en-US" sz="1200" b="0" i="0" u="none" strike="noStrike" kern="1200" cap="none" spc="0" normalizeH="0" baseline="0" noProof="0" dirty="0">
                 <a:ln>
                   <a:noFill/>
                 </a:ln>
@@ -9364,22 +11382,8 @@
                 <a:ea typeface="+mn-ea"/>
                 <a:cs typeface="+mn-cs"/>
               </a:rPr>
-              <a:t>@SIH Idea submission- Template</a:t>
-            </a:r>
-            <a:endParaRPr kumimoji="0" lang="en-US" sz="1200" b="0" i="0" u="none" strike="noStrike" kern="1200" cap="none" spc="0" normalizeH="0" baseline="0" noProof="0" dirty="0">
-              <a:ln>
-                <a:noFill/>
-              </a:ln>
-              <a:solidFill>
-                <a:prstClr val="white"/>
-              </a:solidFill>
-              <a:effectLst/>
-              <a:uLnTx/>
-              <a:uFillTx/>
-              <a:latin typeface="TradeGothic"/>
-              <a:ea typeface="+mn-ea"/>
-              <a:cs typeface="+mn-cs"/>
-            </a:endParaRPr>
+              <a:t>@SIH Idea submission</a:t>
+            </a:r>
           </a:p>
         </p:txBody>
       </p:sp>
@@ -9401,7 +11405,7 @@
         <p:spPr>
           <a:xfrm>
             <a:off x="329773" y="252246"/>
-            <a:ext cx="1251857" cy="807334"/>
+            <a:ext cx="1656343" cy="807334"/>
           </a:xfrm>
           <a:prstGeom prst="ellipse">
             <a:avLst/>
@@ -9427,7 +11431,10 @@
           <a:p>
             <a:pPr algn="ctr"/>
             <a:r>
-              <a:rPr lang="en-US" sz="1000" dirty="0"/>
+              <a:rPr lang="en-US" b="1" dirty="0">
+                <a:latin typeface="Arial" panose="020B0604020202020204" pitchFamily="34" charset="0"/>
+                <a:cs typeface="Arial" panose="020B0604020202020204" pitchFamily="34" charset="0"/>
+              </a:rPr>
               <a:t>Team Invictus</a:t>
             </a:r>
             <a:endParaRPr lang="en-IN" dirty="0"/>
@@ -9466,20 +11473,61 @@
       </p:pic>
       <p:sp>
         <p:nvSpPr>
+          <p:cNvPr id="17410" name="TextBox 17409"/>
+          <p:cNvSpPr txBox="1"/>
+          <p:nvPr/>
+        </p:nvSpPr>
+        <p:spPr>
+          <a:xfrm>
+            <a:off x="411480" y="1847088"/>
+            <a:ext cx="7315200" cy="276999"/>
+          </a:xfrm>
+          <a:prstGeom prst="rect">
+            <a:avLst/>
+          </a:prstGeom>
+          <a:noFill/>
+        </p:spPr>
+        <p:txBody>
+          <a:bodyPr wrap="square" lIns="0" tIns="0" rIns="0" bIns="0" anchor="t">
+            <a:spAutoFit/>
+          </a:bodyPr>
+          <a:lstStyle/>
+          <a:p>
+            <a:pPr algn="l">
+              <a:lnSpc>
+                <a:spcPct val="100000"/>
+              </a:lnSpc>
+            </a:pPr>
+            <a:r>
+              <a:rPr b="1" i="0" dirty="0">
+                <a:solidFill>
+                  <a:srgbClr val="1F3864"/>
+                </a:solidFill>
+                <a:latin typeface="Calibri"/>
+              </a:rPr>
+              <a:t>Feasibility Analysis</a:t>
+            </a:r>
+          </a:p>
+        </p:txBody>
+      </p:sp>
+      <p:sp>
+        <p:nvSpPr>
           <p:cNvPr id="17411" name="Rounded Rectangle 17410"/>
           <p:cNvSpPr/>
           <p:nvPr/>
         </p:nvSpPr>
         <p:spPr>
           <a:xfrm>
-            <a:off x="906780" y="4206240"/>
-            <a:ext cx="3246120" cy="1417320"/>
+            <a:off x="411480" y="2148840"/>
+            <a:ext cx="3538727" cy="1691640"/>
           </a:xfrm>
           <a:prstGeom prst="roundRect">
-            <a:avLst/>
+            <a:avLst>
+              <a:gd name="adj" fmla="val 6000"/>
+            </a:avLst>
           </a:prstGeom>
           <a:solidFill>
-            <a:srgbClr val="F4F7FB"/>
+            <a:srgbClr val="F1F5FA"/>
           </a:solidFill>
           <a:ln>
             <a:noFill/>
@@ -9517,14 +11565,14 @@
         </p:nvSpPr>
         <p:spPr>
           <a:xfrm>
-            <a:off x="2209800" y="3886200"/>
-            <a:ext cx="640080" cy="640080"/>
+            <a:off x="521208" y="2258568"/>
+            <a:ext cx="365760" cy="365760"/>
           </a:xfrm>
           <a:prstGeom prst="ellipse">
             <a:avLst/>
           </a:prstGeom>
           <a:solidFill>
-            <a:srgbClr val="0070C0"/>
+            <a:srgbClr val="2E8B57"/>
           </a:solidFill>
           <a:ln>
             <a:noFill/>
@@ -9546,11 +11594,18 @@
           </a:fontRef>
         </p:style>
         <p:txBody>
-          <a:bodyPr wrap="square" lIns="25400" rIns="25400" rtlCol="0" anchor="ctr"/>
+          <a:bodyPr lIns="0" tIns="0" rIns="0" bIns="0" rtlCol="0" anchor="ctr"/>
           <a:lstStyle/>
           <a:p>
             <a:pPr algn="ctr"/>
-            <a:endParaRPr/>
+            <a:r>
+              <a:rPr sz="1300" b="1">
+                <a:solidFill>
+                  <a:srgbClr val="FFFFFF"/>
+                </a:solidFill>
+              </a:rPr>
+              <a:t>F</a:t>
+            </a:r>
           </a:p>
         </p:txBody>
       </p:sp>
@@ -9562,8 +11617,8 @@
         </p:nvSpPr>
         <p:spPr>
           <a:xfrm>
-            <a:off x="906780" y="4617720"/>
-            <a:ext cx="3246120" cy="274320"/>
+            <a:off x="960120" y="2276856"/>
+            <a:ext cx="2807207" cy="246221"/>
           </a:xfrm>
           <a:prstGeom prst="rect">
             <a:avLst/>
@@ -9571,20 +11626,24 @@
           <a:noFill/>
         </p:spPr>
         <p:txBody>
-          <a:bodyPr wrap="square" lIns="0" tIns="0" rIns="0" bIns="0" anchor="ctr">
+          <a:bodyPr wrap="square" lIns="0" tIns="0" rIns="0" bIns="0" anchor="t">
             <a:spAutoFit/>
           </a:bodyPr>
           <a:lstStyle/>
           <a:p>
-            <a:pPr algn="ctr"/>
-            <a:r>
-              <a:rPr sz="1000" b="1">
-                <a:solidFill>
-                  <a:srgbClr val="1E2A4A"/>
+            <a:pPr algn="l">
+              <a:lnSpc>
+                <a:spcPct val="100000"/>
+              </a:lnSpc>
+            </a:pPr>
+            <a:r>
+              <a:rPr sz="1600" b="1" i="0" dirty="0">
+                <a:solidFill>
+                  <a:srgbClr val="1F3864"/>
                 </a:solidFill>
                 <a:latin typeface="Calibri"/>
               </a:rPr>
-              <a:t>Security Analysts</a:t>
+              <a:t>Technical</a:t>
             </a:r>
           </a:p>
         </p:txBody>
@@ -9597,8 +11656,8 @@
         </p:nvSpPr>
         <p:spPr>
           <a:xfrm>
-            <a:off x="1043940" y="4937760"/>
-            <a:ext cx="2971800" cy="594360"/>
+            <a:off x="612648" y="2715768"/>
+            <a:ext cx="3154679" cy="1110560"/>
           </a:xfrm>
           <a:prstGeom prst="rect">
             <a:avLst/>
@@ -9606,20 +11665,65 @@
           <a:noFill/>
         </p:spPr>
         <p:txBody>
-          <a:bodyPr wrap="square" lIns="0" tIns="0" rIns="0" bIns="0" anchor="ctr">
+          <a:bodyPr wrap="square" lIns="0" tIns="0" rIns="0" bIns="0">
             <a:spAutoFit/>
           </a:bodyPr>
           <a:lstStyle/>
           <a:p>
-            <a:pPr algn="ctr"/>
-            <a:r>
-              <a:rPr sz="1050" b="0">
-                <a:solidFill>
-                  <a:srgbClr val="555555"/>
+            <a:pPr>
+              <a:lnSpc>
+                <a:spcPct val="105000"/>
+              </a:lnSpc>
+              <a:spcAft>
+                <a:spcPts val="200"/>
+              </a:spcAft>
+            </a:pPr>
+            <a:r>
+              <a:rPr sz="1100" dirty="0">
+                <a:solidFill>
+                  <a:srgbClr val="222A33"/>
                 </a:solidFill>
                 <a:latin typeface="Calibri"/>
               </a:rPr>
-              <a:t>One-click generation of every required format from a single source</a:t>
+              <a:t>•  Mature open-source stack (React, Node, Python) with strong community support</a:t>
+            </a:r>
+          </a:p>
+          <a:p>
+            <a:pPr>
+              <a:lnSpc>
+                <a:spcPct val="105000"/>
+              </a:lnSpc>
+              <a:spcAft>
+                <a:spcPts val="200"/>
+              </a:spcAft>
+            </a:pPr>
+            <a:r>
+              <a:rPr sz="1100" dirty="0">
+                <a:solidFill>
+                  <a:srgbClr val="222A33"/>
+                </a:solidFill>
+                <a:latin typeface="Calibri"/>
+              </a:rPr>
+              <a:t>•  Modular microservices allow independent scaling of the AI matching engine</a:t>
+            </a:r>
+          </a:p>
+          <a:p>
+            <a:pPr>
+              <a:lnSpc>
+                <a:spcPct val="105000"/>
+              </a:lnSpc>
+              <a:spcAft>
+                <a:spcPts val="200"/>
+              </a:spcAft>
+            </a:pPr>
+            <a:r>
+              <a:rPr sz="1100" dirty="0">
+                <a:solidFill>
+                  <a:srgbClr val="222A33"/>
+                </a:solidFill>
+                <a:latin typeface="Calibri"/>
+              </a:rPr>
+              <a:t>•  Phased rollout: pilot at AIIA before extending to all Ayush institutions</a:t>
             </a:r>
           </a:p>
         </p:txBody>
@@ -9632,14 +11736,16 @@
         </p:nvSpPr>
         <p:spPr>
           <a:xfrm>
-            <a:off x="4472940" y="4206240"/>
-            <a:ext cx="3246120" cy="1417320"/>
+            <a:off x="4087368" y="2148840"/>
+            <a:ext cx="3538727" cy="1691640"/>
           </a:xfrm>
           <a:prstGeom prst="roundRect">
-            <a:avLst/>
+            <a:avLst>
+              <a:gd name="adj" fmla="val 6000"/>
+            </a:avLst>
           </a:prstGeom>
           <a:solidFill>
-            <a:srgbClr val="F4F7FB"/>
+            <a:srgbClr val="F1F5FA"/>
           </a:solidFill>
           <a:ln>
             <a:noFill/>
@@ -9677,14 +11783,14 @@
         </p:nvSpPr>
         <p:spPr>
           <a:xfrm>
-            <a:off x="5775960" y="3886200"/>
-            <a:ext cx="640080" cy="640080"/>
+            <a:off x="4197096" y="2258568"/>
+            <a:ext cx="365760" cy="365760"/>
           </a:xfrm>
           <a:prstGeom prst="ellipse">
             <a:avLst/>
           </a:prstGeom>
           <a:solidFill>
-            <a:srgbClr val="E88A2E"/>
+            <a:srgbClr val="F28C28"/>
           </a:solidFill>
           <a:ln>
             <a:noFill/>
@@ -9706,11 +11812,18 @@
           </a:fontRef>
         </p:style>
         <p:txBody>
-          <a:bodyPr wrap="square" lIns="25400" rIns="25400" rtlCol="0" anchor="ctr"/>
+          <a:bodyPr lIns="0" tIns="0" rIns="0" bIns="0" rtlCol="0" anchor="ctr"/>
           <a:lstStyle/>
           <a:p>
             <a:pPr algn="ctr"/>
-            <a:endParaRPr/>
+            <a:r>
+              <a:rPr sz="1300" b="1">
+                <a:solidFill>
+                  <a:srgbClr val="FFFFFF"/>
+                </a:solidFill>
+              </a:rPr>
+              <a:t>R</a:t>
+            </a:r>
           </a:p>
         </p:txBody>
       </p:sp>
@@ -9722,8 +11835,8 @@
         </p:nvSpPr>
         <p:spPr>
           <a:xfrm>
-            <a:off x="4472940" y="4617720"/>
-            <a:ext cx="3246120" cy="274320"/>
+            <a:off x="4636007" y="2276856"/>
+            <a:ext cx="2807207" cy="246221"/>
           </a:xfrm>
           <a:prstGeom prst="rect">
             <a:avLst/>
@@ -9731,20 +11844,24 @@
           <a:noFill/>
         </p:spPr>
         <p:txBody>
-          <a:bodyPr wrap="square" lIns="0" tIns="0" rIns="0" bIns="0" anchor="ctr">
+          <a:bodyPr wrap="square" lIns="0" tIns="0" rIns="0" bIns="0" anchor="t">
             <a:spAutoFit/>
           </a:bodyPr>
           <a:lstStyle/>
           <a:p>
-            <a:pPr algn="ctr"/>
-            <a:r>
-              <a:rPr sz="1000" b="1">
-                <a:solidFill>
-                  <a:srgbClr val="1E2A4A"/>
+            <a:pPr algn="l">
+              <a:lnSpc>
+                <a:spcPct val="100000"/>
+              </a:lnSpc>
+            </a:pPr>
+            <a:r>
+              <a:rPr sz="1600" b="1" i="0" dirty="0">
+                <a:solidFill>
+                  <a:srgbClr val="1F3864"/>
                 </a:solidFill>
                 <a:latin typeface="Calibri"/>
               </a:rPr>
-              <a:t>Comms &amp; PR Teams</a:t>
+              <a:t>Regulatory</a:t>
             </a:r>
           </a:p>
         </p:txBody>
@@ -9757,8 +11874,8 @@
         </p:nvSpPr>
         <p:spPr>
           <a:xfrm>
-            <a:off x="4610100" y="4937760"/>
-            <a:ext cx="2971800" cy="594360"/>
+            <a:off x="4288536" y="2715768"/>
+            <a:ext cx="3154679" cy="1110560"/>
           </a:xfrm>
           <a:prstGeom prst="rect">
             <a:avLst/>
@@ -9766,20 +11883,83 @@
           <a:noFill/>
         </p:spPr>
         <p:txBody>
-          <a:bodyPr wrap="square" lIns="0" tIns="0" rIns="0" bIns="0" anchor="ctr">
+          <a:bodyPr wrap="square" lIns="0" tIns="0" rIns="0" bIns="0">
             <a:spAutoFit/>
           </a:bodyPr>
           <a:lstStyle/>
           <a:p>
-            <a:pPr algn="ctr"/>
-            <a:r>
-              <a:rPr sz="1050" b="0">
-                <a:solidFill>
-                  <a:srgbClr val="555555"/>
+            <a:pPr>
+              <a:lnSpc>
+                <a:spcPct val="105000"/>
+              </a:lnSpc>
+              <a:spcAft>
+                <a:spcPts val="200"/>
+              </a:spcAft>
+            </a:pPr>
+            <a:r>
+              <a:rPr sz="1100" dirty="0">
+                <a:solidFill>
+                  <a:srgbClr val="222A33"/>
                 </a:solidFill>
                 <a:latin typeface="Calibri"/>
               </a:rPr>
-              <a:t>Brand-consistent, ready-to-publish content across formats</a:t>
+              <a:t>•  Aligned with UGC internship guidelines &amp; AICTE internship framework</a:t>
+            </a:r>
+          </a:p>
+          <a:p>
+            <a:pPr>
+              <a:lnSpc>
+                <a:spcPct val="105000"/>
+              </a:lnSpc>
+              <a:spcAft>
+                <a:spcPts val="200"/>
+              </a:spcAft>
+            </a:pPr>
+            <a:r>
+              <a:rPr sz="1100" dirty="0">
+                <a:solidFill>
+                  <a:srgbClr val="222A33"/>
+                </a:solidFill>
+                <a:latin typeface="Calibri"/>
+              </a:rPr>
+              <a:t>•  DPDP Act, 2023-compliant consent-based data collection &amp; sharing</a:t>
+            </a:r>
+          </a:p>
+          <a:p>
+            <a:pPr>
+              <a:lnSpc>
+                <a:spcPct val="105000"/>
+              </a:lnSpc>
+              <a:spcAft>
+                <a:spcPts val="200"/>
+              </a:spcAft>
+            </a:pPr>
+            <a:r>
+              <a:rPr sz="1100" dirty="0">
+                <a:solidFill>
+                  <a:srgbClr val="222A33"/>
+                </a:solidFill>
+                <a:latin typeface="Calibri"/>
+              </a:rPr>
+              <a:t>•  Role-based access ensures data </a:t>
+            </a:r>
+            <a:r>
+              <a:rPr sz="1100" dirty="0" err="1">
+                <a:solidFill>
+                  <a:srgbClr val="222A33"/>
+                </a:solidFill>
+                <a:latin typeface="Calibri"/>
+              </a:rPr>
+              <a:t>minimisation</a:t>
+            </a:r>
+            <a:r>
+              <a:rPr sz="1100" dirty="0">
+                <a:solidFill>
+                  <a:srgbClr val="222A33"/>
+                </a:solidFill>
+                <a:latin typeface="Calibri"/>
+              </a:rPr>
+              <a:t> for each stakeholder type</a:t>
             </a:r>
           </a:p>
         </p:txBody>
@@ -9792,14 +11972,16 @@
         </p:nvSpPr>
         <p:spPr>
           <a:xfrm>
-            <a:off x="8039100" y="4206240"/>
-            <a:ext cx="3246120" cy="1417320"/>
+            <a:off x="7763255" y="2148840"/>
+            <a:ext cx="3538727" cy="1691640"/>
           </a:xfrm>
           <a:prstGeom prst="roundRect">
-            <a:avLst/>
+            <a:avLst>
+              <a:gd name="adj" fmla="val 6000"/>
+            </a:avLst>
           </a:prstGeom>
           <a:solidFill>
-            <a:srgbClr val="F4F7FB"/>
+            <a:srgbClr val="F1F5FA"/>
           </a:solidFill>
           <a:ln>
             <a:noFill/>
@@ -9837,8 +12019,8 @@
         </p:nvSpPr>
         <p:spPr>
           <a:xfrm>
-            <a:off x="9342120" y="3886200"/>
-            <a:ext cx="640080" cy="640080"/>
+            <a:off x="7872983" y="2258568"/>
+            <a:ext cx="365760" cy="365760"/>
           </a:xfrm>
           <a:prstGeom prst="ellipse">
             <a:avLst/>
@@ -9866,11 +12048,18 @@
           </a:fontRef>
         </p:style>
         <p:txBody>
-          <a:bodyPr wrap="square" lIns="25400" rIns="25400" rtlCol="0" anchor="ctr"/>
+          <a:bodyPr lIns="0" tIns="0" rIns="0" bIns="0" rtlCol="0" anchor="ctr"/>
           <a:lstStyle/>
           <a:p>
             <a:pPr algn="ctr"/>
-            <a:endParaRPr/>
+            <a:r>
+              <a:rPr sz="1300" b="1">
+                <a:solidFill>
+                  <a:srgbClr val="FFFFFF"/>
+                </a:solidFill>
+              </a:rPr>
+              <a:t>E</a:t>
+            </a:r>
           </a:p>
         </p:txBody>
       </p:sp>
@@ -9882,8 +12071,8 @@
         </p:nvSpPr>
         <p:spPr>
           <a:xfrm>
-            <a:off x="8039100" y="4617720"/>
-            <a:ext cx="3246120" cy="274320"/>
+            <a:off x="8311895" y="2276856"/>
+            <a:ext cx="2807207" cy="246221"/>
           </a:xfrm>
           <a:prstGeom prst="rect">
             <a:avLst/>
@@ -9891,20 +12080,24 @@
           <a:noFill/>
         </p:spPr>
         <p:txBody>
-          <a:bodyPr wrap="square" lIns="0" tIns="0" rIns="0" bIns="0" anchor="ctr">
+          <a:bodyPr wrap="square" lIns="0" tIns="0" rIns="0" bIns="0" anchor="t">
             <a:spAutoFit/>
           </a:bodyPr>
           <a:lstStyle/>
           <a:p>
-            <a:pPr algn="ctr"/>
-            <a:r>
-              <a:rPr sz="1000" b="1">
-                <a:solidFill>
-                  <a:srgbClr val="1E2A4A"/>
+            <a:pPr algn="l">
+              <a:lnSpc>
+                <a:spcPct val="100000"/>
+              </a:lnSpc>
+            </a:pPr>
+            <a:r>
+              <a:rPr sz="1600" b="1" i="0" dirty="0">
+                <a:solidFill>
+                  <a:srgbClr val="1F3864"/>
                 </a:solidFill>
                 <a:latin typeface="Calibri"/>
               </a:rPr>
-              <a:t>Leadership</a:t>
+              <a:t>Economic</a:t>
             </a:r>
           </a:p>
         </p:txBody>
@@ -9917,8 +12110,8 @@
         </p:nvSpPr>
         <p:spPr>
           <a:xfrm>
-            <a:off x="8176260" y="4937760"/>
-            <a:ext cx="2971800" cy="594360"/>
+            <a:off x="7964423" y="2715768"/>
+            <a:ext cx="3154679" cy="1110560"/>
           </a:xfrm>
           <a:prstGeom prst="rect">
             <a:avLst/>
@@ -9926,20 +12119,83 @@
           <a:noFill/>
         </p:spPr>
         <p:txBody>
-          <a:bodyPr wrap="square" lIns="0" tIns="0" rIns="0" bIns="0" anchor="ctr">
+          <a:bodyPr wrap="square" lIns="0" tIns="0" rIns="0" bIns="0">
             <a:spAutoFit/>
           </a:bodyPr>
           <a:lstStyle/>
           <a:p>
-            <a:pPr algn="ctr"/>
-            <a:r>
-              <a:rPr sz="1050" b="0">
-                <a:solidFill>
-                  <a:srgbClr val="555555"/>
+            <a:pPr>
+              <a:lnSpc>
+                <a:spcPct val="105000"/>
+              </a:lnSpc>
+              <a:spcAft>
+                <a:spcPts val="200"/>
+              </a:spcAft>
+            </a:pPr>
+            <a:r>
+              <a:rPr sz="1100" dirty="0">
+                <a:solidFill>
+                  <a:srgbClr val="222A33"/>
                 </a:solidFill>
                 <a:latin typeface="Calibri"/>
               </a:rPr>
-              <a:t>Auto-generated executive summaries &amp; slide decks in minutes</a:t>
+              <a:t>•  Low </a:t>
+            </a:r>
+            <a:r>
+              <a:rPr sz="1100" dirty="0" err="1">
+                <a:solidFill>
+                  <a:srgbClr val="222A33"/>
+                </a:solidFill>
+                <a:latin typeface="Calibri"/>
+              </a:rPr>
+              <a:t>opex</a:t>
+            </a:r>
+            <a:r>
+              <a:rPr sz="1100" dirty="0">
+                <a:solidFill>
+                  <a:srgbClr val="222A33"/>
+                </a:solidFill>
+                <a:latin typeface="Calibri"/>
+              </a:rPr>
+              <a:t> via pay-as-you-go cloud infra (~₹0.8–1.2L/month at pilot scale)</a:t>
+            </a:r>
+          </a:p>
+          <a:p>
+            <a:pPr>
+              <a:lnSpc>
+                <a:spcPct val="105000"/>
+              </a:lnSpc>
+              <a:spcAft>
+                <a:spcPts val="200"/>
+              </a:spcAft>
+            </a:pPr>
+            <a:r>
+              <a:rPr sz="1100" dirty="0">
+                <a:solidFill>
+                  <a:srgbClr val="222A33"/>
+                </a:solidFill>
+                <a:latin typeface="Calibri"/>
+              </a:rPr>
+              <a:t>•  Freemium model for institutions; nominal subscription for large recruiters</a:t>
+            </a:r>
+          </a:p>
+          <a:p>
+            <a:pPr>
+              <a:lnSpc>
+                <a:spcPct val="105000"/>
+              </a:lnSpc>
+              <a:spcAft>
+                <a:spcPts val="200"/>
+              </a:spcAft>
+            </a:pPr>
+            <a:r>
+              <a:rPr sz="1100" dirty="0">
+                <a:solidFill>
+                  <a:srgbClr val="222A33"/>
+                </a:solidFill>
+                <a:latin typeface="Calibri"/>
+              </a:rPr>
+              <a:t>•  Central govt. Ayush-sector grant + CSR partnerships to fund scale-up</a:t>
             </a:r>
           </a:p>
         </p:txBody>
@@ -9952,8 +12208,8 @@
         </p:nvSpPr>
         <p:spPr>
           <a:xfrm>
-            <a:off x="612648" y="5806440"/>
-            <a:ext cx="10972800" cy="457200"/>
+            <a:off x="411480" y="3977639"/>
+            <a:ext cx="7315200" cy="276999"/>
           </a:xfrm>
           <a:prstGeom prst="rect">
             <a:avLst/>
@@ -9961,28 +12217,740 @@
           <a:noFill/>
         </p:spPr>
         <p:txBody>
-          <a:bodyPr wrap="square">
+          <a:bodyPr wrap="square" lIns="0" tIns="0" rIns="0" bIns="0" anchor="t">
             <a:spAutoFit/>
           </a:bodyPr>
           <a:lstStyle/>
           <a:p>
-            <a:pPr algn="l"/>
-            <a:r>
-              <a:rPr sz="1200" b="1" i="1">
-                <a:solidFill>
-                  <a:srgbClr val="1F4E79"/>
+            <a:pPr algn="l">
+              <a:lnSpc>
+                <a:spcPct val="100000"/>
+              </a:lnSpc>
+            </a:pPr>
+            <a:r>
+              <a:rPr b="1" i="0" dirty="0">
+                <a:solidFill>
+                  <a:srgbClr val="1F3864"/>
                 </a:solidFill>
                 <a:latin typeface="Calibri"/>
               </a:rPr>
-              <a:t>Key outcomes:  70%+ faster content turnaround   •   8+ output formats from one source   •   100% provenance-verified content   •   SDG 9 &amp; 16 — Industry Innovation &amp; Strong Institutions</a:t>
-            </a:r>
-          </a:p>
-        </p:txBody>
-      </p:sp>
+              <a:t>Risk Matrix &amp; Mitigation</a:t>
+            </a:r>
+          </a:p>
+        </p:txBody>
+      </p:sp>
+      <p:graphicFrame>
+        <p:nvGraphicFramePr>
+          <p:cNvPr id="17424" name="Table 17423"/>
+          <p:cNvGraphicFramePr>
+            <a:graphicFrameLocks noGrp="1"/>
+          </p:cNvGraphicFramePr>
+          <p:nvPr>
+            <p:extLst>
+              <p:ext uri="{D42A27DB-BD31-4B8C-83A1-F6EECF244321}">
+                <p14:modId xmlns:p14="http://schemas.microsoft.com/office/powerpoint/2010/main" val="2128280871"/>
+              </p:ext>
+            </p:extLst>
+          </p:nvPr>
+        </p:nvGraphicFramePr>
+        <p:xfrm>
+          <a:off x="411480" y="4297680"/>
+          <a:ext cx="11338560" cy="1874519"/>
+        </p:xfrm>
+        <a:graphic>
+          <a:graphicData uri="http://schemas.openxmlformats.org/drawingml/2006/table">
+            <a:tbl>
+              <a:tblPr firstRow="1" bandRow="1">
+                <a:tableStyleId>{5C22544A-7EE6-4342-B048-85BDC9FD1C3A}</a:tableStyleId>
+              </a:tblPr>
+              <a:tblGrid>
+                <a:gridCol w="3017520">
+                  <a:extLst>
+                    <a:ext uri="{9D8B030D-6E8A-4147-A177-3AD203B41FA5}">
+                      <a16:colId xmlns:a16="http://schemas.microsoft.com/office/drawing/2014/main" val="20000"/>
+                    </a:ext>
+                  </a:extLst>
+                </a:gridCol>
+                <a:gridCol w="1280160">
+                  <a:extLst>
+                    <a:ext uri="{9D8B030D-6E8A-4147-A177-3AD203B41FA5}">
+                      <a16:colId xmlns:a16="http://schemas.microsoft.com/office/drawing/2014/main" val="20001"/>
+                    </a:ext>
+                  </a:extLst>
+                </a:gridCol>
+                <a:gridCol w="1097280">
+                  <a:extLst>
+                    <a:ext uri="{9D8B030D-6E8A-4147-A177-3AD203B41FA5}">
+                      <a16:colId xmlns:a16="http://schemas.microsoft.com/office/drawing/2014/main" val="20002"/>
+                    </a:ext>
+                  </a:extLst>
+                </a:gridCol>
+                <a:gridCol w="5943600">
+                  <a:extLst>
+                    <a:ext uri="{9D8B030D-6E8A-4147-A177-3AD203B41FA5}">
+                      <a16:colId xmlns:a16="http://schemas.microsoft.com/office/drawing/2014/main" val="20003"/>
+                    </a:ext>
+                  </a:extLst>
+                </a:gridCol>
+              </a:tblGrid>
+              <a:tr h="312419">
+                <a:tc>
+                  <a:txBody>
+                    <a:bodyPr/>
+                    <a:lstStyle/>
+                    <a:p>
+                      <a:pPr algn="l"/>
+                      <a:r>
+                        <a:rPr sz="1200" b="1">
+                          <a:solidFill>
+                            <a:srgbClr val="FFFFFF"/>
+                          </a:solidFill>
+                        </a:rPr>
+                        <a:t>Risk</a:t>
+                      </a:r>
+                    </a:p>
+                  </a:txBody>
+                  <a:tcPr marL="76200" marR="50800" marT="38100" marB="38100">
+                    <a:solidFill>
+                      <a:srgbClr val="1F3864"/>
+                    </a:solidFill>
+                  </a:tcPr>
+                </a:tc>
+                <a:tc>
+                  <a:txBody>
+                    <a:bodyPr/>
+                    <a:lstStyle/>
+                    <a:p>
+                      <a:pPr algn="l"/>
+                      <a:r>
+                        <a:rPr sz="1200" b="1">
+                          <a:solidFill>
+                            <a:srgbClr val="FFFFFF"/>
+                          </a:solidFill>
+                        </a:rPr>
+                        <a:t>Likelihood</a:t>
+                      </a:r>
+                    </a:p>
+                  </a:txBody>
+                  <a:tcPr marL="76200" marR="50800" marT="38100" marB="38100">
+                    <a:solidFill>
+                      <a:srgbClr val="1F3864"/>
+                    </a:solidFill>
+                  </a:tcPr>
+                </a:tc>
+                <a:tc>
+                  <a:txBody>
+                    <a:bodyPr/>
+                    <a:lstStyle/>
+                    <a:p>
+                      <a:pPr algn="l"/>
+                      <a:r>
+                        <a:rPr sz="1200" b="1">
+                          <a:solidFill>
+                            <a:srgbClr val="FFFFFF"/>
+                          </a:solidFill>
+                        </a:rPr>
+                        <a:t>Impact</a:t>
+                      </a:r>
+                    </a:p>
+                  </a:txBody>
+                  <a:tcPr marL="76200" marR="50800" marT="38100" marB="38100">
+                    <a:solidFill>
+                      <a:srgbClr val="1F3864"/>
+                    </a:solidFill>
+                  </a:tcPr>
+                </a:tc>
+                <a:tc>
+                  <a:txBody>
+                    <a:bodyPr/>
+                    <a:lstStyle/>
+                    <a:p>
+                      <a:pPr algn="l"/>
+                      <a:r>
+                        <a:rPr sz="1200" b="1">
+                          <a:solidFill>
+                            <a:srgbClr val="FFFFFF"/>
+                          </a:solidFill>
+                        </a:rPr>
+                        <a:t>Mitigation Strategy</a:t>
+                      </a:r>
+                    </a:p>
+                  </a:txBody>
+                  <a:tcPr marL="76200" marR="50800" marT="38100" marB="38100">
+                    <a:solidFill>
+                      <a:srgbClr val="1F3864"/>
+                    </a:solidFill>
+                  </a:tcPr>
+                </a:tc>
+                <a:extLst>
+                  <a:ext uri="{0D108BD9-81ED-4DB2-BD59-A6C34878D82A}">
+                    <a16:rowId xmlns:a16="http://schemas.microsoft.com/office/drawing/2014/main" val="10000"/>
+                  </a:ext>
+                </a:extLst>
+              </a:tr>
+              <a:tr h="312419">
+                <a:tc>
+                  <a:txBody>
+                    <a:bodyPr/>
+                    <a:lstStyle/>
+                    <a:p>
+                      <a:pPr>
+                        <a:lnSpc>
+                          <a:spcPct val="100000"/>
+                        </a:lnSpc>
+                      </a:pPr>
+                      <a:r>
+                        <a:rPr sz="1200">
+                          <a:solidFill>
+                            <a:srgbClr val="222A33"/>
+                          </a:solidFill>
+                        </a:rPr>
+                        <a:t>Low initial institutional adoption</a:t>
+                      </a:r>
+                    </a:p>
+                  </a:txBody>
+                  <a:tcPr marL="76200" marR="50800" marT="38100" marB="38100">
+                    <a:solidFill>
+                      <a:srgbClr val="FFFFFF"/>
+                    </a:solidFill>
+                  </a:tcPr>
+                </a:tc>
+                <a:tc>
+                  <a:txBody>
+                    <a:bodyPr/>
+                    <a:lstStyle/>
+                    <a:p>
+                      <a:pPr>
+                        <a:lnSpc>
+                          <a:spcPct val="100000"/>
+                        </a:lnSpc>
+                      </a:pPr>
+                      <a:r>
+                        <a:rPr sz="1200">
+                          <a:solidFill>
+                            <a:srgbClr val="222A33"/>
+                          </a:solidFill>
+                        </a:rPr>
+                        <a:t>Medium</a:t>
+                      </a:r>
+                    </a:p>
+                  </a:txBody>
+                  <a:tcPr marL="76200" marR="50800" marT="38100" marB="38100">
+                    <a:solidFill>
+                      <a:srgbClr val="FFFFFF"/>
+                    </a:solidFill>
+                  </a:tcPr>
+                </a:tc>
+                <a:tc>
+                  <a:txBody>
+                    <a:bodyPr/>
+                    <a:lstStyle/>
+                    <a:p>
+                      <a:pPr>
+                        <a:lnSpc>
+                          <a:spcPct val="100000"/>
+                        </a:lnSpc>
+                      </a:pPr>
+                      <a:r>
+                        <a:rPr sz="1200">
+                          <a:solidFill>
+                            <a:srgbClr val="222A33"/>
+                          </a:solidFill>
+                        </a:rPr>
+                        <a:t>High</a:t>
+                      </a:r>
+                    </a:p>
+                  </a:txBody>
+                  <a:tcPr marL="76200" marR="50800" marT="38100" marB="38100">
+                    <a:solidFill>
+                      <a:srgbClr val="FFFFFF"/>
+                    </a:solidFill>
+                  </a:tcPr>
+                </a:tc>
+                <a:tc>
+                  <a:txBody>
+                    <a:bodyPr/>
+                    <a:lstStyle/>
+                    <a:p>
+                      <a:pPr>
+                        <a:lnSpc>
+                          <a:spcPct val="100000"/>
+                        </a:lnSpc>
+                      </a:pPr>
+                      <a:r>
+                        <a:rPr sz="1200" dirty="0">
+                          <a:solidFill>
+                            <a:srgbClr val="222A33"/>
+                          </a:solidFill>
+                        </a:rPr>
+                        <a:t>Pilot at AIIA + 2–3 partner colleges with onboarding support</a:t>
+                      </a:r>
+                    </a:p>
+                  </a:txBody>
+                  <a:tcPr marL="76200" marR="50800" marT="38100" marB="38100">
+                    <a:solidFill>
+                      <a:srgbClr val="FFFFFF"/>
+                    </a:solidFill>
+                  </a:tcPr>
+                </a:tc>
+                <a:extLst>
+                  <a:ext uri="{0D108BD9-81ED-4DB2-BD59-A6C34878D82A}">
+                    <a16:rowId xmlns:a16="http://schemas.microsoft.com/office/drawing/2014/main" val="10001"/>
+                  </a:ext>
+                </a:extLst>
+              </a:tr>
+              <a:tr h="312419">
+                <a:tc>
+                  <a:txBody>
+                    <a:bodyPr/>
+                    <a:lstStyle/>
+                    <a:p>
+                      <a:pPr>
+                        <a:lnSpc>
+                          <a:spcPct val="100000"/>
+                        </a:lnSpc>
+                      </a:pPr>
+                      <a:r>
+                        <a:rPr sz="1200">
+                          <a:solidFill>
+                            <a:srgbClr val="222A33"/>
+                          </a:solidFill>
+                        </a:rPr>
+                        <a:t>Inaccurate self-reported skill data</a:t>
+                      </a:r>
+                    </a:p>
+                  </a:txBody>
+                  <a:tcPr marL="76200" marR="50800" marT="38100" marB="38100">
+                    <a:solidFill>
+                      <a:srgbClr val="F4F7FA"/>
+                    </a:solidFill>
+                  </a:tcPr>
+                </a:tc>
+                <a:tc>
+                  <a:txBody>
+                    <a:bodyPr/>
+                    <a:lstStyle/>
+                    <a:p>
+                      <a:pPr>
+                        <a:lnSpc>
+                          <a:spcPct val="100000"/>
+                        </a:lnSpc>
+                      </a:pPr>
+                      <a:r>
+                        <a:rPr sz="1200">
+                          <a:solidFill>
+                            <a:srgbClr val="222A33"/>
+                          </a:solidFill>
+                        </a:rPr>
+                        <a:t>High</a:t>
+                      </a:r>
+                    </a:p>
+                  </a:txBody>
+                  <a:tcPr marL="76200" marR="50800" marT="38100" marB="38100">
+                    <a:solidFill>
+                      <a:srgbClr val="F4F7FA"/>
+                    </a:solidFill>
+                  </a:tcPr>
+                </a:tc>
+                <a:tc>
+                  <a:txBody>
+                    <a:bodyPr/>
+                    <a:lstStyle/>
+                    <a:p>
+                      <a:pPr>
+                        <a:lnSpc>
+                          <a:spcPct val="100000"/>
+                        </a:lnSpc>
+                      </a:pPr>
+                      <a:r>
+                        <a:rPr sz="1200">
+                          <a:solidFill>
+                            <a:srgbClr val="222A33"/>
+                          </a:solidFill>
+                        </a:rPr>
+                        <a:t>Medium</a:t>
+                      </a:r>
+                    </a:p>
+                  </a:txBody>
+                  <a:tcPr marL="76200" marR="50800" marT="38100" marB="38100">
+                    <a:solidFill>
+                      <a:srgbClr val="F4F7FA"/>
+                    </a:solidFill>
+                  </a:tcPr>
+                </a:tc>
+                <a:tc>
+                  <a:txBody>
+                    <a:bodyPr/>
+                    <a:lstStyle/>
+                    <a:p>
+                      <a:pPr>
+                        <a:lnSpc>
+                          <a:spcPct val="100000"/>
+                        </a:lnSpc>
+                      </a:pPr>
+                      <a:r>
+                        <a:rPr sz="1200">
+                          <a:solidFill>
+                            <a:srgbClr val="222A33"/>
+                          </a:solidFill>
+                        </a:rPr>
+                        <a:t>Verified assessments &amp; third-party certification checks</a:t>
+                      </a:r>
+                    </a:p>
+                  </a:txBody>
+                  <a:tcPr marL="76200" marR="50800" marT="38100" marB="38100">
+                    <a:solidFill>
+                      <a:srgbClr val="F4F7FA"/>
+                    </a:solidFill>
+                  </a:tcPr>
+                </a:tc>
+                <a:extLst>
+                  <a:ext uri="{0D108BD9-81ED-4DB2-BD59-A6C34878D82A}">
+                    <a16:rowId xmlns:a16="http://schemas.microsoft.com/office/drawing/2014/main" val="10002"/>
+                  </a:ext>
+                </a:extLst>
+              </a:tr>
+              <a:tr h="312419">
+                <a:tc>
+                  <a:txBody>
+                    <a:bodyPr/>
+                    <a:lstStyle/>
+                    <a:p>
+                      <a:pPr>
+                        <a:lnSpc>
+                          <a:spcPct val="100000"/>
+                        </a:lnSpc>
+                      </a:pPr>
+                      <a:r>
+                        <a:rPr sz="1200">
+                          <a:solidFill>
+                            <a:srgbClr val="222A33"/>
+                          </a:solidFill>
+                        </a:rPr>
+                        <a:t>Evolving industry skill taxonomy</a:t>
+                      </a:r>
+                    </a:p>
+                  </a:txBody>
+                  <a:tcPr marL="76200" marR="50800" marT="38100" marB="38100">
+                    <a:solidFill>
+                      <a:srgbClr val="FFFFFF"/>
+                    </a:solidFill>
+                  </a:tcPr>
+                </a:tc>
+                <a:tc>
+                  <a:txBody>
+                    <a:bodyPr/>
+                    <a:lstStyle/>
+                    <a:p>
+                      <a:pPr>
+                        <a:lnSpc>
+                          <a:spcPct val="100000"/>
+                        </a:lnSpc>
+                      </a:pPr>
+                      <a:r>
+                        <a:rPr sz="1200">
+                          <a:solidFill>
+                            <a:srgbClr val="222A33"/>
+                          </a:solidFill>
+                        </a:rPr>
+                        <a:t>Medium</a:t>
+                      </a:r>
+                    </a:p>
+                  </a:txBody>
+                  <a:tcPr marL="76200" marR="50800" marT="38100" marB="38100">
+                    <a:solidFill>
+                      <a:srgbClr val="FFFFFF"/>
+                    </a:solidFill>
+                  </a:tcPr>
+                </a:tc>
+                <a:tc>
+                  <a:txBody>
+                    <a:bodyPr/>
+                    <a:lstStyle/>
+                    <a:p>
+                      <a:pPr>
+                        <a:lnSpc>
+                          <a:spcPct val="100000"/>
+                        </a:lnSpc>
+                      </a:pPr>
+                      <a:r>
+                        <a:rPr sz="1200">
+                          <a:solidFill>
+                            <a:srgbClr val="222A33"/>
+                          </a:solidFill>
+                        </a:rPr>
+                        <a:t>Medium</a:t>
+                      </a:r>
+                    </a:p>
+                  </a:txBody>
+                  <a:tcPr marL="76200" marR="50800" marT="38100" marB="38100">
+                    <a:solidFill>
+                      <a:srgbClr val="FFFFFF"/>
+                    </a:solidFill>
+                  </a:tcPr>
+                </a:tc>
+                <a:tc>
+                  <a:txBody>
+                    <a:bodyPr/>
+                    <a:lstStyle/>
+                    <a:p>
+                      <a:pPr>
+                        <a:lnSpc>
+                          <a:spcPct val="100000"/>
+                        </a:lnSpc>
+                      </a:pPr>
+                      <a:r>
+                        <a:rPr sz="1200">
+                          <a:solidFill>
+                            <a:srgbClr val="222A33"/>
+                          </a:solidFill>
+                        </a:rPr>
+                        <a:t>Quarterly industry-advisory review + model retraining</a:t>
+                      </a:r>
+                    </a:p>
+                  </a:txBody>
+                  <a:tcPr marL="76200" marR="50800" marT="38100" marB="38100">
+                    <a:solidFill>
+                      <a:srgbClr val="FFFFFF"/>
+                    </a:solidFill>
+                  </a:tcPr>
+                </a:tc>
+                <a:extLst>
+                  <a:ext uri="{0D108BD9-81ED-4DB2-BD59-A6C34878D82A}">
+                    <a16:rowId xmlns:a16="http://schemas.microsoft.com/office/drawing/2014/main" val="10003"/>
+                  </a:ext>
+                </a:extLst>
+              </a:tr>
+              <a:tr h="312419">
+                <a:tc>
+                  <a:txBody>
+                    <a:bodyPr/>
+                    <a:lstStyle/>
+                    <a:p>
+                      <a:pPr>
+                        <a:lnSpc>
+                          <a:spcPct val="100000"/>
+                        </a:lnSpc>
+                      </a:pPr>
+                      <a:r>
+                        <a:rPr sz="1200">
+                          <a:solidFill>
+                            <a:srgbClr val="222A33"/>
+                          </a:solidFill>
+                        </a:rPr>
+                        <a:t>Data privacy / DPDP non-compliance</a:t>
+                      </a:r>
+                    </a:p>
+                  </a:txBody>
+                  <a:tcPr marL="76200" marR="50800" marT="38100" marB="38100">
+                    <a:solidFill>
+                      <a:srgbClr val="F4F7FA"/>
+                    </a:solidFill>
+                  </a:tcPr>
+                </a:tc>
+                <a:tc>
+                  <a:txBody>
+                    <a:bodyPr/>
+                    <a:lstStyle/>
+                    <a:p>
+                      <a:pPr>
+                        <a:lnSpc>
+                          <a:spcPct val="100000"/>
+                        </a:lnSpc>
+                      </a:pPr>
+                      <a:r>
+                        <a:rPr sz="1200">
+                          <a:solidFill>
+                            <a:srgbClr val="222A33"/>
+                          </a:solidFill>
+                        </a:rPr>
+                        <a:t>Low</a:t>
+                      </a:r>
+                    </a:p>
+                  </a:txBody>
+                  <a:tcPr marL="76200" marR="50800" marT="38100" marB="38100">
+                    <a:solidFill>
+                      <a:srgbClr val="F4F7FA"/>
+                    </a:solidFill>
+                  </a:tcPr>
+                </a:tc>
+                <a:tc>
+                  <a:txBody>
+                    <a:bodyPr/>
+                    <a:lstStyle/>
+                    <a:p>
+                      <a:pPr>
+                        <a:lnSpc>
+                          <a:spcPct val="100000"/>
+                        </a:lnSpc>
+                      </a:pPr>
+                      <a:r>
+                        <a:rPr sz="1200">
+                          <a:solidFill>
+                            <a:srgbClr val="222A33"/>
+                          </a:solidFill>
+                        </a:rPr>
+                        <a:t>High</a:t>
+                      </a:r>
+                    </a:p>
+                  </a:txBody>
+                  <a:tcPr marL="76200" marR="50800" marT="38100" marB="38100">
+                    <a:solidFill>
+                      <a:srgbClr val="F4F7FA"/>
+                    </a:solidFill>
+                  </a:tcPr>
+                </a:tc>
+                <a:tc>
+                  <a:txBody>
+                    <a:bodyPr/>
+                    <a:lstStyle/>
+                    <a:p>
+                      <a:pPr>
+                        <a:lnSpc>
+                          <a:spcPct val="100000"/>
+                        </a:lnSpc>
+                      </a:pPr>
+                      <a:r>
+                        <a:rPr sz="1200">
+                          <a:solidFill>
+                            <a:srgbClr val="222A33"/>
+                          </a:solidFill>
+                        </a:rPr>
+                        <a:t>Consent-based sharing, encryption, regular audits</a:t>
+                      </a:r>
+                    </a:p>
+                  </a:txBody>
+                  <a:tcPr marL="76200" marR="50800" marT="38100" marB="38100">
+                    <a:solidFill>
+                      <a:srgbClr val="F4F7FA"/>
+                    </a:solidFill>
+                  </a:tcPr>
+                </a:tc>
+                <a:extLst>
+                  <a:ext uri="{0D108BD9-81ED-4DB2-BD59-A6C34878D82A}">
+                    <a16:rowId xmlns:a16="http://schemas.microsoft.com/office/drawing/2014/main" val="10004"/>
+                  </a:ext>
+                </a:extLst>
+              </a:tr>
+              <a:tr h="312424">
+                <a:tc>
+                  <a:txBody>
+                    <a:bodyPr/>
+                    <a:lstStyle/>
+                    <a:p>
+                      <a:pPr>
+                        <a:lnSpc>
+                          <a:spcPct val="100000"/>
+                        </a:lnSpc>
+                      </a:pPr>
+                      <a:r>
+                        <a:rPr sz="1200">
+                          <a:solidFill>
+                            <a:srgbClr val="222A33"/>
+                          </a:solidFill>
+                        </a:rPr>
+                        <a:t>AI cold-start for new users</a:t>
+                      </a:r>
+                    </a:p>
+                  </a:txBody>
+                  <a:tcPr marL="76200" marR="50800" marT="38100" marB="38100">
+                    <a:solidFill>
+                      <a:srgbClr val="FFFFFF"/>
+                    </a:solidFill>
+                  </a:tcPr>
+                </a:tc>
+                <a:tc>
+                  <a:txBody>
+                    <a:bodyPr/>
+                    <a:lstStyle/>
+                    <a:p>
+                      <a:pPr>
+                        <a:lnSpc>
+                          <a:spcPct val="100000"/>
+                        </a:lnSpc>
+                      </a:pPr>
+                      <a:r>
+                        <a:rPr sz="1200">
+                          <a:solidFill>
+                            <a:srgbClr val="222A33"/>
+                          </a:solidFill>
+                        </a:rPr>
+                        <a:t>High</a:t>
+                      </a:r>
+                    </a:p>
+                  </a:txBody>
+                  <a:tcPr marL="76200" marR="50800" marT="38100" marB="38100">
+                    <a:solidFill>
+                      <a:srgbClr val="FFFFFF"/>
+                    </a:solidFill>
+                  </a:tcPr>
+                </a:tc>
+                <a:tc>
+                  <a:txBody>
+                    <a:bodyPr/>
+                    <a:lstStyle/>
+                    <a:p>
+                      <a:pPr>
+                        <a:lnSpc>
+                          <a:spcPct val="100000"/>
+                        </a:lnSpc>
+                      </a:pPr>
+                      <a:r>
+                        <a:rPr sz="1200">
+                          <a:solidFill>
+                            <a:srgbClr val="222A33"/>
+                          </a:solidFill>
+                        </a:rPr>
+                        <a:t>Low</a:t>
+                      </a:r>
+                    </a:p>
+                  </a:txBody>
+                  <a:tcPr marL="76200" marR="50800" marT="38100" marB="38100">
+                    <a:solidFill>
+                      <a:srgbClr val="FFFFFF"/>
+                    </a:solidFill>
+                  </a:tcPr>
+                </a:tc>
+                <a:tc>
+                  <a:txBody>
+                    <a:bodyPr/>
+                    <a:lstStyle/>
+                    <a:p>
+                      <a:pPr>
+                        <a:lnSpc>
+                          <a:spcPct val="100000"/>
+                        </a:lnSpc>
+                      </a:pPr>
+                      <a:r>
+                        <a:rPr sz="1200" dirty="0">
+                          <a:solidFill>
+                            <a:srgbClr val="222A33"/>
+                          </a:solidFill>
+                        </a:rPr>
+                        <a:t>Rule-based fallback recommendations until data accrues</a:t>
+                      </a:r>
+                    </a:p>
+                  </a:txBody>
+                  <a:tcPr marL="76200" marR="50800" marT="38100" marB="38100">
+                    <a:solidFill>
+                      <a:srgbClr val="FFFFFF"/>
+                    </a:solidFill>
+                  </a:tcPr>
+                </a:tc>
+                <a:extLst>
+                  <a:ext uri="{0D108BD9-81ED-4DB2-BD59-A6C34878D82A}">
+                    <a16:rowId xmlns:a16="http://schemas.microsoft.com/office/drawing/2014/main" val="10005"/>
+                  </a:ext>
+                </a:extLst>
+              </a:tr>
+            </a:tbl>
+          </a:graphicData>
+        </a:graphic>
+      </p:graphicFrame>
     </p:spTree>
     <p:extLst>
       <p:ext uri="{BB962C8B-B14F-4D97-AF65-F5344CB8AC3E}">
-        <p14:creationId xmlns:p14="http://schemas.microsoft.com/office/powerpoint/2010/main" val="2997144140"/>
+        <p14:creationId xmlns:p14="http://schemas.microsoft.com/office/powerpoint/2010/main" val="3753387913"/>
       </p:ext>
     </p:extLst>
   </p:cSld>
@@ -10117,196 +13085,6 @@
       </p:sp>
       <p:sp>
         <p:nvSpPr>
-          <p:cNvPr id="17410" name="TextBox 8"/>
-          <p:cNvSpPr txBox="1">
-            <a:spLocks noChangeArrowheads="1"/>
-          </p:cNvSpPr>
-          <p:nvPr/>
-        </p:nvSpPr>
-        <p:spPr bwMode="auto">
-          <a:xfrm>
-            <a:off x="612648" y="2514600"/>
-            <a:ext cx="5532120" cy="2893100"/>
-          </a:xfrm>
-          <a:prstGeom prst="rect">
-            <a:avLst/>
-          </a:prstGeom>
-          <a:noFill/>
-          <a:ln w="9525">
-            <a:noFill/>
-            <a:miter lim="800000"/>
-            <a:headEnd/>
-            <a:tailEnd/>
-          </a:ln>
-        </p:spPr>
-        <p:txBody>
-          <a:bodyPr wrap="square">
-            <a:spAutoFit/>
-          </a:bodyPr>
-          <a:lstStyle/>
-          <a:p>
-            <a:pPr marL="342900" marR="0" lvl="0" indent="-342900" algn="just" defTabSz="457200" rtl="0" eaLnBrk="1" fontAlgn="base" latinLnBrk="0" hangingPunct="1">
-              <a:lnSpc>
-                <a:spcPct val="100000"/>
-              </a:lnSpc>
-              <a:spcBef>
-                <a:spcPct val="0"/>
-              </a:spcBef>
-              <a:spcAft>
-                <a:spcPct val="0"/>
-              </a:spcAft>
-              <a:buClrTx/>
-              <a:buSzTx/>
-              <a:buFont typeface="Arial" panose="020B0604020202020204" pitchFamily="34" charset="0"/>
-              <a:buChar char="•"/>
-              <a:tabLst/>
-              <a:defRPr/>
-            </a:pPr>
-            <a:r>
-              <a:rPr lang="en-US" sz="1400" noProof="0" dirty="0">
-                <a:solidFill>
-                  <a:prstClr val="black"/>
-                </a:solidFill>
-                <a:latin typeface="+mj-lt"/>
-                <a:cs typeface="Arial" pitchFamily="34" charset="0"/>
-              </a:rPr>
-              <a:t>[1]  Smart India Hackathon 2026 Problem Statement Portal, Problem Statement ID 26154. [Online]. Available: https://sih.gov.in</a:t>
-            </a:r>
-            <a:endParaRPr kumimoji="0" lang="en-US" sz="1400" b="0" i="0" u="none" strike="noStrike" kern="1200" cap="none" spc="0" normalizeH="0" baseline="0" noProof="0" dirty="0">
-              <a:ln>
-                <a:noFill/>
-              </a:ln>
-              <a:solidFill>
-                <a:prstClr val="black"/>
-              </a:solidFill>
-              <a:effectLst/>
-              <a:uLnTx/>
-              <a:uFillTx/>
-              <a:latin typeface="+mj-lt"/>
-              <a:ea typeface="ＭＳ Ｐゴシック" pitchFamily="1" charset="-128"/>
-              <a:cs typeface="Arial" pitchFamily="34" charset="0"/>
-            </a:endParaRPr>
-          </a:p>
-          <a:p>
-            <a:pPr marL="342900" marR="0" lvl="0" indent="-342900" algn="just" defTabSz="457200" rtl="0" eaLnBrk="1" fontAlgn="base" latinLnBrk="0" hangingPunct="1">
-              <a:lnSpc>
-                <a:spcPct val="100000"/>
-              </a:lnSpc>
-              <a:spcBef>
-                <a:spcPct val="0"/>
-              </a:spcBef>
-              <a:spcAft>
-                <a:spcPct val="0"/>
-              </a:spcAft>
-              <a:buClrTx/>
-              <a:buSzTx/>
-              <a:buFont typeface="Arial" panose="020B0604020202020204" pitchFamily="34" charset="0"/>
-              <a:buChar char="•"/>
-              <a:tabLst/>
-              <a:defRPr/>
-            </a:pPr>
-            <a:r>
-              <a:rPr lang="en-US" sz="1400" noProof="0" dirty="0">
-                <a:solidFill>
-                  <a:prstClr val="black"/>
-                </a:solidFill>
-                <a:latin typeface="+mj-lt"/>
-                <a:cs typeface="Arial" pitchFamily="34" charset="0"/>
-              </a:rPr>
-              <a:t>[2]  T. Brown et al., "Language Models are Few-Shot Learners," in Proc. Advances in Neural Information Processing Systems (NeurIPS), 2020, pp. 1877–1901.</a:t>
-            </a:r>
-          </a:p>
-          <a:p>
-            <a:pPr marL="342900" marR="0" lvl="0" indent="-342900" algn="just" defTabSz="457200" rtl="0" eaLnBrk="1" fontAlgn="base" latinLnBrk="0" hangingPunct="1">
-              <a:lnSpc>
-                <a:spcPct val="100000"/>
-              </a:lnSpc>
-              <a:spcBef>
-                <a:spcPct val="0"/>
-              </a:spcBef>
-              <a:spcAft>
-                <a:spcPct val="0"/>
-              </a:spcAft>
-              <a:buClrTx/>
-              <a:buSzTx/>
-              <a:buFont typeface="Arial" panose="020B0604020202020204" pitchFamily="34" charset="0"/>
-              <a:buChar char="•"/>
-              <a:tabLst/>
-              <a:defRPr/>
-            </a:pPr>
-            <a:r>
-              <a:rPr lang="en-US" sz="1400" noProof="0" dirty="0">
-                <a:solidFill>
-                  <a:prstClr val="black"/>
-                </a:solidFill>
-                <a:latin typeface="+mj-lt"/>
-                <a:cs typeface="Arial" pitchFamily="34" charset="0"/>
-              </a:rPr>
-              <a:t>[3]  A. Radford, J. W. Kim, T. Xu, G. Brockman, C. McLeavey, and I. Sutskever, "Robust Speech Recognition via Large-Scale Weak Supervision," arXiv:2212.04356, 2022.</a:t>
-            </a:r>
-          </a:p>
-          <a:p>
-            <a:pPr marL="342900" marR="0" lvl="0" indent="-342900" algn="just" defTabSz="457200" rtl="0" eaLnBrk="1" fontAlgn="base" latinLnBrk="0" hangingPunct="1">
-              <a:lnSpc>
-                <a:spcPct val="100000"/>
-              </a:lnSpc>
-              <a:spcBef>
-                <a:spcPct val="0"/>
-              </a:spcBef>
-              <a:spcAft>
-                <a:spcPct val="0"/>
-              </a:spcAft>
-              <a:buClrTx/>
-              <a:buSzTx/>
-              <a:buFont typeface="Arial" panose="020B0604020202020204" pitchFamily="34" charset="0"/>
-              <a:buChar char="•"/>
-              <a:tabLst/>
-              <a:defRPr/>
-            </a:pPr>
-            <a:r>
-              <a:rPr lang="en-US" sz="1400" noProof="0" dirty="0">
-                <a:solidFill>
-                  <a:prstClr val="black"/>
-                </a:solidFill>
-                <a:latin typeface="+mj-lt"/>
-                <a:cs typeface="Arial" pitchFamily="34" charset="0"/>
-              </a:rPr>
-              <a:t>[4]  National Critical Information Infrastructure Protection Centre (NCIIPC). [Online]. Available: https://nciipc.gov.in</a:t>
-            </a:r>
-          </a:p>
-          <a:p>
-            <a:pPr marL="342900" marR="0" lvl="0" indent="-342900" algn="just" defTabSz="457200" rtl="0" eaLnBrk="1" fontAlgn="base" latinLnBrk="0" hangingPunct="1">
-              <a:lnSpc>
-                <a:spcPct val="100000"/>
-              </a:lnSpc>
-              <a:spcBef>
-                <a:spcPct val="0"/>
-              </a:spcBef>
-              <a:spcAft>
-                <a:spcPct val="0"/>
-              </a:spcAft>
-              <a:buClrTx/>
-              <a:buSzTx/>
-              <a:buFont typeface="Arial" panose="020B0604020202020204" pitchFamily="34" charset="0"/>
-              <a:buChar char="•"/>
-              <a:tabLst/>
-              <a:defRPr/>
-            </a:pPr>
-            <a:r>
-              <a:rPr lang="en-US" sz="1400" noProof="0" dirty="0">
-                <a:solidFill>
-                  <a:prstClr val="black"/>
-                </a:solidFill>
-                <a:latin typeface="+mj-lt"/>
-                <a:cs typeface="Arial" pitchFamily="34" charset="0"/>
-              </a:rPr>
-              <a:t>[5]  Ministry of Electronics and Information Technology (MeitY), "Digital Personal Data Protection Act, 2023." [Online]. Available: https://www.meity.gov.in</a:t>
-            </a:r>
-          </a:p>
-        </p:txBody>
-      </p:sp>
-      <p:sp>
-        <p:nvSpPr>
           <p:cNvPr id="6" name="Slide Number Placeholder 5"/>
           <p:cNvSpPr>
             <a:spLocks noGrp="1"/>
@@ -10426,7 +13204,7 @@
               <a:defRPr/>
             </a:pPr>
             <a:r>
-              <a:rPr kumimoji="0" lang="en-US" sz="1200" b="0" i="0" u="none" strike="noStrike" kern="1200" cap="none" spc="0" normalizeH="0" baseline="0" noProof="0">
+              <a:rPr kumimoji="0" lang="en-US" sz="1200" b="0" i="0" u="none" strike="noStrike" kern="1200" cap="none" spc="0" normalizeH="0" baseline="0" noProof="0" dirty="0">
                 <a:ln>
                   <a:noFill/>
                 </a:ln>
@@ -10440,22 +13218,8 @@
                 <a:ea typeface="+mn-ea"/>
                 <a:cs typeface="+mn-cs"/>
               </a:rPr>
-              <a:t>@SIH Idea submission- Template</a:t>
-            </a:r>
-            <a:endParaRPr kumimoji="0" lang="en-US" sz="1200" b="0" i="0" u="none" strike="noStrike" kern="1200" cap="none" spc="0" normalizeH="0" baseline="0" noProof="0" dirty="0">
-              <a:ln>
-                <a:noFill/>
-              </a:ln>
-              <a:solidFill>
-                <a:prstClr val="white"/>
-              </a:solidFill>
-              <a:effectLst/>
-              <a:uLnTx/>
-              <a:uFillTx/>
-              <a:latin typeface="TradeGothic"/>
-              <a:ea typeface="+mn-ea"/>
-              <a:cs typeface="+mn-cs"/>
-            </a:endParaRPr>
+              <a:t>@SIH Idea submission</a:t>
+            </a:r>
           </a:p>
         </p:txBody>
       </p:sp>
@@ -10477,7 +13241,7 @@
         <p:spPr>
           <a:xfrm>
             <a:off x="329773" y="252246"/>
-            <a:ext cx="1251857" cy="807334"/>
+            <a:ext cx="1787785" cy="807334"/>
           </a:xfrm>
           <a:prstGeom prst="ellipse">
             <a:avLst/>
@@ -10502,10 +13266,31 @@
           <a:lstStyle/>
           <a:p>
             <a:pPr algn="ctr"/>
-            <a:r>
-              <a:rPr lang="en-US" sz="1000" dirty="0"/>
-              <a:t>Team Invictus</a:t>
-            </a:r>
+            <a:endParaRPr lang="en-US" b="1">
+              <a:latin typeface="Arial" panose="020B0604020202020204" pitchFamily="34" charset="0"/>
+              <a:cs typeface="Arial" panose="020B0604020202020204" pitchFamily="34" charset="0"/>
+            </a:endParaRPr>
+          </a:p>
+          <a:p>
+            <a:pPr algn="ctr"/>
+            <a:r>
+              <a:rPr lang="en-US" b="1">
+                <a:latin typeface="Arial" panose="020B0604020202020204" pitchFamily="34" charset="0"/>
+                <a:cs typeface="Arial" panose="020B0604020202020204" pitchFamily="34" charset="0"/>
+              </a:rPr>
+              <a:t>Team </a:t>
+            </a:r>
+            <a:r>
+              <a:rPr lang="en-US" b="1" dirty="0">
+                <a:latin typeface="Arial" panose="020B0604020202020204" pitchFamily="34" charset="0"/>
+                <a:cs typeface="Arial" panose="020B0604020202020204" pitchFamily="34" charset="0"/>
+              </a:rPr>
+              <a:t>Invictus</a:t>
+            </a:r>
+            <a:endParaRPr lang="en-IN" dirty="0"/>
+          </a:p>
+          <a:p>
+            <a:pPr algn="ctr"/>
             <a:endParaRPr lang="en-IN" dirty="0"/>
           </a:p>
         </p:txBody>
@@ -10542,14 +13327,14 @@
       </p:pic>
       <p:sp>
         <p:nvSpPr>
-          <p:cNvPr id="17411" name="TextBox 17410"/>
+          <p:cNvPr id="17410" name="TextBox 17409"/>
           <p:cNvSpPr txBox="1"/>
           <p:nvPr/>
         </p:nvSpPr>
         <p:spPr>
           <a:xfrm>
-            <a:off x="6309360" y="2514600"/>
-            <a:ext cx="5486400" cy="2200602"/>
+            <a:off x="411480" y="1847088"/>
+            <a:ext cx="7315200" cy="274320"/>
           </a:xfrm>
           <a:prstGeom prst="rect">
             <a:avLst/>
@@ -10557,112 +13342,401 @@
           <a:noFill/>
         </p:spPr>
         <p:txBody>
-          <a:bodyPr wrap="square">
+          <a:bodyPr wrap="square" lIns="0" tIns="0" rIns="0" bIns="0" anchor="t">
             <a:spAutoFit/>
           </a:bodyPr>
           <a:lstStyle/>
           <a:p>
-            <a:pPr>
-              <a:spcAft>
-                <a:spcPts val="1000"/>
-              </a:spcAft>
+            <a:pPr algn="l">
+              <a:lnSpc>
+                <a:spcPct val="100000"/>
+              </a:lnSpc>
             </a:pPr>
             <a:r>
-              <a:rPr sz="1400" dirty="0">
-                <a:solidFill>
-                  <a:srgbClr val="333333"/>
+              <a:rPr sz="1300" b="1" i="0">
+                <a:solidFill>
+                  <a:srgbClr val="1F3864"/>
                 </a:solidFill>
                 <a:latin typeface="Calibri"/>
               </a:rPr>
-              <a:t>[6]  OWASP Foundation, "OWASP Top 10 for Large Language Model Applications," 2024.</a:t>
-            </a:r>
-          </a:p>
-          <a:p>
-            <a:pPr>
-              <a:spcAft>
-                <a:spcPts val="1000"/>
-              </a:spcAft>
-            </a:pPr>
-            <a:r>
-              <a:rPr sz="1400" dirty="0">
-                <a:solidFill>
-                  <a:srgbClr val="333333"/>
-                </a:solidFill>
-                <a:latin typeface="Calibri"/>
-              </a:rPr>
-              <a:t>[7]  P. Lewis et al., "Retrieval-Augmented Generation for Knowledge-Intensive NLP Tasks," in Proc. </a:t>
-            </a:r>
-            <a:r>
-              <a:rPr sz="1400" dirty="0" err="1">
-                <a:solidFill>
-                  <a:srgbClr val="333333"/>
-                </a:solidFill>
-                <a:latin typeface="Calibri"/>
-              </a:rPr>
-              <a:t>NeurIPS</a:t>
-            </a:r>
-            <a:r>
-              <a:rPr sz="1400" dirty="0">
-                <a:solidFill>
-                  <a:srgbClr val="333333"/>
-                </a:solidFill>
-                <a:latin typeface="Calibri"/>
-              </a:rPr>
-              <a:t>, 2020, pp. 9459–9474.</a:t>
-            </a:r>
-          </a:p>
-          <a:p>
-            <a:pPr>
-              <a:spcAft>
-                <a:spcPts val="1000"/>
-              </a:spcAft>
-            </a:pPr>
-            <a:r>
-              <a:rPr sz="1400" dirty="0">
-                <a:solidFill>
-                  <a:srgbClr val="333333"/>
-                </a:solidFill>
-                <a:latin typeface="Calibri"/>
-              </a:rPr>
-              <a:t>[8]  National Institute of Standards and Technology (NIST), "AI Risk Management Framework," NIST AI 100-1, 2023.</a:t>
-            </a:r>
-          </a:p>
-          <a:p>
-            <a:pPr>
-              <a:spcAft>
-                <a:spcPts val="1000"/>
-              </a:spcAft>
-            </a:pPr>
-            <a:r>
-              <a:rPr sz="1400" dirty="0">
-                <a:solidFill>
-                  <a:srgbClr val="333333"/>
-                </a:solidFill>
-                <a:latin typeface="Calibri"/>
-              </a:rPr>
-              <a:t>[9]  </a:t>
-            </a:r>
-            <a:r>
-              <a:rPr sz="1400" dirty="0" err="1">
-                <a:solidFill>
-                  <a:srgbClr val="333333"/>
-                </a:solidFill>
-                <a:latin typeface="Calibri"/>
-              </a:rPr>
-              <a:t>LangChain</a:t>
-            </a:r>
-            <a:r>
-              <a:rPr sz="1400" dirty="0">
-                <a:solidFill>
-                  <a:srgbClr val="333333"/>
-                </a:solidFill>
-                <a:latin typeface="Calibri"/>
-              </a:rPr>
-              <a:t> Documentation. [Online]. Available: https://python.langchain.com</a:t>
-            </a:r>
-          </a:p>
-        </p:txBody>
-      </p:sp>
+              <a:t>Competitive Landscape</a:t>
+            </a:r>
+          </a:p>
+        </p:txBody>
+      </p:sp>
+      <p:graphicFrame>
+        <p:nvGraphicFramePr>
+          <p:cNvPr id="17411" name="Table 17410"/>
+          <p:cNvGraphicFramePr>
+            <a:graphicFrameLocks noGrp="1"/>
+          </p:cNvGraphicFramePr>
+          <p:nvPr/>
+        </p:nvGraphicFramePr>
+        <p:xfrm>
+          <a:off x="411480" y="2176272"/>
+          <a:ext cx="11338560" cy="1234440"/>
+        </p:xfrm>
+        <a:graphic>
+          <a:graphicData uri="http://schemas.openxmlformats.org/drawingml/2006/table">
+            <a:tbl>
+              <a:tblPr firstRow="1" bandRow="1">
+                <a:tableStyleId>{5C22544A-7EE6-4342-B048-85BDC9FD1C3A}</a:tableStyleId>
+              </a:tblPr>
+              <a:tblGrid>
+                <a:gridCol w="2377440">
+                  <a:extLst>
+                    <a:ext uri="{9D8B030D-6E8A-4147-A177-3AD203B41FA5}">
+                      <a16:colId xmlns:a16="http://schemas.microsoft.com/office/drawing/2014/main" val="20000"/>
+                    </a:ext>
+                  </a:extLst>
+                </a:gridCol>
+                <a:gridCol w="3291840">
+                  <a:extLst>
+                    <a:ext uri="{9D8B030D-6E8A-4147-A177-3AD203B41FA5}">
+                      <a16:colId xmlns:a16="http://schemas.microsoft.com/office/drawing/2014/main" val="20001"/>
+                    </a:ext>
+                  </a:extLst>
+                </a:gridCol>
+                <a:gridCol w="5669280">
+                  <a:extLst>
+                    <a:ext uri="{9D8B030D-6E8A-4147-A177-3AD203B41FA5}">
+                      <a16:colId xmlns:a16="http://schemas.microsoft.com/office/drawing/2014/main" val="20002"/>
+                    </a:ext>
+                  </a:extLst>
+                </a:gridCol>
+              </a:tblGrid>
+              <a:tr h="308610">
+                <a:tc>
+                  <a:txBody>
+                    <a:bodyPr/>
+                    <a:lstStyle/>
+                    <a:p>
+                      <a:pPr algn="l"/>
+                      <a:r>
+                        <a:rPr sz="950" b="1">
+                          <a:solidFill>
+                            <a:srgbClr val="FFFFFF"/>
+                          </a:solidFill>
+                        </a:rPr>
+                        <a:t>Existing Platform</a:t>
+                      </a:r>
+                    </a:p>
+                  </a:txBody>
+                  <a:tcPr marL="76200" marR="50800" marT="38100" marB="38100">
+                    <a:solidFill>
+                      <a:srgbClr val="1F3864"/>
+                    </a:solidFill>
+                  </a:tcPr>
+                </a:tc>
+                <a:tc>
+                  <a:txBody>
+                    <a:bodyPr/>
+                    <a:lstStyle/>
+                    <a:p>
+                      <a:pPr algn="l"/>
+                      <a:r>
+                        <a:rPr sz="950" b="1">
+                          <a:solidFill>
+                            <a:srgbClr val="FFFFFF"/>
+                          </a:solidFill>
+                        </a:rPr>
+                        <a:t>Focus Area</a:t>
+                      </a:r>
+                    </a:p>
+                  </a:txBody>
+                  <a:tcPr marL="76200" marR="50800" marT="38100" marB="38100">
+                    <a:solidFill>
+                      <a:srgbClr val="1F3864"/>
+                    </a:solidFill>
+                  </a:tcPr>
+                </a:tc>
+                <a:tc>
+                  <a:txBody>
+                    <a:bodyPr/>
+                    <a:lstStyle/>
+                    <a:p>
+                      <a:pPr algn="l"/>
+                      <a:r>
+                        <a:rPr sz="950" b="1">
+                          <a:solidFill>
+                            <a:srgbClr val="FFFFFF"/>
+                          </a:solidFill>
+                        </a:rPr>
+                        <a:t>Gap SKILL-SETU Addresses</a:t>
+                      </a:r>
+                    </a:p>
+                  </a:txBody>
+                  <a:tcPr marL="76200" marR="50800" marT="38100" marB="38100">
+                    <a:solidFill>
+                      <a:srgbClr val="1F3864"/>
+                    </a:solidFill>
+                  </a:tcPr>
+                </a:tc>
+                <a:extLst>
+                  <a:ext uri="{0D108BD9-81ED-4DB2-BD59-A6C34878D82A}">
+                    <a16:rowId xmlns:a16="http://schemas.microsoft.com/office/drawing/2014/main" val="10000"/>
+                  </a:ext>
+                </a:extLst>
+              </a:tr>
+              <a:tr h="308610">
+                <a:tc>
+                  <a:txBody>
+                    <a:bodyPr/>
+                    <a:lstStyle/>
+                    <a:p>
+                      <a:pPr>
+                        <a:lnSpc>
+                          <a:spcPct val="100000"/>
+                        </a:lnSpc>
+                      </a:pPr>
+                      <a:r>
+                        <a:rPr sz="850">
+                          <a:solidFill>
+                            <a:srgbClr val="222A33"/>
+                          </a:solidFill>
+                        </a:rPr>
+                        <a:t>LinkedIn / Naukri</a:t>
+                      </a:r>
+                    </a:p>
+                  </a:txBody>
+                  <a:tcPr marL="76200" marR="50800" marT="38100" marB="38100">
+                    <a:solidFill>
+                      <a:srgbClr val="FFFFFF"/>
+                    </a:solidFill>
+                  </a:tcPr>
+                </a:tc>
+                <a:tc>
+                  <a:txBody>
+                    <a:bodyPr/>
+                    <a:lstStyle/>
+                    <a:p>
+                      <a:pPr>
+                        <a:lnSpc>
+                          <a:spcPct val="100000"/>
+                        </a:lnSpc>
+                      </a:pPr>
+                      <a:r>
+                        <a:rPr sz="850">
+                          <a:solidFill>
+                            <a:srgbClr val="222A33"/>
+                          </a:solidFill>
+                        </a:rPr>
+                        <a:t>General job &amp; networking matching</a:t>
+                      </a:r>
+                    </a:p>
+                  </a:txBody>
+                  <a:tcPr marL="76200" marR="50800" marT="38100" marB="38100">
+                    <a:solidFill>
+                      <a:srgbClr val="FFFFFF"/>
+                    </a:solidFill>
+                  </a:tcPr>
+                </a:tc>
+                <a:tc>
+                  <a:txBody>
+                    <a:bodyPr/>
+                    <a:lstStyle/>
+                    <a:p>
+                      <a:pPr>
+                        <a:lnSpc>
+                          <a:spcPct val="100000"/>
+                        </a:lnSpc>
+                      </a:pPr>
+                      <a:r>
+                        <a:rPr sz="850">
+                          <a:solidFill>
+                            <a:srgbClr val="222A33"/>
+                          </a:solidFill>
+                        </a:rPr>
+                        <a:t>No institution/curriculum linkage or skill-gap analytics</a:t>
+                      </a:r>
+                    </a:p>
+                  </a:txBody>
+                  <a:tcPr marL="76200" marR="50800" marT="38100" marB="38100">
+                    <a:solidFill>
+                      <a:srgbClr val="FFFFFF"/>
+                    </a:solidFill>
+                  </a:tcPr>
+                </a:tc>
+                <a:extLst>
+                  <a:ext uri="{0D108BD9-81ED-4DB2-BD59-A6C34878D82A}">
+                    <a16:rowId xmlns:a16="http://schemas.microsoft.com/office/drawing/2014/main" val="10001"/>
+                  </a:ext>
+                </a:extLst>
+              </a:tr>
+              <a:tr h="308610">
+                <a:tc>
+                  <a:txBody>
+                    <a:bodyPr/>
+                    <a:lstStyle/>
+                    <a:p>
+                      <a:pPr>
+                        <a:lnSpc>
+                          <a:spcPct val="100000"/>
+                        </a:lnSpc>
+                      </a:pPr>
+                      <a:r>
+                        <a:rPr sz="850">
+                          <a:solidFill>
+                            <a:srgbClr val="222A33"/>
+                          </a:solidFill>
+                        </a:rPr>
+                        <a:t>Internshala</a:t>
+                      </a:r>
+                    </a:p>
+                  </a:txBody>
+                  <a:tcPr marL="76200" marR="50800" marT="38100" marB="38100">
+                    <a:solidFill>
+                      <a:srgbClr val="F4F7FA"/>
+                    </a:solidFill>
+                  </a:tcPr>
+                </a:tc>
+                <a:tc>
+                  <a:txBody>
+                    <a:bodyPr/>
+                    <a:lstStyle/>
+                    <a:p>
+                      <a:pPr>
+                        <a:lnSpc>
+                          <a:spcPct val="100000"/>
+                        </a:lnSpc>
+                      </a:pPr>
+                      <a:r>
+                        <a:rPr sz="850">
+                          <a:solidFill>
+                            <a:srgbClr val="222A33"/>
+                          </a:solidFill>
+                        </a:rPr>
+                        <a:t>Internship listings marketplace</a:t>
+                      </a:r>
+                    </a:p>
+                  </a:txBody>
+                  <a:tcPr marL="76200" marR="50800" marT="38100" marB="38100">
+                    <a:solidFill>
+                      <a:srgbClr val="F4F7FA"/>
+                    </a:solidFill>
+                  </a:tcPr>
+                </a:tc>
+                <a:tc>
+                  <a:txBody>
+                    <a:bodyPr/>
+                    <a:lstStyle/>
+                    <a:p>
+                      <a:pPr>
+                        <a:lnSpc>
+                          <a:spcPct val="100000"/>
+                        </a:lnSpc>
+                      </a:pPr>
+                      <a:r>
+                        <a:rPr sz="850">
+                          <a:solidFill>
+                            <a:srgbClr val="222A33"/>
+                          </a:solidFill>
+                        </a:rPr>
+                        <a:t>No AI-based skill-gap mapping or verified competency scoring</a:t>
+                      </a:r>
+                    </a:p>
+                  </a:txBody>
+                  <a:tcPr marL="76200" marR="50800" marT="38100" marB="38100">
+                    <a:solidFill>
+                      <a:srgbClr val="F4F7FA"/>
+                    </a:solidFill>
+                  </a:tcPr>
+                </a:tc>
+                <a:extLst>
+                  <a:ext uri="{0D108BD9-81ED-4DB2-BD59-A6C34878D82A}">
+                    <a16:rowId xmlns:a16="http://schemas.microsoft.com/office/drawing/2014/main" val="10002"/>
+                  </a:ext>
+                </a:extLst>
+              </a:tr>
+              <a:tr h="308610">
+                <a:tc>
+                  <a:txBody>
+                    <a:bodyPr/>
+                    <a:lstStyle/>
+                    <a:p>
+                      <a:pPr>
+                        <a:lnSpc>
+                          <a:spcPct val="100000"/>
+                        </a:lnSpc>
+                      </a:pPr>
+                      <a:r>
+                        <a:rPr sz="850">
+                          <a:solidFill>
+                            <a:srgbClr val="222A33"/>
+                          </a:solidFill>
+                        </a:rPr>
+                        <a:t>AICTE Internship Portal</a:t>
+                      </a:r>
+                    </a:p>
+                  </a:txBody>
+                  <a:tcPr marL="76200" marR="50800" marT="38100" marB="38100">
+                    <a:solidFill>
+                      <a:srgbClr val="FFFFFF"/>
+                    </a:solidFill>
+                  </a:tcPr>
+                </a:tc>
+                <a:tc>
+                  <a:txBody>
+                    <a:bodyPr/>
+                    <a:lstStyle/>
+                    <a:p>
+                      <a:pPr>
+                        <a:lnSpc>
+                          <a:spcPct val="100000"/>
+                        </a:lnSpc>
+                      </a:pPr>
+                      <a:r>
+                        <a:rPr sz="850">
+                          <a:solidFill>
+                            <a:srgbClr val="222A33"/>
+                          </a:solidFill>
+                        </a:rPr>
+                        <a:t>Manual internship registry</a:t>
+                      </a:r>
+                    </a:p>
+                  </a:txBody>
+                  <a:tcPr marL="76200" marR="50800" marT="38100" marB="38100">
+                    <a:solidFill>
+                      <a:srgbClr val="FFFFFF"/>
+                    </a:solidFill>
+                  </a:tcPr>
+                </a:tc>
+                <a:tc>
+                  <a:txBody>
+                    <a:bodyPr/>
+                    <a:lstStyle/>
+                    <a:p>
+                      <a:pPr>
+                        <a:lnSpc>
+                          <a:spcPct val="100000"/>
+                        </a:lnSpc>
+                      </a:pPr>
+                      <a:r>
+                        <a:rPr sz="850">
+                          <a:solidFill>
+                            <a:srgbClr val="222A33"/>
+                          </a:solidFill>
+                        </a:rPr>
+                        <a:t>No real-time analytics, ML matching, or Ayush-sector focus</a:t>
+                      </a:r>
+                    </a:p>
+                  </a:txBody>
+                  <a:tcPr marL="76200" marR="50800" marT="38100" marB="38100">
+                    <a:solidFill>
+                      <a:srgbClr val="FFFFFF"/>
+                    </a:solidFill>
+                  </a:tcPr>
+                </a:tc>
+                <a:extLst>
+                  <a:ext uri="{0D108BD9-81ED-4DB2-BD59-A6C34878D82A}">
+                    <a16:rowId xmlns:a16="http://schemas.microsoft.com/office/drawing/2014/main" val="10003"/>
+                  </a:ext>
+                </a:extLst>
+              </a:tr>
+            </a:tbl>
+          </a:graphicData>
+        </a:graphic>
+      </p:graphicFrame>
       <p:sp>
         <p:nvSpPr>
           <p:cNvPr id="17412" name="TextBox 17411"/>
@@ -10671,8 +13745,8 @@
         </p:nvSpPr>
         <p:spPr>
           <a:xfrm>
-            <a:off x="612648" y="1234440"/>
-            <a:ext cx="10972800" cy="969496"/>
+            <a:off x="411480" y="3611880"/>
+            <a:ext cx="7315200" cy="274320"/>
           </a:xfrm>
           <a:prstGeom prst="rect">
             <a:avLst/>
@@ -10680,52 +13754,304 @@
           <a:noFill/>
         </p:spPr>
         <p:txBody>
-          <a:bodyPr wrap="square">
+          <a:bodyPr wrap="square" lIns="0" tIns="0" rIns="0" bIns="0" anchor="t">
             <a:spAutoFit/>
           </a:bodyPr>
           <a:lstStyle/>
           <a:p>
-            <a:r>
-              <a:rPr sz="1500" b="1" dirty="0">
-                <a:solidFill>
-                  <a:srgbClr val="1F4E79"/>
+            <a:pPr algn="l">
+              <a:lnSpc>
+                <a:spcPct val="100000"/>
+              </a:lnSpc>
+            </a:pPr>
+            <a:r>
+              <a:rPr sz="1300" b="1" i="0">
+                <a:solidFill>
+                  <a:srgbClr val="1F3864"/>
                 </a:solidFill>
                 <a:latin typeface="Calibri"/>
               </a:rPr>
-              <a:t>Competitive Landscape</a:t>
-            </a:r>
-          </a:p>
-          <a:p>
-            <a:r>
-              <a:rPr sz="1400" dirty="0">
-                <a:solidFill>
-                  <a:srgbClr val="404040"/>
-                </a:solidFill>
-                <a:latin typeface="Calibri"/>
-              </a:rPr>
-              <a:t>•  Jasper AI / Copy.ai — general-purpose marketing copy generation; no single-source, multi-format orchestration or provenance tracking</a:t>
-            </a:r>
-          </a:p>
-          <a:p>
-            <a:r>
-              <a:rPr sz="1400" dirty="0">
-                <a:solidFill>
-                  <a:srgbClr val="404040"/>
-                </a:solidFill>
-                <a:latin typeface="Calibri"/>
-              </a:rPr>
-              <a:t>•  Canva Magic Design — visual/design templates only; no video script, advisory or executive-summary generation</a:t>
-            </a:r>
-          </a:p>
-          <a:p>
-            <a:r>
-              <a:rPr sz="1400" dirty="0">
-                <a:solidFill>
-                  <a:srgbClr val="404040"/>
-                </a:solidFill>
-                <a:latin typeface="Calibri"/>
-              </a:rPr>
-              <a:t>•  Lately.ai — social-media repurposing only; no cross-format orchestration, security focus or on-prem option</a:t>
+              <a:t>Research &amp; References (IEEE Format)</a:t>
+            </a:r>
+          </a:p>
+        </p:txBody>
+      </p:sp>
+      <p:sp>
+        <p:nvSpPr>
+          <p:cNvPr id="17413" name="TextBox 17412"/>
+          <p:cNvSpPr txBox="1"/>
+          <p:nvPr/>
+        </p:nvSpPr>
+        <p:spPr>
+          <a:xfrm>
+            <a:off x="411480" y="3950208"/>
+            <a:ext cx="5486400" cy="91440"/>
+          </a:xfrm>
+          <a:prstGeom prst="rect">
+            <a:avLst/>
+          </a:prstGeom>
+          <a:noFill/>
+        </p:spPr>
+        <p:txBody>
+          <a:bodyPr wrap="square" lIns="0" tIns="0" rIns="0" bIns="0">
+            <a:spAutoFit/>
+          </a:bodyPr>
+          <a:lstStyle/>
+          <a:p>
+            <a:pPr>
+              <a:lnSpc>
+                <a:spcPct val="115000"/>
+              </a:lnSpc>
+              <a:spcAft>
+                <a:spcPts val="576"/>
+              </a:spcAft>
+            </a:pPr>
+            <a:r>
+              <a:rPr sz="950" b="1">
+                <a:solidFill>
+                  <a:srgbClr val="1F3864"/>
+                </a:solidFill>
+              </a:rPr>
+              <a:t>[1]  </a:t>
+            </a:r>
+            <a:r>
+              <a:rPr sz="950">
+                <a:solidFill>
+                  <a:srgbClr val="222A33"/>
+                </a:solidFill>
+              </a:rPr>
+              <a:t>All India Council for Technical Education (AICTE), “Internship Policy Framework.” [Online]. Available: https://www.aicte-india.org</a:t>
+            </a:r>
+          </a:p>
+          <a:p>
+            <a:pPr>
+              <a:lnSpc>
+                <a:spcPct val="115000"/>
+              </a:lnSpc>
+              <a:spcAft>
+                <a:spcPts val="576"/>
+              </a:spcAft>
+            </a:pPr>
+            <a:r>
+              <a:rPr sz="950" b="1">
+                <a:solidFill>
+                  <a:srgbClr val="1F3864"/>
+                </a:solidFill>
+              </a:rPr>
+              <a:t>[2]  </a:t>
+            </a:r>
+            <a:r>
+              <a:rPr sz="950">
+                <a:solidFill>
+                  <a:srgbClr val="222A33"/>
+                </a:solidFill>
+              </a:rPr>
+              <a:t>Ministry of Ayush, Government of India, “Annual Report and AIIA Institutional Data.” [Online]. Available: https://www.ayush.gov.in</a:t>
+            </a:r>
+          </a:p>
+          <a:p>
+            <a:pPr>
+              <a:lnSpc>
+                <a:spcPct val="115000"/>
+              </a:lnSpc>
+              <a:spcAft>
+                <a:spcPts val="576"/>
+              </a:spcAft>
+            </a:pPr>
+            <a:r>
+              <a:rPr sz="950" b="1">
+                <a:solidFill>
+                  <a:srgbClr val="1F3864"/>
+                </a:solidFill>
+              </a:rPr>
+              <a:t>[3]  </a:t>
+            </a:r>
+            <a:r>
+              <a:rPr sz="950">
+                <a:solidFill>
+                  <a:srgbClr val="222A33"/>
+                </a:solidFill>
+              </a:rPr>
+              <a:t>Ministry of Education, Government of India, “National Education Policy 2020.” [Online]. Available: https://www.education.gov.in</a:t>
+            </a:r>
+          </a:p>
+          <a:p>
+            <a:pPr>
+              <a:lnSpc>
+                <a:spcPct val="115000"/>
+              </a:lnSpc>
+              <a:spcAft>
+                <a:spcPts val="576"/>
+              </a:spcAft>
+            </a:pPr>
+            <a:r>
+              <a:rPr sz="950" b="1">
+                <a:solidFill>
+                  <a:srgbClr val="1F3864"/>
+                </a:solidFill>
+              </a:rPr>
+              <a:t>[4]  </a:t>
+            </a:r>
+            <a:r>
+              <a:rPr sz="950">
+                <a:solidFill>
+                  <a:srgbClr val="222A33"/>
+                </a:solidFill>
+              </a:rPr>
+              <a:t>Ministry of Education, Government of India, “All India Survey on Higher Education (AISHE) Report.” [Online]. Available: https://www.education.gov.in/aishe</a:t>
+            </a:r>
+          </a:p>
+          <a:p>
+            <a:pPr>
+              <a:lnSpc>
+                <a:spcPct val="115000"/>
+              </a:lnSpc>
+              <a:spcAft>
+                <a:spcPts val="576"/>
+              </a:spcAft>
+            </a:pPr>
+            <a:r>
+              <a:rPr sz="950" b="1">
+                <a:solidFill>
+                  <a:srgbClr val="1F3864"/>
+                </a:solidFill>
+              </a:rPr>
+              <a:t>[5]  </a:t>
+            </a:r>
+            <a:r>
+              <a:rPr sz="950">
+                <a:solidFill>
+                  <a:srgbClr val="222A33"/>
+                </a:solidFill>
+              </a:rPr>
+              <a:t>Ministry of Statistics and Programme Implementation (MoSPI), “Periodic Labour Force Survey (PLFS).” [Online]. Available: https://www.mospi.gov.in</a:t>
+            </a:r>
+          </a:p>
+        </p:txBody>
+      </p:sp>
+      <p:sp>
+        <p:nvSpPr>
+          <p:cNvPr id="17414" name="TextBox 17413"/>
+          <p:cNvSpPr txBox="1"/>
+          <p:nvPr/>
+        </p:nvSpPr>
+        <p:spPr>
+          <a:xfrm>
+            <a:off x="6172200" y="3950208"/>
+            <a:ext cx="5577840" cy="91440"/>
+          </a:xfrm>
+          <a:prstGeom prst="rect">
+            <a:avLst/>
+          </a:prstGeom>
+          <a:noFill/>
+        </p:spPr>
+        <p:txBody>
+          <a:bodyPr wrap="square" lIns="0" tIns="0" rIns="0" bIns="0">
+            <a:spAutoFit/>
+          </a:bodyPr>
+          <a:lstStyle/>
+          <a:p>
+            <a:pPr>
+              <a:lnSpc>
+                <a:spcPct val="115000"/>
+              </a:lnSpc>
+              <a:spcAft>
+                <a:spcPts val="576"/>
+              </a:spcAft>
+            </a:pPr>
+            <a:r>
+              <a:rPr sz="950" b="1">
+                <a:solidFill>
+                  <a:srgbClr val="1F3864"/>
+                </a:solidFill>
+              </a:rPr>
+              <a:t>[6]  </a:t>
+            </a:r>
+            <a:r>
+              <a:rPr sz="950">
+                <a:solidFill>
+                  <a:srgbClr val="222A33"/>
+                </a:solidFill>
+              </a:rPr>
+              <a:t>N. Reimers and I. Gurevych, “Sentence-BERT: Sentence Embeddings using Siamese BERT-Networks,” in Proc. EMNLP-IJCNLP, 2019, pp. 3982–3992.</a:t>
+            </a:r>
+          </a:p>
+          <a:p>
+            <a:pPr>
+              <a:lnSpc>
+                <a:spcPct val="115000"/>
+              </a:lnSpc>
+              <a:spcAft>
+                <a:spcPts val="576"/>
+              </a:spcAft>
+            </a:pPr>
+            <a:r>
+              <a:rPr sz="950" b="1">
+                <a:solidFill>
+                  <a:srgbClr val="1F3864"/>
+                </a:solidFill>
+              </a:rPr>
+              <a:t>[7]  </a:t>
+            </a:r>
+            <a:r>
+              <a:rPr sz="950">
+                <a:solidFill>
+                  <a:srgbClr val="222A33"/>
+                </a:solidFill>
+              </a:rPr>
+              <a:t>Ministry of Electronics and Information Technology (MeitY), “Digital Personal Data Protection Act, 2023.” [Online]. Available: https://www.meity.gov.in</a:t>
+            </a:r>
+          </a:p>
+          <a:p>
+            <a:pPr>
+              <a:lnSpc>
+                <a:spcPct val="115000"/>
+              </a:lnSpc>
+              <a:spcAft>
+                <a:spcPts val="576"/>
+              </a:spcAft>
+            </a:pPr>
+            <a:r>
+              <a:rPr sz="950" b="1">
+                <a:solidFill>
+                  <a:srgbClr val="1F3864"/>
+                </a:solidFill>
+              </a:rPr>
+              <a:t>[8]  </a:t>
+            </a:r>
+            <a:r>
+              <a:rPr sz="950">
+                <a:solidFill>
+                  <a:srgbClr val="222A33"/>
+                </a:solidFill>
+              </a:rPr>
+              <a:t>University Grants Commission (UGC), “UGC Internship Guidelines, 2023.” [Online]. Available: https://www.ugc.gov.in</a:t>
+            </a:r>
+          </a:p>
+          <a:p>
+            <a:pPr>
+              <a:lnSpc>
+                <a:spcPct val="115000"/>
+              </a:lnSpc>
+              <a:spcAft>
+                <a:spcPts val="576"/>
+              </a:spcAft>
+            </a:pPr>
+            <a:r>
+              <a:rPr sz="950" b="1">
+                <a:solidFill>
+                  <a:srgbClr val="1F3864"/>
+                </a:solidFill>
+              </a:rPr>
+              <a:t>[9]  </a:t>
+            </a:r>
+            <a:r>
+              <a:rPr sz="950">
+                <a:solidFill>
+                  <a:srgbClr val="222A33"/>
+                </a:solidFill>
+              </a:rPr>
+              <a:t>IEEE/ACM Digital Library, “AI-Based Recommendation Systems in Educational Technology: A Survey,” 2022.</a:t>
             </a:r>
           </a:p>
         </p:txBody>
@@ -10733,7 +14059,7 @@
     </p:spTree>
     <p:extLst>
       <p:ext uri="{BB962C8B-B14F-4D97-AF65-F5344CB8AC3E}">
-        <p14:creationId xmlns:p14="http://schemas.microsoft.com/office/powerpoint/2010/main" val="3916788613"/>
+        <p14:creationId xmlns:p14="http://schemas.microsoft.com/office/powerpoint/2010/main" val="3779924293"/>
       </p:ext>
     </p:extLst>
   </p:cSld>
